--- a/deliverables/PresentazioneProgettoTIW.pptx
+++ b/deliverables/PresentazioneProgettoTIW.pptx
@@ -25,6 +25,30 @@
     <p:sldId id="275" r:id="rId19"/>
     <p:sldId id="276" r:id="rId20"/>
     <p:sldId id="277" r:id="rId21"/>
+    <p:sldId id="301" r:id="rId22"/>
+    <p:sldId id="278" r:id="rId23"/>
+    <p:sldId id="279" r:id="rId24"/>
+    <p:sldId id="280" r:id="rId25"/>
+    <p:sldId id="281" r:id="rId26"/>
+    <p:sldId id="282" r:id="rId27"/>
+    <p:sldId id="283" r:id="rId28"/>
+    <p:sldId id="284" r:id="rId29"/>
+    <p:sldId id="285" r:id="rId30"/>
+    <p:sldId id="286" r:id="rId31"/>
+    <p:sldId id="287" r:id="rId32"/>
+    <p:sldId id="288" r:id="rId33"/>
+    <p:sldId id="289" r:id="rId34"/>
+    <p:sldId id="290" r:id="rId35"/>
+    <p:sldId id="291" r:id="rId36"/>
+    <p:sldId id="292" r:id="rId37"/>
+    <p:sldId id="293" r:id="rId38"/>
+    <p:sldId id="294" r:id="rId39"/>
+    <p:sldId id="295" r:id="rId40"/>
+    <p:sldId id="296" r:id="rId41"/>
+    <p:sldId id="297" r:id="rId42"/>
+    <p:sldId id="298" r:id="rId43"/>
+    <p:sldId id="299" r:id="rId44"/>
+    <p:sldId id="300" r:id="rId45"/>
   </p:sldIdLst>
   <p:sldSz cx="12192000" cy="6858000"/>
   <p:notesSz cx="6858000" cy="9144000"/>
@@ -284,7 +308,7 @@
           <a:p>
             <a:fld id="{D1D1EADE-8E88-4C7C-8AC5-FB148DE4940E}" type="datetime1">
               <a:rPr lang="en-US" smtClean="0"/>
-              <a:t>8/24/25</a:t>
+              <a:t>8/24/2025</a:t>
             </a:fld>
             <a:endParaRPr lang="en-US"/>
           </a:p>
@@ -484,7 +508,7 @@
           <a:p>
             <a:fld id="{EC3C8B9C-477D-492A-96AD-1FC2CC997A73}" type="datetime1">
               <a:rPr lang="en-US" smtClean="0"/>
-              <a:t>8/24/25</a:t>
+              <a:t>8/24/2025</a:t>
             </a:fld>
             <a:endParaRPr lang="en-US"/>
           </a:p>
@@ -694,7 +718,7 @@
           <a:p>
             <a:fld id="{42D3AED5-E26D-4E29-B1B3-7847B6779594}" type="datetime1">
               <a:rPr lang="en-US" smtClean="0"/>
-              <a:t>8/24/25</a:t>
+              <a:t>8/24/2025</a:t>
             </a:fld>
             <a:endParaRPr lang="en-US"/>
           </a:p>
@@ -894,7 +918,7 @@
           <a:p>
             <a:fld id="{157B6794-849E-4626-908B-D15793550EFB}" type="datetime1">
               <a:rPr lang="en-US" smtClean="0"/>
-              <a:t>8/24/25</a:t>
+              <a:t>8/24/2025</a:t>
             </a:fld>
             <a:endParaRPr lang="en-US"/>
           </a:p>
@@ -1170,7 +1194,7 @@
           <a:p>
             <a:fld id="{63DB64E7-5594-42A3-ADBF-E95A7ACEAD64}" type="datetime1">
               <a:rPr lang="en-US" smtClean="0"/>
-              <a:t>8/24/25</a:t>
+              <a:t>8/24/2025</a:t>
             </a:fld>
             <a:endParaRPr lang="en-US"/>
           </a:p>
@@ -1443,7 +1467,7 @@
           <a:p>
             <a:fld id="{18462B0B-D248-4FFB-8695-AD7FA4B1284A}" type="datetime1">
               <a:rPr lang="en-US" smtClean="0"/>
-              <a:t>8/24/25</a:t>
+              <a:t>8/24/2025</a:t>
             </a:fld>
             <a:endParaRPr lang="en-US"/>
           </a:p>
@@ -1866,7 +1890,7 @@
           <a:p>
             <a:fld id="{D0378EFB-9159-4510-B73F-4F0409ADE937}" type="datetime1">
               <a:rPr lang="en-US" smtClean="0"/>
-              <a:t>8/24/25</a:t>
+              <a:t>8/24/2025</a:t>
             </a:fld>
             <a:endParaRPr lang="en-US"/>
           </a:p>
@@ -2008,7 +2032,7 @@
           <a:p>
             <a:fld id="{89BC9412-2452-4BED-A324-9D8C115361AD}" type="datetime1">
               <a:rPr lang="en-US" smtClean="0"/>
-              <a:t>8/24/25</a:t>
+              <a:t>8/24/2025</a:t>
             </a:fld>
             <a:endParaRPr lang="en-US"/>
           </a:p>
@@ -2121,7 +2145,7 @@
           <a:p>
             <a:fld id="{F5318F62-D251-40E8-A23C-F4CFE9FEAB41}" type="datetime1">
               <a:rPr lang="en-US" smtClean="0"/>
-              <a:t>8/24/25</a:t>
+              <a:t>8/24/2025</a:t>
             </a:fld>
             <a:endParaRPr lang="en-US"/>
           </a:p>
@@ -2434,7 +2458,7 @@
           <a:p>
             <a:fld id="{44F76144-149E-4874-93A5-554A0357CF82}" type="datetime1">
               <a:rPr lang="en-US" smtClean="0"/>
-              <a:t>8/24/25</a:t>
+              <a:t>8/24/2025</a:t>
             </a:fld>
             <a:endParaRPr lang="en-US"/>
           </a:p>
@@ -2727,7 +2751,7 @@
           <a:p>
             <a:fld id="{50BA65D8-0540-4835-AE5C-25D29DBA01BE}" type="datetime1">
               <a:rPr lang="en-US" smtClean="0"/>
-              <a:t>8/24/25</a:t>
+              <a:t>8/24/2025</a:t>
             </a:fld>
             <a:endParaRPr lang="en-US"/>
           </a:p>
@@ -2969,7 +2993,7 @@
           <a:p>
             <a:fld id="{E31BA835-12AC-4E8F-955A-EA3F4DE2791F}" type="datetime1">
               <a:rPr lang="en-US" smtClean="0"/>
-              <a:t>8/24/25</a:t>
+              <a:t>8/24/2025</a:t>
             </a:fld>
             <a:endParaRPr lang="en-US"/>
           </a:p>
@@ -9385,6 +9409,3188 @@
 </p:sld>
 </file>
 
+<file path=ppt/slides/slide21.xml><?xml version="1.0" encoding="utf-8"?>
+<p:sld xmlns:a="http://schemas.openxmlformats.org/drawingml/2006/main" xmlns:r="http://schemas.openxmlformats.org/officeDocument/2006/relationships" xmlns:p="http://schemas.openxmlformats.org/presentationml/2006/main">
+  <p:cSld>
+    <p:spTree>
+      <p:nvGrpSpPr>
+        <p:cNvPr id="1" name="">
+          <a:extLst>
+            <a:ext uri="{FF2B5EF4-FFF2-40B4-BE49-F238E27FC236}">
+              <a16:creationId xmlns:a16="http://schemas.microsoft.com/office/drawing/2014/main" id="{F8E22F65-028F-A28C-2740-A91BC4AB4C45}"/>
+            </a:ext>
+          </a:extLst>
+        </p:cNvPr>
+        <p:cNvGrpSpPr/>
+        <p:nvPr/>
+      </p:nvGrpSpPr>
+      <p:grpSpPr>
+        <a:xfrm>
+          <a:off x="0" y="0"/>
+          <a:ext cx="0" cy="0"/>
+          <a:chOff x="0" y="0"/>
+          <a:chExt cx="0" cy="0"/>
+        </a:xfrm>
+      </p:grpSpPr>
+      <p:sp>
+        <p:nvSpPr>
+          <p:cNvPr id="2" name="Titolo 1">
+            <a:extLst>
+              <a:ext uri="{FF2B5EF4-FFF2-40B4-BE49-F238E27FC236}">
+                <a16:creationId xmlns:a16="http://schemas.microsoft.com/office/drawing/2014/main" id="{58E9E2F2-FB03-0F5B-9E43-A6091C0D8CCC}"/>
+              </a:ext>
+            </a:extLst>
+          </p:cNvPr>
+          <p:cNvSpPr>
+            <a:spLocks noGrp="1"/>
+          </p:cNvSpPr>
+          <p:nvPr>
+            <p:ph type="title"/>
+          </p:nvPr>
+        </p:nvSpPr>
+        <p:spPr/>
+        <p:txBody>
+          <a:bodyPr/>
+          <a:lstStyle/>
+          <a:p>
+            <a:pPr algn="ctr"/>
+            <a:r>
+              <a:rPr lang="it-IT" dirty="0"/>
+              <a:t>Componenti – client side</a:t>
+            </a:r>
+          </a:p>
+        </p:txBody>
+      </p:sp>
+      <p:sp>
+        <p:nvSpPr>
+          <p:cNvPr id="3" name="Segnaposto contenuto 2">
+            <a:extLst>
+              <a:ext uri="{FF2B5EF4-FFF2-40B4-BE49-F238E27FC236}">
+                <a16:creationId xmlns:a16="http://schemas.microsoft.com/office/drawing/2014/main" id="{962A4388-9DBB-DA07-A6B2-D328B76D544B}"/>
+              </a:ext>
+            </a:extLst>
+          </p:cNvPr>
+          <p:cNvSpPr>
+            <a:spLocks noGrp="1"/>
+          </p:cNvSpPr>
+          <p:nvPr>
+            <p:ph idx="1"/>
+          </p:nvPr>
+        </p:nvSpPr>
+        <p:spPr>
+          <a:xfrm>
+            <a:off x="276582" y="1752862"/>
+            <a:ext cx="5088229" cy="3739896"/>
+          </a:xfrm>
+        </p:spPr>
+        <p:txBody>
+          <a:bodyPr>
+            <a:normAutofit/>
+          </a:bodyPr>
+          <a:lstStyle/>
+          <a:p>
+            <a:r>
+              <a:rPr lang="it-IT" b="1" dirty="0"/>
+              <a:t>Home</a:t>
+            </a:r>
+          </a:p>
+          <a:p>
+            <a:pPr marL="457200" lvl="1" indent="0" eaLnBrk="0" fontAlgn="base" hangingPunct="0">
+              <a:lnSpc>
+                <a:spcPct val="100000"/>
+              </a:lnSpc>
+              <a:spcBef>
+                <a:spcPct val="0"/>
+              </a:spcBef>
+              <a:spcAft>
+                <a:spcPct val="0"/>
+              </a:spcAft>
+              <a:buFontTx/>
+              <a:buChar char="•"/>
+            </a:pPr>
+            <a:r>
+              <a:rPr lang="it-IT" altLang="it-IT" sz="1200" dirty="0" err="1">
+                <a:latin typeface="Arial Unicode MS"/>
+              </a:rPr>
+              <a:t>showVendo</a:t>
+            </a:r>
+            <a:r>
+              <a:rPr lang="it-IT" altLang="it-IT" sz="1200" dirty="0">
+                <a:latin typeface="Arial Unicode MS"/>
+              </a:rPr>
+              <a:t>()</a:t>
+            </a:r>
+            <a:r>
+              <a:rPr lang="it-IT" altLang="it-IT" sz="1200" dirty="0"/>
+              <a:t> → mostra la pagina Vendo e nasconde le altre</a:t>
+            </a:r>
+            <a:endParaRPr lang="it-IT" altLang="it-IT" sz="1200" dirty="0">
+              <a:latin typeface="Arial" panose="020B0604020202020204" pitchFamily="34" charset="0"/>
+            </a:endParaRPr>
+          </a:p>
+          <a:p>
+            <a:pPr marL="457200" lvl="1" indent="0" eaLnBrk="0" fontAlgn="base" hangingPunct="0">
+              <a:lnSpc>
+                <a:spcPct val="100000"/>
+              </a:lnSpc>
+              <a:spcBef>
+                <a:spcPct val="0"/>
+              </a:spcBef>
+              <a:spcAft>
+                <a:spcPct val="0"/>
+              </a:spcAft>
+              <a:buFontTx/>
+              <a:buChar char="•"/>
+            </a:pPr>
+            <a:r>
+              <a:rPr lang="it-IT" altLang="it-IT" sz="1200" dirty="0" err="1">
+                <a:latin typeface="Arial Unicode MS"/>
+              </a:rPr>
+              <a:t>showAcquisto</a:t>
+            </a:r>
+            <a:r>
+              <a:rPr lang="it-IT" altLang="it-IT" sz="1200" dirty="0">
+                <a:latin typeface="Arial Unicode MS"/>
+              </a:rPr>
+              <a:t>()</a:t>
+            </a:r>
+            <a:r>
+              <a:rPr lang="it-IT" altLang="it-IT" sz="1200" dirty="0"/>
+              <a:t> → mostra la pagina Acquisto e nasconde le altre</a:t>
+            </a:r>
+            <a:endParaRPr lang="it-IT" altLang="it-IT" sz="1200" dirty="0">
+              <a:latin typeface="Arial" panose="020B0604020202020204" pitchFamily="34" charset="0"/>
+            </a:endParaRPr>
+          </a:p>
+          <a:p>
+            <a:pPr marL="457200" lvl="1" indent="0" eaLnBrk="0" fontAlgn="base" hangingPunct="0">
+              <a:lnSpc>
+                <a:spcPct val="100000"/>
+              </a:lnSpc>
+              <a:spcBef>
+                <a:spcPct val="0"/>
+              </a:spcBef>
+              <a:spcAft>
+                <a:spcPct val="0"/>
+              </a:spcAft>
+              <a:buFontTx/>
+              <a:buChar char="•"/>
+            </a:pPr>
+            <a:r>
+              <a:rPr lang="it-IT" altLang="it-IT" sz="1200" dirty="0" err="1">
+                <a:latin typeface="Arial Unicode MS"/>
+              </a:rPr>
+              <a:t>hideAllPages</a:t>
+            </a:r>
+            <a:r>
+              <a:rPr lang="it-IT" altLang="it-IT" sz="1200" dirty="0">
+                <a:latin typeface="Arial Unicode MS"/>
+              </a:rPr>
+              <a:t>()</a:t>
+            </a:r>
+            <a:r>
+              <a:rPr lang="it-IT" altLang="it-IT" sz="1200" dirty="0"/>
+              <a:t> → nasconde tutte le pagine</a:t>
+            </a:r>
+            <a:endParaRPr lang="it-IT" altLang="it-IT" sz="1200" dirty="0">
+              <a:latin typeface="Arial" panose="020B0604020202020204" pitchFamily="34" charset="0"/>
+            </a:endParaRPr>
+          </a:p>
+          <a:p>
+            <a:pPr marL="457200" lvl="1" indent="0" eaLnBrk="0" fontAlgn="base" hangingPunct="0">
+              <a:lnSpc>
+                <a:spcPct val="100000"/>
+              </a:lnSpc>
+              <a:spcBef>
+                <a:spcPct val="0"/>
+              </a:spcBef>
+              <a:spcAft>
+                <a:spcPct val="0"/>
+              </a:spcAft>
+              <a:buFontTx/>
+              <a:buChar char="•"/>
+            </a:pPr>
+            <a:r>
+              <a:rPr lang="it-IT" altLang="it-IT" sz="1200" dirty="0" err="1">
+                <a:latin typeface="Arial Unicode MS"/>
+              </a:rPr>
+              <a:t>renderPageByLastAction</a:t>
+            </a:r>
+            <a:r>
+              <a:rPr lang="it-IT" altLang="it-IT" sz="1200" dirty="0">
+                <a:latin typeface="Arial Unicode MS"/>
+              </a:rPr>
+              <a:t>()</a:t>
+            </a:r>
+            <a:r>
+              <a:rPr lang="it-IT" altLang="it-IT" sz="1200" dirty="0"/>
+              <a:t> → apre Vendo o Acquisto in base all’ultima azione utente</a:t>
+            </a:r>
+            <a:endParaRPr lang="it-IT" sz="1200" b="1" dirty="0"/>
+          </a:p>
+          <a:p>
+            <a:pPr lvl="1">
+              <a:buFont typeface="Courier New" panose="02070309020205020404" pitchFamily="49" charset="0"/>
+              <a:buChar char="o"/>
+            </a:pPr>
+            <a:endParaRPr lang="it-IT" b="1" dirty="0"/>
+          </a:p>
+          <a:p>
+            <a:pPr lvl="1">
+              <a:buFont typeface="Courier New" panose="02070309020205020404" pitchFamily="49" charset="0"/>
+              <a:buChar char="o"/>
+            </a:pPr>
+            <a:endParaRPr lang="it-IT" sz="1400" dirty="0"/>
+          </a:p>
+        </p:txBody>
+      </p:sp>
+      <p:sp>
+        <p:nvSpPr>
+          <p:cNvPr id="4" name="CasellaDiTesto 3">
+            <a:extLst>
+              <a:ext uri="{FF2B5EF4-FFF2-40B4-BE49-F238E27FC236}">
+                <a16:creationId xmlns:a16="http://schemas.microsoft.com/office/drawing/2014/main" id="{1292F17C-75CD-B5B0-8B0F-8B952D8EE178}"/>
+              </a:ext>
+            </a:extLst>
+          </p:cNvPr>
+          <p:cNvSpPr txBox="1"/>
+          <p:nvPr/>
+        </p:nvSpPr>
+        <p:spPr>
+          <a:xfrm>
+            <a:off x="5788864" y="1568196"/>
+            <a:ext cx="614271" cy="369332"/>
+          </a:xfrm>
+          <a:prstGeom prst="rect">
+            <a:avLst/>
+          </a:prstGeom>
+          <a:noFill/>
+        </p:spPr>
+        <p:txBody>
+          <a:bodyPr wrap="none" rtlCol="0">
+            <a:spAutoFit/>
+          </a:bodyPr>
+          <a:lstStyle/>
+          <a:p>
+            <a:r>
+              <a:rPr lang="it-IT" dirty="0"/>
+              <a:t>RIA</a:t>
+            </a:r>
+          </a:p>
+        </p:txBody>
+      </p:sp>
+      <p:sp>
+        <p:nvSpPr>
+          <p:cNvPr id="6" name="Segnaposto contenuto 2">
+            <a:extLst>
+              <a:ext uri="{FF2B5EF4-FFF2-40B4-BE49-F238E27FC236}">
+                <a16:creationId xmlns:a16="http://schemas.microsoft.com/office/drawing/2014/main" id="{CEAA40AF-A523-5452-1183-34767D48E707}"/>
+              </a:ext>
+            </a:extLst>
+          </p:cNvPr>
+          <p:cNvSpPr txBox="1">
+            <a:spLocks/>
+          </p:cNvSpPr>
+          <p:nvPr/>
+        </p:nvSpPr>
+        <p:spPr>
+          <a:xfrm>
+            <a:off x="276581" y="3060454"/>
+            <a:ext cx="6075831" cy="3739896"/>
+          </a:xfrm>
+          <a:prstGeom prst="rect">
+            <a:avLst/>
+          </a:prstGeom>
+        </p:spPr>
+        <p:txBody>
+          <a:bodyPr vert="horz" lIns="91440" tIns="45720" rIns="91440" bIns="45720" rtlCol="0">
+            <a:normAutofit/>
+          </a:bodyPr>
+          <a:lstStyle>
+            <a:lvl1pPr marL="228600" indent="-228600" algn="l" defTabSz="914400" rtl="0" eaLnBrk="1" latinLnBrk="0" hangingPunct="1">
+              <a:lnSpc>
+                <a:spcPct val="110000"/>
+              </a:lnSpc>
+              <a:spcBef>
+                <a:spcPts val="1000"/>
+              </a:spcBef>
+              <a:buFont typeface="Arial" panose="020B0604020202020204" pitchFamily="34" charset="0"/>
+              <a:buChar char="•"/>
+              <a:defRPr sz="2000" kern="1200">
+                <a:solidFill>
+                  <a:schemeClr val="tx1"/>
+                </a:solidFill>
+                <a:latin typeface="+mn-lt"/>
+                <a:ea typeface="+mn-ea"/>
+                <a:cs typeface="+mn-cs"/>
+              </a:defRPr>
+            </a:lvl1pPr>
+            <a:lvl2pPr marL="685800" indent="-228600" algn="l" defTabSz="914400" rtl="0" eaLnBrk="1" latinLnBrk="0" hangingPunct="1">
+              <a:lnSpc>
+                <a:spcPct val="110000"/>
+              </a:lnSpc>
+              <a:spcBef>
+                <a:spcPts val="500"/>
+              </a:spcBef>
+              <a:buFont typeface="Arial" panose="020B0604020202020204" pitchFamily="34" charset="0"/>
+              <a:buChar char="•"/>
+              <a:defRPr sz="1800" kern="1200">
+                <a:solidFill>
+                  <a:schemeClr val="tx1"/>
+                </a:solidFill>
+                <a:latin typeface="+mn-lt"/>
+                <a:ea typeface="+mn-ea"/>
+                <a:cs typeface="+mn-cs"/>
+              </a:defRPr>
+            </a:lvl2pPr>
+            <a:lvl3pPr marL="1143000" indent="-228600" algn="l" defTabSz="914400" rtl="0" eaLnBrk="1" latinLnBrk="0" hangingPunct="1">
+              <a:lnSpc>
+                <a:spcPct val="110000"/>
+              </a:lnSpc>
+              <a:spcBef>
+                <a:spcPts val="500"/>
+              </a:spcBef>
+              <a:buFont typeface="Arial" panose="020B0604020202020204" pitchFamily="34" charset="0"/>
+              <a:buChar char="•"/>
+              <a:defRPr sz="1600" kern="1200">
+                <a:solidFill>
+                  <a:schemeClr val="tx1"/>
+                </a:solidFill>
+                <a:latin typeface="+mn-lt"/>
+                <a:ea typeface="+mn-ea"/>
+                <a:cs typeface="+mn-cs"/>
+              </a:defRPr>
+            </a:lvl3pPr>
+            <a:lvl4pPr marL="1600200" indent="-228600" algn="l" defTabSz="914400" rtl="0" eaLnBrk="1" latinLnBrk="0" hangingPunct="1">
+              <a:lnSpc>
+                <a:spcPct val="110000"/>
+              </a:lnSpc>
+              <a:spcBef>
+                <a:spcPts val="500"/>
+              </a:spcBef>
+              <a:buFont typeface="Arial" panose="020B0604020202020204" pitchFamily="34" charset="0"/>
+              <a:buChar char="•"/>
+              <a:defRPr sz="1400" kern="1200">
+                <a:solidFill>
+                  <a:schemeClr val="tx1"/>
+                </a:solidFill>
+                <a:latin typeface="+mn-lt"/>
+                <a:ea typeface="+mn-ea"/>
+                <a:cs typeface="+mn-cs"/>
+              </a:defRPr>
+            </a:lvl4pPr>
+            <a:lvl5pPr marL="2057400" indent="-228600" algn="l" defTabSz="914400" rtl="0" eaLnBrk="1" latinLnBrk="0" hangingPunct="1">
+              <a:lnSpc>
+                <a:spcPct val="110000"/>
+              </a:lnSpc>
+              <a:spcBef>
+                <a:spcPts val="500"/>
+              </a:spcBef>
+              <a:buFont typeface="Arial" panose="020B0604020202020204" pitchFamily="34" charset="0"/>
+              <a:buChar char="•"/>
+              <a:defRPr sz="1400" kern="1200">
+                <a:solidFill>
+                  <a:schemeClr val="tx1"/>
+                </a:solidFill>
+                <a:latin typeface="+mn-lt"/>
+                <a:ea typeface="+mn-ea"/>
+                <a:cs typeface="+mn-cs"/>
+              </a:defRPr>
+            </a:lvl5pPr>
+            <a:lvl6pPr marL="2514600" indent="-228600" algn="l" defTabSz="914400" rtl="0" eaLnBrk="1" latinLnBrk="0" hangingPunct="1">
+              <a:lnSpc>
+                <a:spcPct val="90000"/>
+              </a:lnSpc>
+              <a:spcBef>
+                <a:spcPts val="500"/>
+              </a:spcBef>
+              <a:buFont typeface="Arial" panose="020B0604020202020204" pitchFamily="34" charset="0"/>
+              <a:buChar char="•"/>
+              <a:defRPr sz="1800" kern="1200">
+                <a:solidFill>
+                  <a:schemeClr val="tx1"/>
+                </a:solidFill>
+                <a:latin typeface="+mn-lt"/>
+                <a:ea typeface="+mn-ea"/>
+                <a:cs typeface="+mn-cs"/>
+              </a:defRPr>
+            </a:lvl6pPr>
+            <a:lvl7pPr marL="2971800" indent="-228600" algn="l" defTabSz="914400" rtl="0" eaLnBrk="1" latinLnBrk="0" hangingPunct="1">
+              <a:lnSpc>
+                <a:spcPct val="90000"/>
+              </a:lnSpc>
+              <a:spcBef>
+                <a:spcPts val="500"/>
+              </a:spcBef>
+              <a:buFont typeface="Arial" panose="020B0604020202020204" pitchFamily="34" charset="0"/>
+              <a:buChar char="•"/>
+              <a:defRPr sz="1800" kern="1200">
+                <a:solidFill>
+                  <a:schemeClr val="tx1"/>
+                </a:solidFill>
+                <a:latin typeface="+mn-lt"/>
+                <a:ea typeface="+mn-ea"/>
+                <a:cs typeface="+mn-cs"/>
+              </a:defRPr>
+            </a:lvl7pPr>
+            <a:lvl8pPr marL="3429000" indent="-228600" algn="l" defTabSz="914400" rtl="0" eaLnBrk="1" latinLnBrk="0" hangingPunct="1">
+              <a:lnSpc>
+                <a:spcPct val="90000"/>
+              </a:lnSpc>
+              <a:spcBef>
+                <a:spcPts val="500"/>
+              </a:spcBef>
+              <a:buFont typeface="Arial" panose="020B0604020202020204" pitchFamily="34" charset="0"/>
+              <a:buChar char="•"/>
+              <a:defRPr sz="1800" kern="1200">
+                <a:solidFill>
+                  <a:schemeClr val="tx1"/>
+                </a:solidFill>
+                <a:latin typeface="+mn-lt"/>
+                <a:ea typeface="+mn-ea"/>
+                <a:cs typeface="+mn-cs"/>
+              </a:defRPr>
+            </a:lvl8pPr>
+            <a:lvl9pPr marL="3886200" indent="-228600" algn="l" defTabSz="914400" rtl="0" eaLnBrk="1" latinLnBrk="0" hangingPunct="1">
+              <a:lnSpc>
+                <a:spcPct val="90000"/>
+              </a:lnSpc>
+              <a:spcBef>
+                <a:spcPts val="500"/>
+              </a:spcBef>
+              <a:buFont typeface="Arial" panose="020B0604020202020204" pitchFamily="34" charset="0"/>
+              <a:buChar char="•"/>
+              <a:defRPr sz="1800" kern="1200">
+                <a:solidFill>
+                  <a:schemeClr val="tx1"/>
+                </a:solidFill>
+                <a:latin typeface="+mn-lt"/>
+                <a:ea typeface="+mn-ea"/>
+                <a:cs typeface="+mn-cs"/>
+              </a:defRPr>
+            </a:lvl9pPr>
+          </a:lstStyle>
+          <a:p>
+            <a:r>
+              <a:rPr lang="it-IT" b="1" dirty="0"/>
+              <a:t>Vendo</a:t>
+            </a:r>
+          </a:p>
+          <a:p>
+            <a:pPr marL="457200" lvl="1" indent="0" eaLnBrk="0" fontAlgn="base" hangingPunct="0">
+              <a:lnSpc>
+                <a:spcPct val="100000"/>
+              </a:lnSpc>
+              <a:spcBef>
+                <a:spcPct val="0"/>
+              </a:spcBef>
+              <a:spcAft>
+                <a:spcPct val="0"/>
+              </a:spcAft>
+              <a:buFontTx/>
+              <a:buChar char="•"/>
+            </a:pPr>
+            <a:r>
+              <a:rPr lang="it-IT" altLang="it-IT" sz="1200" dirty="0" err="1">
+                <a:latin typeface="Arial Unicode MS"/>
+              </a:rPr>
+              <a:t>renderVendoPage</a:t>
+            </a:r>
+            <a:r>
+              <a:rPr lang="it-IT" altLang="it-IT" sz="1200" dirty="0">
+                <a:latin typeface="Arial Unicode MS"/>
+              </a:rPr>
+              <a:t>()</a:t>
+            </a:r>
+            <a:r>
+              <a:rPr lang="it-IT" altLang="it-IT" sz="1200" dirty="0"/>
+              <a:t> → inizializza pagina Vendo e collega i pulsanti</a:t>
+            </a:r>
+            <a:endParaRPr lang="it-IT" altLang="it-IT" sz="1200" dirty="0">
+              <a:latin typeface="Arial" panose="020B0604020202020204" pitchFamily="34" charset="0"/>
+            </a:endParaRPr>
+          </a:p>
+          <a:p>
+            <a:pPr marL="457200" lvl="1" indent="0" eaLnBrk="0" fontAlgn="base" hangingPunct="0">
+              <a:lnSpc>
+                <a:spcPct val="100000"/>
+              </a:lnSpc>
+              <a:spcBef>
+                <a:spcPct val="0"/>
+              </a:spcBef>
+              <a:spcAft>
+                <a:spcPct val="0"/>
+              </a:spcAft>
+              <a:buFontTx/>
+              <a:buChar char="•"/>
+            </a:pPr>
+            <a:r>
+              <a:rPr lang="it-IT" altLang="it-IT" sz="1200" dirty="0" err="1">
+                <a:latin typeface="Arial Unicode MS"/>
+              </a:rPr>
+              <a:t>aggiungiArticolo</a:t>
+            </a:r>
+            <a:r>
+              <a:rPr lang="it-IT" altLang="it-IT" sz="1200" dirty="0">
+                <a:latin typeface="Arial Unicode MS"/>
+              </a:rPr>
+              <a:t>()</a:t>
+            </a:r>
+            <a:r>
+              <a:rPr lang="it-IT" altLang="it-IT" sz="1200" dirty="0"/>
+              <a:t> → invia un nuovo articolo al server</a:t>
+            </a:r>
+            <a:endParaRPr lang="it-IT" altLang="it-IT" sz="1200" dirty="0">
+              <a:latin typeface="Arial" panose="020B0604020202020204" pitchFamily="34" charset="0"/>
+            </a:endParaRPr>
+          </a:p>
+          <a:p>
+            <a:pPr marL="457200" lvl="1" indent="0" eaLnBrk="0" fontAlgn="base" hangingPunct="0">
+              <a:lnSpc>
+                <a:spcPct val="100000"/>
+              </a:lnSpc>
+              <a:spcBef>
+                <a:spcPct val="0"/>
+              </a:spcBef>
+              <a:spcAft>
+                <a:spcPct val="0"/>
+              </a:spcAft>
+              <a:buFontTx/>
+              <a:buChar char="•"/>
+            </a:pPr>
+            <a:r>
+              <a:rPr lang="it-IT" altLang="it-IT" sz="1200" dirty="0" err="1">
+                <a:latin typeface="Arial Unicode MS"/>
+              </a:rPr>
+              <a:t>creaAsta</a:t>
+            </a:r>
+            <a:r>
+              <a:rPr lang="it-IT" altLang="it-IT" sz="1200" dirty="0">
+                <a:latin typeface="Arial Unicode MS"/>
+              </a:rPr>
+              <a:t>()</a:t>
+            </a:r>
+            <a:r>
+              <a:rPr lang="it-IT" altLang="it-IT" sz="1200" dirty="0"/>
+              <a:t> → crea una nuova asta con articoli selezionati</a:t>
+            </a:r>
+            <a:endParaRPr lang="it-IT" altLang="it-IT" sz="1200" dirty="0">
+              <a:latin typeface="Arial" panose="020B0604020202020204" pitchFamily="34" charset="0"/>
+            </a:endParaRPr>
+          </a:p>
+          <a:p>
+            <a:pPr marL="457200" lvl="1" indent="0" eaLnBrk="0" fontAlgn="base" hangingPunct="0">
+              <a:lnSpc>
+                <a:spcPct val="100000"/>
+              </a:lnSpc>
+              <a:spcBef>
+                <a:spcPct val="0"/>
+              </a:spcBef>
+              <a:spcAft>
+                <a:spcPct val="0"/>
+              </a:spcAft>
+              <a:buFontTx/>
+              <a:buChar char="•"/>
+            </a:pPr>
+            <a:r>
+              <a:rPr lang="it-IT" altLang="it-IT" sz="1200" dirty="0" err="1">
+                <a:latin typeface="Arial Unicode MS"/>
+              </a:rPr>
+              <a:t>aggiornaArticoliDisponibili</a:t>
+            </a:r>
+            <a:r>
+              <a:rPr lang="it-IT" altLang="it-IT" sz="1200" dirty="0">
+                <a:latin typeface="Arial Unicode MS"/>
+              </a:rPr>
+              <a:t>()</a:t>
+            </a:r>
+            <a:r>
+              <a:rPr lang="it-IT" altLang="it-IT" sz="1200" dirty="0"/>
+              <a:t> → aggiorna la lista articoli disponibili per asta</a:t>
+            </a:r>
+            <a:endParaRPr lang="it-IT" altLang="it-IT" sz="1200" dirty="0">
+              <a:latin typeface="Arial" panose="020B0604020202020204" pitchFamily="34" charset="0"/>
+            </a:endParaRPr>
+          </a:p>
+          <a:p>
+            <a:pPr marL="457200" lvl="1" indent="0" eaLnBrk="0" fontAlgn="base" hangingPunct="0">
+              <a:lnSpc>
+                <a:spcPct val="100000"/>
+              </a:lnSpc>
+              <a:spcBef>
+                <a:spcPct val="0"/>
+              </a:spcBef>
+              <a:spcAft>
+                <a:spcPct val="0"/>
+              </a:spcAft>
+              <a:buFontTx/>
+              <a:buChar char="•"/>
+            </a:pPr>
+            <a:r>
+              <a:rPr lang="it-IT" altLang="it-IT" sz="1200" dirty="0" err="1">
+                <a:latin typeface="Arial Unicode MS"/>
+              </a:rPr>
+              <a:t>aggiungiArticoloAllaTabella</a:t>
+            </a:r>
+            <a:r>
+              <a:rPr lang="it-IT" altLang="it-IT" sz="1200" dirty="0">
+                <a:latin typeface="Arial Unicode MS"/>
+              </a:rPr>
+              <a:t>()</a:t>
+            </a:r>
+            <a:r>
+              <a:rPr lang="it-IT" altLang="it-IT" sz="1200" dirty="0"/>
+              <a:t> → aggiunge una riga articolo alla tabella nuova asta</a:t>
+            </a:r>
+            <a:endParaRPr lang="it-IT" altLang="it-IT" sz="1200" dirty="0">
+              <a:latin typeface="Arial" panose="020B0604020202020204" pitchFamily="34" charset="0"/>
+            </a:endParaRPr>
+          </a:p>
+          <a:p>
+            <a:pPr marL="457200" lvl="1" indent="0" eaLnBrk="0" fontAlgn="base" hangingPunct="0">
+              <a:lnSpc>
+                <a:spcPct val="100000"/>
+              </a:lnSpc>
+              <a:spcBef>
+                <a:spcPct val="0"/>
+              </a:spcBef>
+              <a:spcAft>
+                <a:spcPct val="0"/>
+              </a:spcAft>
+              <a:buFontTx/>
+              <a:buChar char="•"/>
+            </a:pPr>
+            <a:r>
+              <a:rPr lang="it-IT" altLang="it-IT" sz="1200" dirty="0" err="1">
+                <a:latin typeface="Arial Unicode MS"/>
+              </a:rPr>
+              <a:t>caricaListeAperte</a:t>
+            </a:r>
+            <a:r>
+              <a:rPr lang="it-IT" altLang="it-IT" sz="1200" dirty="0">
+                <a:latin typeface="Arial Unicode MS"/>
+              </a:rPr>
+              <a:t>()</a:t>
+            </a:r>
+            <a:r>
+              <a:rPr lang="it-IT" altLang="it-IT" sz="1200" dirty="0"/>
+              <a:t> → carica e mostra le aste aperte dell’utente</a:t>
+            </a:r>
+            <a:endParaRPr lang="it-IT" altLang="it-IT" sz="1200" dirty="0">
+              <a:latin typeface="Arial" panose="020B0604020202020204" pitchFamily="34" charset="0"/>
+            </a:endParaRPr>
+          </a:p>
+          <a:p>
+            <a:pPr marL="457200" lvl="1" indent="0" eaLnBrk="0" fontAlgn="base" hangingPunct="0">
+              <a:lnSpc>
+                <a:spcPct val="100000"/>
+              </a:lnSpc>
+              <a:spcBef>
+                <a:spcPct val="0"/>
+              </a:spcBef>
+              <a:spcAft>
+                <a:spcPct val="0"/>
+              </a:spcAft>
+              <a:buFontTx/>
+              <a:buChar char="•"/>
+            </a:pPr>
+            <a:r>
+              <a:rPr lang="it-IT" altLang="it-IT" sz="1200" dirty="0" err="1">
+                <a:latin typeface="Arial Unicode MS"/>
+              </a:rPr>
+              <a:t>caricaListeChiuse</a:t>
+            </a:r>
+            <a:r>
+              <a:rPr lang="it-IT" altLang="it-IT" sz="1200" dirty="0">
+                <a:latin typeface="Arial Unicode MS"/>
+              </a:rPr>
+              <a:t>()</a:t>
+            </a:r>
+            <a:r>
+              <a:rPr lang="it-IT" altLang="it-IT" sz="1200" dirty="0"/>
+              <a:t> → carica e mostra le aste chiuse dell’utente</a:t>
+            </a:r>
+            <a:endParaRPr lang="it-IT" altLang="it-IT" sz="1200" dirty="0">
+              <a:latin typeface="Arial" panose="020B0604020202020204" pitchFamily="34" charset="0"/>
+            </a:endParaRPr>
+          </a:p>
+          <a:p>
+            <a:pPr marL="457200" lvl="1" indent="0" eaLnBrk="0" fontAlgn="base" hangingPunct="0">
+              <a:lnSpc>
+                <a:spcPct val="100000"/>
+              </a:lnSpc>
+              <a:spcBef>
+                <a:spcPct val="0"/>
+              </a:spcBef>
+              <a:spcAft>
+                <a:spcPct val="0"/>
+              </a:spcAft>
+              <a:buFontTx/>
+              <a:buChar char="•"/>
+            </a:pPr>
+            <a:r>
+              <a:rPr lang="it-IT" altLang="it-IT" sz="1200" dirty="0" err="1">
+                <a:latin typeface="Arial Unicode MS"/>
+              </a:rPr>
+              <a:t>inizializzaClickDettaglioAstaAperta</a:t>
+            </a:r>
+            <a:r>
+              <a:rPr lang="it-IT" altLang="it-IT" sz="1200" dirty="0">
+                <a:latin typeface="Arial Unicode MS"/>
+              </a:rPr>
+              <a:t>()</a:t>
+            </a:r>
+            <a:r>
+              <a:rPr lang="it-IT" altLang="it-IT" sz="1200" dirty="0"/>
+              <a:t> → click su ID asta aperta → dettaglio</a:t>
+            </a:r>
+            <a:endParaRPr lang="it-IT" altLang="it-IT" sz="1200" dirty="0">
+              <a:latin typeface="Arial" panose="020B0604020202020204" pitchFamily="34" charset="0"/>
+            </a:endParaRPr>
+          </a:p>
+          <a:p>
+            <a:pPr marL="457200" lvl="1" indent="0" eaLnBrk="0" fontAlgn="base" hangingPunct="0">
+              <a:lnSpc>
+                <a:spcPct val="100000"/>
+              </a:lnSpc>
+              <a:spcBef>
+                <a:spcPct val="0"/>
+              </a:spcBef>
+              <a:spcAft>
+                <a:spcPct val="0"/>
+              </a:spcAft>
+              <a:buFontTx/>
+              <a:buChar char="•"/>
+            </a:pPr>
+            <a:r>
+              <a:rPr lang="it-IT" altLang="it-IT" sz="1200" dirty="0" err="1">
+                <a:latin typeface="Arial Unicode MS"/>
+              </a:rPr>
+              <a:t>inizializzaClickDettaglioAsteChiuse</a:t>
+            </a:r>
+            <a:r>
+              <a:rPr lang="it-IT" altLang="it-IT" sz="1200" dirty="0">
+                <a:latin typeface="Arial Unicode MS"/>
+              </a:rPr>
+              <a:t>()</a:t>
+            </a:r>
+            <a:r>
+              <a:rPr lang="it-IT" altLang="it-IT" sz="1200" dirty="0"/>
+              <a:t> → click su ID asta chiusa → dettaglio</a:t>
+            </a:r>
+            <a:endParaRPr lang="it-IT" altLang="it-IT" sz="1200" dirty="0">
+              <a:latin typeface="Arial" panose="020B0604020202020204" pitchFamily="34" charset="0"/>
+            </a:endParaRPr>
+          </a:p>
+          <a:p>
+            <a:pPr marL="457200" lvl="1" indent="0" eaLnBrk="0" fontAlgn="base" hangingPunct="0">
+              <a:lnSpc>
+                <a:spcPct val="100000"/>
+              </a:lnSpc>
+              <a:spcBef>
+                <a:spcPct val="0"/>
+              </a:spcBef>
+              <a:spcAft>
+                <a:spcPct val="0"/>
+              </a:spcAft>
+              <a:buFontTx/>
+              <a:buChar char="•"/>
+            </a:pPr>
+            <a:r>
+              <a:rPr lang="it-IT" altLang="it-IT" sz="1200" dirty="0" err="1">
+                <a:latin typeface="Arial Unicode MS"/>
+              </a:rPr>
+              <a:t>resetMSG</a:t>
+            </a:r>
+            <a:r>
+              <a:rPr lang="it-IT" altLang="it-IT" sz="1200" dirty="0">
+                <a:latin typeface="Arial Unicode MS"/>
+              </a:rPr>
+              <a:t>()</a:t>
+            </a:r>
+            <a:r>
+              <a:rPr lang="it-IT" altLang="it-IT" sz="1200" dirty="0"/>
+              <a:t> → pulisce i messaggi a schermo</a:t>
+            </a:r>
+            <a:endParaRPr lang="it-IT" altLang="it-IT" sz="1200" dirty="0">
+              <a:latin typeface="Arial" panose="020B0604020202020204" pitchFamily="34" charset="0"/>
+            </a:endParaRPr>
+          </a:p>
+          <a:p>
+            <a:pPr lvl="1"/>
+            <a:endParaRPr lang="it-IT" b="1" dirty="0"/>
+          </a:p>
+          <a:p>
+            <a:endParaRPr lang="it-IT" b="1" dirty="0"/>
+          </a:p>
+          <a:p>
+            <a:endParaRPr lang="it-IT" b="1" dirty="0"/>
+          </a:p>
+          <a:p>
+            <a:pPr lvl="1">
+              <a:buFont typeface="Courier New" panose="02070309020205020404" pitchFamily="49" charset="0"/>
+              <a:buChar char="o"/>
+            </a:pPr>
+            <a:endParaRPr lang="it-IT" b="1" dirty="0"/>
+          </a:p>
+          <a:p>
+            <a:pPr lvl="1">
+              <a:buFont typeface="Courier New" panose="02070309020205020404" pitchFamily="49" charset="0"/>
+              <a:buChar char="o"/>
+            </a:pPr>
+            <a:endParaRPr lang="it-IT" sz="1400" dirty="0"/>
+          </a:p>
+        </p:txBody>
+      </p:sp>
+      <p:sp>
+        <p:nvSpPr>
+          <p:cNvPr id="10" name="Segnaposto contenuto 2">
+            <a:extLst>
+              <a:ext uri="{FF2B5EF4-FFF2-40B4-BE49-F238E27FC236}">
+                <a16:creationId xmlns:a16="http://schemas.microsoft.com/office/drawing/2014/main" id="{BB2F039C-CB89-3612-7BCE-2D13D43443B9}"/>
+              </a:ext>
+            </a:extLst>
+          </p:cNvPr>
+          <p:cNvSpPr txBox="1">
+            <a:spLocks/>
+          </p:cNvSpPr>
+          <p:nvPr/>
+        </p:nvSpPr>
+        <p:spPr>
+          <a:xfrm>
+            <a:off x="6172200" y="3549658"/>
+            <a:ext cx="6019800" cy="3739896"/>
+          </a:xfrm>
+          <a:prstGeom prst="rect">
+            <a:avLst/>
+          </a:prstGeom>
+        </p:spPr>
+        <p:txBody>
+          <a:bodyPr vert="horz" lIns="91440" tIns="45720" rIns="91440" bIns="45720" rtlCol="0">
+            <a:normAutofit/>
+          </a:bodyPr>
+          <a:lstStyle>
+            <a:lvl1pPr marL="228600" indent="-228600" algn="l" defTabSz="914400" rtl="0" eaLnBrk="1" latinLnBrk="0" hangingPunct="1">
+              <a:lnSpc>
+                <a:spcPct val="110000"/>
+              </a:lnSpc>
+              <a:spcBef>
+                <a:spcPts val="1000"/>
+              </a:spcBef>
+              <a:buFont typeface="Arial" panose="020B0604020202020204" pitchFamily="34" charset="0"/>
+              <a:buChar char="•"/>
+              <a:defRPr sz="2000" kern="1200">
+                <a:solidFill>
+                  <a:schemeClr val="tx1"/>
+                </a:solidFill>
+                <a:latin typeface="+mn-lt"/>
+                <a:ea typeface="+mn-ea"/>
+                <a:cs typeface="+mn-cs"/>
+              </a:defRPr>
+            </a:lvl1pPr>
+            <a:lvl2pPr marL="685800" indent="-228600" algn="l" defTabSz="914400" rtl="0" eaLnBrk="1" latinLnBrk="0" hangingPunct="1">
+              <a:lnSpc>
+                <a:spcPct val="110000"/>
+              </a:lnSpc>
+              <a:spcBef>
+                <a:spcPts val="500"/>
+              </a:spcBef>
+              <a:buFont typeface="Arial" panose="020B0604020202020204" pitchFamily="34" charset="0"/>
+              <a:buChar char="•"/>
+              <a:defRPr sz="1800" kern="1200">
+                <a:solidFill>
+                  <a:schemeClr val="tx1"/>
+                </a:solidFill>
+                <a:latin typeface="+mn-lt"/>
+                <a:ea typeface="+mn-ea"/>
+                <a:cs typeface="+mn-cs"/>
+              </a:defRPr>
+            </a:lvl2pPr>
+            <a:lvl3pPr marL="1143000" indent="-228600" algn="l" defTabSz="914400" rtl="0" eaLnBrk="1" latinLnBrk="0" hangingPunct="1">
+              <a:lnSpc>
+                <a:spcPct val="110000"/>
+              </a:lnSpc>
+              <a:spcBef>
+                <a:spcPts val="500"/>
+              </a:spcBef>
+              <a:buFont typeface="Arial" panose="020B0604020202020204" pitchFamily="34" charset="0"/>
+              <a:buChar char="•"/>
+              <a:defRPr sz="1600" kern="1200">
+                <a:solidFill>
+                  <a:schemeClr val="tx1"/>
+                </a:solidFill>
+                <a:latin typeface="+mn-lt"/>
+                <a:ea typeface="+mn-ea"/>
+                <a:cs typeface="+mn-cs"/>
+              </a:defRPr>
+            </a:lvl3pPr>
+            <a:lvl4pPr marL="1600200" indent="-228600" algn="l" defTabSz="914400" rtl="0" eaLnBrk="1" latinLnBrk="0" hangingPunct="1">
+              <a:lnSpc>
+                <a:spcPct val="110000"/>
+              </a:lnSpc>
+              <a:spcBef>
+                <a:spcPts val="500"/>
+              </a:spcBef>
+              <a:buFont typeface="Arial" panose="020B0604020202020204" pitchFamily="34" charset="0"/>
+              <a:buChar char="•"/>
+              <a:defRPr sz="1400" kern="1200">
+                <a:solidFill>
+                  <a:schemeClr val="tx1"/>
+                </a:solidFill>
+                <a:latin typeface="+mn-lt"/>
+                <a:ea typeface="+mn-ea"/>
+                <a:cs typeface="+mn-cs"/>
+              </a:defRPr>
+            </a:lvl4pPr>
+            <a:lvl5pPr marL="2057400" indent="-228600" algn="l" defTabSz="914400" rtl="0" eaLnBrk="1" latinLnBrk="0" hangingPunct="1">
+              <a:lnSpc>
+                <a:spcPct val="110000"/>
+              </a:lnSpc>
+              <a:spcBef>
+                <a:spcPts val="500"/>
+              </a:spcBef>
+              <a:buFont typeface="Arial" panose="020B0604020202020204" pitchFamily="34" charset="0"/>
+              <a:buChar char="•"/>
+              <a:defRPr sz="1400" kern="1200">
+                <a:solidFill>
+                  <a:schemeClr val="tx1"/>
+                </a:solidFill>
+                <a:latin typeface="+mn-lt"/>
+                <a:ea typeface="+mn-ea"/>
+                <a:cs typeface="+mn-cs"/>
+              </a:defRPr>
+            </a:lvl5pPr>
+            <a:lvl6pPr marL="2514600" indent="-228600" algn="l" defTabSz="914400" rtl="0" eaLnBrk="1" latinLnBrk="0" hangingPunct="1">
+              <a:lnSpc>
+                <a:spcPct val="90000"/>
+              </a:lnSpc>
+              <a:spcBef>
+                <a:spcPts val="500"/>
+              </a:spcBef>
+              <a:buFont typeface="Arial" panose="020B0604020202020204" pitchFamily="34" charset="0"/>
+              <a:buChar char="•"/>
+              <a:defRPr sz="1800" kern="1200">
+                <a:solidFill>
+                  <a:schemeClr val="tx1"/>
+                </a:solidFill>
+                <a:latin typeface="+mn-lt"/>
+                <a:ea typeface="+mn-ea"/>
+                <a:cs typeface="+mn-cs"/>
+              </a:defRPr>
+            </a:lvl6pPr>
+            <a:lvl7pPr marL="2971800" indent="-228600" algn="l" defTabSz="914400" rtl="0" eaLnBrk="1" latinLnBrk="0" hangingPunct="1">
+              <a:lnSpc>
+                <a:spcPct val="90000"/>
+              </a:lnSpc>
+              <a:spcBef>
+                <a:spcPts val="500"/>
+              </a:spcBef>
+              <a:buFont typeface="Arial" panose="020B0604020202020204" pitchFamily="34" charset="0"/>
+              <a:buChar char="•"/>
+              <a:defRPr sz="1800" kern="1200">
+                <a:solidFill>
+                  <a:schemeClr val="tx1"/>
+                </a:solidFill>
+                <a:latin typeface="+mn-lt"/>
+                <a:ea typeface="+mn-ea"/>
+                <a:cs typeface="+mn-cs"/>
+              </a:defRPr>
+            </a:lvl7pPr>
+            <a:lvl8pPr marL="3429000" indent="-228600" algn="l" defTabSz="914400" rtl="0" eaLnBrk="1" latinLnBrk="0" hangingPunct="1">
+              <a:lnSpc>
+                <a:spcPct val="90000"/>
+              </a:lnSpc>
+              <a:spcBef>
+                <a:spcPts val="500"/>
+              </a:spcBef>
+              <a:buFont typeface="Arial" panose="020B0604020202020204" pitchFamily="34" charset="0"/>
+              <a:buChar char="•"/>
+              <a:defRPr sz="1800" kern="1200">
+                <a:solidFill>
+                  <a:schemeClr val="tx1"/>
+                </a:solidFill>
+                <a:latin typeface="+mn-lt"/>
+                <a:ea typeface="+mn-ea"/>
+                <a:cs typeface="+mn-cs"/>
+              </a:defRPr>
+            </a:lvl8pPr>
+            <a:lvl9pPr marL="3886200" indent="-228600" algn="l" defTabSz="914400" rtl="0" eaLnBrk="1" latinLnBrk="0" hangingPunct="1">
+              <a:lnSpc>
+                <a:spcPct val="90000"/>
+              </a:lnSpc>
+              <a:spcBef>
+                <a:spcPts val="500"/>
+              </a:spcBef>
+              <a:buFont typeface="Arial" panose="020B0604020202020204" pitchFamily="34" charset="0"/>
+              <a:buChar char="•"/>
+              <a:defRPr sz="1800" kern="1200">
+                <a:solidFill>
+                  <a:schemeClr val="tx1"/>
+                </a:solidFill>
+                <a:latin typeface="+mn-lt"/>
+                <a:ea typeface="+mn-ea"/>
+                <a:cs typeface="+mn-cs"/>
+              </a:defRPr>
+            </a:lvl9pPr>
+          </a:lstStyle>
+          <a:p>
+            <a:r>
+              <a:rPr lang="it-IT" b="1" dirty="0" err="1"/>
+              <a:t>DettaglioAsta</a:t>
+            </a:r>
+            <a:endParaRPr lang="it-IT" b="1" dirty="0"/>
+          </a:p>
+          <a:p>
+            <a:pPr marL="457200" lvl="1" indent="0" eaLnBrk="0" fontAlgn="base" hangingPunct="0">
+              <a:lnSpc>
+                <a:spcPct val="100000"/>
+              </a:lnSpc>
+              <a:spcBef>
+                <a:spcPct val="0"/>
+              </a:spcBef>
+              <a:spcAft>
+                <a:spcPct val="0"/>
+              </a:spcAft>
+              <a:buFontTx/>
+              <a:buChar char="•"/>
+            </a:pPr>
+            <a:r>
+              <a:rPr lang="it-IT" altLang="it-IT" sz="1200" dirty="0" err="1">
+                <a:latin typeface="Arial Unicode MS"/>
+              </a:rPr>
+              <a:t>mostraDettaglioAstaAperta</a:t>
+            </a:r>
+            <a:r>
+              <a:rPr lang="it-IT" altLang="it-IT" sz="1200" dirty="0">
+                <a:latin typeface="Arial Unicode MS"/>
+              </a:rPr>
+              <a:t>(data)</a:t>
+            </a:r>
+            <a:r>
+              <a:rPr lang="it-IT" altLang="it-IT" sz="1200" dirty="0"/>
+              <a:t> → mostra dettagli e offerte di un’asta aperta</a:t>
+            </a:r>
+            <a:endParaRPr lang="it-IT" altLang="it-IT" sz="1200" dirty="0">
+              <a:latin typeface="Arial" panose="020B0604020202020204" pitchFamily="34" charset="0"/>
+            </a:endParaRPr>
+          </a:p>
+          <a:p>
+            <a:pPr marL="457200" lvl="1" indent="0" eaLnBrk="0" fontAlgn="base" hangingPunct="0">
+              <a:lnSpc>
+                <a:spcPct val="100000"/>
+              </a:lnSpc>
+              <a:spcBef>
+                <a:spcPct val="0"/>
+              </a:spcBef>
+              <a:spcAft>
+                <a:spcPct val="0"/>
+              </a:spcAft>
+              <a:buFontTx/>
+              <a:buChar char="•"/>
+            </a:pPr>
+            <a:r>
+              <a:rPr lang="it-IT" altLang="it-IT" sz="1200" dirty="0" err="1">
+                <a:latin typeface="Arial Unicode MS"/>
+              </a:rPr>
+              <a:t>mostraDettaglioAstaChiusa</a:t>
+            </a:r>
+            <a:r>
+              <a:rPr lang="it-IT" altLang="it-IT" sz="1200" dirty="0">
+                <a:latin typeface="Arial Unicode MS"/>
+              </a:rPr>
+              <a:t>(data)</a:t>
+            </a:r>
+            <a:r>
+              <a:rPr lang="it-IT" altLang="it-IT" sz="1200" dirty="0"/>
+              <a:t> → mostra dettagli di un’asta chiusa</a:t>
+            </a:r>
+            <a:endParaRPr lang="it-IT" altLang="it-IT" sz="1200" dirty="0">
+              <a:latin typeface="Arial" panose="020B0604020202020204" pitchFamily="34" charset="0"/>
+            </a:endParaRPr>
+          </a:p>
+          <a:p>
+            <a:pPr marL="457200" lvl="1" indent="0" eaLnBrk="0" fontAlgn="base" hangingPunct="0">
+              <a:lnSpc>
+                <a:spcPct val="100000"/>
+              </a:lnSpc>
+              <a:spcBef>
+                <a:spcPct val="0"/>
+              </a:spcBef>
+              <a:spcAft>
+                <a:spcPct val="0"/>
+              </a:spcAft>
+              <a:buFontTx/>
+              <a:buChar char="•"/>
+            </a:pPr>
+            <a:r>
+              <a:rPr lang="it-IT" altLang="it-IT" sz="1200" dirty="0" err="1">
+                <a:latin typeface="Arial Unicode MS"/>
+              </a:rPr>
+              <a:t>caricaChiudiAstaButton</a:t>
+            </a:r>
+            <a:r>
+              <a:rPr lang="it-IT" altLang="it-IT" sz="1200" dirty="0">
+                <a:latin typeface="Arial Unicode MS"/>
+              </a:rPr>
+              <a:t>()</a:t>
+            </a:r>
+            <a:r>
+              <a:rPr lang="it-IT" altLang="it-IT" sz="1200" dirty="0"/>
+              <a:t> → collega bottone “Chiudi asta” e invia richiesta al server</a:t>
+            </a:r>
+            <a:endParaRPr lang="it-IT" altLang="it-IT" sz="1200" dirty="0">
+              <a:latin typeface="Arial" panose="020B0604020202020204" pitchFamily="34" charset="0"/>
+            </a:endParaRPr>
+          </a:p>
+          <a:p>
+            <a:pPr lvl="1"/>
+            <a:endParaRPr lang="it-IT" b="1" dirty="0"/>
+          </a:p>
+          <a:p>
+            <a:pPr lvl="1"/>
+            <a:endParaRPr lang="it-IT" b="1" dirty="0"/>
+          </a:p>
+          <a:p>
+            <a:pPr lvl="1">
+              <a:buFont typeface="Courier New" panose="02070309020205020404" pitchFamily="49" charset="0"/>
+              <a:buChar char="o"/>
+            </a:pPr>
+            <a:endParaRPr lang="it-IT" b="1" dirty="0"/>
+          </a:p>
+          <a:p>
+            <a:pPr lvl="1">
+              <a:buFont typeface="Courier New" panose="02070309020205020404" pitchFamily="49" charset="0"/>
+              <a:buChar char="o"/>
+            </a:pPr>
+            <a:endParaRPr lang="it-IT" sz="1400" dirty="0"/>
+          </a:p>
+        </p:txBody>
+      </p:sp>
+      <p:sp>
+        <p:nvSpPr>
+          <p:cNvPr id="12" name="Segnaposto contenuto 2">
+            <a:extLst>
+              <a:ext uri="{FF2B5EF4-FFF2-40B4-BE49-F238E27FC236}">
+                <a16:creationId xmlns:a16="http://schemas.microsoft.com/office/drawing/2014/main" id="{D04FA927-EC0F-E43A-1F4A-3B6FFE9AC345}"/>
+              </a:ext>
+            </a:extLst>
+          </p:cNvPr>
+          <p:cNvSpPr txBox="1">
+            <a:spLocks/>
+          </p:cNvSpPr>
+          <p:nvPr/>
+        </p:nvSpPr>
+        <p:spPr>
+          <a:xfrm>
+            <a:off x="6095999" y="1870341"/>
+            <a:ext cx="5682236" cy="3739896"/>
+          </a:xfrm>
+          <a:prstGeom prst="rect">
+            <a:avLst/>
+          </a:prstGeom>
+        </p:spPr>
+        <p:txBody>
+          <a:bodyPr vert="horz" lIns="91440" tIns="45720" rIns="91440" bIns="45720" rtlCol="0">
+            <a:normAutofit/>
+          </a:bodyPr>
+          <a:lstStyle>
+            <a:lvl1pPr marL="228600" indent="-228600" algn="l" defTabSz="914400" rtl="0" eaLnBrk="1" latinLnBrk="0" hangingPunct="1">
+              <a:lnSpc>
+                <a:spcPct val="110000"/>
+              </a:lnSpc>
+              <a:spcBef>
+                <a:spcPts val="1000"/>
+              </a:spcBef>
+              <a:buFont typeface="Arial" panose="020B0604020202020204" pitchFamily="34" charset="0"/>
+              <a:buChar char="•"/>
+              <a:defRPr sz="2000" kern="1200">
+                <a:solidFill>
+                  <a:schemeClr val="tx1"/>
+                </a:solidFill>
+                <a:latin typeface="+mn-lt"/>
+                <a:ea typeface="+mn-ea"/>
+                <a:cs typeface="+mn-cs"/>
+              </a:defRPr>
+            </a:lvl1pPr>
+            <a:lvl2pPr marL="685800" indent="-228600" algn="l" defTabSz="914400" rtl="0" eaLnBrk="1" latinLnBrk="0" hangingPunct="1">
+              <a:lnSpc>
+                <a:spcPct val="110000"/>
+              </a:lnSpc>
+              <a:spcBef>
+                <a:spcPts val="500"/>
+              </a:spcBef>
+              <a:buFont typeface="Arial" panose="020B0604020202020204" pitchFamily="34" charset="0"/>
+              <a:buChar char="•"/>
+              <a:defRPr sz="1800" kern="1200">
+                <a:solidFill>
+                  <a:schemeClr val="tx1"/>
+                </a:solidFill>
+                <a:latin typeface="+mn-lt"/>
+                <a:ea typeface="+mn-ea"/>
+                <a:cs typeface="+mn-cs"/>
+              </a:defRPr>
+            </a:lvl2pPr>
+            <a:lvl3pPr marL="1143000" indent="-228600" algn="l" defTabSz="914400" rtl="0" eaLnBrk="1" latinLnBrk="0" hangingPunct="1">
+              <a:lnSpc>
+                <a:spcPct val="110000"/>
+              </a:lnSpc>
+              <a:spcBef>
+                <a:spcPts val="500"/>
+              </a:spcBef>
+              <a:buFont typeface="Arial" panose="020B0604020202020204" pitchFamily="34" charset="0"/>
+              <a:buChar char="•"/>
+              <a:defRPr sz="1600" kern="1200">
+                <a:solidFill>
+                  <a:schemeClr val="tx1"/>
+                </a:solidFill>
+                <a:latin typeface="+mn-lt"/>
+                <a:ea typeface="+mn-ea"/>
+                <a:cs typeface="+mn-cs"/>
+              </a:defRPr>
+            </a:lvl3pPr>
+            <a:lvl4pPr marL="1600200" indent="-228600" algn="l" defTabSz="914400" rtl="0" eaLnBrk="1" latinLnBrk="0" hangingPunct="1">
+              <a:lnSpc>
+                <a:spcPct val="110000"/>
+              </a:lnSpc>
+              <a:spcBef>
+                <a:spcPts val="500"/>
+              </a:spcBef>
+              <a:buFont typeface="Arial" panose="020B0604020202020204" pitchFamily="34" charset="0"/>
+              <a:buChar char="•"/>
+              <a:defRPr sz="1400" kern="1200">
+                <a:solidFill>
+                  <a:schemeClr val="tx1"/>
+                </a:solidFill>
+                <a:latin typeface="+mn-lt"/>
+                <a:ea typeface="+mn-ea"/>
+                <a:cs typeface="+mn-cs"/>
+              </a:defRPr>
+            </a:lvl4pPr>
+            <a:lvl5pPr marL="2057400" indent="-228600" algn="l" defTabSz="914400" rtl="0" eaLnBrk="1" latinLnBrk="0" hangingPunct="1">
+              <a:lnSpc>
+                <a:spcPct val="110000"/>
+              </a:lnSpc>
+              <a:spcBef>
+                <a:spcPts val="500"/>
+              </a:spcBef>
+              <a:buFont typeface="Arial" panose="020B0604020202020204" pitchFamily="34" charset="0"/>
+              <a:buChar char="•"/>
+              <a:defRPr sz="1400" kern="1200">
+                <a:solidFill>
+                  <a:schemeClr val="tx1"/>
+                </a:solidFill>
+                <a:latin typeface="+mn-lt"/>
+                <a:ea typeface="+mn-ea"/>
+                <a:cs typeface="+mn-cs"/>
+              </a:defRPr>
+            </a:lvl5pPr>
+            <a:lvl6pPr marL="2514600" indent="-228600" algn="l" defTabSz="914400" rtl="0" eaLnBrk="1" latinLnBrk="0" hangingPunct="1">
+              <a:lnSpc>
+                <a:spcPct val="90000"/>
+              </a:lnSpc>
+              <a:spcBef>
+                <a:spcPts val="500"/>
+              </a:spcBef>
+              <a:buFont typeface="Arial" panose="020B0604020202020204" pitchFamily="34" charset="0"/>
+              <a:buChar char="•"/>
+              <a:defRPr sz="1800" kern="1200">
+                <a:solidFill>
+                  <a:schemeClr val="tx1"/>
+                </a:solidFill>
+                <a:latin typeface="+mn-lt"/>
+                <a:ea typeface="+mn-ea"/>
+                <a:cs typeface="+mn-cs"/>
+              </a:defRPr>
+            </a:lvl6pPr>
+            <a:lvl7pPr marL="2971800" indent="-228600" algn="l" defTabSz="914400" rtl="0" eaLnBrk="1" latinLnBrk="0" hangingPunct="1">
+              <a:lnSpc>
+                <a:spcPct val="90000"/>
+              </a:lnSpc>
+              <a:spcBef>
+                <a:spcPts val="500"/>
+              </a:spcBef>
+              <a:buFont typeface="Arial" panose="020B0604020202020204" pitchFamily="34" charset="0"/>
+              <a:buChar char="•"/>
+              <a:defRPr sz="1800" kern="1200">
+                <a:solidFill>
+                  <a:schemeClr val="tx1"/>
+                </a:solidFill>
+                <a:latin typeface="+mn-lt"/>
+                <a:ea typeface="+mn-ea"/>
+                <a:cs typeface="+mn-cs"/>
+              </a:defRPr>
+            </a:lvl7pPr>
+            <a:lvl8pPr marL="3429000" indent="-228600" algn="l" defTabSz="914400" rtl="0" eaLnBrk="1" latinLnBrk="0" hangingPunct="1">
+              <a:lnSpc>
+                <a:spcPct val="90000"/>
+              </a:lnSpc>
+              <a:spcBef>
+                <a:spcPts val="500"/>
+              </a:spcBef>
+              <a:buFont typeface="Arial" panose="020B0604020202020204" pitchFamily="34" charset="0"/>
+              <a:buChar char="•"/>
+              <a:defRPr sz="1800" kern="1200">
+                <a:solidFill>
+                  <a:schemeClr val="tx1"/>
+                </a:solidFill>
+                <a:latin typeface="+mn-lt"/>
+                <a:ea typeface="+mn-ea"/>
+                <a:cs typeface="+mn-cs"/>
+              </a:defRPr>
+            </a:lvl8pPr>
+            <a:lvl9pPr marL="3886200" indent="-228600" algn="l" defTabSz="914400" rtl="0" eaLnBrk="1" latinLnBrk="0" hangingPunct="1">
+              <a:lnSpc>
+                <a:spcPct val="90000"/>
+              </a:lnSpc>
+              <a:spcBef>
+                <a:spcPts val="500"/>
+              </a:spcBef>
+              <a:buFont typeface="Arial" panose="020B0604020202020204" pitchFamily="34" charset="0"/>
+              <a:buChar char="•"/>
+              <a:defRPr sz="1800" kern="1200">
+                <a:solidFill>
+                  <a:schemeClr val="tx1"/>
+                </a:solidFill>
+                <a:latin typeface="+mn-lt"/>
+                <a:ea typeface="+mn-ea"/>
+                <a:cs typeface="+mn-cs"/>
+              </a:defRPr>
+            </a:lvl9pPr>
+          </a:lstStyle>
+          <a:p>
+            <a:r>
+              <a:rPr lang="it-IT" b="1" dirty="0"/>
+              <a:t>Acquisto</a:t>
+            </a:r>
+          </a:p>
+          <a:p>
+            <a:pPr marL="457200" lvl="1" indent="0" eaLnBrk="0" fontAlgn="base" hangingPunct="0">
+              <a:lnSpc>
+                <a:spcPct val="100000"/>
+              </a:lnSpc>
+              <a:spcBef>
+                <a:spcPct val="0"/>
+              </a:spcBef>
+              <a:spcAft>
+                <a:spcPct val="0"/>
+              </a:spcAft>
+              <a:buFontTx/>
+              <a:buChar char="•"/>
+            </a:pPr>
+            <a:r>
+              <a:rPr lang="it-IT" altLang="it-IT" sz="1200" dirty="0" err="1">
+                <a:latin typeface="Arial Unicode MS"/>
+              </a:rPr>
+              <a:t>renderAcquistoPage</a:t>
+            </a:r>
+            <a:r>
+              <a:rPr lang="it-IT" altLang="it-IT" sz="1200" dirty="0">
+                <a:latin typeface="Arial Unicode MS"/>
+              </a:rPr>
+              <a:t>()</a:t>
+            </a:r>
+            <a:r>
+              <a:rPr lang="it-IT" altLang="it-IT" sz="1200" dirty="0"/>
+              <a:t> → apre pagina Acquisto e collega pulsante ricerca</a:t>
+            </a:r>
+            <a:endParaRPr lang="it-IT" altLang="it-IT" sz="1200" dirty="0">
+              <a:latin typeface="Arial" panose="020B0604020202020204" pitchFamily="34" charset="0"/>
+            </a:endParaRPr>
+          </a:p>
+          <a:p>
+            <a:pPr marL="457200" lvl="1" indent="0" eaLnBrk="0" fontAlgn="base" hangingPunct="0">
+              <a:lnSpc>
+                <a:spcPct val="100000"/>
+              </a:lnSpc>
+              <a:spcBef>
+                <a:spcPct val="0"/>
+              </a:spcBef>
+              <a:spcAft>
+                <a:spcPct val="0"/>
+              </a:spcAft>
+              <a:buFontTx/>
+              <a:buChar char="•"/>
+            </a:pPr>
+            <a:r>
+              <a:rPr lang="it-IT" altLang="it-IT" sz="1200" dirty="0" err="1">
+                <a:latin typeface="Arial Unicode MS"/>
+              </a:rPr>
+              <a:t>searchAstaByKeyword</a:t>
+            </a:r>
+            <a:r>
+              <a:rPr lang="it-IT" altLang="it-IT" sz="1200" dirty="0">
+                <a:latin typeface="Arial Unicode MS"/>
+              </a:rPr>
+              <a:t>()</a:t>
+            </a:r>
+            <a:r>
+              <a:rPr lang="it-IT" altLang="it-IT" sz="1200" dirty="0"/>
+              <a:t> → cerca aste per parola chiave</a:t>
+            </a:r>
+            <a:endParaRPr lang="it-IT" altLang="it-IT" sz="1200" dirty="0">
+              <a:latin typeface="Arial" panose="020B0604020202020204" pitchFamily="34" charset="0"/>
+            </a:endParaRPr>
+          </a:p>
+          <a:p>
+            <a:pPr marL="457200" lvl="1" indent="0" eaLnBrk="0" fontAlgn="base" hangingPunct="0">
+              <a:lnSpc>
+                <a:spcPct val="100000"/>
+              </a:lnSpc>
+              <a:spcBef>
+                <a:spcPct val="0"/>
+              </a:spcBef>
+              <a:spcAft>
+                <a:spcPct val="0"/>
+              </a:spcAft>
+              <a:buFontTx/>
+              <a:buChar char="•"/>
+            </a:pPr>
+            <a:r>
+              <a:rPr lang="it-IT" altLang="it-IT" sz="1200" dirty="0" err="1">
+                <a:latin typeface="Arial Unicode MS"/>
+              </a:rPr>
+              <a:t>showAsteByKeyword</a:t>
+            </a:r>
+            <a:r>
+              <a:rPr lang="it-IT" altLang="it-IT" sz="1200" dirty="0">
+                <a:latin typeface="Arial Unicode MS"/>
+              </a:rPr>
+              <a:t>(</a:t>
+            </a:r>
+            <a:r>
+              <a:rPr lang="it-IT" altLang="it-IT" sz="1200" dirty="0" err="1">
+                <a:latin typeface="Arial Unicode MS"/>
+              </a:rPr>
+              <a:t>request</a:t>
+            </a:r>
+            <a:r>
+              <a:rPr lang="it-IT" altLang="it-IT" sz="1200" dirty="0">
+                <a:latin typeface="Arial Unicode MS"/>
+              </a:rPr>
+              <a:t>)</a:t>
+            </a:r>
+            <a:r>
+              <a:rPr lang="it-IT" altLang="it-IT" sz="1200" dirty="0"/>
+              <a:t> → mostra i risultati della ricerca</a:t>
+            </a:r>
+            <a:endParaRPr lang="it-IT" altLang="it-IT" sz="1200" dirty="0">
+              <a:latin typeface="Arial" panose="020B0604020202020204" pitchFamily="34" charset="0"/>
+            </a:endParaRPr>
+          </a:p>
+          <a:p>
+            <a:pPr marL="457200" lvl="1" indent="0" eaLnBrk="0" fontAlgn="base" hangingPunct="0">
+              <a:lnSpc>
+                <a:spcPct val="100000"/>
+              </a:lnSpc>
+              <a:spcBef>
+                <a:spcPct val="0"/>
+              </a:spcBef>
+              <a:spcAft>
+                <a:spcPct val="0"/>
+              </a:spcAft>
+              <a:buFontTx/>
+              <a:buChar char="•"/>
+            </a:pPr>
+            <a:r>
+              <a:rPr lang="it-IT" altLang="it-IT" sz="1200" dirty="0" err="1">
+                <a:latin typeface="Arial Unicode MS"/>
+              </a:rPr>
+              <a:t>addAstaTrovataInTable</a:t>
+            </a:r>
+            <a:r>
+              <a:rPr lang="it-IT" altLang="it-IT" sz="1200" dirty="0">
+                <a:latin typeface="Arial Unicode MS"/>
+              </a:rPr>
+              <a:t>(asta)</a:t>
+            </a:r>
+            <a:r>
+              <a:rPr lang="it-IT" altLang="it-IT" sz="1200" dirty="0"/>
+              <a:t> → aggiunge una riga asta trovata in tabella</a:t>
+            </a:r>
+            <a:endParaRPr lang="it-IT" altLang="it-IT" sz="1200" dirty="0">
+              <a:latin typeface="Arial" panose="020B0604020202020204" pitchFamily="34" charset="0"/>
+            </a:endParaRPr>
+          </a:p>
+          <a:p>
+            <a:pPr marL="457200" lvl="1" indent="0" eaLnBrk="0" fontAlgn="base" hangingPunct="0">
+              <a:lnSpc>
+                <a:spcPct val="100000"/>
+              </a:lnSpc>
+              <a:spcBef>
+                <a:spcPct val="0"/>
+              </a:spcBef>
+              <a:spcAft>
+                <a:spcPct val="0"/>
+              </a:spcAft>
+              <a:buFontTx/>
+              <a:buChar char="•"/>
+            </a:pPr>
+            <a:r>
+              <a:rPr lang="it-IT" altLang="it-IT" sz="1200" dirty="0" err="1">
+                <a:latin typeface="Arial Unicode MS"/>
+              </a:rPr>
+              <a:t>renderAsteVisionateEAggiudicate</a:t>
+            </a:r>
+            <a:r>
+              <a:rPr lang="it-IT" altLang="it-IT" sz="1200" dirty="0">
+                <a:latin typeface="Arial Unicode MS"/>
+              </a:rPr>
+              <a:t>()</a:t>
+            </a:r>
+            <a:r>
+              <a:rPr lang="it-IT" altLang="it-IT" sz="1200" dirty="0"/>
+              <a:t> → mostra aste visitate e vinte</a:t>
+            </a:r>
+            <a:endParaRPr lang="it-IT" altLang="it-IT" sz="1200" dirty="0">
+              <a:latin typeface="Arial" panose="020B0604020202020204" pitchFamily="34" charset="0"/>
+            </a:endParaRPr>
+          </a:p>
+          <a:p>
+            <a:pPr marL="457200" lvl="1" indent="0" eaLnBrk="0" fontAlgn="base" hangingPunct="0">
+              <a:lnSpc>
+                <a:spcPct val="100000"/>
+              </a:lnSpc>
+              <a:spcBef>
+                <a:spcPct val="0"/>
+              </a:spcBef>
+              <a:spcAft>
+                <a:spcPct val="0"/>
+              </a:spcAft>
+              <a:buFontTx/>
+              <a:buChar char="•"/>
+            </a:pPr>
+            <a:r>
+              <a:rPr lang="it-IT" altLang="it-IT" sz="1200" dirty="0" err="1">
+                <a:latin typeface="Arial Unicode MS"/>
+              </a:rPr>
+              <a:t>addAstaVintaInTable</a:t>
+            </a:r>
+            <a:r>
+              <a:rPr lang="it-IT" altLang="it-IT" sz="1200" dirty="0">
+                <a:latin typeface="Arial Unicode MS"/>
+              </a:rPr>
+              <a:t>(asta)</a:t>
+            </a:r>
+            <a:r>
+              <a:rPr lang="it-IT" altLang="it-IT" sz="1200" dirty="0"/>
+              <a:t> → aggiunge asta vinta in tabella</a:t>
+            </a:r>
+            <a:endParaRPr lang="it-IT" altLang="it-IT" sz="1200" dirty="0">
+              <a:latin typeface="Arial" panose="020B0604020202020204" pitchFamily="34" charset="0"/>
+            </a:endParaRPr>
+          </a:p>
+          <a:p>
+            <a:pPr lvl="1"/>
+            <a:endParaRPr lang="it-IT" b="1" dirty="0"/>
+          </a:p>
+          <a:p>
+            <a:pPr lvl="1">
+              <a:buFont typeface="Courier New" panose="02070309020205020404" pitchFamily="49" charset="0"/>
+              <a:buChar char="o"/>
+            </a:pPr>
+            <a:endParaRPr lang="it-IT" b="1" dirty="0"/>
+          </a:p>
+          <a:p>
+            <a:pPr lvl="1">
+              <a:buFont typeface="Courier New" panose="02070309020205020404" pitchFamily="49" charset="0"/>
+              <a:buChar char="o"/>
+            </a:pPr>
+            <a:endParaRPr lang="it-IT" sz="1400" dirty="0"/>
+          </a:p>
+        </p:txBody>
+      </p:sp>
+      <p:sp>
+        <p:nvSpPr>
+          <p:cNvPr id="13" name="Segnaposto contenuto 2">
+            <a:extLst>
+              <a:ext uri="{FF2B5EF4-FFF2-40B4-BE49-F238E27FC236}">
+                <a16:creationId xmlns:a16="http://schemas.microsoft.com/office/drawing/2014/main" id="{1F890BC6-1059-90D7-118F-9773B9012093}"/>
+              </a:ext>
+            </a:extLst>
+          </p:cNvPr>
+          <p:cNvSpPr txBox="1">
+            <a:spLocks/>
+          </p:cNvSpPr>
+          <p:nvPr/>
+        </p:nvSpPr>
+        <p:spPr>
+          <a:xfrm>
+            <a:off x="6172200" y="4739771"/>
+            <a:ext cx="5819419" cy="3739896"/>
+          </a:xfrm>
+          <a:prstGeom prst="rect">
+            <a:avLst/>
+          </a:prstGeom>
+        </p:spPr>
+        <p:txBody>
+          <a:bodyPr vert="horz" lIns="91440" tIns="45720" rIns="91440" bIns="45720" rtlCol="0">
+            <a:normAutofit/>
+          </a:bodyPr>
+          <a:lstStyle>
+            <a:lvl1pPr marL="228600" indent="-228600" algn="l" defTabSz="914400" rtl="0" eaLnBrk="1" latinLnBrk="0" hangingPunct="1">
+              <a:lnSpc>
+                <a:spcPct val="110000"/>
+              </a:lnSpc>
+              <a:spcBef>
+                <a:spcPts val="1000"/>
+              </a:spcBef>
+              <a:buFont typeface="Arial" panose="020B0604020202020204" pitchFamily="34" charset="0"/>
+              <a:buChar char="•"/>
+              <a:defRPr sz="2000" kern="1200">
+                <a:solidFill>
+                  <a:schemeClr val="tx1"/>
+                </a:solidFill>
+                <a:latin typeface="+mn-lt"/>
+                <a:ea typeface="+mn-ea"/>
+                <a:cs typeface="+mn-cs"/>
+              </a:defRPr>
+            </a:lvl1pPr>
+            <a:lvl2pPr marL="685800" indent="-228600" algn="l" defTabSz="914400" rtl="0" eaLnBrk="1" latinLnBrk="0" hangingPunct="1">
+              <a:lnSpc>
+                <a:spcPct val="110000"/>
+              </a:lnSpc>
+              <a:spcBef>
+                <a:spcPts val="500"/>
+              </a:spcBef>
+              <a:buFont typeface="Arial" panose="020B0604020202020204" pitchFamily="34" charset="0"/>
+              <a:buChar char="•"/>
+              <a:defRPr sz="1800" kern="1200">
+                <a:solidFill>
+                  <a:schemeClr val="tx1"/>
+                </a:solidFill>
+                <a:latin typeface="+mn-lt"/>
+                <a:ea typeface="+mn-ea"/>
+                <a:cs typeface="+mn-cs"/>
+              </a:defRPr>
+            </a:lvl2pPr>
+            <a:lvl3pPr marL="1143000" indent="-228600" algn="l" defTabSz="914400" rtl="0" eaLnBrk="1" latinLnBrk="0" hangingPunct="1">
+              <a:lnSpc>
+                <a:spcPct val="110000"/>
+              </a:lnSpc>
+              <a:spcBef>
+                <a:spcPts val="500"/>
+              </a:spcBef>
+              <a:buFont typeface="Arial" panose="020B0604020202020204" pitchFamily="34" charset="0"/>
+              <a:buChar char="•"/>
+              <a:defRPr sz="1600" kern="1200">
+                <a:solidFill>
+                  <a:schemeClr val="tx1"/>
+                </a:solidFill>
+                <a:latin typeface="+mn-lt"/>
+                <a:ea typeface="+mn-ea"/>
+                <a:cs typeface="+mn-cs"/>
+              </a:defRPr>
+            </a:lvl3pPr>
+            <a:lvl4pPr marL="1600200" indent="-228600" algn="l" defTabSz="914400" rtl="0" eaLnBrk="1" latinLnBrk="0" hangingPunct="1">
+              <a:lnSpc>
+                <a:spcPct val="110000"/>
+              </a:lnSpc>
+              <a:spcBef>
+                <a:spcPts val="500"/>
+              </a:spcBef>
+              <a:buFont typeface="Arial" panose="020B0604020202020204" pitchFamily="34" charset="0"/>
+              <a:buChar char="•"/>
+              <a:defRPr sz="1400" kern="1200">
+                <a:solidFill>
+                  <a:schemeClr val="tx1"/>
+                </a:solidFill>
+                <a:latin typeface="+mn-lt"/>
+                <a:ea typeface="+mn-ea"/>
+                <a:cs typeface="+mn-cs"/>
+              </a:defRPr>
+            </a:lvl4pPr>
+            <a:lvl5pPr marL="2057400" indent="-228600" algn="l" defTabSz="914400" rtl="0" eaLnBrk="1" latinLnBrk="0" hangingPunct="1">
+              <a:lnSpc>
+                <a:spcPct val="110000"/>
+              </a:lnSpc>
+              <a:spcBef>
+                <a:spcPts val="500"/>
+              </a:spcBef>
+              <a:buFont typeface="Arial" panose="020B0604020202020204" pitchFamily="34" charset="0"/>
+              <a:buChar char="•"/>
+              <a:defRPr sz="1400" kern="1200">
+                <a:solidFill>
+                  <a:schemeClr val="tx1"/>
+                </a:solidFill>
+                <a:latin typeface="+mn-lt"/>
+                <a:ea typeface="+mn-ea"/>
+                <a:cs typeface="+mn-cs"/>
+              </a:defRPr>
+            </a:lvl5pPr>
+            <a:lvl6pPr marL="2514600" indent="-228600" algn="l" defTabSz="914400" rtl="0" eaLnBrk="1" latinLnBrk="0" hangingPunct="1">
+              <a:lnSpc>
+                <a:spcPct val="90000"/>
+              </a:lnSpc>
+              <a:spcBef>
+                <a:spcPts val="500"/>
+              </a:spcBef>
+              <a:buFont typeface="Arial" panose="020B0604020202020204" pitchFamily="34" charset="0"/>
+              <a:buChar char="•"/>
+              <a:defRPr sz="1800" kern="1200">
+                <a:solidFill>
+                  <a:schemeClr val="tx1"/>
+                </a:solidFill>
+                <a:latin typeface="+mn-lt"/>
+                <a:ea typeface="+mn-ea"/>
+                <a:cs typeface="+mn-cs"/>
+              </a:defRPr>
+            </a:lvl6pPr>
+            <a:lvl7pPr marL="2971800" indent="-228600" algn="l" defTabSz="914400" rtl="0" eaLnBrk="1" latinLnBrk="0" hangingPunct="1">
+              <a:lnSpc>
+                <a:spcPct val="90000"/>
+              </a:lnSpc>
+              <a:spcBef>
+                <a:spcPts val="500"/>
+              </a:spcBef>
+              <a:buFont typeface="Arial" panose="020B0604020202020204" pitchFamily="34" charset="0"/>
+              <a:buChar char="•"/>
+              <a:defRPr sz="1800" kern="1200">
+                <a:solidFill>
+                  <a:schemeClr val="tx1"/>
+                </a:solidFill>
+                <a:latin typeface="+mn-lt"/>
+                <a:ea typeface="+mn-ea"/>
+                <a:cs typeface="+mn-cs"/>
+              </a:defRPr>
+            </a:lvl7pPr>
+            <a:lvl8pPr marL="3429000" indent="-228600" algn="l" defTabSz="914400" rtl="0" eaLnBrk="1" latinLnBrk="0" hangingPunct="1">
+              <a:lnSpc>
+                <a:spcPct val="90000"/>
+              </a:lnSpc>
+              <a:spcBef>
+                <a:spcPts val="500"/>
+              </a:spcBef>
+              <a:buFont typeface="Arial" panose="020B0604020202020204" pitchFamily="34" charset="0"/>
+              <a:buChar char="•"/>
+              <a:defRPr sz="1800" kern="1200">
+                <a:solidFill>
+                  <a:schemeClr val="tx1"/>
+                </a:solidFill>
+                <a:latin typeface="+mn-lt"/>
+                <a:ea typeface="+mn-ea"/>
+                <a:cs typeface="+mn-cs"/>
+              </a:defRPr>
+            </a:lvl8pPr>
+            <a:lvl9pPr marL="3886200" indent="-228600" algn="l" defTabSz="914400" rtl="0" eaLnBrk="1" latinLnBrk="0" hangingPunct="1">
+              <a:lnSpc>
+                <a:spcPct val="90000"/>
+              </a:lnSpc>
+              <a:spcBef>
+                <a:spcPts val="500"/>
+              </a:spcBef>
+              <a:buFont typeface="Arial" panose="020B0604020202020204" pitchFamily="34" charset="0"/>
+              <a:buChar char="•"/>
+              <a:defRPr sz="1800" kern="1200">
+                <a:solidFill>
+                  <a:schemeClr val="tx1"/>
+                </a:solidFill>
+                <a:latin typeface="+mn-lt"/>
+                <a:ea typeface="+mn-ea"/>
+                <a:cs typeface="+mn-cs"/>
+              </a:defRPr>
+            </a:lvl9pPr>
+          </a:lstStyle>
+          <a:p>
+            <a:r>
+              <a:rPr lang="it-IT" b="1" dirty="0"/>
+              <a:t>Offerta</a:t>
+            </a:r>
+          </a:p>
+          <a:p>
+            <a:pPr marL="457200" lvl="1" indent="0" eaLnBrk="0" fontAlgn="base" hangingPunct="0">
+              <a:lnSpc>
+                <a:spcPct val="100000"/>
+              </a:lnSpc>
+              <a:spcBef>
+                <a:spcPct val="0"/>
+              </a:spcBef>
+              <a:spcAft>
+                <a:spcPct val="0"/>
+              </a:spcAft>
+              <a:buFontTx/>
+              <a:buChar char="•"/>
+            </a:pPr>
+            <a:r>
+              <a:rPr lang="it-IT" altLang="it-IT" sz="1200" dirty="0" err="1">
+                <a:latin typeface="Arial Unicode MS"/>
+              </a:rPr>
+              <a:t>renderOffertaPage</a:t>
+            </a:r>
+            <a:r>
+              <a:rPr lang="it-IT" altLang="it-IT" sz="1200" dirty="0">
+                <a:latin typeface="Arial Unicode MS"/>
+              </a:rPr>
+              <a:t>(</a:t>
+            </a:r>
+            <a:r>
+              <a:rPr lang="it-IT" altLang="it-IT" sz="1200" dirty="0" err="1">
+                <a:latin typeface="Arial Unicode MS"/>
+              </a:rPr>
+              <a:t>idAsta</a:t>
+            </a:r>
+            <a:r>
+              <a:rPr lang="it-IT" altLang="it-IT" sz="1200" dirty="0">
+                <a:latin typeface="Arial Unicode MS"/>
+              </a:rPr>
+              <a:t>)</a:t>
+            </a:r>
+            <a:r>
+              <a:rPr lang="it-IT" altLang="it-IT" sz="1200" dirty="0"/>
+              <a:t> → mostra pagina offerta per una certa asta</a:t>
+            </a:r>
+            <a:endParaRPr lang="it-IT" altLang="it-IT" sz="1200" dirty="0">
+              <a:latin typeface="Arial" panose="020B0604020202020204" pitchFamily="34" charset="0"/>
+            </a:endParaRPr>
+          </a:p>
+          <a:p>
+            <a:pPr marL="457200" lvl="1" indent="0" eaLnBrk="0" fontAlgn="base" hangingPunct="0">
+              <a:lnSpc>
+                <a:spcPct val="100000"/>
+              </a:lnSpc>
+              <a:spcBef>
+                <a:spcPct val="0"/>
+              </a:spcBef>
+              <a:spcAft>
+                <a:spcPct val="0"/>
+              </a:spcAft>
+              <a:buFontTx/>
+              <a:buChar char="•"/>
+            </a:pPr>
+            <a:r>
+              <a:rPr lang="it-IT" altLang="it-IT" sz="1200" dirty="0" err="1">
+                <a:latin typeface="Arial Unicode MS"/>
+              </a:rPr>
+              <a:t>addArticoloInTable</a:t>
+            </a:r>
+            <a:r>
+              <a:rPr lang="it-IT" altLang="it-IT" sz="1200" dirty="0">
+                <a:latin typeface="Arial Unicode MS"/>
+              </a:rPr>
+              <a:t>(articolo)</a:t>
+            </a:r>
+            <a:r>
+              <a:rPr lang="it-IT" altLang="it-IT" sz="1200" dirty="0"/>
+              <a:t> → aggiunge un articolo alla tabella articoli asta</a:t>
+            </a:r>
+            <a:endParaRPr lang="it-IT" altLang="it-IT" sz="1200" dirty="0">
+              <a:latin typeface="Arial" panose="020B0604020202020204" pitchFamily="34" charset="0"/>
+            </a:endParaRPr>
+          </a:p>
+          <a:p>
+            <a:pPr marL="457200" lvl="1" indent="0" eaLnBrk="0" fontAlgn="base" hangingPunct="0">
+              <a:lnSpc>
+                <a:spcPct val="100000"/>
+              </a:lnSpc>
+              <a:spcBef>
+                <a:spcPct val="0"/>
+              </a:spcBef>
+              <a:spcAft>
+                <a:spcPct val="0"/>
+              </a:spcAft>
+              <a:buFontTx/>
+              <a:buChar char="•"/>
+            </a:pPr>
+            <a:r>
+              <a:rPr lang="it-IT" altLang="it-IT" sz="1200" dirty="0" err="1">
+                <a:latin typeface="Arial Unicode MS"/>
+              </a:rPr>
+              <a:t>addOffertaInTable</a:t>
+            </a:r>
+            <a:r>
+              <a:rPr lang="it-IT" altLang="it-IT" sz="1200" dirty="0">
+                <a:latin typeface="Arial Unicode MS"/>
+              </a:rPr>
+              <a:t>(offerta, nuova)</a:t>
+            </a:r>
+            <a:r>
+              <a:rPr lang="it-IT" altLang="it-IT" sz="1200" dirty="0"/>
+              <a:t> → aggiunge un’offerta alla tabella offerte</a:t>
+            </a:r>
+            <a:endParaRPr lang="it-IT" altLang="it-IT" sz="1200" dirty="0">
+              <a:latin typeface="Arial" panose="020B0604020202020204" pitchFamily="34" charset="0"/>
+            </a:endParaRPr>
+          </a:p>
+          <a:p>
+            <a:pPr marL="457200" lvl="1" indent="0" eaLnBrk="0" fontAlgn="base" hangingPunct="0">
+              <a:lnSpc>
+                <a:spcPct val="100000"/>
+              </a:lnSpc>
+              <a:spcBef>
+                <a:spcPct val="0"/>
+              </a:spcBef>
+              <a:spcAft>
+                <a:spcPct val="0"/>
+              </a:spcAft>
+              <a:buFontTx/>
+              <a:buChar char="•"/>
+            </a:pPr>
+            <a:r>
+              <a:rPr lang="it-IT" altLang="it-IT" sz="1200" dirty="0" err="1">
+                <a:latin typeface="Arial Unicode MS"/>
+              </a:rPr>
+              <a:t>faiOfferta</a:t>
+            </a:r>
+            <a:r>
+              <a:rPr lang="it-IT" altLang="it-IT" sz="1200" dirty="0">
+                <a:latin typeface="Arial Unicode MS"/>
+              </a:rPr>
+              <a:t>(</a:t>
+            </a:r>
+            <a:r>
+              <a:rPr lang="it-IT" altLang="it-IT" sz="1200" dirty="0" err="1">
+                <a:latin typeface="Arial Unicode MS"/>
+              </a:rPr>
+              <a:t>prezzoIniziale</a:t>
+            </a:r>
+            <a:r>
+              <a:rPr lang="it-IT" altLang="it-IT" sz="1200" dirty="0">
+                <a:latin typeface="Arial Unicode MS"/>
+              </a:rPr>
+              <a:t>, </a:t>
+            </a:r>
+            <a:r>
+              <a:rPr lang="it-IT" altLang="it-IT" sz="1200" dirty="0" err="1">
+                <a:latin typeface="Arial Unicode MS"/>
+              </a:rPr>
+              <a:t>prezzoOffertaMassima</a:t>
+            </a:r>
+            <a:r>
+              <a:rPr lang="it-IT" altLang="it-IT" sz="1200" dirty="0">
+                <a:latin typeface="Arial Unicode MS"/>
+              </a:rPr>
+              <a:t>, </a:t>
+            </a:r>
+            <a:r>
+              <a:rPr lang="it-IT" altLang="it-IT" sz="1200" dirty="0" err="1">
+                <a:latin typeface="Arial Unicode MS"/>
+              </a:rPr>
+              <a:t>rialzoMinimo</a:t>
+            </a:r>
+            <a:r>
+              <a:rPr lang="it-IT" altLang="it-IT" sz="1200" dirty="0">
+                <a:latin typeface="Arial Unicode MS"/>
+              </a:rPr>
+              <a:t>)</a:t>
+            </a:r>
+            <a:r>
+              <a:rPr lang="it-IT" altLang="it-IT" sz="1200" dirty="0"/>
+              <a:t> → invia una nuova offerta al server</a:t>
+            </a:r>
+            <a:endParaRPr lang="it-IT" altLang="it-IT" sz="1200" dirty="0">
+              <a:latin typeface="Arial" panose="020B0604020202020204" pitchFamily="34" charset="0"/>
+            </a:endParaRPr>
+          </a:p>
+          <a:p>
+            <a:pPr lvl="1"/>
+            <a:endParaRPr lang="it-IT" b="1" dirty="0"/>
+          </a:p>
+          <a:p>
+            <a:pPr lvl="1"/>
+            <a:endParaRPr lang="it-IT" b="1" dirty="0"/>
+          </a:p>
+          <a:p>
+            <a:pPr lvl="1">
+              <a:buFont typeface="Courier New" panose="02070309020205020404" pitchFamily="49" charset="0"/>
+              <a:buChar char="o"/>
+            </a:pPr>
+            <a:endParaRPr lang="it-IT" b="1" dirty="0"/>
+          </a:p>
+          <a:p>
+            <a:pPr lvl="1">
+              <a:buFont typeface="Courier New" panose="02070309020205020404" pitchFamily="49" charset="0"/>
+              <a:buChar char="o"/>
+            </a:pPr>
+            <a:endParaRPr lang="it-IT" sz="1400" dirty="0"/>
+          </a:p>
+        </p:txBody>
+      </p:sp>
+      <p:sp>
+        <p:nvSpPr>
+          <p:cNvPr id="17" name="Rectangle 7">
+            <a:extLst>
+              <a:ext uri="{FF2B5EF4-FFF2-40B4-BE49-F238E27FC236}">
+                <a16:creationId xmlns:a16="http://schemas.microsoft.com/office/drawing/2014/main" id="{5A043DE1-F99E-90A4-37A3-757CB7335A38}"/>
+              </a:ext>
+            </a:extLst>
+          </p:cNvPr>
+          <p:cNvSpPr>
+            <a:spLocks noChangeArrowheads="1"/>
+          </p:cNvSpPr>
+          <p:nvPr/>
+        </p:nvSpPr>
+        <p:spPr bwMode="auto">
+          <a:xfrm>
+            <a:off x="0" y="0"/>
+            <a:ext cx="12192000" cy="0"/>
+          </a:xfrm>
+          <a:prstGeom prst="rect">
+            <a:avLst/>
+          </a:prstGeom>
+          <a:noFill/>
+          <a:ln>
+            <a:noFill/>
+          </a:ln>
+          <a:effectLst/>
+          <a:extLst>
+            <a:ext uri="{909E8E84-426E-40DD-AFC4-6F175D3DCCD1}">
+              <a14:hiddenFill xmlns:a14="http://schemas.microsoft.com/office/drawing/2010/main">
+                <a:solidFill>
+                  <a:schemeClr val="accent1"/>
+                </a:solidFill>
+              </a14:hiddenFill>
+            </a:ext>
+            <a:ext uri="{91240B29-F687-4F45-9708-019B960494DF}">
+              <a14:hiddenLine xmlns:a14="http://schemas.microsoft.com/office/drawing/2010/main" w="9525">
+                <a:solidFill>
+                  <a:schemeClr val="tx1"/>
+                </a:solidFill>
+                <a:miter lim="800000"/>
+                <a:headEnd/>
+                <a:tailEnd/>
+              </a14:hiddenLine>
+            </a:ext>
+            <a:ext uri="{AF507438-7753-43E0-B8FC-AC1667EBCBE1}">
+              <a14:hiddenEffects xmlns:a14="http://schemas.microsoft.com/office/drawing/2010/main">
+                <a:effectLst>
+                  <a:outerShdw dist="35921" dir="2700000" algn="ctr" rotWithShape="0">
+                    <a:schemeClr val="bg2"/>
+                  </a:outerShdw>
+                </a:effectLst>
+              </a14:hiddenEffects>
+            </a:ext>
+          </a:extLst>
+        </p:spPr>
+        <p:txBody>
+          <a:bodyPr vert="horz" wrap="none" lIns="91440" tIns="45720" rIns="91440" bIns="45720" numCol="1" anchor="ctr" anchorCtr="0" compatLnSpc="1">
+            <a:prstTxWarp prst="textNoShape">
+              <a:avLst/>
+            </a:prstTxWarp>
+            <a:spAutoFit/>
+          </a:bodyPr>
+          <a:lstStyle/>
+          <a:p>
+            <a:pPr marL="0" marR="0" lvl="0" indent="0" algn="l" defTabSz="914400" rtl="0" eaLnBrk="0" fontAlgn="base" latinLnBrk="0" hangingPunct="0">
+              <a:lnSpc>
+                <a:spcPct val="100000"/>
+              </a:lnSpc>
+              <a:spcBef>
+                <a:spcPct val="0"/>
+              </a:spcBef>
+              <a:spcAft>
+                <a:spcPct val="0"/>
+              </a:spcAft>
+              <a:buClrTx/>
+              <a:buSzTx/>
+              <a:buFontTx/>
+              <a:buChar char="•"/>
+              <a:tabLst/>
+            </a:pPr>
+            <a:r>
+              <a:rPr kumimoji="0" lang="it-IT" altLang="it-IT" sz="1000" b="0" i="0" u="none" strike="noStrike" cap="none" normalizeH="0" baseline="0" dirty="0" err="1">
+                <a:ln>
+                  <a:noFill/>
+                </a:ln>
+                <a:solidFill>
+                  <a:schemeClr val="tx1"/>
+                </a:solidFill>
+                <a:effectLst/>
+                <a:latin typeface="Arial Unicode MS"/>
+              </a:rPr>
+              <a:t>renderOffertaPage</a:t>
+            </a:r>
+            <a:r>
+              <a:rPr kumimoji="0" lang="it-IT" altLang="it-IT" sz="1000" b="0" i="0" u="none" strike="noStrike" cap="none" normalizeH="0" baseline="0" dirty="0">
+                <a:ln>
+                  <a:noFill/>
+                </a:ln>
+                <a:solidFill>
+                  <a:schemeClr val="tx1"/>
+                </a:solidFill>
+                <a:effectLst/>
+                <a:latin typeface="Arial Unicode MS"/>
+              </a:rPr>
+              <a:t>(</a:t>
+            </a:r>
+            <a:r>
+              <a:rPr kumimoji="0" lang="it-IT" altLang="it-IT" sz="1000" b="0" i="0" u="none" strike="noStrike" cap="none" normalizeH="0" baseline="0" dirty="0" err="1">
+                <a:ln>
+                  <a:noFill/>
+                </a:ln>
+                <a:solidFill>
+                  <a:schemeClr val="tx1"/>
+                </a:solidFill>
+                <a:effectLst/>
+                <a:latin typeface="Arial Unicode MS"/>
+              </a:rPr>
+              <a:t>idAsta</a:t>
+            </a:r>
+            <a:r>
+              <a:rPr kumimoji="0" lang="it-IT" altLang="it-IT" sz="1000" b="0" i="0" u="none" strike="noStrike" cap="none" normalizeH="0" baseline="0" dirty="0">
+                <a:ln>
+                  <a:noFill/>
+                </a:ln>
+                <a:solidFill>
+                  <a:schemeClr val="tx1"/>
+                </a:solidFill>
+                <a:effectLst/>
+                <a:latin typeface="Arial Unicode MS"/>
+              </a:rPr>
+              <a:t>)</a:t>
+            </a:r>
+            <a:r>
+              <a:rPr kumimoji="0" lang="it-IT" altLang="it-IT" sz="800" b="0" i="0" u="none" strike="noStrike" cap="none" normalizeH="0" baseline="0" dirty="0">
+                <a:ln>
+                  <a:noFill/>
+                </a:ln>
+                <a:solidFill>
+                  <a:schemeClr val="tx1"/>
+                </a:solidFill>
+                <a:effectLst/>
+              </a:rPr>
+              <a:t> → mostra pagina offerta per una certa asta</a:t>
+            </a:r>
+            <a:endParaRPr kumimoji="0" lang="it-IT" altLang="it-IT" sz="1800" b="0" i="0" u="none" strike="noStrike" cap="none" normalizeH="0" baseline="0" dirty="0">
+              <a:ln>
+                <a:noFill/>
+              </a:ln>
+              <a:solidFill>
+                <a:schemeClr val="tx1"/>
+              </a:solidFill>
+              <a:effectLst/>
+              <a:latin typeface="Arial" panose="020B0604020202020204" pitchFamily="34" charset="0"/>
+            </a:endParaRPr>
+          </a:p>
+          <a:p>
+            <a:pPr marL="0" marR="0" lvl="0" indent="0" algn="l" defTabSz="914400" rtl="0" eaLnBrk="0" fontAlgn="base" latinLnBrk="0" hangingPunct="0">
+              <a:lnSpc>
+                <a:spcPct val="100000"/>
+              </a:lnSpc>
+              <a:spcBef>
+                <a:spcPct val="0"/>
+              </a:spcBef>
+              <a:spcAft>
+                <a:spcPct val="0"/>
+              </a:spcAft>
+              <a:buClrTx/>
+              <a:buSzTx/>
+              <a:buFontTx/>
+              <a:buChar char="•"/>
+              <a:tabLst/>
+            </a:pPr>
+            <a:r>
+              <a:rPr kumimoji="0" lang="it-IT" altLang="it-IT" sz="1000" b="0" i="0" u="none" strike="noStrike" cap="none" normalizeH="0" baseline="0" dirty="0" err="1">
+                <a:ln>
+                  <a:noFill/>
+                </a:ln>
+                <a:solidFill>
+                  <a:schemeClr val="tx1"/>
+                </a:solidFill>
+                <a:effectLst/>
+                <a:latin typeface="Arial Unicode MS"/>
+              </a:rPr>
+              <a:t>addArticoloInTable</a:t>
+            </a:r>
+            <a:r>
+              <a:rPr kumimoji="0" lang="it-IT" altLang="it-IT" sz="1000" b="0" i="0" u="none" strike="noStrike" cap="none" normalizeH="0" baseline="0" dirty="0">
+                <a:ln>
+                  <a:noFill/>
+                </a:ln>
+                <a:solidFill>
+                  <a:schemeClr val="tx1"/>
+                </a:solidFill>
+                <a:effectLst/>
+                <a:latin typeface="Arial Unicode MS"/>
+              </a:rPr>
+              <a:t>(articolo)</a:t>
+            </a:r>
+            <a:r>
+              <a:rPr kumimoji="0" lang="it-IT" altLang="it-IT" sz="800" b="0" i="0" u="none" strike="noStrike" cap="none" normalizeH="0" baseline="0" dirty="0">
+                <a:ln>
+                  <a:noFill/>
+                </a:ln>
+                <a:solidFill>
+                  <a:schemeClr val="tx1"/>
+                </a:solidFill>
+                <a:effectLst/>
+              </a:rPr>
+              <a:t> → aggiunge un articolo alla tabella articoli asta</a:t>
+            </a:r>
+            <a:endParaRPr kumimoji="0" lang="it-IT" altLang="it-IT" sz="1800" b="0" i="0" u="none" strike="noStrike" cap="none" normalizeH="0" baseline="0" dirty="0">
+              <a:ln>
+                <a:noFill/>
+              </a:ln>
+              <a:solidFill>
+                <a:schemeClr val="tx1"/>
+              </a:solidFill>
+              <a:effectLst/>
+              <a:latin typeface="Arial" panose="020B0604020202020204" pitchFamily="34" charset="0"/>
+            </a:endParaRPr>
+          </a:p>
+          <a:p>
+            <a:pPr marL="0" marR="0" lvl="0" indent="0" algn="l" defTabSz="914400" rtl="0" eaLnBrk="0" fontAlgn="base" latinLnBrk="0" hangingPunct="0">
+              <a:lnSpc>
+                <a:spcPct val="100000"/>
+              </a:lnSpc>
+              <a:spcBef>
+                <a:spcPct val="0"/>
+              </a:spcBef>
+              <a:spcAft>
+                <a:spcPct val="0"/>
+              </a:spcAft>
+              <a:buClrTx/>
+              <a:buSzTx/>
+              <a:buFontTx/>
+              <a:buChar char="•"/>
+              <a:tabLst/>
+            </a:pPr>
+            <a:r>
+              <a:rPr kumimoji="0" lang="it-IT" altLang="it-IT" sz="1000" b="0" i="0" u="none" strike="noStrike" cap="none" normalizeH="0" baseline="0" dirty="0" err="1">
+                <a:ln>
+                  <a:noFill/>
+                </a:ln>
+                <a:solidFill>
+                  <a:schemeClr val="tx1"/>
+                </a:solidFill>
+                <a:effectLst/>
+                <a:latin typeface="Arial Unicode MS"/>
+              </a:rPr>
+              <a:t>addOffertaInTable</a:t>
+            </a:r>
+            <a:r>
+              <a:rPr kumimoji="0" lang="it-IT" altLang="it-IT" sz="1000" b="0" i="0" u="none" strike="noStrike" cap="none" normalizeH="0" baseline="0" dirty="0">
+                <a:ln>
+                  <a:noFill/>
+                </a:ln>
+                <a:solidFill>
+                  <a:schemeClr val="tx1"/>
+                </a:solidFill>
+                <a:effectLst/>
+                <a:latin typeface="Arial Unicode MS"/>
+              </a:rPr>
+              <a:t>(offerta, nuova)</a:t>
+            </a:r>
+            <a:r>
+              <a:rPr kumimoji="0" lang="it-IT" altLang="it-IT" sz="800" b="0" i="0" u="none" strike="noStrike" cap="none" normalizeH="0" baseline="0" dirty="0">
+                <a:ln>
+                  <a:noFill/>
+                </a:ln>
+                <a:solidFill>
+                  <a:schemeClr val="tx1"/>
+                </a:solidFill>
+                <a:effectLst/>
+              </a:rPr>
+              <a:t> → aggiunge un’offerta alla tabella offerte</a:t>
+            </a:r>
+            <a:endParaRPr kumimoji="0" lang="it-IT" altLang="it-IT" sz="1800" b="0" i="0" u="none" strike="noStrike" cap="none" normalizeH="0" baseline="0" dirty="0">
+              <a:ln>
+                <a:noFill/>
+              </a:ln>
+              <a:solidFill>
+                <a:schemeClr val="tx1"/>
+              </a:solidFill>
+              <a:effectLst/>
+              <a:latin typeface="Arial" panose="020B0604020202020204" pitchFamily="34" charset="0"/>
+            </a:endParaRPr>
+          </a:p>
+          <a:p>
+            <a:pPr marL="0" marR="0" lvl="0" indent="0" algn="l" defTabSz="914400" rtl="0" eaLnBrk="0" fontAlgn="base" latinLnBrk="0" hangingPunct="0">
+              <a:lnSpc>
+                <a:spcPct val="100000"/>
+              </a:lnSpc>
+              <a:spcBef>
+                <a:spcPct val="0"/>
+              </a:spcBef>
+              <a:spcAft>
+                <a:spcPct val="0"/>
+              </a:spcAft>
+              <a:buClrTx/>
+              <a:buSzTx/>
+              <a:buFontTx/>
+              <a:buChar char="•"/>
+              <a:tabLst/>
+            </a:pPr>
+            <a:r>
+              <a:rPr kumimoji="0" lang="it-IT" altLang="it-IT" sz="1000" b="0" i="0" u="none" strike="noStrike" cap="none" normalizeH="0" baseline="0" dirty="0" err="1">
+                <a:ln>
+                  <a:noFill/>
+                </a:ln>
+                <a:solidFill>
+                  <a:schemeClr val="tx1"/>
+                </a:solidFill>
+                <a:effectLst/>
+                <a:latin typeface="Arial Unicode MS"/>
+              </a:rPr>
+              <a:t>faiOfferta</a:t>
+            </a:r>
+            <a:r>
+              <a:rPr kumimoji="0" lang="it-IT" altLang="it-IT" sz="1000" b="0" i="0" u="none" strike="noStrike" cap="none" normalizeH="0" baseline="0" dirty="0">
+                <a:ln>
+                  <a:noFill/>
+                </a:ln>
+                <a:solidFill>
+                  <a:schemeClr val="tx1"/>
+                </a:solidFill>
+                <a:effectLst/>
+                <a:latin typeface="Arial Unicode MS"/>
+              </a:rPr>
+              <a:t>(</a:t>
+            </a:r>
+            <a:r>
+              <a:rPr kumimoji="0" lang="it-IT" altLang="it-IT" sz="1000" b="0" i="0" u="none" strike="noStrike" cap="none" normalizeH="0" baseline="0" dirty="0" err="1">
+                <a:ln>
+                  <a:noFill/>
+                </a:ln>
+                <a:solidFill>
+                  <a:schemeClr val="tx1"/>
+                </a:solidFill>
+                <a:effectLst/>
+                <a:latin typeface="Arial Unicode MS"/>
+              </a:rPr>
+              <a:t>prezzoIniziale</a:t>
+            </a:r>
+            <a:r>
+              <a:rPr kumimoji="0" lang="it-IT" altLang="it-IT" sz="1000" b="0" i="0" u="none" strike="noStrike" cap="none" normalizeH="0" baseline="0" dirty="0">
+                <a:ln>
+                  <a:noFill/>
+                </a:ln>
+                <a:solidFill>
+                  <a:schemeClr val="tx1"/>
+                </a:solidFill>
+                <a:effectLst/>
+                <a:latin typeface="Arial Unicode MS"/>
+              </a:rPr>
+              <a:t>, </a:t>
+            </a:r>
+            <a:r>
+              <a:rPr kumimoji="0" lang="it-IT" altLang="it-IT" sz="1000" b="0" i="0" u="none" strike="noStrike" cap="none" normalizeH="0" baseline="0" dirty="0" err="1">
+                <a:ln>
+                  <a:noFill/>
+                </a:ln>
+                <a:solidFill>
+                  <a:schemeClr val="tx1"/>
+                </a:solidFill>
+                <a:effectLst/>
+                <a:latin typeface="Arial Unicode MS"/>
+              </a:rPr>
+              <a:t>prezzoOffertaMassima</a:t>
+            </a:r>
+            <a:r>
+              <a:rPr kumimoji="0" lang="it-IT" altLang="it-IT" sz="1000" b="0" i="0" u="none" strike="noStrike" cap="none" normalizeH="0" baseline="0" dirty="0">
+                <a:ln>
+                  <a:noFill/>
+                </a:ln>
+                <a:solidFill>
+                  <a:schemeClr val="tx1"/>
+                </a:solidFill>
+                <a:effectLst/>
+                <a:latin typeface="Arial Unicode MS"/>
+              </a:rPr>
+              <a:t>, </a:t>
+            </a:r>
+            <a:r>
+              <a:rPr kumimoji="0" lang="it-IT" altLang="it-IT" sz="1000" b="0" i="0" u="none" strike="noStrike" cap="none" normalizeH="0" baseline="0" dirty="0" err="1">
+                <a:ln>
+                  <a:noFill/>
+                </a:ln>
+                <a:solidFill>
+                  <a:schemeClr val="tx1"/>
+                </a:solidFill>
+                <a:effectLst/>
+                <a:latin typeface="Arial Unicode MS"/>
+              </a:rPr>
+              <a:t>rialzoMinimo</a:t>
+            </a:r>
+            <a:r>
+              <a:rPr kumimoji="0" lang="it-IT" altLang="it-IT" sz="1000" b="0" i="0" u="none" strike="noStrike" cap="none" normalizeH="0" baseline="0" dirty="0">
+                <a:ln>
+                  <a:noFill/>
+                </a:ln>
+                <a:solidFill>
+                  <a:schemeClr val="tx1"/>
+                </a:solidFill>
+                <a:effectLst/>
+                <a:latin typeface="Arial Unicode MS"/>
+              </a:rPr>
+              <a:t>)</a:t>
+            </a:r>
+            <a:r>
+              <a:rPr kumimoji="0" lang="it-IT" altLang="it-IT" sz="800" b="0" i="0" u="none" strike="noStrike" cap="none" normalizeH="0" baseline="0" dirty="0">
+                <a:ln>
+                  <a:noFill/>
+                </a:ln>
+                <a:solidFill>
+                  <a:schemeClr val="tx1"/>
+                </a:solidFill>
+                <a:effectLst/>
+              </a:rPr>
+              <a:t> → invia una nuova offerta al server</a:t>
+            </a:r>
+            <a:endParaRPr kumimoji="0" lang="it-IT" altLang="it-IT" sz="1800" b="0" i="0" u="none" strike="noStrike" cap="none" normalizeH="0" baseline="0" dirty="0">
+              <a:ln>
+                <a:noFill/>
+              </a:ln>
+              <a:solidFill>
+                <a:schemeClr val="tx1"/>
+              </a:solidFill>
+              <a:effectLst/>
+              <a:latin typeface="Arial" panose="020B0604020202020204" pitchFamily="34" charset="0"/>
+            </a:endParaRPr>
+          </a:p>
+        </p:txBody>
+      </p:sp>
+    </p:spTree>
+    <p:extLst>
+      <p:ext uri="{BB962C8B-B14F-4D97-AF65-F5344CB8AC3E}">
+        <p14:creationId xmlns:p14="http://schemas.microsoft.com/office/powerpoint/2010/main" val="3165191962"/>
+      </p:ext>
+    </p:extLst>
+  </p:cSld>
+  <p:clrMapOvr>
+    <a:masterClrMapping/>
+  </p:clrMapOvr>
+</p:sld>
+</file>
+
+<file path=ppt/slides/slide22.xml><?xml version="1.0" encoding="utf-8"?>
+<p:sld xmlns:a="http://schemas.openxmlformats.org/drawingml/2006/main" xmlns:r="http://schemas.openxmlformats.org/officeDocument/2006/relationships" xmlns:p="http://schemas.openxmlformats.org/presentationml/2006/main">
+  <p:cSld>
+    <p:spTree>
+      <p:nvGrpSpPr>
+        <p:cNvPr id="1" name=""/>
+        <p:cNvGrpSpPr/>
+        <p:nvPr/>
+      </p:nvGrpSpPr>
+      <p:grpSpPr>
+        <a:xfrm>
+          <a:off x="0" y="0"/>
+          <a:ext cx="0" cy="0"/>
+          <a:chOff x="0" y="0"/>
+          <a:chExt cx="0" cy="0"/>
+        </a:xfrm>
+      </p:grpSpPr>
+      <p:sp>
+        <p:nvSpPr>
+          <p:cNvPr id="2" name="Titolo 1">
+            <a:extLst>
+              <a:ext uri="{FF2B5EF4-FFF2-40B4-BE49-F238E27FC236}">
+                <a16:creationId xmlns:a16="http://schemas.microsoft.com/office/drawing/2014/main" id="{E9B626C4-C1A0-5F50-9B84-7CB56748E319}"/>
+              </a:ext>
+            </a:extLst>
+          </p:cNvPr>
+          <p:cNvSpPr>
+            <a:spLocks noGrp="1"/>
+          </p:cNvSpPr>
+          <p:nvPr>
+            <p:ph type="title"/>
+          </p:nvPr>
+        </p:nvSpPr>
+        <p:spPr/>
+        <p:txBody>
+          <a:bodyPr/>
+          <a:lstStyle/>
+          <a:p>
+            <a:pPr algn="ctr"/>
+            <a:r>
+              <a:rPr lang="it-IT" dirty="0"/>
+              <a:t>SEQUENCE DIAGRAM – HTML - SIGNUP</a:t>
+            </a:r>
+          </a:p>
+        </p:txBody>
+      </p:sp>
+      <p:pic>
+        <p:nvPicPr>
+          <p:cNvPr id="5" name="Segnaposto contenuto 4" descr="Immagine che contiene testo, schermata, linea, diagramma&#10;&#10;Il contenuto generato dall'IA potrebbe non essere corretto.">
+            <a:extLst>
+              <a:ext uri="{FF2B5EF4-FFF2-40B4-BE49-F238E27FC236}">
+                <a16:creationId xmlns:a16="http://schemas.microsoft.com/office/drawing/2014/main" id="{443E0549-4721-3783-1E48-8E40E3D800F0}"/>
+              </a:ext>
+            </a:extLst>
+          </p:cNvPr>
+          <p:cNvPicPr>
+            <a:picLocks noGrp="1" noChangeAspect="1"/>
+          </p:cNvPicPr>
+          <p:nvPr>
+            <p:ph idx="1"/>
+          </p:nvPr>
+        </p:nvPicPr>
+        <p:blipFill>
+          <a:blip r:embed="rId2"/>
+          <a:stretch>
+            <a:fillRect/>
+          </a:stretch>
+        </p:blipFill>
+        <p:spPr>
+          <a:xfrm>
+            <a:off x="700635" y="1679281"/>
+            <a:ext cx="10790729" cy="4900465"/>
+          </a:xfrm>
+        </p:spPr>
+      </p:pic>
+    </p:spTree>
+    <p:extLst>
+      <p:ext uri="{BB962C8B-B14F-4D97-AF65-F5344CB8AC3E}">
+        <p14:creationId xmlns:p14="http://schemas.microsoft.com/office/powerpoint/2010/main" val="1019899170"/>
+      </p:ext>
+    </p:extLst>
+  </p:cSld>
+  <p:clrMapOvr>
+    <a:masterClrMapping/>
+  </p:clrMapOvr>
+</p:sld>
+</file>
+
+<file path=ppt/slides/slide23.xml><?xml version="1.0" encoding="utf-8"?>
+<p:sld xmlns:a="http://schemas.openxmlformats.org/drawingml/2006/main" xmlns:r="http://schemas.openxmlformats.org/officeDocument/2006/relationships" xmlns:p="http://schemas.openxmlformats.org/presentationml/2006/main">
+  <p:cSld>
+    <p:spTree>
+      <p:nvGrpSpPr>
+        <p:cNvPr id="1" name=""/>
+        <p:cNvGrpSpPr/>
+        <p:nvPr/>
+      </p:nvGrpSpPr>
+      <p:grpSpPr>
+        <a:xfrm>
+          <a:off x="0" y="0"/>
+          <a:ext cx="0" cy="0"/>
+          <a:chOff x="0" y="0"/>
+          <a:chExt cx="0" cy="0"/>
+        </a:xfrm>
+      </p:grpSpPr>
+      <p:sp>
+        <p:nvSpPr>
+          <p:cNvPr id="2" name="Titolo 1">
+            <a:extLst>
+              <a:ext uri="{FF2B5EF4-FFF2-40B4-BE49-F238E27FC236}">
+                <a16:creationId xmlns:a16="http://schemas.microsoft.com/office/drawing/2014/main" id="{99B4FD73-7AFE-A7DA-F9FE-65BEB12EBA73}"/>
+              </a:ext>
+            </a:extLst>
+          </p:cNvPr>
+          <p:cNvSpPr>
+            <a:spLocks noGrp="1"/>
+          </p:cNvSpPr>
+          <p:nvPr>
+            <p:ph type="title"/>
+          </p:nvPr>
+        </p:nvSpPr>
+        <p:spPr/>
+        <p:txBody>
+          <a:bodyPr/>
+          <a:lstStyle/>
+          <a:p>
+            <a:pPr algn="ctr"/>
+            <a:r>
+              <a:rPr lang="it-IT" dirty="0"/>
+              <a:t>SEQUENCE DIAGRAM - LOGIN</a:t>
+            </a:r>
+          </a:p>
+        </p:txBody>
+      </p:sp>
+      <p:pic>
+        <p:nvPicPr>
+          <p:cNvPr id="5" name="Segnaposto contenuto 4" descr="Immagine che contiene testo, schermata, diagramma, linea&#10;&#10;Il contenuto generato dall'IA potrebbe non essere corretto.">
+            <a:extLst>
+              <a:ext uri="{FF2B5EF4-FFF2-40B4-BE49-F238E27FC236}">
+                <a16:creationId xmlns:a16="http://schemas.microsoft.com/office/drawing/2014/main" id="{D343FD7A-BB61-8D5D-44E4-DB07223DF3EF}"/>
+              </a:ext>
+            </a:extLst>
+          </p:cNvPr>
+          <p:cNvPicPr>
+            <a:picLocks noGrp="1" noChangeAspect="1"/>
+          </p:cNvPicPr>
+          <p:nvPr>
+            <p:ph idx="1"/>
+          </p:nvPr>
+        </p:nvPicPr>
+        <p:blipFill>
+          <a:blip r:embed="rId2"/>
+          <a:stretch>
+            <a:fillRect/>
+          </a:stretch>
+        </p:blipFill>
+        <p:spPr>
+          <a:xfrm>
+            <a:off x="700635" y="1594168"/>
+            <a:ext cx="10691265" cy="4996558"/>
+          </a:xfrm>
+        </p:spPr>
+      </p:pic>
+    </p:spTree>
+    <p:extLst>
+      <p:ext uri="{BB962C8B-B14F-4D97-AF65-F5344CB8AC3E}">
+        <p14:creationId xmlns:p14="http://schemas.microsoft.com/office/powerpoint/2010/main" val="2099754950"/>
+      </p:ext>
+    </p:extLst>
+  </p:cSld>
+  <p:clrMapOvr>
+    <a:masterClrMapping/>
+  </p:clrMapOvr>
+</p:sld>
+</file>
+
+<file path=ppt/slides/slide24.xml><?xml version="1.0" encoding="utf-8"?>
+<p:sld xmlns:a="http://schemas.openxmlformats.org/drawingml/2006/main" xmlns:r="http://schemas.openxmlformats.org/officeDocument/2006/relationships" xmlns:p="http://schemas.openxmlformats.org/presentationml/2006/main">
+  <p:cSld>
+    <p:spTree>
+      <p:nvGrpSpPr>
+        <p:cNvPr id="1" name="">
+          <a:extLst>
+            <a:ext uri="{FF2B5EF4-FFF2-40B4-BE49-F238E27FC236}">
+              <a16:creationId xmlns:a16="http://schemas.microsoft.com/office/drawing/2014/main" id="{F0342C25-8C7D-79B4-CBE7-1489A3B65BFF}"/>
+            </a:ext>
+          </a:extLst>
+        </p:cNvPr>
+        <p:cNvGrpSpPr/>
+        <p:nvPr/>
+      </p:nvGrpSpPr>
+      <p:grpSpPr>
+        <a:xfrm>
+          <a:off x="0" y="0"/>
+          <a:ext cx="0" cy="0"/>
+          <a:chOff x="0" y="0"/>
+          <a:chExt cx="0" cy="0"/>
+        </a:xfrm>
+      </p:grpSpPr>
+      <p:sp>
+        <p:nvSpPr>
+          <p:cNvPr id="2" name="Titolo 1">
+            <a:extLst>
+              <a:ext uri="{FF2B5EF4-FFF2-40B4-BE49-F238E27FC236}">
+                <a16:creationId xmlns:a16="http://schemas.microsoft.com/office/drawing/2014/main" id="{F321C98D-26AF-B111-E668-EA470A72AC88}"/>
+              </a:ext>
+            </a:extLst>
+          </p:cNvPr>
+          <p:cNvSpPr>
+            <a:spLocks noGrp="1"/>
+          </p:cNvSpPr>
+          <p:nvPr>
+            <p:ph type="title"/>
+          </p:nvPr>
+        </p:nvSpPr>
+        <p:spPr/>
+        <p:txBody>
+          <a:bodyPr/>
+          <a:lstStyle/>
+          <a:p>
+            <a:pPr algn="ctr"/>
+            <a:r>
+              <a:rPr lang="it-IT" dirty="0"/>
+              <a:t>SEQUENCE DIAGRAM - LOGOUT</a:t>
+            </a:r>
+          </a:p>
+        </p:txBody>
+      </p:sp>
+      <p:pic>
+        <p:nvPicPr>
+          <p:cNvPr id="5" name="Segnaposto contenuto 4" descr="Immagine che contiene testo, schermata, Carattere, linea&#10;&#10;Il contenuto generato dall'IA potrebbe non essere corretto.">
+            <a:extLst>
+              <a:ext uri="{FF2B5EF4-FFF2-40B4-BE49-F238E27FC236}">
+                <a16:creationId xmlns:a16="http://schemas.microsoft.com/office/drawing/2014/main" id="{BE47FCCD-D551-D8A4-7592-3F872B663D16}"/>
+              </a:ext>
+            </a:extLst>
+          </p:cNvPr>
+          <p:cNvPicPr>
+            <a:picLocks noGrp="1" noChangeAspect="1"/>
+          </p:cNvPicPr>
+          <p:nvPr>
+            <p:ph idx="1"/>
+          </p:nvPr>
+        </p:nvPicPr>
+        <p:blipFill>
+          <a:blip r:embed="rId2"/>
+          <a:stretch>
+            <a:fillRect/>
+          </a:stretch>
+        </p:blipFill>
+        <p:spPr>
+          <a:xfrm>
+            <a:off x="2930236" y="2146562"/>
+            <a:ext cx="6681355" cy="3646514"/>
+          </a:xfrm>
+        </p:spPr>
+      </p:pic>
+    </p:spTree>
+    <p:extLst>
+      <p:ext uri="{BB962C8B-B14F-4D97-AF65-F5344CB8AC3E}">
+        <p14:creationId xmlns:p14="http://schemas.microsoft.com/office/powerpoint/2010/main" val="1617431380"/>
+      </p:ext>
+    </p:extLst>
+  </p:cSld>
+  <p:clrMapOvr>
+    <a:masterClrMapping/>
+  </p:clrMapOvr>
+</p:sld>
+</file>
+
+<file path=ppt/slides/slide25.xml><?xml version="1.0" encoding="utf-8"?>
+<p:sld xmlns:a="http://schemas.openxmlformats.org/drawingml/2006/main" xmlns:r="http://schemas.openxmlformats.org/officeDocument/2006/relationships" xmlns:p="http://schemas.openxmlformats.org/presentationml/2006/main">
+  <p:cSld>
+    <p:spTree>
+      <p:nvGrpSpPr>
+        <p:cNvPr id="1" name="">
+          <a:extLst>
+            <a:ext uri="{FF2B5EF4-FFF2-40B4-BE49-F238E27FC236}">
+              <a16:creationId xmlns:a16="http://schemas.microsoft.com/office/drawing/2014/main" id="{DD61F793-A5E2-70FC-B045-C7A049EBBF90}"/>
+            </a:ext>
+          </a:extLst>
+        </p:cNvPr>
+        <p:cNvGrpSpPr/>
+        <p:nvPr/>
+      </p:nvGrpSpPr>
+      <p:grpSpPr>
+        <a:xfrm>
+          <a:off x="0" y="0"/>
+          <a:ext cx="0" cy="0"/>
+          <a:chOff x="0" y="0"/>
+          <a:chExt cx="0" cy="0"/>
+        </a:xfrm>
+      </p:grpSpPr>
+      <p:sp>
+        <p:nvSpPr>
+          <p:cNvPr id="2" name="Titolo 1">
+            <a:extLst>
+              <a:ext uri="{FF2B5EF4-FFF2-40B4-BE49-F238E27FC236}">
+                <a16:creationId xmlns:a16="http://schemas.microsoft.com/office/drawing/2014/main" id="{874A99D3-AFFE-EE00-5AB6-1473583865A4}"/>
+              </a:ext>
+            </a:extLst>
+          </p:cNvPr>
+          <p:cNvSpPr>
+            <a:spLocks noGrp="1"/>
+          </p:cNvSpPr>
+          <p:nvPr>
+            <p:ph type="title"/>
+          </p:nvPr>
+        </p:nvSpPr>
+        <p:spPr/>
+        <p:txBody>
+          <a:bodyPr/>
+          <a:lstStyle/>
+          <a:p>
+            <a:pPr algn="ctr"/>
+            <a:r>
+              <a:rPr lang="it-IT" dirty="0"/>
+              <a:t>SEQUENCE DIAGRAM – GO TO HOME</a:t>
+            </a:r>
+          </a:p>
+        </p:txBody>
+      </p:sp>
+      <p:pic>
+        <p:nvPicPr>
+          <p:cNvPr id="5" name="Segnaposto contenuto 4" descr="Immagine che contiene testo, schermata, Carattere, linea&#10;&#10;Il contenuto generato dall'IA potrebbe non essere corretto.">
+            <a:extLst>
+              <a:ext uri="{FF2B5EF4-FFF2-40B4-BE49-F238E27FC236}">
+                <a16:creationId xmlns:a16="http://schemas.microsoft.com/office/drawing/2014/main" id="{351336D4-80FD-BC4F-B0E3-4BDA202B7F5B}"/>
+              </a:ext>
+            </a:extLst>
+          </p:cNvPr>
+          <p:cNvPicPr>
+            <a:picLocks noGrp="1" noChangeAspect="1"/>
+          </p:cNvPicPr>
+          <p:nvPr>
+            <p:ph idx="1"/>
+          </p:nvPr>
+        </p:nvPicPr>
+        <p:blipFill>
+          <a:blip r:embed="rId2"/>
+          <a:stretch>
+            <a:fillRect/>
+          </a:stretch>
+        </p:blipFill>
+        <p:spPr>
+          <a:xfrm>
+            <a:off x="668939" y="1901536"/>
+            <a:ext cx="10721724" cy="4395355"/>
+          </a:xfrm>
+        </p:spPr>
+      </p:pic>
+    </p:spTree>
+    <p:extLst>
+      <p:ext uri="{BB962C8B-B14F-4D97-AF65-F5344CB8AC3E}">
+        <p14:creationId xmlns:p14="http://schemas.microsoft.com/office/powerpoint/2010/main" val="3283723489"/>
+      </p:ext>
+    </p:extLst>
+  </p:cSld>
+  <p:clrMapOvr>
+    <a:masterClrMapping/>
+  </p:clrMapOvr>
+</p:sld>
+</file>
+
+<file path=ppt/slides/slide26.xml><?xml version="1.0" encoding="utf-8"?>
+<p:sld xmlns:a="http://schemas.openxmlformats.org/drawingml/2006/main" xmlns:r="http://schemas.openxmlformats.org/officeDocument/2006/relationships" xmlns:p="http://schemas.openxmlformats.org/presentationml/2006/main">
+  <p:cSld>
+    <p:spTree>
+      <p:nvGrpSpPr>
+        <p:cNvPr id="1" name="">
+          <a:extLst>
+            <a:ext uri="{FF2B5EF4-FFF2-40B4-BE49-F238E27FC236}">
+              <a16:creationId xmlns:a16="http://schemas.microsoft.com/office/drawing/2014/main" id="{03B90982-14E0-7EDC-E3B0-E59F1B38782E}"/>
+            </a:ext>
+          </a:extLst>
+        </p:cNvPr>
+        <p:cNvGrpSpPr/>
+        <p:nvPr/>
+      </p:nvGrpSpPr>
+      <p:grpSpPr>
+        <a:xfrm>
+          <a:off x="0" y="0"/>
+          <a:ext cx="0" cy="0"/>
+          <a:chOff x="0" y="0"/>
+          <a:chExt cx="0" cy="0"/>
+        </a:xfrm>
+      </p:grpSpPr>
+      <p:sp>
+        <p:nvSpPr>
+          <p:cNvPr id="2" name="Titolo 1">
+            <a:extLst>
+              <a:ext uri="{FF2B5EF4-FFF2-40B4-BE49-F238E27FC236}">
+                <a16:creationId xmlns:a16="http://schemas.microsoft.com/office/drawing/2014/main" id="{3161FF21-4F98-4B66-D43F-39315B5F717B}"/>
+              </a:ext>
+            </a:extLst>
+          </p:cNvPr>
+          <p:cNvSpPr>
+            <a:spLocks noGrp="1"/>
+          </p:cNvSpPr>
+          <p:nvPr>
+            <p:ph type="title"/>
+          </p:nvPr>
+        </p:nvSpPr>
+        <p:spPr/>
+        <p:txBody>
+          <a:bodyPr/>
+          <a:lstStyle/>
+          <a:p>
+            <a:pPr algn="ctr"/>
+            <a:r>
+              <a:rPr lang="it-IT" dirty="0"/>
+              <a:t>SEQUENCE DIAGRAM – GO TO OFFERTA</a:t>
+            </a:r>
+          </a:p>
+        </p:txBody>
+      </p:sp>
+      <p:pic>
+        <p:nvPicPr>
+          <p:cNvPr id="5" name="Segnaposto contenuto 4" descr="Immagine che contiene testo, schermata, Carattere, ricevuta&#10;&#10;Il contenuto generato dall'IA potrebbe non essere corretto.">
+            <a:extLst>
+              <a:ext uri="{FF2B5EF4-FFF2-40B4-BE49-F238E27FC236}">
+                <a16:creationId xmlns:a16="http://schemas.microsoft.com/office/drawing/2014/main" id="{52E16ADF-A56C-0214-C8C6-C5B0400AC617}"/>
+              </a:ext>
+            </a:extLst>
+          </p:cNvPr>
+          <p:cNvPicPr>
+            <a:picLocks noGrp="1" noChangeAspect="1"/>
+          </p:cNvPicPr>
+          <p:nvPr>
+            <p:ph idx="1"/>
+          </p:nvPr>
+        </p:nvPicPr>
+        <p:blipFill>
+          <a:blip r:embed="rId2"/>
+          <a:stretch>
+            <a:fillRect/>
+          </a:stretch>
+        </p:blipFill>
+        <p:spPr>
+          <a:xfrm>
+            <a:off x="1870364" y="1527409"/>
+            <a:ext cx="8333509" cy="5141281"/>
+          </a:xfrm>
+        </p:spPr>
+      </p:pic>
+    </p:spTree>
+    <p:extLst>
+      <p:ext uri="{BB962C8B-B14F-4D97-AF65-F5344CB8AC3E}">
+        <p14:creationId xmlns:p14="http://schemas.microsoft.com/office/powerpoint/2010/main" val="2000968186"/>
+      </p:ext>
+    </p:extLst>
+  </p:cSld>
+  <p:clrMapOvr>
+    <a:masterClrMapping/>
+  </p:clrMapOvr>
+</p:sld>
+</file>
+
+<file path=ppt/slides/slide27.xml><?xml version="1.0" encoding="utf-8"?>
+<p:sld xmlns:a="http://schemas.openxmlformats.org/drawingml/2006/main" xmlns:r="http://schemas.openxmlformats.org/officeDocument/2006/relationships" xmlns:p="http://schemas.openxmlformats.org/presentationml/2006/main">
+  <p:cSld>
+    <p:spTree>
+      <p:nvGrpSpPr>
+        <p:cNvPr id="1" name="">
+          <a:extLst>
+            <a:ext uri="{FF2B5EF4-FFF2-40B4-BE49-F238E27FC236}">
+              <a16:creationId xmlns:a16="http://schemas.microsoft.com/office/drawing/2014/main" id="{62772210-C84F-FCB0-B265-D12893B7B0D3}"/>
+            </a:ext>
+          </a:extLst>
+        </p:cNvPr>
+        <p:cNvGrpSpPr/>
+        <p:nvPr/>
+      </p:nvGrpSpPr>
+      <p:grpSpPr>
+        <a:xfrm>
+          <a:off x="0" y="0"/>
+          <a:ext cx="0" cy="0"/>
+          <a:chOff x="0" y="0"/>
+          <a:chExt cx="0" cy="0"/>
+        </a:xfrm>
+      </p:grpSpPr>
+      <p:sp>
+        <p:nvSpPr>
+          <p:cNvPr id="2" name="Titolo 1">
+            <a:extLst>
+              <a:ext uri="{FF2B5EF4-FFF2-40B4-BE49-F238E27FC236}">
+                <a16:creationId xmlns:a16="http://schemas.microsoft.com/office/drawing/2014/main" id="{E3A8F0E9-385C-1C5E-B0DB-5C7F03FB1219}"/>
+              </a:ext>
+            </a:extLst>
+          </p:cNvPr>
+          <p:cNvSpPr>
+            <a:spLocks noGrp="1"/>
+          </p:cNvSpPr>
+          <p:nvPr>
+            <p:ph type="title"/>
+          </p:nvPr>
+        </p:nvSpPr>
+        <p:spPr/>
+        <p:txBody>
+          <a:bodyPr/>
+          <a:lstStyle/>
+          <a:p>
+            <a:pPr algn="ctr"/>
+            <a:r>
+              <a:rPr lang="it-IT" dirty="0"/>
+              <a:t>SEQUENCE DIAGRAM – GO TO VENDO</a:t>
+            </a:r>
+          </a:p>
+        </p:txBody>
+      </p:sp>
+      <p:pic>
+        <p:nvPicPr>
+          <p:cNvPr id="5" name="Segnaposto contenuto 4" descr="Immagine che contiene testo, ricevuta, schermata, numero&#10;&#10;Il contenuto generato dall'IA potrebbe non essere corretto.">
+            <a:extLst>
+              <a:ext uri="{FF2B5EF4-FFF2-40B4-BE49-F238E27FC236}">
+                <a16:creationId xmlns:a16="http://schemas.microsoft.com/office/drawing/2014/main" id="{915CC658-91A3-37D2-9296-AA23773D767E}"/>
+              </a:ext>
+            </a:extLst>
+          </p:cNvPr>
+          <p:cNvPicPr>
+            <a:picLocks noGrp="1" noChangeAspect="1"/>
+          </p:cNvPicPr>
+          <p:nvPr>
+            <p:ph idx="1"/>
+          </p:nvPr>
+        </p:nvPicPr>
+        <p:blipFill>
+          <a:blip r:embed="rId2"/>
+          <a:stretch>
+            <a:fillRect/>
+          </a:stretch>
+        </p:blipFill>
+        <p:spPr>
+          <a:xfrm>
+            <a:off x="2369126" y="1563690"/>
+            <a:ext cx="7533409" cy="5084614"/>
+          </a:xfrm>
+        </p:spPr>
+      </p:pic>
+    </p:spTree>
+    <p:extLst>
+      <p:ext uri="{BB962C8B-B14F-4D97-AF65-F5344CB8AC3E}">
+        <p14:creationId xmlns:p14="http://schemas.microsoft.com/office/powerpoint/2010/main" val="2796739571"/>
+      </p:ext>
+    </p:extLst>
+  </p:cSld>
+  <p:clrMapOvr>
+    <a:masterClrMapping/>
+  </p:clrMapOvr>
+</p:sld>
+</file>
+
+<file path=ppt/slides/slide28.xml><?xml version="1.0" encoding="utf-8"?>
+<p:sld xmlns:a="http://schemas.openxmlformats.org/drawingml/2006/main" xmlns:r="http://schemas.openxmlformats.org/officeDocument/2006/relationships" xmlns:p="http://schemas.openxmlformats.org/presentationml/2006/main">
+  <p:cSld>
+    <p:spTree>
+      <p:nvGrpSpPr>
+        <p:cNvPr id="1" name="">
+          <a:extLst>
+            <a:ext uri="{FF2B5EF4-FFF2-40B4-BE49-F238E27FC236}">
+              <a16:creationId xmlns:a16="http://schemas.microsoft.com/office/drawing/2014/main" id="{7D4AA0AA-E97E-39A8-8EC5-0BF71DC2DFC6}"/>
+            </a:ext>
+          </a:extLst>
+        </p:cNvPr>
+        <p:cNvGrpSpPr/>
+        <p:nvPr/>
+      </p:nvGrpSpPr>
+      <p:grpSpPr>
+        <a:xfrm>
+          <a:off x="0" y="0"/>
+          <a:ext cx="0" cy="0"/>
+          <a:chOff x="0" y="0"/>
+          <a:chExt cx="0" cy="0"/>
+        </a:xfrm>
+      </p:grpSpPr>
+      <p:sp>
+        <p:nvSpPr>
+          <p:cNvPr id="2" name="Titolo 1">
+            <a:extLst>
+              <a:ext uri="{FF2B5EF4-FFF2-40B4-BE49-F238E27FC236}">
+                <a16:creationId xmlns:a16="http://schemas.microsoft.com/office/drawing/2014/main" id="{26C2AFD9-F249-34EA-0DFD-B9149B1429FE}"/>
+              </a:ext>
+            </a:extLst>
+          </p:cNvPr>
+          <p:cNvSpPr>
+            <a:spLocks noGrp="1"/>
+          </p:cNvSpPr>
+          <p:nvPr>
+            <p:ph type="title"/>
+          </p:nvPr>
+        </p:nvSpPr>
+        <p:spPr/>
+        <p:txBody>
+          <a:bodyPr/>
+          <a:lstStyle/>
+          <a:p>
+            <a:pPr algn="ctr"/>
+            <a:r>
+              <a:rPr lang="it-IT" dirty="0"/>
+              <a:t>SEQUENCE DIAGRAM – GO TO ACQUISTO</a:t>
+            </a:r>
+          </a:p>
+        </p:txBody>
+      </p:sp>
+      <p:pic>
+        <p:nvPicPr>
+          <p:cNvPr id="5" name="Segnaposto contenuto 4" descr="Immagine che contiene testo, schermata, numero, Carattere&#10;&#10;Il contenuto generato dall'IA potrebbe non essere corretto.">
+            <a:extLst>
+              <a:ext uri="{FF2B5EF4-FFF2-40B4-BE49-F238E27FC236}">
+                <a16:creationId xmlns:a16="http://schemas.microsoft.com/office/drawing/2014/main" id="{1C3E70CE-AB16-84E7-3B89-C93CE931019E}"/>
+              </a:ext>
+            </a:extLst>
+          </p:cNvPr>
+          <p:cNvPicPr>
+            <a:picLocks noGrp="1" noChangeAspect="1"/>
+          </p:cNvPicPr>
+          <p:nvPr>
+            <p:ph idx="1"/>
+          </p:nvPr>
+        </p:nvPicPr>
+        <p:blipFill>
+          <a:blip r:embed="rId2"/>
+          <a:stretch>
+            <a:fillRect/>
+          </a:stretch>
+        </p:blipFill>
+        <p:spPr>
+          <a:xfrm>
+            <a:off x="1548246" y="1628957"/>
+            <a:ext cx="9310254" cy="4766103"/>
+          </a:xfrm>
+        </p:spPr>
+      </p:pic>
+    </p:spTree>
+    <p:extLst>
+      <p:ext uri="{BB962C8B-B14F-4D97-AF65-F5344CB8AC3E}">
+        <p14:creationId xmlns:p14="http://schemas.microsoft.com/office/powerpoint/2010/main" val="3112876415"/>
+      </p:ext>
+    </p:extLst>
+  </p:cSld>
+  <p:clrMapOvr>
+    <a:masterClrMapping/>
+  </p:clrMapOvr>
+</p:sld>
+</file>
+
+<file path=ppt/slides/slide29.xml><?xml version="1.0" encoding="utf-8"?>
+<p:sld xmlns:a="http://schemas.openxmlformats.org/drawingml/2006/main" xmlns:r="http://schemas.openxmlformats.org/officeDocument/2006/relationships" xmlns:p="http://schemas.openxmlformats.org/presentationml/2006/main">
+  <p:cSld>
+    <p:spTree>
+      <p:nvGrpSpPr>
+        <p:cNvPr id="1" name="">
+          <a:extLst>
+            <a:ext uri="{FF2B5EF4-FFF2-40B4-BE49-F238E27FC236}">
+              <a16:creationId xmlns:a16="http://schemas.microsoft.com/office/drawing/2014/main" id="{AA333138-BE70-8D72-7224-846E8B518A4B}"/>
+            </a:ext>
+          </a:extLst>
+        </p:cNvPr>
+        <p:cNvGrpSpPr/>
+        <p:nvPr/>
+      </p:nvGrpSpPr>
+      <p:grpSpPr>
+        <a:xfrm>
+          <a:off x="0" y="0"/>
+          <a:ext cx="0" cy="0"/>
+          <a:chOff x="0" y="0"/>
+          <a:chExt cx="0" cy="0"/>
+        </a:xfrm>
+      </p:grpSpPr>
+      <p:sp>
+        <p:nvSpPr>
+          <p:cNvPr id="2" name="Titolo 1">
+            <a:extLst>
+              <a:ext uri="{FF2B5EF4-FFF2-40B4-BE49-F238E27FC236}">
+                <a16:creationId xmlns:a16="http://schemas.microsoft.com/office/drawing/2014/main" id="{9833DF20-AA24-DDD3-3FFA-33C4AD79947D}"/>
+              </a:ext>
+            </a:extLst>
+          </p:cNvPr>
+          <p:cNvSpPr>
+            <a:spLocks noGrp="1"/>
+          </p:cNvSpPr>
+          <p:nvPr>
+            <p:ph type="title"/>
+          </p:nvPr>
+        </p:nvSpPr>
+        <p:spPr/>
+        <p:txBody>
+          <a:bodyPr/>
+          <a:lstStyle/>
+          <a:p>
+            <a:pPr algn="ctr"/>
+            <a:r>
+              <a:rPr lang="it-IT" dirty="0"/>
+              <a:t>SEQUENCE DIAGRAM – GO TO DETTAGLIO ASTA</a:t>
+            </a:r>
+          </a:p>
+        </p:txBody>
+      </p:sp>
+      <p:pic>
+        <p:nvPicPr>
+          <p:cNvPr id="5" name="Segnaposto contenuto 4" descr="Immagine che contiene testo, schermata, numero, Carattere&#10;&#10;Il contenuto generato dall'IA potrebbe non essere corretto.">
+            <a:extLst>
+              <a:ext uri="{FF2B5EF4-FFF2-40B4-BE49-F238E27FC236}">
+                <a16:creationId xmlns:a16="http://schemas.microsoft.com/office/drawing/2014/main" id="{EBCB93FA-E45A-C10C-DD16-554093D140FE}"/>
+              </a:ext>
+            </a:extLst>
+          </p:cNvPr>
+          <p:cNvPicPr>
+            <a:picLocks noGrp="1" noChangeAspect="1"/>
+          </p:cNvPicPr>
+          <p:nvPr>
+            <p:ph idx="1"/>
+          </p:nvPr>
+        </p:nvPicPr>
+        <p:blipFill>
+          <a:blip r:embed="rId2"/>
+          <a:stretch>
+            <a:fillRect/>
+          </a:stretch>
+        </p:blipFill>
+        <p:spPr>
+          <a:xfrm>
+            <a:off x="2722419" y="1641968"/>
+            <a:ext cx="6909954" cy="4721638"/>
+          </a:xfrm>
+        </p:spPr>
+      </p:pic>
+    </p:spTree>
+    <p:extLst>
+      <p:ext uri="{BB962C8B-B14F-4D97-AF65-F5344CB8AC3E}">
+        <p14:creationId xmlns:p14="http://schemas.microsoft.com/office/powerpoint/2010/main" val="2371181397"/>
+      </p:ext>
+    </p:extLst>
+  </p:cSld>
+  <p:clrMapOvr>
+    <a:masterClrMapping/>
+  </p:clrMapOvr>
+</p:sld>
+</file>
+
 <file path=ppt/slides/slide3.xml><?xml version="1.0" encoding="utf-8"?>
 <p:sld xmlns:a="http://schemas.openxmlformats.org/drawingml/2006/main" xmlns:r="http://schemas.openxmlformats.org/officeDocument/2006/relationships" xmlns:p="http://schemas.openxmlformats.org/presentationml/2006/main">
   <p:cSld>
@@ -9572,6 +12778,952 @@
     <p:extLst>
       <p:ext uri="{BB962C8B-B14F-4D97-AF65-F5344CB8AC3E}">
         <p14:creationId xmlns:p14="http://schemas.microsoft.com/office/powerpoint/2010/main" val="973804671"/>
+      </p:ext>
+    </p:extLst>
+  </p:cSld>
+  <p:clrMapOvr>
+    <a:masterClrMapping/>
+  </p:clrMapOvr>
+</p:sld>
+</file>
+
+<file path=ppt/slides/slide30.xml><?xml version="1.0" encoding="utf-8"?>
+<p:sld xmlns:a="http://schemas.openxmlformats.org/drawingml/2006/main" xmlns:r="http://schemas.openxmlformats.org/officeDocument/2006/relationships" xmlns:p="http://schemas.openxmlformats.org/presentationml/2006/main">
+  <p:cSld>
+    <p:spTree>
+      <p:nvGrpSpPr>
+        <p:cNvPr id="1" name="">
+          <a:extLst>
+            <a:ext uri="{FF2B5EF4-FFF2-40B4-BE49-F238E27FC236}">
+              <a16:creationId xmlns:a16="http://schemas.microsoft.com/office/drawing/2014/main" id="{73238343-DEA0-2086-1C54-63C48A8E27DE}"/>
+            </a:ext>
+          </a:extLst>
+        </p:cNvPr>
+        <p:cNvGrpSpPr/>
+        <p:nvPr/>
+      </p:nvGrpSpPr>
+      <p:grpSpPr>
+        <a:xfrm>
+          <a:off x="0" y="0"/>
+          <a:ext cx="0" cy="0"/>
+          <a:chOff x="0" y="0"/>
+          <a:chExt cx="0" cy="0"/>
+        </a:xfrm>
+      </p:grpSpPr>
+      <p:sp>
+        <p:nvSpPr>
+          <p:cNvPr id="2" name="Titolo 1">
+            <a:extLst>
+              <a:ext uri="{FF2B5EF4-FFF2-40B4-BE49-F238E27FC236}">
+                <a16:creationId xmlns:a16="http://schemas.microsoft.com/office/drawing/2014/main" id="{F08D50D1-BF1F-1913-29B2-9A7F9C8FD4FD}"/>
+              </a:ext>
+            </a:extLst>
+          </p:cNvPr>
+          <p:cNvSpPr>
+            <a:spLocks noGrp="1"/>
+          </p:cNvSpPr>
+          <p:nvPr>
+            <p:ph type="title"/>
+          </p:nvPr>
+        </p:nvSpPr>
+        <p:spPr/>
+        <p:txBody>
+          <a:bodyPr/>
+          <a:lstStyle/>
+          <a:p>
+            <a:pPr algn="ctr"/>
+            <a:r>
+              <a:rPr lang="it-IT" dirty="0"/>
+              <a:t>SEQUENCE DIAGRAM – SEARCH ASTE BY KEY </a:t>
+            </a:r>
+          </a:p>
+        </p:txBody>
+      </p:sp>
+      <p:pic>
+        <p:nvPicPr>
+          <p:cNvPr id="5" name="Segnaposto contenuto 4" descr="Immagine che contiene testo, schermata, Carattere, linea&#10;&#10;Il contenuto generato dall'IA potrebbe non essere corretto.">
+            <a:extLst>
+              <a:ext uri="{FF2B5EF4-FFF2-40B4-BE49-F238E27FC236}">
+                <a16:creationId xmlns:a16="http://schemas.microsoft.com/office/drawing/2014/main" id="{39BF1B3C-8B65-4BD8-1C2F-CDA1BC851D9A}"/>
+              </a:ext>
+            </a:extLst>
+          </p:cNvPr>
+          <p:cNvPicPr>
+            <a:picLocks noGrp="1" noChangeAspect="1"/>
+          </p:cNvPicPr>
+          <p:nvPr>
+            <p:ph idx="1"/>
+          </p:nvPr>
+        </p:nvPicPr>
+        <p:blipFill>
+          <a:blip r:embed="rId2"/>
+          <a:stretch>
+            <a:fillRect/>
+          </a:stretch>
+        </p:blipFill>
+        <p:spPr>
+          <a:xfrm>
+            <a:off x="2272636" y="1724891"/>
+            <a:ext cx="7924204" cy="4520045"/>
+          </a:xfrm>
+        </p:spPr>
+      </p:pic>
+    </p:spTree>
+    <p:extLst>
+      <p:ext uri="{BB962C8B-B14F-4D97-AF65-F5344CB8AC3E}">
+        <p14:creationId xmlns:p14="http://schemas.microsoft.com/office/powerpoint/2010/main" val="1866007806"/>
+      </p:ext>
+    </p:extLst>
+  </p:cSld>
+  <p:clrMapOvr>
+    <a:masterClrMapping/>
+  </p:clrMapOvr>
+</p:sld>
+</file>
+
+<file path=ppt/slides/slide31.xml><?xml version="1.0" encoding="utf-8"?>
+<p:sld xmlns:a="http://schemas.openxmlformats.org/drawingml/2006/main" xmlns:r="http://schemas.openxmlformats.org/officeDocument/2006/relationships" xmlns:p="http://schemas.openxmlformats.org/presentationml/2006/main">
+  <p:cSld>
+    <p:spTree>
+      <p:nvGrpSpPr>
+        <p:cNvPr id="1" name="">
+          <a:extLst>
+            <a:ext uri="{FF2B5EF4-FFF2-40B4-BE49-F238E27FC236}">
+              <a16:creationId xmlns:a16="http://schemas.microsoft.com/office/drawing/2014/main" id="{31FAC8C2-4EA9-B8C7-1A88-A526A93B9E77}"/>
+            </a:ext>
+          </a:extLst>
+        </p:cNvPr>
+        <p:cNvGrpSpPr/>
+        <p:nvPr/>
+      </p:nvGrpSpPr>
+      <p:grpSpPr>
+        <a:xfrm>
+          <a:off x="0" y="0"/>
+          <a:ext cx="0" cy="0"/>
+          <a:chOff x="0" y="0"/>
+          <a:chExt cx="0" cy="0"/>
+        </a:xfrm>
+      </p:grpSpPr>
+      <p:sp>
+        <p:nvSpPr>
+          <p:cNvPr id="2" name="Titolo 1">
+            <a:extLst>
+              <a:ext uri="{FF2B5EF4-FFF2-40B4-BE49-F238E27FC236}">
+                <a16:creationId xmlns:a16="http://schemas.microsoft.com/office/drawing/2014/main" id="{5D6AC322-0E0B-6A6E-04D0-8AEC47B203AB}"/>
+              </a:ext>
+            </a:extLst>
+          </p:cNvPr>
+          <p:cNvSpPr>
+            <a:spLocks noGrp="1"/>
+          </p:cNvSpPr>
+          <p:nvPr>
+            <p:ph type="title"/>
+          </p:nvPr>
+        </p:nvSpPr>
+        <p:spPr/>
+        <p:txBody>
+          <a:bodyPr/>
+          <a:lstStyle/>
+          <a:p>
+            <a:pPr algn="ctr"/>
+            <a:r>
+              <a:rPr lang="it-IT" dirty="0"/>
+              <a:t>SEQUENCE DIAGRAM – FAI OFFERTA</a:t>
+            </a:r>
+          </a:p>
+        </p:txBody>
+      </p:sp>
+      <p:pic>
+        <p:nvPicPr>
+          <p:cNvPr id="5" name="Segnaposto contenuto 4" descr="Immagine che contiene testo, schermata, linea, Carattere&#10;&#10;Il contenuto generato dall'IA potrebbe non essere corretto.">
+            <a:extLst>
+              <a:ext uri="{FF2B5EF4-FFF2-40B4-BE49-F238E27FC236}">
+                <a16:creationId xmlns:a16="http://schemas.microsoft.com/office/drawing/2014/main" id="{8F0A9A2C-7FDE-9C44-66DA-9924D0DC10D0}"/>
+              </a:ext>
+            </a:extLst>
+          </p:cNvPr>
+          <p:cNvPicPr>
+            <a:picLocks noGrp="1" noChangeAspect="1"/>
+          </p:cNvPicPr>
+          <p:nvPr>
+            <p:ph idx="1"/>
+          </p:nvPr>
+        </p:nvPicPr>
+        <p:blipFill>
+          <a:blip r:embed="rId2"/>
+          <a:stretch>
+            <a:fillRect/>
+          </a:stretch>
+        </p:blipFill>
+        <p:spPr>
+          <a:xfrm>
+            <a:off x="2493818" y="1577483"/>
+            <a:ext cx="7232073" cy="4942889"/>
+          </a:xfrm>
+        </p:spPr>
+      </p:pic>
+    </p:spTree>
+    <p:extLst>
+      <p:ext uri="{BB962C8B-B14F-4D97-AF65-F5344CB8AC3E}">
+        <p14:creationId xmlns:p14="http://schemas.microsoft.com/office/powerpoint/2010/main" val="83448595"/>
+      </p:ext>
+    </p:extLst>
+  </p:cSld>
+  <p:clrMapOvr>
+    <a:masterClrMapping/>
+  </p:clrMapOvr>
+</p:sld>
+</file>
+
+<file path=ppt/slides/slide32.xml><?xml version="1.0" encoding="utf-8"?>
+<p:sld xmlns:a="http://schemas.openxmlformats.org/drawingml/2006/main" xmlns:r="http://schemas.openxmlformats.org/officeDocument/2006/relationships" xmlns:p="http://schemas.openxmlformats.org/presentationml/2006/main">
+  <p:cSld>
+    <p:spTree>
+      <p:nvGrpSpPr>
+        <p:cNvPr id="1" name="">
+          <a:extLst>
+            <a:ext uri="{FF2B5EF4-FFF2-40B4-BE49-F238E27FC236}">
+              <a16:creationId xmlns:a16="http://schemas.microsoft.com/office/drawing/2014/main" id="{92B188A3-A14D-95AB-C2D1-2831127D18BE}"/>
+            </a:ext>
+          </a:extLst>
+        </p:cNvPr>
+        <p:cNvGrpSpPr/>
+        <p:nvPr/>
+      </p:nvGrpSpPr>
+      <p:grpSpPr>
+        <a:xfrm>
+          <a:off x="0" y="0"/>
+          <a:ext cx="0" cy="0"/>
+          <a:chOff x="0" y="0"/>
+          <a:chExt cx="0" cy="0"/>
+        </a:xfrm>
+      </p:grpSpPr>
+      <p:sp>
+        <p:nvSpPr>
+          <p:cNvPr id="2" name="Titolo 1">
+            <a:extLst>
+              <a:ext uri="{FF2B5EF4-FFF2-40B4-BE49-F238E27FC236}">
+                <a16:creationId xmlns:a16="http://schemas.microsoft.com/office/drawing/2014/main" id="{D9CA4EB5-8E57-4A25-867E-E9341ABFB2FA}"/>
+              </a:ext>
+            </a:extLst>
+          </p:cNvPr>
+          <p:cNvSpPr>
+            <a:spLocks noGrp="1"/>
+          </p:cNvSpPr>
+          <p:nvPr>
+            <p:ph type="title"/>
+          </p:nvPr>
+        </p:nvSpPr>
+        <p:spPr/>
+        <p:txBody>
+          <a:bodyPr/>
+          <a:lstStyle/>
+          <a:p>
+            <a:pPr algn="ctr"/>
+            <a:r>
+              <a:rPr lang="it-IT" dirty="0"/>
+              <a:t>SEQUENCE DIAGRAM – CREA ASTA</a:t>
+            </a:r>
+          </a:p>
+        </p:txBody>
+      </p:sp>
+      <p:pic>
+        <p:nvPicPr>
+          <p:cNvPr id="5" name="Segnaposto contenuto 4" descr="Immagine che contiene testo, ricevuta, numero, schermata&#10;&#10;Il contenuto generato dall'IA potrebbe non essere corretto.">
+            <a:extLst>
+              <a:ext uri="{FF2B5EF4-FFF2-40B4-BE49-F238E27FC236}">
+                <a16:creationId xmlns:a16="http://schemas.microsoft.com/office/drawing/2014/main" id="{870186E4-665D-942A-2A39-DA895250F04B}"/>
+              </a:ext>
+            </a:extLst>
+          </p:cNvPr>
+          <p:cNvPicPr>
+            <a:picLocks noGrp="1" noChangeAspect="1"/>
+          </p:cNvPicPr>
+          <p:nvPr>
+            <p:ph idx="1"/>
+          </p:nvPr>
+        </p:nvPicPr>
+        <p:blipFill>
+          <a:blip r:embed="rId2"/>
+          <a:stretch>
+            <a:fillRect/>
+          </a:stretch>
+        </p:blipFill>
+        <p:spPr>
+          <a:xfrm>
+            <a:off x="2660073" y="1565957"/>
+            <a:ext cx="7003471" cy="4891458"/>
+          </a:xfrm>
+        </p:spPr>
+      </p:pic>
+    </p:spTree>
+    <p:extLst>
+      <p:ext uri="{BB962C8B-B14F-4D97-AF65-F5344CB8AC3E}">
+        <p14:creationId xmlns:p14="http://schemas.microsoft.com/office/powerpoint/2010/main" val="378536628"/>
+      </p:ext>
+    </p:extLst>
+  </p:cSld>
+  <p:clrMapOvr>
+    <a:masterClrMapping/>
+  </p:clrMapOvr>
+</p:sld>
+</file>
+
+<file path=ppt/slides/slide33.xml><?xml version="1.0" encoding="utf-8"?>
+<p:sld xmlns:a="http://schemas.openxmlformats.org/drawingml/2006/main" xmlns:r="http://schemas.openxmlformats.org/officeDocument/2006/relationships" xmlns:p="http://schemas.openxmlformats.org/presentationml/2006/main">
+  <p:cSld>
+    <p:spTree>
+      <p:nvGrpSpPr>
+        <p:cNvPr id="1" name="">
+          <a:extLst>
+            <a:ext uri="{FF2B5EF4-FFF2-40B4-BE49-F238E27FC236}">
+              <a16:creationId xmlns:a16="http://schemas.microsoft.com/office/drawing/2014/main" id="{7B94707B-F5C1-1BBA-43DE-BC2D643DEF74}"/>
+            </a:ext>
+          </a:extLst>
+        </p:cNvPr>
+        <p:cNvGrpSpPr/>
+        <p:nvPr/>
+      </p:nvGrpSpPr>
+      <p:grpSpPr>
+        <a:xfrm>
+          <a:off x="0" y="0"/>
+          <a:ext cx="0" cy="0"/>
+          <a:chOff x="0" y="0"/>
+          <a:chExt cx="0" cy="0"/>
+        </a:xfrm>
+      </p:grpSpPr>
+      <p:sp>
+        <p:nvSpPr>
+          <p:cNvPr id="2" name="Titolo 1">
+            <a:extLst>
+              <a:ext uri="{FF2B5EF4-FFF2-40B4-BE49-F238E27FC236}">
+                <a16:creationId xmlns:a16="http://schemas.microsoft.com/office/drawing/2014/main" id="{45B0ED28-1D68-2A79-F499-E7FC63635630}"/>
+              </a:ext>
+            </a:extLst>
+          </p:cNvPr>
+          <p:cNvSpPr>
+            <a:spLocks noGrp="1"/>
+          </p:cNvSpPr>
+          <p:nvPr>
+            <p:ph type="title"/>
+          </p:nvPr>
+        </p:nvSpPr>
+        <p:spPr/>
+        <p:txBody>
+          <a:bodyPr/>
+          <a:lstStyle/>
+          <a:p>
+            <a:pPr algn="ctr"/>
+            <a:r>
+              <a:rPr lang="it-IT" dirty="0"/>
+              <a:t>SEQUENCE DIAGRAM – CHIUDI ASTA</a:t>
+            </a:r>
+          </a:p>
+        </p:txBody>
+      </p:sp>
+      <p:pic>
+        <p:nvPicPr>
+          <p:cNvPr id="5" name="Segnaposto contenuto 4" descr="Immagine che contiene testo, schermata, Carattere, numero&#10;&#10;Il contenuto generato dall'IA potrebbe non essere corretto.">
+            <a:extLst>
+              <a:ext uri="{FF2B5EF4-FFF2-40B4-BE49-F238E27FC236}">
+                <a16:creationId xmlns:a16="http://schemas.microsoft.com/office/drawing/2014/main" id="{C4D23C40-C00A-BCB2-36EC-CDD6988AE44F}"/>
+              </a:ext>
+            </a:extLst>
+          </p:cNvPr>
+          <p:cNvPicPr>
+            <a:picLocks noGrp="1" noChangeAspect="1"/>
+          </p:cNvPicPr>
+          <p:nvPr>
+            <p:ph idx="1"/>
+          </p:nvPr>
+        </p:nvPicPr>
+        <p:blipFill>
+          <a:blip r:embed="rId2"/>
+          <a:stretch>
+            <a:fillRect/>
+          </a:stretch>
+        </p:blipFill>
+        <p:spPr>
+          <a:xfrm>
+            <a:off x="2548344" y="1535101"/>
+            <a:ext cx="7271065" cy="4928044"/>
+          </a:xfrm>
+        </p:spPr>
+      </p:pic>
+    </p:spTree>
+    <p:extLst>
+      <p:ext uri="{BB962C8B-B14F-4D97-AF65-F5344CB8AC3E}">
+        <p14:creationId xmlns:p14="http://schemas.microsoft.com/office/powerpoint/2010/main" val="226067210"/>
+      </p:ext>
+    </p:extLst>
+  </p:cSld>
+  <p:clrMapOvr>
+    <a:masterClrMapping/>
+  </p:clrMapOvr>
+</p:sld>
+</file>
+
+<file path=ppt/slides/slide34.xml><?xml version="1.0" encoding="utf-8"?>
+<p:sld xmlns:a="http://schemas.openxmlformats.org/drawingml/2006/main" xmlns:r="http://schemas.openxmlformats.org/officeDocument/2006/relationships" xmlns:p="http://schemas.openxmlformats.org/presentationml/2006/main">
+  <p:cSld>
+    <p:spTree>
+      <p:nvGrpSpPr>
+        <p:cNvPr id="1" name="">
+          <a:extLst>
+            <a:ext uri="{FF2B5EF4-FFF2-40B4-BE49-F238E27FC236}">
+              <a16:creationId xmlns:a16="http://schemas.microsoft.com/office/drawing/2014/main" id="{19C3C918-7594-30C2-4CB0-5C4CE88A0E38}"/>
+            </a:ext>
+          </a:extLst>
+        </p:cNvPr>
+        <p:cNvGrpSpPr/>
+        <p:nvPr/>
+      </p:nvGrpSpPr>
+      <p:grpSpPr>
+        <a:xfrm>
+          <a:off x="0" y="0"/>
+          <a:ext cx="0" cy="0"/>
+          <a:chOff x="0" y="0"/>
+          <a:chExt cx="0" cy="0"/>
+        </a:xfrm>
+      </p:grpSpPr>
+      <p:sp>
+        <p:nvSpPr>
+          <p:cNvPr id="2" name="Titolo 1">
+            <a:extLst>
+              <a:ext uri="{FF2B5EF4-FFF2-40B4-BE49-F238E27FC236}">
+                <a16:creationId xmlns:a16="http://schemas.microsoft.com/office/drawing/2014/main" id="{FF874F21-99E4-2CD9-799E-C6509178008C}"/>
+              </a:ext>
+            </a:extLst>
+          </p:cNvPr>
+          <p:cNvSpPr>
+            <a:spLocks noGrp="1"/>
+          </p:cNvSpPr>
+          <p:nvPr>
+            <p:ph type="title"/>
+          </p:nvPr>
+        </p:nvSpPr>
+        <p:spPr/>
+        <p:txBody>
+          <a:bodyPr/>
+          <a:lstStyle/>
+          <a:p>
+            <a:pPr algn="ctr"/>
+            <a:r>
+              <a:rPr lang="it-IT" dirty="0"/>
+              <a:t>SEQUENCE DIAGRAM – AGGIUNGI ARTICOLO</a:t>
+            </a:r>
+          </a:p>
+        </p:txBody>
+      </p:sp>
+      <p:pic>
+        <p:nvPicPr>
+          <p:cNvPr id="5" name="Segnaposto contenuto 4" descr="Immagine che contiene testo, schermata, Carattere, linea&#10;&#10;Il contenuto generato dall'IA potrebbe non essere corretto.">
+            <a:extLst>
+              <a:ext uri="{FF2B5EF4-FFF2-40B4-BE49-F238E27FC236}">
+                <a16:creationId xmlns:a16="http://schemas.microsoft.com/office/drawing/2014/main" id="{B5862C63-546E-D1F9-48BF-262CDA953E85}"/>
+              </a:ext>
+            </a:extLst>
+          </p:cNvPr>
+          <p:cNvPicPr>
+            <a:picLocks noGrp="1" noChangeAspect="1"/>
+          </p:cNvPicPr>
+          <p:nvPr>
+            <p:ph idx="1"/>
+          </p:nvPr>
+        </p:nvPicPr>
+        <p:blipFill>
+          <a:blip r:embed="rId2"/>
+          <a:stretch>
+            <a:fillRect/>
+          </a:stretch>
+        </p:blipFill>
+        <p:spPr>
+          <a:xfrm>
+            <a:off x="800100" y="1776846"/>
+            <a:ext cx="10606379" cy="4581956"/>
+          </a:xfrm>
+        </p:spPr>
+      </p:pic>
+    </p:spTree>
+    <p:extLst>
+      <p:ext uri="{BB962C8B-B14F-4D97-AF65-F5344CB8AC3E}">
+        <p14:creationId xmlns:p14="http://schemas.microsoft.com/office/powerpoint/2010/main" val="2333171487"/>
+      </p:ext>
+    </p:extLst>
+  </p:cSld>
+  <p:clrMapOvr>
+    <a:masterClrMapping/>
+  </p:clrMapOvr>
+</p:sld>
+</file>
+
+<file path=ppt/slides/slide35.xml><?xml version="1.0" encoding="utf-8"?>
+<p:sld xmlns:a="http://schemas.openxmlformats.org/drawingml/2006/main" xmlns:r="http://schemas.openxmlformats.org/officeDocument/2006/relationships" xmlns:p="http://schemas.openxmlformats.org/presentationml/2006/main">
+  <p:cSld>
+    <p:spTree>
+      <p:nvGrpSpPr>
+        <p:cNvPr id="1" name="">
+          <a:extLst>
+            <a:ext uri="{FF2B5EF4-FFF2-40B4-BE49-F238E27FC236}">
+              <a16:creationId xmlns:a16="http://schemas.microsoft.com/office/drawing/2014/main" id="{A3AA708F-17E3-13BB-FFC7-4E98B1FD7675}"/>
+            </a:ext>
+          </a:extLst>
+        </p:cNvPr>
+        <p:cNvGrpSpPr/>
+        <p:nvPr/>
+      </p:nvGrpSpPr>
+      <p:grpSpPr>
+        <a:xfrm>
+          <a:off x="0" y="0"/>
+          <a:ext cx="0" cy="0"/>
+          <a:chOff x="0" y="0"/>
+          <a:chExt cx="0" cy="0"/>
+        </a:xfrm>
+      </p:grpSpPr>
+      <p:sp>
+        <p:nvSpPr>
+          <p:cNvPr id="2" name="Titolo 1">
+            <a:extLst>
+              <a:ext uri="{FF2B5EF4-FFF2-40B4-BE49-F238E27FC236}">
+                <a16:creationId xmlns:a16="http://schemas.microsoft.com/office/drawing/2014/main" id="{C42EB8AF-6D01-C19F-D1ED-19B5F2EB60DB}"/>
+              </a:ext>
+            </a:extLst>
+          </p:cNvPr>
+          <p:cNvSpPr>
+            <a:spLocks noGrp="1"/>
+          </p:cNvSpPr>
+          <p:nvPr>
+            <p:ph type="title"/>
+          </p:nvPr>
+        </p:nvSpPr>
+        <p:spPr/>
+        <p:txBody>
+          <a:bodyPr>
+            <a:normAutofit fontScale="90000"/>
+          </a:bodyPr>
+          <a:lstStyle/>
+          <a:p>
+            <a:pPr algn="ctr"/>
+            <a:r>
+              <a:rPr lang="it-IT" dirty="0"/>
+              <a:t>SEQUENCE DIAGRAM – RIA – CARICAMENTO HOME</a:t>
+            </a:r>
+          </a:p>
+        </p:txBody>
+      </p:sp>
+      <p:pic>
+        <p:nvPicPr>
+          <p:cNvPr id="5" name="Segnaposto contenuto 4" descr="Immagine che contiene testo, schermata, Carattere, linea&#10;&#10;Il contenuto generato dall'IA potrebbe non essere corretto.">
+            <a:extLst>
+              <a:ext uri="{FF2B5EF4-FFF2-40B4-BE49-F238E27FC236}">
+                <a16:creationId xmlns:a16="http://schemas.microsoft.com/office/drawing/2014/main" id="{923BC546-CE1A-804A-96D6-4A94D96F62C0}"/>
+              </a:ext>
+            </a:extLst>
+          </p:cNvPr>
+          <p:cNvPicPr>
+            <a:picLocks noGrp="1" noChangeAspect="1"/>
+          </p:cNvPicPr>
+          <p:nvPr>
+            <p:ph idx="1"/>
+          </p:nvPr>
+        </p:nvPicPr>
+        <p:blipFill>
+          <a:blip r:embed="rId2"/>
+          <a:stretch>
+            <a:fillRect/>
+          </a:stretch>
+        </p:blipFill>
+        <p:spPr>
+          <a:xfrm>
+            <a:off x="684644" y="2639291"/>
+            <a:ext cx="10712074" cy="2909453"/>
+          </a:xfrm>
+        </p:spPr>
+      </p:pic>
+    </p:spTree>
+    <p:extLst>
+      <p:ext uri="{BB962C8B-B14F-4D97-AF65-F5344CB8AC3E}">
+        <p14:creationId xmlns:p14="http://schemas.microsoft.com/office/powerpoint/2010/main" val="1872397111"/>
+      </p:ext>
+    </p:extLst>
+  </p:cSld>
+  <p:clrMapOvr>
+    <a:masterClrMapping/>
+  </p:clrMapOvr>
+</p:sld>
+</file>
+
+<file path=ppt/slides/slide36.xml><?xml version="1.0" encoding="utf-8"?>
+<p:sld xmlns:a="http://schemas.openxmlformats.org/drawingml/2006/main" xmlns:r="http://schemas.openxmlformats.org/officeDocument/2006/relationships" xmlns:p="http://schemas.openxmlformats.org/presentationml/2006/main">
+  <p:cSld>
+    <p:spTree>
+      <p:nvGrpSpPr>
+        <p:cNvPr id="1" name="">
+          <a:extLst>
+            <a:ext uri="{FF2B5EF4-FFF2-40B4-BE49-F238E27FC236}">
+              <a16:creationId xmlns:a16="http://schemas.microsoft.com/office/drawing/2014/main" id="{E6027CDA-71F6-7034-176F-3B934C3FF8EE}"/>
+            </a:ext>
+          </a:extLst>
+        </p:cNvPr>
+        <p:cNvGrpSpPr/>
+        <p:nvPr/>
+      </p:nvGrpSpPr>
+      <p:grpSpPr>
+        <a:xfrm>
+          <a:off x="0" y="0"/>
+          <a:ext cx="0" cy="0"/>
+          <a:chOff x="0" y="0"/>
+          <a:chExt cx="0" cy="0"/>
+        </a:xfrm>
+      </p:grpSpPr>
+      <p:sp>
+        <p:nvSpPr>
+          <p:cNvPr id="2" name="Titolo 1">
+            <a:extLst>
+              <a:ext uri="{FF2B5EF4-FFF2-40B4-BE49-F238E27FC236}">
+                <a16:creationId xmlns:a16="http://schemas.microsoft.com/office/drawing/2014/main" id="{A466FA82-DE60-7646-0359-E385CE60B4BE}"/>
+              </a:ext>
+            </a:extLst>
+          </p:cNvPr>
+          <p:cNvSpPr>
+            <a:spLocks noGrp="1"/>
+          </p:cNvSpPr>
+          <p:nvPr>
+            <p:ph type="title"/>
+          </p:nvPr>
+        </p:nvSpPr>
+        <p:spPr/>
+        <p:txBody>
+          <a:bodyPr>
+            <a:normAutofit fontScale="90000"/>
+          </a:bodyPr>
+          <a:lstStyle/>
+          <a:p>
+            <a:pPr algn="ctr"/>
+            <a:r>
+              <a:rPr lang="it-IT" dirty="0"/>
+              <a:t>SEQUENCE DIAGRAM – CARICAMENTO ACQUISTO</a:t>
+            </a:r>
+          </a:p>
+        </p:txBody>
+      </p:sp>
+      <p:pic>
+        <p:nvPicPr>
+          <p:cNvPr id="5" name="Segnaposto contenuto 4" descr="Immagine che contiene testo, diagramma, Parallelo, linea&#10;&#10;Il contenuto generato dall'IA potrebbe non essere corretto.">
+            <a:extLst>
+              <a:ext uri="{FF2B5EF4-FFF2-40B4-BE49-F238E27FC236}">
+                <a16:creationId xmlns:a16="http://schemas.microsoft.com/office/drawing/2014/main" id="{EC996D10-F426-5334-EEEE-6B381700E448}"/>
+              </a:ext>
+            </a:extLst>
+          </p:cNvPr>
+          <p:cNvPicPr>
+            <a:picLocks noGrp="1" noChangeAspect="1"/>
+          </p:cNvPicPr>
+          <p:nvPr>
+            <p:ph idx="1"/>
+          </p:nvPr>
+        </p:nvPicPr>
+        <p:blipFill>
+          <a:blip r:embed="rId2"/>
+          <a:stretch>
+            <a:fillRect/>
+          </a:stretch>
+        </p:blipFill>
+        <p:spPr>
+          <a:xfrm>
+            <a:off x="2815936" y="1553015"/>
+            <a:ext cx="6858000" cy="4800600"/>
+          </a:xfrm>
+        </p:spPr>
+      </p:pic>
+    </p:spTree>
+    <p:extLst>
+      <p:ext uri="{BB962C8B-B14F-4D97-AF65-F5344CB8AC3E}">
+        <p14:creationId xmlns:p14="http://schemas.microsoft.com/office/powerpoint/2010/main" val="4164563900"/>
+      </p:ext>
+    </p:extLst>
+  </p:cSld>
+  <p:clrMapOvr>
+    <a:masterClrMapping/>
+  </p:clrMapOvr>
+</p:sld>
+</file>
+
+<file path=ppt/slides/slide37.xml><?xml version="1.0" encoding="utf-8"?>
+<p:sld xmlns:a="http://schemas.openxmlformats.org/drawingml/2006/main" xmlns:r="http://schemas.openxmlformats.org/officeDocument/2006/relationships" xmlns:p="http://schemas.openxmlformats.org/presentationml/2006/main">
+  <p:cSld>
+    <p:spTree>
+      <p:nvGrpSpPr>
+        <p:cNvPr id="1" name="">
+          <a:extLst>
+            <a:ext uri="{FF2B5EF4-FFF2-40B4-BE49-F238E27FC236}">
+              <a16:creationId xmlns:a16="http://schemas.microsoft.com/office/drawing/2014/main" id="{6DCA445D-A68C-E6A4-C755-2DA511001669}"/>
+            </a:ext>
+          </a:extLst>
+        </p:cNvPr>
+        <p:cNvGrpSpPr/>
+        <p:nvPr/>
+      </p:nvGrpSpPr>
+      <p:grpSpPr>
+        <a:xfrm>
+          <a:off x="0" y="0"/>
+          <a:ext cx="0" cy="0"/>
+          <a:chOff x="0" y="0"/>
+          <a:chExt cx="0" cy="0"/>
+        </a:xfrm>
+      </p:grpSpPr>
+      <p:sp>
+        <p:nvSpPr>
+          <p:cNvPr id="2" name="Titolo 1">
+            <a:extLst>
+              <a:ext uri="{FF2B5EF4-FFF2-40B4-BE49-F238E27FC236}">
+                <a16:creationId xmlns:a16="http://schemas.microsoft.com/office/drawing/2014/main" id="{BA22202D-1A9C-A99F-2844-7251BC30ABA2}"/>
+              </a:ext>
+            </a:extLst>
+          </p:cNvPr>
+          <p:cNvSpPr>
+            <a:spLocks noGrp="1"/>
+          </p:cNvSpPr>
+          <p:nvPr>
+            <p:ph type="title"/>
+          </p:nvPr>
+        </p:nvSpPr>
+        <p:spPr/>
+        <p:txBody>
+          <a:bodyPr/>
+          <a:lstStyle/>
+          <a:p>
+            <a:pPr algn="ctr"/>
+            <a:r>
+              <a:rPr lang="it-IT" dirty="0"/>
+              <a:t>SEQUENCE DIAGRAM – CARICAMENTO VENDO</a:t>
+            </a:r>
+          </a:p>
+        </p:txBody>
+      </p:sp>
+      <p:pic>
+        <p:nvPicPr>
+          <p:cNvPr id="5" name="Segnaposto contenuto 4" descr="Immagine che contiene testo, schermata, numero, Carattere&#10;&#10;Il contenuto generato dall'IA potrebbe non essere corretto.">
+            <a:extLst>
+              <a:ext uri="{FF2B5EF4-FFF2-40B4-BE49-F238E27FC236}">
+                <a16:creationId xmlns:a16="http://schemas.microsoft.com/office/drawing/2014/main" id="{6E72BBF1-1153-67E7-222E-A40E50E10079}"/>
+              </a:ext>
+            </a:extLst>
+          </p:cNvPr>
+          <p:cNvPicPr>
+            <a:picLocks noGrp="1" noChangeAspect="1"/>
+          </p:cNvPicPr>
+          <p:nvPr>
+            <p:ph idx="1"/>
+          </p:nvPr>
+        </p:nvPicPr>
+        <p:blipFill>
+          <a:blip r:embed="rId2"/>
+          <a:stretch>
+            <a:fillRect/>
+          </a:stretch>
+        </p:blipFill>
+        <p:spPr>
+          <a:xfrm>
+            <a:off x="2336312" y="1596375"/>
+            <a:ext cx="7451924" cy="4970679"/>
+          </a:xfrm>
+        </p:spPr>
+      </p:pic>
+    </p:spTree>
+    <p:extLst>
+      <p:ext uri="{BB962C8B-B14F-4D97-AF65-F5344CB8AC3E}">
+        <p14:creationId xmlns:p14="http://schemas.microsoft.com/office/powerpoint/2010/main" val="2424893026"/>
+      </p:ext>
+    </p:extLst>
+  </p:cSld>
+  <p:clrMapOvr>
+    <a:masterClrMapping/>
+  </p:clrMapOvr>
+</p:sld>
+</file>
+
+<file path=ppt/slides/slide38.xml><?xml version="1.0" encoding="utf-8"?>
+<p:sld xmlns:a="http://schemas.openxmlformats.org/drawingml/2006/main" xmlns:r="http://schemas.openxmlformats.org/officeDocument/2006/relationships" xmlns:p="http://schemas.openxmlformats.org/presentationml/2006/main">
+  <p:cSld>
+    <p:spTree>
+      <p:nvGrpSpPr>
+        <p:cNvPr id="1" name="">
+          <a:extLst>
+            <a:ext uri="{FF2B5EF4-FFF2-40B4-BE49-F238E27FC236}">
+              <a16:creationId xmlns:a16="http://schemas.microsoft.com/office/drawing/2014/main" id="{E719DE2E-321B-F75B-09CA-B5FDEBADC03C}"/>
+            </a:ext>
+          </a:extLst>
+        </p:cNvPr>
+        <p:cNvGrpSpPr/>
+        <p:nvPr/>
+      </p:nvGrpSpPr>
+      <p:grpSpPr>
+        <a:xfrm>
+          <a:off x="0" y="0"/>
+          <a:ext cx="0" cy="0"/>
+          <a:chOff x="0" y="0"/>
+          <a:chExt cx="0" cy="0"/>
+        </a:xfrm>
+      </p:grpSpPr>
+      <p:sp>
+        <p:nvSpPr>
+          <p:cNvPr id="2" name="Titolo 1">
+            <a:extLst>
+              <a:ext uri="{FF2B5EF4-FFF2-40B4-BE49-F238E27FC236}">
+                <a16:creationId xmlns:a16="http://schemas.microsoft.com/office/drawing/2014/main" id="{250A6346-DD04-F6D5-68B8-8580EF73BE89}"/>
+              </a:ext>
+            </a:extLst>
+          </p:cNvPr>
+          <p:cNvSpPr>
+            <a:spLocks noGrp="1"/>
+          </p:cNvSpPr>
+          <p:nvPr>
+            <p:ph type="title"/>
+          </p:nvPr>
+        </p:nvSpPr>
+        <p:spPr/>
+        <p:txBody>
+          <a:bodyPr/>
+          <a:lstStyle/>
+          <a:p>
+            <a:pPr algn="ctr"/>
+            <a:r>
+              <a:rPr lang="it-IT" dirty="0"/>
+              <a:t>SEQUENCE DIAGRAM – CARICAMENTO OFFERTA</a:t>
+            </a:r>
+          </a:p>
+        </p:txBody>
+      </p:sp>
+      <p:pic>
+        <p:nvPicPr>
+          <p:cNvPr id="5" name="Segnaposto contenuto 4" descr="Immagine che contiene testo, diagramma, numero, Parallelo&#10;&#10;Il contenuto generato dall'IA potrebbe non essere corretto.">
+            <a:extLst>
+              <a:ext uri="{FF2B5EF4-FFF2-40B4-BE49-F238E27FC236}">
+                <a16:creationId xmlns:a16="http://schemas.microsoft.com/office/drawing/2014/main" id="{57B2568F-9C84-9892-A123-C397BB683759}"/>
+              </a:ext>
+            </a:extLst>
+          </p:cNvPr>
+          <p:cNvPicPr>
+            <a:picLocks noGrp="1" noChangeAspect="1"/>
+          </p:cNvPicPr>
+          <p:nvPr>
+            <p:ph idx="1"/>
+          </p:nvPr>
+        </p:nvPicPr>
+        <p:blipFill>
+          <a:blip r:embed="rId2"/>
+          <a:stretch>
+            <a:fillRect/>
+          </a:stretch>
+        </p:blipFill>
+        <p:spPr>
+          <a:xfrm>
+            <a:off x="1908150" y="1636996"/>
+            <a:ext cx="8461977" cy="4805368"/>
+          </a:xfrm>
+        </p:spPr>
+      </p:pic>
+    </p:spTree>
+    <p:extLst>
+      <p:ext uri="{BB962C8B-B14F-4D97-AF65-F5344CB8AC3E}">
+        <p14:creationId xmlns:p14="http://schemas.microsoft.com/office/powerpoint/2010/main" val="1203242601"/>
+      </p:ext>
+    </p:extLst>
+  </p:cSld>
+  <p:clrMapOvr>
+    <a:masterClrMapping/>
+  </p:clrMapOvr>
+</p:sld>
+</file>
+
+<file path=ppt/slides/slide39.xml><?xml version="1.0" encoding="utf-8"?>
+<p:sld xmlns:a="http://schemas.openxmlformats.org/drawingml/2006/main" xmlns:r="http://schemas.openxmlformats.org/officeDocument/2006/relationships" xmlns:p="http://schemas.openxmlformats.org/presentationml/2006/main">
+  <p:cSld>
+    <p:spTree>
+      <p:nvGrpSpPr>
+        <p:cNvPr id="1" name="">
+          <a:extLst>
+            <a:ext uri="{FF2B5EF4-FFF2-40B4-BE49-F238E27FC236}">
+              <a16:creationId xmlns:a16="http://schemas.microsoft.com/office/drawing/2014/main" id="{0C5B6EF7-E90F-C03E-0639-33F75ACF4D5B}"/>
+            </a:ext>
+          </a:extLst>
+        </p:cNvPr>
+        <p:cNvGrpSpPr/>
+        <p:nvPr/>
+      </p:nvGrpSpPr>
+      <p:grpSpPr>
+        <a:xfrm>
+          <a:off x="0" y="0"/>
+          <a:ext cx="0" cy="0"/>
+          <a:chOff x="0" y="0"/>
+          <a:chExt cx="0" cy="0"/>
+        </a:xfrm>
+      </p:grpSpPr>
+      <p:sp>
+        <p:nvSpPr>
+          <p:cNvPr id="2" name="Titolo 1">
+            <a:extLst>
+              <a:ext uri="{FF2B5EF4-FFF2-40B4-BE49-F238E27FC236}">
+                <a16:creationId xmlns:a16="http://schemas.microsoft.com/office/drawing/2014/main" id="{856268D3-40B1-CE8D-68F0-3A4A1D0BC9A6}"/>
+              </a:ext>
+            </a:extLst>
+          </p:cNvPr>
+          <p:cNvSpPr>
+            <a:spLocks noGrp="1"/>
+          </p:cNvSpPr>
+          <p:nvPr>
+            <p:ph type="title"/>
+          </p:nvPr>
+        </p:nvSpPr>
+        <p:spPr/>
+        <p:txBody>
+          <a:bodyPr>
+            <a:normAutofit fontScale="90000"/>
+          </a:bodyPr>
+          <a:lstStyle/>
+          <a:p>
+            <a:pPr algn="ctr"/>
+            <a:r>
+              <a:rPr lang="it-IT" dirty="0"/>
+              <a:t>SEQUENCE DIAGRAM – CARICAMENTO DETTAGLIO ASTA</a:t>
+            </a:r>
+          </a:p>
+        </p:txBody>
+      </p:sp>
+      <p:pic>
+        <p:nvPicPr>
+          <p:cNvPr id="5" name="Segnaposto contenuto 4" descr="Immagine che contiene testo, schermata, numero, Carattere&#10;&#10;Il contenuto generato dall'IA potrebbe non essere corretto.">
+            <a:extLst>
+              <a:ext uri="{FF2B5EF4-FFF2-40B4-BE49-F238E27FC236}">
+                <a16:creationId xmlns:a16="http://schemas.microsoft.com/office/drawing/2014/main" id="{9516FA46-E1A4-0709-501F-8E0CFFC7BC29}"/>
+              </a:ext>
+            </a:extLst>
+          </p:cNvPr>
+          <p:cNvPicPr>
+            <a:picLocks noGrp="1" noChangeAspect="1"/>
+          </p:cNvPicPr>
+          <p:nvPr>
+            <p:ph idx="1"/>
+          </p:nvPr>
+        </p:nvPicPr>
+        <p:blipFill>
+          <a:blip r:embed="rId2"/>
+          <a:stretch>
+            <a:fillRect/>
+          </a:stretch>
+        </p:blipFill>
+        <p:spPr>
+          <a:xfrm>
+            <a:off x="1860238" y="2043659"/>
+            <a:ext cx="8437153" cy="4066195"/>
+          </a:xfrm>
+        </p:spPr>
+      </p:pic>
+    </p:spTree>
+    <p:extLst>
+      <p:ext uri="{BB962C8B-B14F-4D97-AF65-F5344CB8AC3E}">
+        <p14:creationId xmlns:p14="http://schemas.microsoft.com/office/powerpoint/2010/main" val="2457930748"/>
       </p:ext>
     </p:extLst>
   </p:cSld>
@@ -9819,6 +13971,476 @@
     <p:extLst>
       <p:ext uri="{BB962C8B-B14F-4D97-AF65-F5344CB8AC3E}">
         <p14:creationId xmlns:p14="http://schemas.microsoft.com/office/powerpoint/2010/main" val="1561828668"/>
+      </p:ext>
+    </p:extLst>
+  </p:cSld>
+  <p:clrMapOvr>
+    <a:masterClrMapping/>
+  </p:clrMapOvr>
+</p:sld>
+</file>
+
+<file path=ppt/slides/slide40.xml><?xml version="1.0" encoding="utf-8"?>
+<p:sld xmlns:a="http://schemas.openxmlformats.org/drawingml/2006/main" xmlns:r="http://schemas.openxmlformats.org/officeDocument/2006/relationships" xmlns:p="http://schemas.openxmlformats.org/presentationml/2006/main">
+  <p:cSld>
+    <p:spTree>
+      <p:nvGrpSpPr>
+        <p:cNvPr id="1" name="">
+          <a:extLst>
+            <a:ext uri="{FF2B5EF4-FFF2-40B4-BE49-F238E27FC236}">
+              <a16:creationId xmlns:a16="http://schemas.microsoft.com/office/drawing/2014/main" id="{84D3DD91-D270-A745-4170-FEF9B69E0C00}"/>
+            </a:ext>
+          </a:extLst>
+        </p:cNvPr>
+        <p:cNvGrpSpPr/>
+        <p:nvPr/>
+      </p:nvGrpSpPr>
+      <p:grpSpPr>
+        <a:xfrm>
+          <a:off x="0" y="0"/>
+          <a:ext cx="0" cy="0"/>
+          <a:chOff x="0" y="0"/>
+          <a:chExt cx="0" cy="0"/>
+        </a:xfrm>
+      </p:grpSpPr>
+      <p:sp>
+        <p:nvSpPr>
+          <p:cNvPr id="2" name="Titolo 1">
+            <a:extLst>
+              <a:ext uri="{FF2B5EF4-FFF2-40B4-BE49-F238E27FC236}">
+                <a16:creationId xmlns:a16="http://schemas.microsoft.com/office/drawing/2014/main" id="{0122CB3C-0A15-7C60-8443-F44CC5ED59A6}"/>
+              </a:ext>
+            </a:extLst>
+          </p:cNvPr>
+          <p:cNvSpPr>
+            <a:spLocks noGrp="1"/>
+          </p:cNvSpPr>
+          <p:nvPr>
+            <p:ph type="title"/>
+          </p:nvPr>
+        </p:nvSpPr>
+        <p:spPr/>
+        <p:txBody>
+          <a:bodyPr/>
+          <a:lstStyle/>
+          <a:p>
+            <a:pPr algn="ctr"/>
+            <a:r>
+              <a:rPr lang="it-IT" dirty="0"/>
+              <a:t>SEQUENCE DIAGRAM – AGGIUNGI ARTICOLO</a:t>
+            </a:r>
+          </a:p>
+        </p:txBody>
+      </p:sp>
+      <p:pic>
+        <p:nvPicPr>
+          <p:cNvPr id="5" name="Segnaposto contenuto 4" descr="Immagine che contiene testo, schermata, diagramma, linea&#10;&#10;Il contenuto generato dall'IA potrebbe non essere corretto.">
+            <a:extLst>
+              <a:ext uri="{FF2B5EF4-FFF2-40B4-BE49-F238E27FC236}">
+                <a16:creationId xmlns:a16="http://schemas.microsoft.com/office/drawing/2014/main" id="{123E8D6E-713A-5AC7-9BAD-41AB27C67420}"/>
+              </a:ext>
+            </a:extLst>
+          </p:cNvPr>
+          <p:cNvPicPr>
+            <a:picLocks noGrp="1" noChangeAspect="1"/>
+          </p:cNvPicPr>
+          <p:nvPr>
+            <p:ph idx="1"/>
+          </p:nvPr>
+        </p:nvPicPr>
+        <p:blipFill>
+          <a:blip r:embed="rId2"/>
+          <a:stretch>
+            <a:fillRect/>
+          </a:stretch>
+        </p:blipFill>
+        <p:spPr>
+          <a:xfrm>
+            <a:off x="700634" y="1614698"/>
+            <a:ext cx="10691265" cy="4955500"/>
+          </a:xfrm>
+        </p:spPr>
+      </p:pic>
+    </p:spTree>
+    <p:extLst>
+      <p:ext uri="{BB962C8B-B14F-4D97-AF65-F5344CB8AC3E}">
+        <p14:creationId xmlns:p14="http://schemas.microsoft.com/office/powerpoint/2010/main" val="1349043980"/>
+      </p:ext>
+    </p:extLst>
+  </p:cSld>
+  <p:clrMapOvr>
+    <a:masterClrMapping/>
+  </p:clrMapOvr>
+</p:sld>
+</file>
+
+<file path=ppt/slides/slide41.xml><?xml version="1.0" encoding="utf-8"?>
+<p:sld xmlns:a="http://schemas.openxmlformats.org/drawingml/2006/main" xmlns:r="http://schemas.openxmlformats.org/officeDocument/2006/relationships" xmlns:p="http://schemas.openxmlformats.org/presentationml/2006/main">
+  <p:cSld>
+    <p:spTree>
+      <p:nvGrpSpPr>
+        <p:cNvPr id="1" name="">
+          <a:extLst>
+            <a:ext uri="{FF2B5EF4-FFF2-40B4-BE49-F238E27FC236}">
+              <a16:creationId xmlns:a16="http://schemas.microsoft.com/office/drawing/2014/main" id="{37BDB7F8-8811-C36F-605B-80E6B61B4D55}"/>
+            </a:ext>
+          </a:extLst>
+        </p:cNvPr>
+        <p:cNvGrpSpPr/>
+        <p:nvPr/>
+      </p:nvGrpSpPr>
+      <p:grpSpPr>
+        <a:xfrm>
+          <a:off x="0" y="0"/>
+          <a:ext cx="0" cy="0"/>
+          <a:chOff x="0" y="0"/>
+          <a:chExt cx="0" cy="0"/>
+        </a:xfrm>
+      </p:grpSpPr>
+      <p:sp>
+        <p:nvSpPr>
+          <p:cNvPr id="2" name="Titolo 1">
+            <a:extLst>
+              <a:ext uri="{FF2B5EF4-FFF2-40B4-BE49-F238E27FC236}">
+                <a16:creationId xmlns:a16="http://schemas.microsoft.com/office/drawing/2014/main" id="{68BB636B-D419-C643-EF2D-5AB5C71A0693}"/>
+              </a:ext>
+            </a:extLst>
+          </p:cNvPr>
+          <p:cNvSpPr>
+            <a:spLocks noGrp="1"/>
+          </p:cNvSpPr>
+          <p:nvPr>
+            <p:ph type="title"/>
+          </p:nvPr>
+        </p:nvSpPr>
+        <p:spPr/>
+        <p:txBody>
+          <a:bodyPr/>
+          <a:lstStyle/>
+          <a:p>
+            <a:pPr algn="ctr"/>
+            <a:r>
+              <a:rPr lang="it-IT" dirty="0"/>
+              <a:t>SEQUENCE DIAGRAM – CREA ASTA</a:t>
+            </a:r>
+          </a:p>
+        </p:txBody>
+      </p:sp>
+      <p:pic>
+        <p:nvPicPr>
+          <p:cNvPr id="5" name="Segnaposto contenuto 4" descr="Immagine che contiene testo, schermata, Carattere, diagramma&#10;&#10;Il contenuto generato dall'IA potrebbe non essere corretto.">
+            <a:extLst>
+              <a:ext uri="{FF2B5EF4-FFF2-40B4-BE49-F238E27FC236}">
+                <a16:creationId xmlns:a16="http://schemas.microsoft.com/office/drawing/2014/main" id="{1E30C2F4-DFD6-FEB6-24CF-068C7DF15E8E}"/>
+              </a:ext>
+            </a:extLst>
+          </p:cNvPr>
+          <p:cNvPicPr>
+            <a:picLocks noGrp="1" noChangeAspect="1"/>
+          </p:cNvPicPr>
+          <p:nvPr>
+            <p:ph idx="1"/>
+          </p:nvPr>
+        </p:nvPicPr>
+        <p:blipFill>
+          <a:blip r:embed="rId2"/>
+          <a:stretch>
+            <a:fillRect/>
+          </a:stretch>
+        </p:blipFill>
+        <p:spPr>
+          <a:xfrm>
+            <a:off x="2400300" y="1509102"/>
+            <a:ext cx="7471063" cy="4964434"/>
+          </a:xfrm>
+        </p:spPr>
+      </p:pic>
+    </p:spTree>
+    <p:extLst>
+      <p:ext uri="{BB962C8B-B14F-4D97-AF65-F5344CB8AC3E}">
+        <p14:creationId xmlns:p14="http://schemas.microsoft.com/office/powerpoint/2010/main" val="3736278895"/>
+      </p:ext>
+    </p:extLst>
+  </p:cSld>
+  <p:clrMapOvr>
+    <a:masterClrMapping/>
+  </p:clrMapOvr>
+</p:sld>
+</file>
+
+<file path=ppt/slides/slide42.xml><?xml version="1.0" encoding="utf-8"?>
+<p:sld xmlns:a="http://schemas.openxmlformats.org/drawingml/2006/main" xmlns:r="http://schemas.openxmlformats.org/officeDocument/2006/relationships" xmlns:p="http://schemas.openxmlformats.org/presentationml/2006/main">
+  <p:cSld>
+    <p:spTree>
+      <p:nvGrpSpPr>
+        <p:cNvPr id="1" name="">
+          <a:extLst>
+            <a:ext uri="{FF2B5EF4-FFF2-40B4-BE49-F238E27FC236}">
+              <a16:creationId xmlns:a16="http://schemas.microsoft.com/office/drawing/2014/main" id="{9090ADEB-B033-7355-F48D-DA83D509F2D9}"/>
+            </a:ext>
+          </a:extLst>
+        </p:cNvPr>
+        <p:cNvGrpSpPr/>
+        <p:nvPr/>
+      </p:nvGrpSpPr>
+      <p:grpSpPr>
+        <a:xfrm>
+          <a:off x="0" y="0"/>
+          <a:ext cx="0" cy="0"/>
+          <a:chOff x="0" y="0"/>
+          <a:chExt cx="0" cy="0"/>
+        </a:xfrm>
+      </p:grpSpPr>
+      <p:sp>
+        <p:nvSpPr>
+          <p:cNvPr id="2" name="Titolo 1">
+            <a:extLst>
+              <a:ext uri="{FF2B5EF4-FFF2-40B4-BE49-F238E27FC236}">
+                <a16:creationId xmlns:a16="http://schemas.microsoft.com/office/drawing/2014/main" id="{EE1B7A22-6764-7F1D-7CEE-C0FBB6B50C5D}"/>
+              </a:ext>
+            </a:extLst>
+          </p:cNvPr>
+          <p:cNvSpPr>
+            <a:spLocks noGrp="1"/>
+          </p:cNvSpPr>
+          <p:nvPr>
+            <p:ph type="title"/>
+          </p:nvPr>
+        </p:nvSpPr>
+        <p:spPr/>
+        <p:txBody>
+          <a:bodyPr/>
+          <a:lstStyle/>
+          <a:p>
+            <a:pPr algn="ctr"/>
+            <a:r>
+              <a:rPr lang="it-IT" dirty="0"/>
+              <a:t>SEQUENCE DIAGRAM – CHIUDI ASTA</a:t>
+            </a:r>
+          </a:p>
+        </p:txBody>
+      </p:sp>
+      <p:pic>
+        <p:nvPicPr>
+          <p:cNvPr id="5" name="Segnaposto contenuto 4" descr="Immagine che contiene testo, schermata, numero, Carattere&#10;&#10;Il contenuto generato dall'IA potrebbe non essere corretto.">
+            <a:extLst>
+              <a:ext uri="{FF2B5EF4-FFF2-40B4-BE49-F238E27FC236}">
+                <a16:creationId xmlns:a16="http://schemas.microsoft.com/office/drawing/2014/main" id="{54FDBB04-B578-B662-FEB7-9BAEC73A5867}"/>
+              </a:ext>
+            </a:extLst>
+          </p:cNvPr>
+          <p:cNvPicPr>
+            <a:picLocks noGrp="1" noChangeAspect="1"/>
+          </p:cNvPicPr>
+          <p:nvPr>
+            <p:ph idx="1"/>
+          </p:nvPr>
+        </p:nvPicPr>
+        <p:blipFill>
+          <a:blip r:embed="rId2"/>
+          <a:stretch>
+            <a:fillRect/>
+          </a:stretch>
+        </p:blipFill>
+        <p:spPr>
+          <a:xfrm>
+            <a:off x="2327565" y="1567729"/>
+            <a:ext cx="7658100" cy="4825867"/>
+          </a:xfrm>
+        </p:spPr>
+      </p:pic>
+    </p:spTree>
+    <p:extLst>
+      <p:ext uri="{BB962C8B-B14F-4D97-AF65-F5344CB8AC3E}">
+        <p14:creationId xmlns:p14="http://schemas.microsoft.com/office/powerpoint/2010/main" val="900218779"/>
+      </p:ext>
+    </p:extLst>
+  </p:cSld>
+  <p:clrMapOvr>
+    <a:masterClrMapping/>
+  </p:clrMapOvr>
+</p:sld>
+</file>
+
+<file path=ppt/slides/slide43.xml><?xml version="1.0" encoding="utf-8"?>
+<p:sld xmlns:a="http://schemas.openxmlformats.org/drawingml/2006/main" xmlns:r="http://schemas.openxmlformats.org/officeDocument/2006/relationships" xmlns:p="http://schemas.openxmlformats.org/presentationml/2006/main">
+  <p:cSld>
+    <p:spTree>
+      <p:nvGrpSpPr>
+        <p:cNvPr id="1" name="">
+          <a:extLst>
+            <a:ext uri="{FF2B5EF4-FFF2-40B4-BE49-F238E27FC236}">
+              <a16:creationId xmlns:a16="http://schemas.microsoft.com/office/drawing/2014/main" id="{82E3FE80-BE74-AA18-DD56-A6E3F4C2BC6F}"/>
+            </a:ext>
+          </a:extLst>
+        </p:cNvPr>
+        <p:cNvGrpSpPr/>
+        <p:nvPr/>
+      </p:nvGrpSpPr>
+      <p:grpSpPr>
+        <a:xfrm>
+          <a:off x="0" y="0"/>
+          <a:ext cx="0" cy="0"/>
+          <a:chOff x="0" y="0"/>
+          <a:chExt cx="0" cy="0"/>
+        </a:xfrm>
+      </p:grpSpPr>
+      <p:sp>
+        <p:nvSpPr>
+          <p:cNvPr id="2" name="Titolo 1">
+            <a:extLst>
+              <a:ext uri="{FF2B5EF4-FFF2-40B4-BE49-F238E27FC236}">
+                <a16:creationId xmlns:a16="http://schemas.microsoft.com/office/drawing/2014/main" id="{2C030651-BCA1-A728-15E0-106761D029EC}"/>
+              </a:ext>
+            </a:extLst>
+          </p:cNvPr>
+          <p:cNvSpPr>
+            <a:spLocks noGrp="1"/>
+          </p:cNvSpPr>
+          <p:nvPr>
+            <p:ph type="title"/>
+          </p:nvPr>
+        </p:nvSpPr>
+        <p:spPr/>
+        <p:txBody>
+          <a:bodyPr/>
+          <a:lstStyle/>
+          <a:p>
+            <a:pPr algn="ctr"/>
+            <a:r>
+              <a:rPr lang="it-IT" dirty="0"/>
+              <a:t>SEQUENCE DIAGRAM – FAI OFFERTA</a:t>
+            </a:r>
+          </a:p>
+        </p:txBody>
+      </p:sp>
+      <p:pic>
+        <p:nvPicPr>
+          <p:cNvPr id="5" name="Segnaposto contenuto 4" descr="Immagine che contiene testo, schermata, numero, Carattere&#10;&#10;Il contenuto generato dall'IA potrebbe non essere corretto.">
+            <a:extLst>
+              <a:ext uri="{FF2B5EF4-FFF2-40B4-BE49-F238E27FC236}">
+                <a16:creationId xmlns:a16="http://schemas.microsoft.com/office/drawing/2014/main" id="{C1C89FC0-7B07-A877-D1F8-AB86DFFDE56F}"/>
+              </a:ext>
+            </a:extLst>
+          </p:cNvPr>
+          <p:cNvPicPr>
+            <a:picLocks noGrp="1" noChangeAspect="1"/>
+          </p:cNvPicPr>
+          <p:nvPr>
+            <p:ph idx="1"/>
+          </p:nvPr>
+        </p:nvPicPr>
+        <p:blipFill>
+          <a:blip r:embed="rId2"/>
+          <a:stretch>
+            <a:fillRect/>
+          </a:stretch>
+        </p:blipFill>
+        <p:spPr>
+          <a:xfrm>
+            <a:off x="1569027" y="1696697"/>
+            <a:ext cx="9227128" cy="4653963"/>
+          </a:xfrm>
+        </p:spPr>
+      </p:pic>
+    </p:spTree>
+    <p:extLst>
+      <p:ext uri="{BB962C8B-B14F-4D97-AF65-F5344CB8AC3E}">
+        <p14:creationId xmlns:p14="http://schemas.microsoft.com/office/powerpoint/2010/main" val="2474054820"/>
+      </p:ext>
+    </p:extLst>
+  </p:cSld>
+  <p:clrMapOvr>
+    <a:masterClrMapping/>
+  </p:clrMapOvr>
+</p:sld>
+</file>
+
+<file path=ppt/slides/slide44.xml><?xml version="1.0" encoding="utf-8"?>
+<p:sld xmlns:a="http://schemas.openxmlformats.org/drawingml/2006/main" xmlns:r="http://schemas.openxmlformats.org/officeDocument/2006/relationships" xmlns:p="http://schemas.openxmlformats.org/presentationml/2006/main">
+  <p:cSld>
+    <p:spTree>
+      <p:nvGrpSpPr>
+        <p:cNvPr id="1" name="">
+          <a:extLst>
+            <a:ext uri="{FF2B5EF4-FFF2-40B4-BE49-F238E27FC236}">
+              <a16:creationId xmlns:a16="http://schemas.microsoft.com/office/drawing/2014/main" id="{1B0556A0-31C6-C039-DDC3-F94A93D764AC}"/>
+            </a:ext>
+          </a:extLst>
+        </p:cNvPr>
+        <p:cNvGrpSpPr/>
+        <p:nvPr/>
+      </p:nvGrpSpPr>
+      <p:grpSpPr>
+        <a:xfrm>
+          <a:off x="0" y="0"/>
+          <a:ext cx="0" cy="0"/>
+          <a:chOff x="0" y="0"/>
+          <a:chExt cx="0" cy="0"/>
+        </a:xfrm>
+      </p:grpSpPr>
+      <p:sp>
+        <p:nvSpPr>
+          <p:cNvPr id="2" name="Titolo 1">
+            <a:extLst>
+              <a:ext uri="{FF2B5EF4-FFF2-40B4-BE49-F238E27FC236}">
+                <a16:creationId xmlns:a16="http://schemas.microsoft.com/office/drawing/2014/main" id="{21454DE5-8B62-B30F-4486-2DE1F78257E5}"/>
+              </a:ext>
+            </a:extLst>
+          </p:cNvPr>
+          <p:cNvSpPr>
+            <a:spLocks noGrp="1"/>
+          </p:cNvSpPr>
+          <p:nvPr>
+            <p:ph type="title"/>
+          </p:nvPr>
+        </p:nvSpPr>
+        <p:spPr/>
+        <p:txBody>
+          <a:bodyPr/>
+          <a:lstStyle/>
+          <a:p>
+            <a:pPr algn="ctr"/>
+            <a:r>
+              <a:rPr lang="it-IT" dirty="0"/>
+              <a:t>SEQUENCE DIAGRAM – SEARCH ASTE BY KEY</a:t>
+            </a:r>
+          </a:p>
+        </p:txBody>
+      </p:sp>
+      <p:pic>
+        <p:nvPicPr>
+          <p:cNvPr id="5" name="Segnaposto contenuto 4" descr="Immagine che contiene testo, schermata, diagramma, linea&#10;&#10;Il contenuto generato dall'IA potrebbe non essere corretto.">
+            <a:extLst>
+              <a:ext uri="{FF2B5EF4-FFF2-40B4-BE49-F238E27FC236}">
+                <a16:creationId xmlns:a16="http://schemas.microsoft.com/office/drawing/2014/main" id="{42BE1DA9-60DB-C1D6-0009-B605B5717F60}"/>
+              </a:ext>
+            </a:extLst>
+          </p:cNvPr>
+          <p:cNvPicPr>
+            <a:picLocks noGrp="1" noChangeAspect="1"/>
+          </p:cNvPicPr>
+          <p:nvPr>
+            <p:ph idx="1"/>
+          </p:nvPr>
+        </p:nvPicPr>
+        <p:blipFill>
+          <a:blip r:embed="rId2"/>
+          <a:stretch>
+            <a:fillRect/>
+          </a:stretch>
+        </p:blipFill>
+        <p:spPr>
+          <a:xfrm>
+            <a:off x="1350464" y="1808017"/>
+            <a:ext cx="9728041" cy="4416137"/>
+          </a:xfrm>
+        </p:spPr>
+      </p:pic>
+    </p:spTree>
+    <p:extLst>
+      <p:ext uri="{BB962C8B-B14F-4D97-AF65-F5344CB8AC3E}">
+        <p14:creationId xmlns:p14="http://schemas.microsoft.com/office/powerpoint/2010/main" val="1297480831"/>
       </p:ext>
     </p:extLst>
   </p:cSld>

--- a/deliverables/PresentazioneProgettoTIW.pptx
+++ b/deliverables/PresentazioneProgettoTIW.pptx
@@ -24,31 +24,30 @@
     <p:sldId id="274" r:id="rId18"/>
     <p:sldId id="275" r:id="rId19"/>
     <p:sldId id="276" r:id="rId20"/>
-    <p:sldId id="277" r:id="rId21"/>
-    <p:sldId id="301" r:id="rId22"/>
-    <p:sldId id="278" r:id="rId23"/>
-    <p:sldId id="279" r:id="rId24"/>
-    <p:sldId id="280" r:id="rId25"/>
-    <p:sldId id="281" r:id="rId26"/>
-    <p:sldId id="282" r:id="rId27"/>
-    <p:sldId id="283" r:id="rId28"/>
-    <p:sldId id="284" r:id="rId29"/>
-    <p:sldId id="285" r:id="rId30"/>
-    <p:sldId id="286" r:id="rId31"/>
-    <p:sldId id="287" r:id="rId32"/>
-    <p:sldId id="288" r:id="rId33"/>
-    <p:sldId id="289" r:id="rId34"/>
-    <p:sldId id="290" r:id="rId35"/>
-    <p:sldId id="291" r:id="rId36"/>
-    <p:sldId id="292" r:id="rId37"/>
-    <p:sldId id="293" r:id="rId38"/>
-    <p:sldId id="294" r:id="rId39"/>
-    <p:sldId id="295" r:id="rId40"/>
-    <p:sldId id="296" r:id="rId41"/>
-    <p:sldId id="297" r:id="rId42"/>
-    <p:sldId id="298" r:id="rId43"/>
-    <p:sldId id="299" r:id="rId44"/>
-    <p:sldId id="300" r:id="rId45"/>
+    <p:sldId id="301" r:id="rId21"/>
+    <p:sldId id="278" r:id="rId22"/>
+    <p:sldId id="279" r:id="rId23"/>
+    <p:sldId id="280" r:id="rId24"/>
+    <p:sldId id="281" r:id="rId25"/>
+    <p:sldId id="282" r:id="rId26"/>
+    <p:sldId id="283" r:id="rId27"/>
+    <p:sldId id="284" r:id="rId28"/>
+    <p:sldId id="285" r:id="rId29"/>
+    <p:sldId id="286" r:id="rId30"/>
+    <p:sldId id="287" r:id="rId31"/>
+    <p:sldId id="288" r:id="rId32"/>
+    <p:sldId id="289" r:id="rId33"/>
+    <p:sldId id="290" r:id="rId34"/>
+    <p:sldId id="291" r:id="rId35"/>
+    <p:sldId id="292" r:id="rId36"/>
+    <p:sldId id="293" r:id="rId37"/>
+    <p:sldId id="294" r:id="rId38"/>
+    <p:sldId id="295" r:id="rId39"/>
+    <p:sldId id="296" r:id="rId40"/>
+    <p:sldId id="297" r:id="rId41"/>
+    <p:sldId id="298" r:id="rId42"/>
+    <p:sldId id="299" r:id="rId43"/>
+    <p:sldId id="300" r:id="rId44"/>
   </p:sldIdLst>
   <p:sldSz cx="12192000" cy="6858000"/>
   <p:notesSz cx="6858000" cy="9144000"/>
@@ -8415,1008 +8414,6 @@
         <p:cNvPr id="1" name="">
           <a:extLst>
             <a:ext uri="{FF2B5EF4-FFF2-40B4-BE49-F238E27FC236}">
-              <a16:creationId xmlns:a16="http://schemas.microsoft.com/office/drawing/2014/main" id="{5A6BEFCB-2CC5-3A8E-F35B-81291654F64B}"/>
-            </a:ext>
-          </a:extLst>
-        </p:cNvPr>
-        <p:cNvGrpSpPr/>
-        <p:nvPr/>
-      </p:nvGrpSpPr>
-      <p:grpSpPr>
-        <a:xfrm>
-          <a:off x="0" y="0"/>
-          <a:ext cx="0" cy="0"/>
-          <a:chOff x="0" y="0"/>
-          <a:chExt cx="0" cy="0"/>
-        </a:xfrm>
-      </p:grpSpPr>
-      <p:sp>
-        <p:nvSpPr>
-          <p:cNvPr id="2" name="Titolo 1">
-            <a:extLst>
-              <a:ext uri="{FF2B5EF4-FFF2-40B4-BE49-F238E27FC236}">
-                <a16:creationId xmlns:a16="http://schemas.microsoft.com/office/drawing/2014/main" id="{315334AB-82AD-991C-BAF2-23312EB4D9D4}"/>
-              </a:ext>
-            </a:extLst>
-          </p:cNvPr>
-          <p:cNvSpPr>
-            <a:spLocks noGrp="1"/>
-          </p:cNvSpPr>
-          <p:nvPr>
-            <p:ph type="title"/>
-          </p:nvPr>
-        </p:nvSpPr>
-        <p:spPr/>
-        <p:txBody>
-          <a:bodyPr/>
-          <a:lstStyle/>
-          <a:p>
-            <a:pPr algn="ctr"/>
-            <a:r>
-              <a:rPr lang="it-IT" dirty="0"/>
-              <a:t>Componenti – client side</a:t>
-            </a:r>
-          </a:p>
-        </p:txBody>
-      </p:sp>
-      <p:sp>
-        <p:nvSpPr>
-          <p:cNvPr id="3" name="Segnaposto contenuto 2">
-            <a:extLst>
-              <a:ext uri="{FF2B5EF4-FFF2-40B4-BE49-F238E27FC236}">
-                <a16:creationId xmlns:a16="http://schemas.microsoft.com/office/drawing/2014/main" id="{DF58F6A5-1131-DE6B-BE23-30722B193BE6}"/>
-              </a:ext>
-            </a:extLst>
-          </p:cNvPr>
-          <p:cNvSpPr>
-            <a:spLocks noGrp="1"/>
-          </p:cNvSpPr>
-          <p:nvPr>
-            <p:ph idx="1"/>
-          </p:nvPr>
-        </p:nvSpPr>
-        <p:spPr>
-          <a:xfrm>
-            <a:off x="700635" y="2221992"/>
-            <a:ext cx="2842665" cy="3739896"/>
-          </a:xfrm>
-        </p:spPr>
-        <p:txBody>
-          <a:bodyPr>
-            <a:normAutofit/>
-          </a:bodyPr>
-          <a:lstStyle/>
-          <a:p>
-            <a:r>
-              <a:rPr lang="it-IT" b="1" dirty="0"/>
-              <a:t>Home</a:t>
-            </a:r>
-          </a:p>
-          <a:p>
-            <a:pPr lvl="1">
-              <a:buFont typeface="Courier New" panose="02070309020205020404" pitchFamily="49" charset="0"/>
-              <a:buChar char="o"/>
-            </a:pPr>
-            <a:endParaRPr lang="it-IT" b="1" dirty="0"/>
-          </a:p>
-          <a:p>
-            <a:pPr lvl="1">
-              <a:buFont typeface="Courier New" panose="02070309020205020404" pitchFamily="49" charset="0"/>
-              <a:buChar char="o"/>
-            </a:pPr>
-            <a:endParaRPr lang="it-IT" sz="1400" dirty="0"/>
-          </a:p>
-        </p:txBody>
-      </p:sp>
-      <p:sp>
-        <p:nvSpPr>
-          <p:cNvPr id="4" name="CasellaDiTesto 3">
-            <a:extLst>
-              <a:ext uri="{FF2B5EF4-FFF2-40B4-BE49-F238E27FC236}">
-                <a16:creationId xmlns:a16="http://schemas.microsoft.com/office/drawing/2014/main" id="{B185F631-2267-2ABC-70A3-549211BD90D0}"/>
-              </a:ext>
-            </a:extLst>
-          </p:cNvPr>
-          <p:cNvSpPr txBox="1"/>
-          <p:nvPr/>
-        </p:nvSpPr>
-        <p:spPr>
-          <a:xfrm>
-            <a:off x="5788864" y="1568196"/>
-            <a:ext cx="614271" cy="369332"/>
-          </a:xfrm>
-          <a:prstGeom prst="rect">
-            <a:avLst/>
-          </a:prstGeom>
-          <a:noFill/>
-        </p:spPr>
-        <p:txBody>
-          <a:bodyPr wrap="none" rtlCol="0">
-            <a:spAutoFit/>
-          </a:bodyPr>
-          <a:lstStyle/>
-          <a:p>
-            <a:r>
-              <a:rPr lang="it-IT" dirty="0"/>
-              <a:t>RIA</a:t>
-            </a:r>
-          </a:p>
-        </p:txBody>
-      </p:sp>
-      <p:sp>
-        <p:nvSpPr>
-          <p:cNvPr id="6" name="Segnaposto contenuto 2">
-            <a:extLst>
-              <a:ext uri="{FF2B5EF4-FFF2-40B4-BE49-F238E27FC236}">
-                <a16:creationId xmlns:a16="http://schemas.microsoft.com/office/drawing/2014/main" id="{CA7FEC24-456F-DD63-C86C-6C67A18DBE71}"/>
-              </a:ext>
-            </a:extLst>
-          </p:cNvPr>
-          <p:cNvSpPr txBox="1">
-            <a:spLocks/>
-          </p:cNvSpPr>
-          <p:nvPr/>
-        </p:nvSpPr>
-        <p:spPr>
-          <a:xfrm>
-            <a:off x="2119860" y="2249424"/>
-            <a:ext cx="2842665" cy="3739896"/>
-          </a:xfrm>
-          <a:prstGeom prst="rect">
-            <a:avLst/>
-          </a:prstGeom>
-        </p:spPr>
-        <p:txBody>
-          <a:bodyPr vert="horz" lIns="91440" tIns="45720" rIns="91440" bIns="45720" rtlCol="0">
-            <a:normAutofit/>
-          </a:bodyPr>
-          <a:lstStyle>
-            <a:lvl1pPr marL="228600" indent="-228600" algn="l" defTabSz="914400" rtl="0" eaLnBrk="1" latinLnBrk="0" hangingPunct="1">
-              <a:lnSpc>
-                <a:spcPct val="110000"/>
-              </a:lnSpc>
-              <a:spcBef>
-                <a:spcPts val="1000"/>
-              </a:spcBef>
-              <a:buFont typeface="Arial" panose="020B0604020202020204" pitchFamily="34" charset="0"/>
-              <a:buChar char="•"/>
-              <a:defRPr sz="2000" kern="1200">
-                <a:solidFill>
-                  <a:schemeClr val="tx1"/>
-                </a:solidFill>
-                <a:latin typeface="+mn-lt"/>
-                <a:ea typeface="+mn-ea"/>
-                <a:cs typeface="+mn-cs"/>
-              </a:defRPr>
-            </a:lvl1pPr>
-            <a:lvl2pPr marL="685800" indent="-228600" algn="l" defTabSz="914400" rtl="0" eaLnBrk="1" latinLnBrk="0" hangingPunct="1">
-              <a:lnSpc>
-                <a:spcPct val="110000"/>
-              </a:lnSpc>
-              <a:spcBef>
-                <a:spcPts val="500"/>
-              </a:spcBef>
-              <a:buFont typeface="Arial" panose="020B0604020202020204" pitchFamily="34" charset="0"/>
-              <a:buChar char="•"/>
-              <a:defRPr sz="1800" kern="1200">
-                <a:solidFill>
-                  <a:schemeClr val="tx1"/>
-                </a:solidFill>
-                <a:latin typeface="+mn-lt"/>
-                <a:ea typeface="+mn-ea"/>
-                <a:cs typeface="+mn-cs"/>
-              </a:defRPr>
-            </a:lvl2pPr>
-            <a:lvl3pPr marL="1143000" indent="-228600" algn="l" defTabSz="914400" rtl="0" eaLnBrk="1" latinLnBrk="0" hangingPunct="1">
-              <a:lnSpc>
-                <a:spcPct val="110000"/>
-              </a:lnSpc>
-              <a:spcBef>
-                <a:spcPts val="500"/>
-              </a:spcBef>
-              <a:buFont typeface="Arial" panose="020B0604020202020204" pitchFamily="34" charset="0"/>
-              <a:buChar char="•"/>
-              <a:defRPr sz="1600" kern="1200">
-                <a:solidFill>
-                  <a:schemeClr val="tx1"/>
-                </a:solidFill>
-                <a:latin typeface="+mn-lt"/>
-                <a:ea typeface="+mn-ea"/>
-                <a:cs typeface="+mn-cs"/>
-              </a:defRPr>
-            </a:lvl3pPr>
-            <a:lvl4pPr marL="1600200" indent="-228600" algn="l" defTabSz="914400" rtl="0" eaLnBrk="1" latinLnBrk="0" hangingPunct="1">
-              <a:lnSpc>
-                <a:spcPct val="110000"/>
-              </a:lnSpc>
-              <a:spcBef>
-                <a:spcPts val="500"/>
-              </a:spcBef>
-              <a:buFont typeface="Arial" panose="020B0604020202020204" pitchFamily="34" charset="0"/>
-              <a:buChar char="•"/>
-              <a:defRPr sz="1400" kern="1200">
-                <a:solidFill>
-                  <a:schemeClr val="tx1"/>
-                </a:solidFill>
-                <a:latin typeface="+mn-lt"/>
-                <a:ea typeface="+mn-ea"/>
-                <a:cs typeface="+mn-cs"/>
-              </a:defRPr>
-            </a:lvl4pPr>
-            <a:lvl5pPr marL="2057400" indent="-228600" algn="l" defTabSz="914400" rtl="0" eaLnBrk="1" latinLnBrk="0" hangingPunct="1">
-              <a:lnSpc>
-                <a:spcPct val="110000"/>
-              </a:lnSpc>
-              <a:spcBef>
-                <a:spcPts val="500"/>
-              </a:spcBef>
-              <a:buFont typeface="Arial" panose="020B0604020202020204" pitchFamily="34" charset="0"/>
-              <a:buChar char="•"/>
-              <a:defRPr sz="1400" kern="1200">
-                <a:solidFill>
-                  <a:schemeClr val="tx1"/>
-                </a:solidFill>
-                <a:latin typeface="+mn-lt"/>
-                <a:ea typeface="+mn-ea"/>
-                <a:cs typeface="+mn-cs"/>
-              </a:defRPr>
-            </a:lvl5pPr>
-            <a:lvl6pPr marL="2514600" indent="-228600" algn="l" defTabSz="914400" rtl="0" eaLnBrk="1" latinLnBrk="0" hangingPunct="1">
-              <a:lnSpc>
-                <a:spcPct val="90000"/>
-              </a:lnSpc>
-              <a:spcBef>
-                <a:spcPts val="500"/>
-              </a:spcBef>
-              <a:buFont typeface="Arial" panose="020B0604020202020204" pitchFamily="34" charset="0"/>
-              <a:buChar char="•"/>
-              <a:defRPr sz="1800" kern="1200">
-                <a:solidFill>
-                  <a:schemeClr val="tx1"/>
-                </a:solidFill>
-                <a:latin typeface="+mn-lt"/>
-                <a:ea typeface="+mn-ea"/>
-                <a:cs typeface="+mn-cs"/>
-              </a:defRPr>
-            </a:lvl6pPr>
-            <a:lvl7pPr marL="2971800" indent="-228600" algn="l" defTabSz="914400" rtl="0" eaLnBrk="1" latinLnBrk="0" hangingPunct="1">
-              <a:lnSpc>
-                <a:spcPct val="90000"/>
-              </a:lnSpc>
-              <a:spcBef>
-                <a:spcPts val="500"/>
-              </a:spcBef>
-              <a:buFont typeface="Arial" panose="020B0604020202020204" pitchFamily="34" charset="0"/>
-              <a:buChar char="•"/>
-              <a:defRPr sz="1800" kern="1200">
-                <a:solidFill>
-                  <a:schemeClr val="tx1"/>
-                </a:solidFill>
-                <a:latin typeface="+mn-lt"/>
-                <a:ea typeface="+mn-ea"/>
-                <a:cs typeface="+mn-cs"/>
-              </a:defRPr>
-            </a:lvl7pPr>
-            <a:lvl8pPr marL="3429000" indent="-228600" algn="l" defTabSz="914400" rtl="0" eaLnBrk="1" latinLnBrk="0" hangingPunct="1">
-              <a:lnSpc>
-                <a:spcPct val="90000"/>
-              </a:lnSpc>
-              <a:spcBef>
-                <a:spcPts val="500"/>
-              </a:spcBef>
-              <a:buFont typeface="Arial" panose="020B0604020202020204" pitchFamily="34" charset="0"/>
-              <a:buChar char="•"/>
-              <a:defRPr sz="1800" kern="1200">
-                <a:solidFill>
-                  <a:schemeClr val="tx1"/>
-                </a:solidFill>
-                <a:latin typeface="+mn-lt"/>
-                <a:ea typeface="+mn-ea"/>
-                <a:cs typeface="+mn-cs"/>
-              </a:defRPr>
-            </a:lvl8pPr>
-            <a:lvl9pPr marL="3886200" indent="-228600" algn="l" defTabSz="914400" rtl="0" eaLnBrk="1" latinLnBrk="0" hangingPunct="1">
-              <a:lnSpc>
-                <a:spcPct val="90000"/>
-              </a:lnSpc>
-              <a:spcBef>
-                <a:spcPts val="500"/>
-              </a:spcBef>
-              <a:buFont typeface="Arial" panose="020B0604020202020204" pitchFamily="34" charset="0"/>
-              <a:buChar char="•"/>
-              <a:defRPr sz="1800" kern="1200">
-                <a:solidFill>
-                  <a:schemeClr val="tx1"/>
-                </a:solidFill>
-                <a:latin typeface="+mn-lt"/>
-                <a:ea typeface="+mn-ea"/>
-                <a:cs typeface="+mn-cs"/>
-              </a:defRPr>
-            </a:lvl9pPr>
-          </a:lstStyle>
-          <a:p>
-            <a:r>
-              <a:rPr lang="it-IT" b="1" dirty="0"/>
-              <a:t>Vendo</a:t>
-            </a:r>
-          </a:p>
-          <a:p>
-            <a:pPr lvl="1">
-              <a:buFont typeface="Courier New" panose="02070309020205020404" pitchFamily="49" charset="0"/>
-              <a:buChar char="o"/>
-            </a:pPr>
-            <a:endParaRPr lang="it-IT" b="1" dirty="0"/>
-          </a:p>
-          <a:p>
-            <a:pPr lvl="1">
-              <a:buFont typeface="Courier New" panose="02070309020205020404" pitchFamily="49" charset="0"/>
-              <a:buChar char="o"/>
-            </a:pPr>
-            <a:endParaRPr lang="it-IT" sz="1400" dirty="0"/>
-          </a:p>
-        </p:txBody>
-      </p:sp>
-      <p:sp>
-        <p:nvSpPr>
-          <p:cNvPr id="10" name="Segnaposto contenuto 2">
-            <a:extLst>
-              <a:ext uri="{FF2B5EF4-FFF2-40B4-BE49-F238E27FC236}">
-                <a16:creationId xmlns:a16="http://schemas.microsoft.com/office/drawing/2014/main" id="{B57C8372-DCFE-E73A-3258-BDE0B8EFA33B}"/>
-              </a:ext>
-            </a:extLst>
-          </p:cNvPr>
-          <p:cNvSpPr txBox="1">
-            <a:spLocks/>
-          </p:cNvSpPr>
-          <p:nvPr/>
-        </p:nvSpPr>
-        <p:spPr>
-          <a:xfrm>
-            <a:off x="3539085" y="2247138"/>
-            <a:ext cx="2842665" cy="3739896"/>
-          </a:xfrm>
-          <a:prstGeom prst="rect">
-            <a:avLst/>
-          </a:prstGeom>
-        </p:spPr>
-        <p:txBody>
-          <a:bodyPr vert="horz" lIns="91440" tIns="45720" rIns="91440" bIns="45720" rtlCol="0">
-            <a:normAutofit/>
-          </a:bodyPr>
-          <a:lstStyle>
-            <a:lvl1pPr marL="228600" indent="-228600" algn="l" defTabSz="914400" rtl="0" eaLnBrk="1" latinLnBrk="0" hangingPunct="1">
-              <a:lnSpc>
-                <a:spcPct val="110000"/>
-              </a:lnSpc>
-              <a:spcBef>
-                <a:spcPts val="1000"/>
-              </a:spcBef>
-              <a:buFont typeface="Arial" panose="020B0604020202020204" pitchFamily="34" charset="0"/>
-              <a:buChar char="•"/>
-              <a:defRPr sz="2000" kern="1200">
-                <a:solidFill>
-                  <a:schemeClr val="tx1"/>
-                </a:solidFill>
-                <a:latin typeface="+mn-lt"/>
-                <a:ea typeface="+mn-ea"/>
-                <a:cs typeface="+mn-cs"/>
-              </a:defRPr>
-            </a:lvl1pPr>
-            <a:lvl2pPr marL="685800" indent="-228600" algn="l" defTabSz="914400" rtl="0" eaLnBrk="1" latinLnBrk="0" hangingPunct="1">
-              <a:lnSpc>
-                <a:spcPct val="110000"/>
-              </a:lnSpc>
-              <a:spcBef>
-                <a:spcPts val="500"/>
-              </a:spcBef>
-              <a:buFont typeface="Arial" panose="020B0604020202020204" pitchFamily="34" charset="0"/>
-              <a:buChar char="•"/>
-              <a:defRPr sz="1800" kern="1200">
-                <a:solidFill>
-                  <a:schemeClr val="tx1"/>
-                </a:solidFill>
-                <a:latin typeface="+mn-lt"/>
-                <a:ea typeface="+mn-ea"/>
-                <a:cs typeface="+mn-cs"/>
-              </a:defRPr>
-            </a:lvl2pPr>
-            <a:lvl3pPr marL="1143000" indent="-228600" algn="l" defTabSz="914400" rtl="0" eaLnBrk="1" latinLnBrk="0" hangingPunct="1">
-              <a:lnSpc>
-                <a:spcPct val="110000"/>
-              </a:lnSpc>
-              <a:spcBef>
-                <a:spcPts val="500"/>
-              </a:spcBef>
-              <a:buFont typeface="Arial" panose="020B0604020202020204" pitchFamily="34" charset="0"/>
-              <a:buChar char="•"/>
-              <a:defRPr sz="1600" kern="1200">
-                <a:solidFill>
-                  <a:schemeClr val="tx1"/>
-                </a:solidFill>
-                <a:latin typeface="+mn-lt"/>
-                <a:ea typeface="+mn-ea"/>
-                <a:cs typeface="+mn-cs"/>
-              </a:defRPr>
-            </a:lvl3pPr>
-            <a:lvl4pPr marL="1600200" indent="-228600" algn="l" defTabSz="914400" rtl="0" eaLnBrk="1" latinLnBrk="0" hangingPunct="1">
-              <a:lnSpc>
-                <a:spcPct val="110000"/>
-              </a:lnSpc>
-              <a:spcBef>
-                <a:spcPts val="500"/>
-              </a:spcBef>
-              <a:buFont typeface="Arial" panose="020B0604020202020204" pitchFamily="34" charset="0"/>
-              <a:buChar char="•"/>
-              <a:defRPr sz="1400" kern="1200">
-                <a:solidFill>
-                  <a:schemeClr val="tx1"/>
-                </a:solidFill>
-                <a:latin typeface="+mn-lt"/>
-                <a:ea typeface="+mn-ea"/>
-                <a:cs typeface="+mn-cs"/>
-              </a:defRPr>
-            </a:lvl4pPr>
-            <a:lvl5pPr marL="2057400" indent="-228600" algn="l" defTabSz="914400" rtl="0" eaLnBrk="1" latinLnBrk="0" hangingPunct="1">
-              <a:lnSpc>
-                <a:spcPct val="110000"/>
-              </a:lnSpc>
-              <a:spcBef>
-                <a:spcPts val="500"/>
-              </a:spcBef>
-              <a:buFont typeface="Arial" panose="020B0604020202020204" pitchFamily="34" charset="0"/>
-              <a:buChar char="•"/>
-              <a:defRPr sz="1400" kern="1200">
-                <a:solidFill>
-                  <a:schemeClr val="tx1"/>
-                </a:solidFill>
-                <a:latin typeface="+mn-lt"/>
-                <a:ea typeface="+mn-ea"/>
-                <a:cs typeface="+mn-cs"/>
-              </a:defRPr>
-            </a:lvl5pPr>
-            <a:lvl6pPr marL="2514600" indent="-228600" algn="l" defTabSz="914400" rtl="0" eaLnBrk="1" latinLnBrk="0" hangingPunct="1">
-              <a:lnSpc>
-                <a:spcPct val="90000"/>
-              </a:lnSpc>
-              <a:spcBef>
-                <a:spcPts val="500"/>
-              </a:spcBef>
-              <a:buFont typeface="Arial" panose="020B0604020202020204" pitchFamily="34" charset="0"/>
-              <a:buChar char="•"/>
-              <a:defRPr sz="1800" kern="1200">
-                <a:solidFill>
-                  <a:schemeClr val="tx1"/>
-                </a:solidFill>
-                <a:latin typeface="+mn-lt"/>
-                <a:ea typeface="+mn-ea"/>
-                <a:cs typeface="+mn-cs"/>
-              </a:defRPr>
-            </a:lvl6pPr>
-            <a:lvl7pPr marL="2971800" indent="-228600" algn="l" defTabSz="914400" rtl="0" eaLnBrk="1" latinLnBrk="0" hangingPunct="1">
-              <a:lnSpc>
-                <a:spcPct val="90000"/>
-              </a:lnSpc>
-              <a:spcBef>
-                <a:spcPts val="500"/>
-              </a:spcBef>
-              <a:buFont typeface="Arial" panose="020B0604020202020204" pitchFamily="34" charset="0"/>
-              <a:buChar char="•"/>
-              <a:defRPr sz="1800" kern="1200">
-                <a:solidFill>
-                  <a:schemeClr val="tx1"/>
-                </a:solidFill>
-                <a:latin typeface="+mn-lt"/>
-                <a:ea typeface="+mn-ea"/>
-                <a:cs typeface="+mn-cs"/>
-              </a:defRPr>
-            </a:lvl7pPr>
-            <a:lvl8pPr marL="3429000" indent="-228600" algn="l" defTabSz="914400" rtl="0" eaLnBrk="1" latinLnBrk="0" hangingPunct="1">
-              <a:lnSpc>
-                <a:spcPct val="90000"/>
-              </a:lnSpc>
-              <a:spcBef>
-                <a:spcPts val="500"/>
-              </a:spcBef>
-              <a:buFont typeface="Arial" panose="020B0604020202020204" pitchFamily="34" charset="0"/>
-              <a:buChar char="•"/>
-              <a:defRPr sz="1800" kern="1200">
-                <a:solidFill>
-                  <a:schemeClr val="tx1"/>
-                </a:solidFill>
-                <a:latin typeface="+mn-lt"/>
-                <a:ea typeface="+mn-ea"/>
-                <a:cs typeface="+mn-cs"/>
-              </a:defRPr>
-            </a:lvl8pPr>
-            <a:lvl9pPr marL="3886200" indent="-228600" algn="l" defTabSz="914400" rtl="0" eaLnBrk="1" latinLnBrk="0" hangingPunct="1">
-              <a:lnSpc>
-                <a:spcPct val="90000"/>
-              </a:lnSpc>
-              <a:spcBef>
-                <a:spcPts val="500"/>
-              </a:spcBef>
-              <a:buFont typeface="Arial" panose="020B0604020202020204" pitchFamily="34" charset="0"/>
-              <a:buChar char="•"/>
-              <a:defRPr sz="1800" kern="1200">
-                <a:solidFill>
-                  <a:schemeClr val="tx1"/>
-                </a:solidFill>
-                <a:latin typeface="+mn-lt"/>
-                <a:ea typeface="+mn-ea"/>
-                <a:cs typeface="+mn-cs"/>
-              </a:defRPr>
-            </a:lvl9pPr>
-          </a:lstStyle>
-          <a:p>
-            <a:r>
-              <a:rPr lang="it-IT" b="1" dirty="0" err="1"/>
-              <a:t>DettaglioAsta</a:t>
-            </a:r>
-            <a:endParaRPr lang="it-IT" b="1" dirty="0"/>
-          </a:p>
-          <a:p>
-            <a:pPr lvl="1">
-              <a:buFont typeface="Courier New" panose="02070309020205020404" pitchFamily="49" charset="0"/>
-              <a:buChar char="o"/>
-            </a:pPr>
-            <a:endParaRPr lang="it-IT" b="1" dirty="0"/>
-          </a:p>
-          <a:p>
-            <a:pPr lvl="1">
-              <a:buFont typeface="Courier New" panose="02070309020205020404" pitchFamily="49" charset="0"/>
-              <a:buChar char="o"/>
-            </a:pPr>
-            <a:endParaRPr lang="it-IT" sz="1400" dirty="0"/>
-          </a:p>
-        </p:txBody>
-      </p:sp>
-      <p:sp>
-        <p:nvSpPr>
-          <p:cNvPr id="12" name="Segnaposto contenuto 2">
-            <a:extLst>
-              <a:ext uri="{FF2B5EF4-FFF2-40B4-BE49-F238E27FC236}">
-                <a16:creationId xmlns:a16="http://schemas.microsoft.com/office/drawing/2014/main" id="{F57A8FB2-F101-C4A1-CAA6-D6581CBB4A65}"/>
-              </a:ext>
-            </a:extLst>
-          </p:cNvPr>
-          <p:cNvSpPr txBox="1">
-            <a:spLocks/>
-          </p:cNvSpPr>
-          <p:nvPr/>
-        </p:nvSpPr>
-        <p:spPr>
-          <a:xfrm>
-            <a:off x="5808144" y="2247138"/>
-            <a:ext cx="2842665" cy="3739896"/>
-          </a:xfrm>
-          <a:prstGeom prst="rect">
-            <a:avLst/>
-          </a:prstGeom>
-        </p:spPr>
-        <p:txBody>
-          <a:bodyPr vert="horz" lIns="91440" tIns="45720" rIns="91440" bIns="45720" rtlCol="0">
-            <a:normAutofit/>
-          </a:bodyPr>
-          <a:lstStyle>
-            <a:lvl1pPr marL="228600" indent="-228600" algn="l" defTabSz="914400" rtl="0" eaLnBrk="1" latinLnBrk="0" hangingPunct="1">
-              <a:lnSpc>
-                <a:spcPct val="110000"/>
-              </a:lnSpc>
-              <a:spcBef>
-                <a:spcPts val="1000"/>
-              </a:spcBef>
-              <a:buFont typeface="Arial" panose="020B0604020202020204" pitchFamily="34" charset="0"/>
-              <a:buChar char="•"/>
-              <a:defRPr sz="2000" kern="1200">
-                <a:solidFill>
-                  <a:schemeClr val="tx1"/>
-                </a:solidFill>
-                <a:latin typeface="+mn-lt"/>
-                <a:ea typeface="+mn-ea"/>
-                <a:cs typeface="+mn-cs"/>
-              </a:defRPr>
-            </a:lvl1pPr>
-            <a:lvl2pPr marL="685800" indent="-228600" algn="l" defTabSz="914400" rtl="0" eaLnBrk="1" latinLnBrk="0" hangingPunct="1">
-              <a:lnSpc>
-                <a:spcPct val="110000"/>
-              </a:lnSpc>
-              <a:spcBef>
-                <a:spcPts val="500"/>
-              </a:spcBef>
-              <a:buFont typeface="Arial" panose="020B0604020202020204" pitchFamily="34" charset="0"/>
-              <a:buChar char="•"/>
-              <a:defRPr sz="1800" kern="1200">
-                <a:solidFill>
-                  <a:schemeClr val="tx1"/>
-                </a:solidFill>
-                <a:latin typeface="+mn-lt"/>
-                <a:ea typeface="+mn-ea"/>
-                <a:cs typeface="+mn-cs"/>
-              </a:defRPr>
-            </a:lvl2pPr>
-            <a:lvl3pPr marL="1143000" indent="-228600" algn="l" defTabSz="914400" rtl="0" eaLnBrk="1" latinLnBrk="0" hangingPunct="1">
-              <a:lnSpc>
-                <a:spcPct val="110000"/>
-              </a:lnSpc>
-              <a:spcBef>
-                <a:spcPts val="500"/>
-              </a:spcBef>
-              <a:buFont typeface="Arial" panose="020B0604020202020204" pitchFamily="34" charset="0"/>
-              <a:buChar char="•"/>
-              <a:defRPr sz="1600" kern="1200">
-                <a:solidFill>
-                  <a:schemeClr val="tx1"/>
-                </a:solidFill>
-                <a:latin typeface="+mn-lt"/>
-                <a:ea typeface="+mn-ea"/>
-                <a:cs typeface="+mn-cs"/>
-              </a:defRPr>
-            </a:lvl3pPr>
-            <a:lvl4pPr marL="1600200" indent="-228600" algn="l" defTabSz="914400" rtl="0" eaLnBrk="1" latinLnBrk="0" hangingPunct="1">
-              <a:lnSpc>
-                <a:spcPct val="110000"/>
-              </a:lnSpc>
-              <a:spcBef>
-                <a:spcPts val="500"/>
-              </a:spcBef>
-              <a:buFont typeface="Arial" panose="020B0604020202020204" pitchFamily="34" charset="0"/>
-              <a:buChar char="•"/>
-              <a:defRPr sz="1400" kern="1200">
-                <a:solidFill>
-                  <a:schemeClr val="tx1"/>
-                </a:solidFill>
-                <a:latin typeface="+mn-lt"/>
-                <a:ea typeface="+mn-ea"/>
-                <a:cs typeface="+mn-cs"/>
-              </a:defRPr>
-            </a:lvl4pPr>
-            <a:lvl5pPr marL="2057400" indent="-228600" algn="l" defTabSz="914400" rtl="0" eaLnBrk="1" latinLnBrk="0" hangingPunct="1">
-              <a:lnSpc>
-                <a:spcPct val="110000"/>
-              </a:lnSpc>
-              <a:spcBef>
-                <a:spcPts val="500"/>
-              </a:spcBef>
-              <a:buFont typeface="Arial" panose="020B0604020202020204" pitchFamily="34" charset="0"/>
-              <a:buChar char="•"/>
-              <a:defRPr sz="1400" kern="1200">
-                <a:solidFill>
-                  <a:schemeClr val="tx1"/>
-                </a:solidFill>
-                <a:latin typeface="+mn-lt"/>
-                <a:ea typeface="+mn-ea"/>
-                <a:cs typeface="+mn-cs"/>
-              </a:defRPr>
-            </a:lvl5pPr>
-            <a:lvl6pPr marL="2514600" indent="-228600" algn="l" defTabSz="914400" rtl="0" eaLnBrk="1" latinLnBrk="0" hangingPunct="1">
-              <a:lnSpc>
-                <a:spcPct val="90000"/>
-              </a:lnSpc>
-              <a:spcBef>
-                <a:spcPts val="500"/>
-              </a:spcBef>
-              <a:buFont typeface="Arial" panose="020B0604020202020204" pitchFamily="34" charset="0"/>
-              <a:buChar char="•"/>
-              <a:defRPr sz="1800" kern="1200">
-                <a:solidFill>
-                  <a:schemeClr val="tx1"/>
-                </a:solidFill>
-                <a:latin typeface="+mn-lt"/>
-                <a:ea typeface="+mn-ea"/>
-                <a:cs typeface="+mn-cs"/>
-              </a:defRPr>
-            </a:lvl6pPr>
-            <a:lvl7pPr marL="2971800" indent="-228600" algn="l" defTabSz="914400" rtl="0" eaLnBrk="1" latinLnBrk="0" hangingPunct="1">
-              <a:lnSpc>
-                <a:spcPct val="90000"/>
-              </a:lnSpc>
-              <a:spcBef>
-                <a:spcPts val="500"/>
-              </a:spcBef>
-              <a:buFont typeface="Arial" panose="020B0604020202020204" pitchFamily="34" charset="0"/>
-              <a:buChar char="•"/>
-              <a:defRPr sz="1800" kern="1200">
-                <a:solidFill>
-                  <a:schemeClr val="tx1"/>
-                </a:solidFill>
-                <a:latin typeface="+mn-lt"/>
-                <a:ea typeface="+mn-ea"/>
-                <a:cs typeface="+mn-cs"/>
-              </a:defRPr>
-            </a:lvl7pPr>
-            <a:lvl8pPr marL="3429000" indent="-228600" algn="l" defTabSz="914400" rtl="0" eaLnBrk="1" latinLnBrk="0" hangingPunct="1">
-              <a:lnSpc>
-                <a:spcPct val="90000"/>
-              </a:lnSpc>
-              <a:spcBef>
-                <a:spcPts val="500"/>
-              </a:spcBef>
-              <a:buFont typeface="Arial" panose="020B0604020202020204" pitchFamily="34" charset="0"/>
-              <a:buChar char="•"/>
-              <a:defRPr sz="1800" kern="1200">
-                <a:solidFill>
-                  <a:schemeClr val="tx1"/>
-                </a:solidFill>
-                <a:latin typeface="+mn-lt"/>
-                <a:ea typeface="+mn-ea"/>
-                <a:cs typeface="+mn-cs"/>
-              </a:defRPr>
-            </a:lvl8pPr>
-            <a:lvl9pPr marL="3886200" indent="-228600" algn="l" defTabSz="914400" rtl="0" eaLnBrk="1" latinLnBrk="0" hangingPunct="1">
-              <a:lnSpc>
-                <a:spcPct val="90000"/>
-              </a:lnSpc>
-              <a:spcBef>
-                <a:spcPts val="500"/>
-              </a:spcBef>
-              <a:buFont typeface="Arial" panose="020B0604020202020204" pitchFamily="34" charset="0"/>
-              <a:buChar char="•"/>
-              <a:defRPr sz="1800" kern="1200">
-                <a:solidFill>
-                  <a:schemeClr val="tx1"/>
-                </a:solidFill>
-                <a:latin typeface="+mn-lt"/>
-                <a:ea typeface="+mn-ea"/>
-                <a:cs typeface="+mn-cs"/>
-              </a:defRPr>
-            </a:lvl9pPr>
-          </a:lstStyle>
-          <a:p>
-            <a:r>
-              <a:rPr lang="it-IT" b="1" dirty="0"/>
-              <a:t>Acquisto</a:t>
-            </a:r>
-          </a:p>
-          <a:p>
-            <a:pPr lvl="1">
-              <a:buFont typeface="Courier New" panose="02070309020205020404" pitchFamily="49" charset="0"/>
-              <a:buChar char="o"/>
-            </a:pPr>
-            <a:endParaRPr lang="it-IT" b="1" dirty="0"/>
-          </a:p>
-          <a:p>
-            <a:pPr lvl="1">
-              <a:buFont typeface="Courier New" panose="02070309020205020404" pitchFamily="49" charset="0"/>
-              <a:buChar char="o"/>
-            </a:pPr>
-            <a:endParaRPr lang="it-IT" sz="1400" dirty="0"/>
-          </a:p>
-        </p:txBody>
-      </p:sp>
-      <p:sp>
-        <p:nvSpPr>
-          <p:cNvPr id="13" name="Segnaposto contenuto 2">
-            <a:extLst>
-              <a:ext uri="{FF2B5EF4-FFF2-40B4-BE49-F238E27FC236}">
-                <a16:creationId xmlns:a16="http://schemas.microsoft.com/office/drawing/2014/main" id="{A0C7C6D8-C91B-C47A-AEE9-B685EB076029}"/>
-              </a:ext>
-            </a:extLst>
-          </p:cNvPr>
-          <p:cNvSpPr txBox="1">
-            <a:spLocks/>
-          </p:cNvSpPr>
-          <p:nvPr/>
-        </p:nvSpPr>
-        <p:spPr>
-          <a:xfrm>
-            <a:off x="7479232" y="2272284"/>
-            <a:ext cx="2842665" cy="3739896"/>
-          </a:xfrm>
-          <a:prstGeom prst="rect">
-            <a:avLst/>
-          </a:prstGeom>
-        </p:spPr>
-        <p:txBody>
-          <a:bodyPr vert="horz" lIns="91440" tIns="45720" rIns="91440" bIns="45720" rtlCol="0">
-            <a:normAutofit/>
-          </a:bodyPr>
-          <a:lstStyle>
-            <a:lvl1pPr marL="228600" indent="-228600" algn="l" defTabSz="914400" rtl="0" eaLnBrk="1" latinLnBrk="0" hangingPunct="1">
-              <a:lnSpc>
-                <a:spcPct val="110000"/>
-              </a:lnSpc>
-              <a:spcBef>
-                <a:spcPts val="1000"/>
-              </a:spcBef>
-              <a:buFont typeface="Arial" panose="020B0604020202020204" pitchFamily="34" charset="0"/>
-              <a:buChar char="•"/>
-              <a:defRPr sz="2000" kern="1200">
-                <a:solidFill>
-                  <a:schemeClr val="tx1"/>
-                </a:solidFill>
-                <a:latin typeface="+mn-lt"/>
-                <a:ea typeface="+mn-ea"/>
-                <a:cs typeface="+mn-cs"/>
-              </a:defRPr>
-            </a:lvl1pPr>
-            <a:lvl2pPr marL="685800" indent="-228600" algn="l" defTabSz="914400" rtl="0" eaLnBrk="1" latinLnBrk="0" hangingPunct="1">
-              <a:lnSpc>
-                <a:spcPct val="110000"/>
-              </a:lnSpc>
-              <a:spcBef>
-                <a:spcPts val="500"/>
-              </a:spcBef>
-              <a:buFont typeface="Arial" panose="020B0604020202020204" pitchFamily="34" charset="0"/>
-              <a:buChar char="•"/>
-              <a:defRPr sz="1800" kern="1200">
-                <a:solidFill>
-                  <a:schemeClr val="tx1"/>
-                </a:solidFill>
-                <a:latin typeface="+mn-lt"/>
-                <a:ea typeface="+mn-ea"/>
-                <a:cs typeface="+mn-cs"/>
-              </a:defRPr>
-            </a:lvl2pPr>
-            <a:lvl3pPr marL="1143000" indent="-228600" algn="l" defTabSz="914400" rtl="0" eaLnBrk="1" latinLnBrk="0" hangingPunct="1">
-              <a:lnSpc>
-                <a:spcPct val="110000"/>
-              </a:lnSpc>
-              <a:spcBef>
-                <a:spcPts val="500"/>
-              </a:spcBef>
-              <a:buFont typeface="Arial" panose="020B0604020202020204" pitchFamily="34" charset="0"/>
-              <a:buChar char="•"/>
-              <a:defRPr sz="1600" kern="1200">
-                <a:solidFill>
-                  <a:schemeClr val="tx1"/>
-                </a:solidFill>
-                <a:latin typeface="+mn-lt"/>
-                <a:ea typeface="+mn-ea"/>
-                <a:cs typeface="+mn-cs"/>
-              </a:defRPr>
-            </a:lvl3pPr>
-            <a:lvl4pPr marL="1600200" indent="-228600" algn="l" defTabSz="914400" rtl="0" eaLnBrk="1" latinLnBrk="0" hangingPunct="1">
-              <a:lnSpc>
-                <a:spcPct val="110000"/>
-              </a:lnSpc>
-              <a:spcBef>
-                <a:spcPts val="500"/>
-              </a:spcBef>
-              <a:buFont typeface="Arial" panose="020B0604020202020204" pitchFamily="34" charset="0"/>
-              <a:buChar char="•"/>
-              <a:defRPr sz="1400" kern="1200">
-                <a:solidFill>
-                  <a:schemeClr val="tx1"/>
-                </a:solidFill>
-                <a:latin typeface="+mn-lt"/>
-                <a:ea typeface="+mn-ea"/>
-                <a:cs typeface="+mn-cs"/>
-              </a:defRPr>
-            </a:lvl4pPr>
-            <a:lvl5pPr marL="2057400" indent="-228600" algn="l" defTabSz="914400" rtl="0" eaLnBrk="1" latinLnBrk="0" hangingPunct="1">
-              <a:lnSpc>
-                <a:spcPct val="110000"/>
-              </a:lnSpc>
-              <a:spcBef>
-                <a:spcPts val="500"/>
-              </a:spcBef>
-              <a:buFont typeface="Arial" panose="020B0604020202020204" pitchFamily="34" charset="0"/>
-              <a:buChar char="•"/>
-              <a:defRPr sz="1400" kern="1200">
-                <a:solidFill>
-                  <a:schemeClr val="tx1"/>
-                </a:solidFill>
-                <a:latin typeface="+mn-lt"/>
-                <a:ea typeface="+mn-ea"/>
-                <a:cs typeface="+mn-cs"/>
-              </a:defRPr>
-            </a:lvl5pPr>
-            <a:lvl6pPr marL="2514600" indent="-228600" algn="l" defTabSz="914400" rtl="0" eaLnBrk="1" latinLnBrk="0" hangingPunct="1">
-              <a:lnSpc>
-                <a:spcPct val="90000"/>
-              </a:lnSpc>
-              <a:spcBef>
-                <a:spcPts val="500"/>
-              </a:spcBef>
-              <a:buFont typeface="Arial" panose="020B0604020202020204" pitchFamily="34" charset="0"/>
-              <a:buChar char="•"/>
-              <a:defRPr sz="1800" kern="1200">
-                <a:solidFill>
-                  <a:schemeClr val="tx1"/>
-                </a:solidFill>
-                <a:latin typeface="+mn-lt"/>
-                <a:ea typeface="+mn-ea"/>
-                <a:cs typeface="+mn-cs"/>
-              </a:defRPr>
-            </a:lvl6pPr>
-            <a:lvl7pPr marL="2971800" indent="-228600" algn="l" defTabSz="914400" rtl="0" eaLnBrk="1" latinLnBrk="0" hangingPunct="1">
-              <a:lnSpc>
-                <a:spcPct val="90000"/>
-              </a:lnSpc>
-              <a:spcBef>
-                <a:spcPts val="500"/>
-              </a:spcBef>
-              <a:buFont typeface="Arial" panose="020B0604020202020204" pitchFamily="34" charset="0"/>
-              <a:buChar char="•"/>
-              <a:defRPr sz="1800" kern="1200">
-                <a:solidFill>
-                  <a:schemeClr val="tx1"/>
-                </a:solidFill>
-                <a:latin typeface="+mn-lt"/>
-                <a:ea typeface="+mn-ea"/>
-                <a:cs typeface="+mn-cs"/>
-              </a:defRPr>
-            </a:lvl7pPr>
-            <a:lvl8pPr marL="3429000" indent="-228600" algn="l" defTabSz="914400" rtl="0" eaLnBrk="1" latinLnBrk="0" hangingPunct="1">
-              <a:lnSpc>
-                <a:spcPct val="90000"/>
-              </a:lnSpc>
-              <a:spcBef>
-                <a:spcPts val="500"/>
-              </a:spcBef>
-              <a:buFont typeface="Arial" panose="020B0604020202020204" pitchFamily="34" charset="0"/>
-              <a:buChar char="•"/>
-              <a:defRPr sz="1800" kern="1200">
-                <a:solidFill>
-                  <a:schemeClr val="tx1"/>
-                </a:solidFill>
-                <a:latin typeface="+mn-lt"/>
-                <a:ea typeface="+mn-ea"/>
-                <a:cs typeface="+mn-cs"/>
-              </a:defRPr>
-            </a:lvl8pPr>
-            <a:lvl9pPr marL="3886200" indent="-228600" algn="l" defTabSz="914400" rtl="0" eaLnBrk="1" latinLnBrk="0" hangingPunct="1">
-              <a:lnSpc>
-                <a:spcPct val="90000"/>
-              </a:lnSpc>
-              <a:spcBef>
-                <a:spcPts val="500"/>
-              </a:spcBef>
-              <a:buFont typeface="Arial" panose="020B0604020202020204" pitchFamily="34" charset="0"/>
-              <a:buChar char="•"/>
-              <a:defRPr sz="1800" kern="1200">
-                <a:solidFill>
-                  <a:schemeClr val="tx1"/>
-                </a:solidFill>
-                <a:latin typeface="+mn-lt"/>
-                <a:ea typeface="+mn-ea"/>
-                <a:cs typeface="+mn-cs"/>
-              </a:defRPr>
-            </a:lvl9pPr>
-          </a:lstStyle>
-          <a:p>
-            <a:r>
-              <a:rPr lang="it-IT" b="1" dirty="0"/>
-              <a:t>Offerta</a:t>
-            </a:r>
-          </a:p>
-          <a:p>
-            <a:pPr lvl="1">
-              <a:buFont typeface="Courier New" panose="02070309020205020404" pitchFamily="49" charset="0"/>
-              <a:buChar char="o"/>
-            </a:pPr>
-            <a:endParaRPr lang="it-IT" b="1" dirty="0"/>
-          </a:p>
-          <a:p>
-            <a:pPr lvl="1">
-              <a:buFont typeface="Courier New" panose="02070309020205020404" pitchFamily="49" charset="0"/>
-              <a:buChar char="o"/>
-            </a:pPr>
-            <a:endParaRPr lang="it-IT" sz="1400" dirty="0"/>
-          </a:p>
-        </p:txBody>
-      </p:sp>
-    </p:spTree>
-    <p:extLst>
-      <p:ext uri="{BB962C8B-B14F-4D97-AF65-F5344CB8AC3E}">
-        <p14:creationId xmlns:p14="http://schemas.microsoft.com/office/powerpoint/2010/main" val="2638022050"/>
-      </p:ext>
-    </p:extLst>
-  </p:cSld>
-  <p:clrMapOvr>
-    <a:masterClrMapping/>
-  </p:clrMapOvr>
-</p:sld>
-</file>
-
-<file path=ppt/slides/slide21.xml><?xml version="1.0" encoding="utf-8"?>
-<p:sld xmlns:a="http://schemas.openxmlformats.org/drawingml/2006/main" xmlns:r="http://schemas.openxmlformats.org/officeDocument/2006/relationships" xmlns:p="http://schemas.openxmlformats.org/presentationml/2006/main">
-  <p:cSld>
-    <p:spTree>
-      <p:nvGrpSpPr>
-        <p:cNvPr id="1" name="">
-          <a:extLst>
-            <a:ext uri="{FF2B5EF4-FFF2-40B4-BE49-F238E27FC236}">
               <a16:creationId xmlns:a16="http://schemas.microsoft.com/office/drawing/2014/main" id="{F8E22F65-028F-A28C-2740-A91BC4AB4C45}"/>
             </a:ext>
           </a:extLst>
@@ -11404,440 +10401,6 @@
           </a:p>
         </p:txBody>
       </p:sp>
-      <p:sp>
-        <p:nvSpPr>
-          <p:cNvPr id="17" name="Rectangle 7">
-            <a:extLst>
-              <a:ext uri="{FF2B5EF4-FFF2-40B4-BE49-F238E27FC236}">
-                <a16:creationId xmlns:a16="http://schemas.microsoft.com/office/drawing/2014/main" id="{5A043DE1-F99E-90A4-37A3-757CB7335A38}"/>
-              </a:ext>
-            </a:extLst>
-          </p:cNvPr>
-          <p:cNvSpPr>
-            <a:spLocks noChangeArrowheads="1"/>
-          </p:cNvSpPr>
-          <p:nvPr/>
-        </p:nvSpPr>
-        <p:spPr bwMode="auto">
-          <a:xfrm>
-            <a:off x="0" y="0"/>
-            <a:ext cx="12192000" cy="0"/>
-          </a:xfrm>
-          <a:prstGeom prst="rect">
-            <a:avLst/>
-          </a:prstGeom>
-          <a:noFill/>
-          <a:ln>
-            <a:noFill/>
-          </a:ln>
-          <a:effectLst/>
-          <a:extLst>
-            <a:ext uri="{909E8E84-426E-40DD-AFC4-6F175D3DCCD1}">
-              <a14:hiddenFill xmlns:a14="http://schemas.microsoft.com/office/drawing/2010/main">
-                <a:solidFill>
-                  <a:schemeClr val="accent1"/>
-                </a:solidFill>
-              </a14:hiddenFill>
-            </a:ext>
-            <a:ext uri="{91240B29-F687-4F45-9708-019B960494DF}">
-              <a14:hiddenLine xmlns:a14="http://schemas.microsoft.com/office/drawing/2010/main" w="9525">
-                <a:solidFill>
-                  <a:schemeClr val="tx1"/>
-                </a:solidFill>
-                <a:miter lim="800000"/>
-                <a:headEnd/>
-                <a:tailEnd/>
-              </a14:hiddenLine>
-            </a:ext>
-            <a:ext uri="{AF507438-7753-43E0-B8FC-AC1667EBCBE1}">
-              <a14:hiddenEffects xmlns:a14="http://schemas.microsoft.com/office/drawing/2010/main">
-                <a:effectLst>
-                  <a:outerShdw dist="35921" dir="2700000" algn="ctr" rotWithShape="0">
-                    <a:schemeClr val="bg2"/>
-                  </a:outerShdw>
-                </a:effectLst>
-              </a14:hiddenEffects>
-            </a:ext>
-          </a:extLst>
-        </p:spPr>
-        <p:txBody>
-          <a:bodyPr vert="horz" wrap="none" lIns="91440" tIns="45720" rIns="91440" bIns="45720" numCol="1" anchor="ctr" anchorCtr="0" compatLnSpc="1">
-            <a:prstTxWarp prst="textNoShape">
-              <a:avLst/>
-            </a:prstTxWarp>
-            <a:spAutoFit/>
-          </a:bodyPr>
-          <a:lstStyle/>
-          <a:p>
-            <a:pPr marL="0" marR="0" lvl="0" indent="0" algn="l" defTabSz="914400" rtl="0" eaLnBrk="0" fontAlgn="base" latinLnBrk="0" hangingPunct="0">
-              <a:lnSpc>
-                <a:spcPct val="100000"/>
-              </a:lnSpc>
-              <a:spcBef>
-                <a:spcPct val="0"/>
-              </a:spcBef>
-              <a:spcAft>
-                <a:spcPct val="0"/>
-              </a:spcAft>
-              <a:buClrTx/>
-              <a:buSzTx/>
-              <a:buFontTx/>
-              <a:buChar char="•"/>
-              <a:tabLst/>
-            </a:pPr>
-            <a:r>
-              <a:rPr kumimoji="0" lang="it-IT" altLang="it-IT" sz="1000" b="0" i="0" u="none" strike="noStrike" cap="none" normalizeH="0" baseline="0" dirty="0" err="1">
-                <a:ln>
-                  <a:noFill/>
-                </a:ln>
-                <a:solidFill>
-                  <a:schemeClr val="tx1"/>
-                </a:solidFill>
-                <a:effectLst/>
-                <a:latin typeface="Arial Unicode MS"/>
-              </a:rPr>
-              <a:t>renderOffertaPage</a:t>
-            </a:r>
-            <a:r>
-              <a:rPr kumimoji="0" lang="it-IT" altLang="it-IT" sz="1000" b="0" i="0" u="none" strike="noStrike" cap="none" normalizeH="0" baseline="0" dirty="0">
-                <a:ln>
-                  <a:noFill/>
-                </a:ln>
-                <a:solidFill>
-                  <a:schemeClr val="tx1"/>
-                </a:solidFill>
-                <a:effectLst/>
-                <a:latin typeface="Arial Unicode MS"/>
-              </a:rPr>
-              <a:t>(</a:t>
-            </a:r>
-            <a:r>
-              <a:rPr kumimoji="0" lang="it-IT" altLang="it-IT" sz="1000" b="0" i="0" u="none" strike="noStrike" cap="none" normalizeH="0" baseline="0" dirty="0" err="1">
-                <a:ln>
-                  <a:noFill/>
-                </a:ln>
-                <a:solidFill>
-                  <a:schemeClr val="tx1"/>
-                </a:solidFill>
-                <a:effectLst/>
-                <a:latin typeface="Arial Unicode MS"/>
-              </a:rPr>
-              <a:t>idAsta</a:t>
-            </a:r>
-            <a:r>
-              <a:rPr kumimoji="0" lang="it-IT" altLang="it-IT" sz="1000" b="0" i="0" u="none" strike="noStrike" cap="none" normalizeH="0" baseline="0" dirty="0">
-                <a:ln>
-                  <a:noFill/>
-                </a:ln>
-                <a:solidFill>
-                  <a:schemeClr val="tx1"/>
-                </a:solidFill>
-                <a:effectLst/>
-                <a:latin typeface="Arial Unicode MS"/>
-              </a:rPr>
-              <a:t>)</a:t>
-            </a:r>
-            <a:r>
-              <a:rPr kumimoji="0" lang="it-IT" altLang="it-IT" sz="800" b="0" i="0" u="none" strike="noStrike" cap="none" normalizeH="0" baseline="0" dirty="0">
-                <a:ln>
-                  <a:noFill/>
-                </a:ln>
-                <a:solidFill>
-                  <a:schemeClr val="tx1"/>
-                </a:solidFill>
-                <a:effectLst/>
-              </a:rPr>
-              <a:t> → mostra pagina offerta per una certa asta</a:t>
-            </a:r>
-            <a:endParaRPr kumimoji="0" lang="it-IT" altLang="it-IT" sz="1800" b="0" i="0" u="none" strike="noStrike" cap="none" normalizeH="0" baseline="0" dirty="0">
-              <a:ln>
-                <a:noFill/>
-              </a:ln>
-              <a:solidFill>
-                <a:schemeClr val="tx1"/>
-              </a:solidFill>
-              <a:effectLst/>
-              <a:latin typeface="Arial" panose="020B0604020202020204" pitchFamily="34" charset="0"/>
-            </a:endParaRPr>
-          </a:p>
-          <a:p>
-            <a:pPr marL="0" marR="0" lvl="0" indent="0" algn="l" defTabSz="914400" rtl="0" eaLnBrk="0" fontAlgn="base" latinLnBrk="0" hangingPunct="0">
-              <a:lnSpc>
-                <a:spcPct val="100000"/>
-              </a:lnSpc>
-              <a:spcBef>
-                <a:spcPct val="0"/>
-              </a:spcBef>
-              <a:spcAft>
-                <a:spcPct val="0"/>
-              </a:spcAft>
-              <a:buClrTx/>
-              <a:buSzTx/>
-              <a:buFontTx/>
-              <a:buChar char="•"/>
-              <a:tabLst/>
-            </a:pPr>
-            <a:r>
-              <a:rPr kumimoji="0" lang="it-IT" altLang="it-IT" sz="1000" b="0" i="0" u="none" strike="noStrike" cap="none" normalizeH="0" baseline="0" dirty="0" err="1">
-                <a:ln>
-                  <a:noFill/>
-                </a:ln>
-                <a:solidFill>
-                  <a:schemeClr val="tx1"/>
-                </a:solidFill>
-                <a:effectLst/>
-                <a:latin typeface="Arial Unicode MS"/>
-              </a:rPr>
-              <a:t>addArticoloInTable</a:t>
-            </a:r>
-            <a:r>
-              <a:rPr kumimoji="0" lang="it-IT" altLang="it-IT" sz="1000" b="0" i="0" u="none" strike="noStrike" cap="none" normalizeH="0" baseline="0" dirty="0">
-                <a:ln>
-                  <a:noFill/>
-                </a:ln>
-                <a:solidFill>
-                  <a:schemeClr val="tx1"/>
-                </a:solidFill>
-                <a:effectLst/>
-                <a:latin typeface="Arial Unicode MS"/>
-              </a:rPr>
-              <a:t>(articolo)</a:t>
-            </a:r>
-            <a:r>
-              <a:rPr kumimoji="0" lang="it-IT" altLang="it-IT" sz="800" b="0" i="0" u="none" strike="noStrike" cap="none" normalizeH="0" baseline="0" dirty="0">
-                <a:ln>
-                  <a:noFill/>
-                </a:ln>
-                <a:solidFill>
-                  <a:schemeClr val="tx1"/>
-                </a:solidFill>
-                <a:effectLst/>
-              </a:rPr>
-              <a:t> → aggiunge un articolo alla tabella articoli asta</a:t>
-            </a:r>
-            <a:endParaRPr kumimoji="0" lang="it-IT" altLang="it-IT" sz="1800" b="0" i="0" u="none" strike="noStrike" cap="none" normalizeH="0" baseline="0" dirty="0">
-              <a:ln>
-                <a:noFill/>
-              </a:ln>
-              <a:solidFill>
-                <a:schemeClr val="tx1"/>
-              </a:solidFill>
-              <a:effectLst/>
-              <a:latin typeface="Arial" panose="020B0604020202020204" pitchFamily="34" charset="0"/>
-            </a:endParaRPr>
-          </a:p>
-          <a:p>
-            <a:pPr marL="0" marR="0" lvl="0" indent="0" algn="l" defTabSz="914400" rtl="0" eaLnBrk="0" fontAlgn="base" latinLnBrk="0" hangingPunct="0">
-              <a:lnSpc>
-                <a:spcPct val="100000"/>
-              </a:lnSpc>
-              <a:spcBef>
-                <a:spcPct val="0"/>
-              </a:spcBef>
-              <a:spcAft>
-                <a:spcPct val="0"/>
-              </a:spcAft>
-              <a:buClrTx/>
-              <a:buSzTx/>
-              <a:buFontTx/>
-              <a:buChar char="•"/>
-              <a:tabLst/>
-            </a:pPr>
-            <a:r>
-              <a:rPr kumimoji="0" lang="it-IT" altLang="it-IT" sz="1000" b="0" i="0" u="none" strike="noStrike" cap="none" normalizeH="0" baseline="0" dirty="0" err="1">
-                <a:ln>
-                  <a:noFill/>
-                </a:ln>
-                <a:solidFill>
-                  <a:schemeClr val="tx1"/>
-                </a:solidFill>
-                <a:effectLst/>
-                <a:latin typeface="Arial Unicode MS"/>
-              </a:rPr>
-              <a:t>addOffertaInTable</a:t>
-            </a:r>
-            <a:r>
-              <a:rPr kumimoji="0" lang="it-IT" altLang="it-IT" sz="1000" b="0" i="0" u="none" strike="noStrike" cap="none" normalizeH="0" baseline="0" dirty="0">
-                <a:ln>
-                  <a:noFill/>
-                </a:ln>
-                <a:solidFill>
-                  <a:schemeClr val="tx1"/>
-                </a:solidFill>
-                <a:effectLst/>
-                <a:latin typeface="Arial Unicode MS"/>
-              </a:rPr>
-              <a:t>(offerta, nuova)</a:t>
-            </a:r>
-            <a:r>
-              <a:rPr kumimoji="0" lang="it-IT" altLang="it-IT" sz="800" b="0" i="0" u="none" strike="noStrike" cap="none" normalizeH="0" baseline="0" dirty="0">
-                <a:ln>
-                  <a:noFill/>
-                </a:ln>
-                <a:solidFill>
-                  <a:schemeClr val="tx1"/>
-                </a:solidFill>
-                <a:effectLst/>
-              </a:rPr>
-              <a:t> → aggiunge un’offerta alla tabella offerte</a:t>
-            </a:r>
-            <a:endParaRPr kumimoji="0" lang="it-IT" altLang="it-IT" sz="1800" b="0" i="0" u="none" strike="noStrike" cap="none" normalizeH="0" baseline="0" dirty="0">
-              <a:ln>
-                <a:noFill/>
-              </a:ln>
-              <a:solidFill>
-                <a:schemeClr val="tx1"/>
-              </a:solidFill>
-              <a:effectLst/>
-              <a:latin typeface="Arial" panose="020B0604020202020204" pitchFamily="34" charset="0"/>
-            </a:endParaRPr>
-          </a:p>
-          <a:p>
-            <a:pPr marL="0" marR="0" lvl="0" indent="0" algn="l" defTabSz="914400" rtl="0" eaLnBrk="0" fontAlgn="base" latinLnBrk="0" hangingPunct="0">
-              <a:lnSpc>
-                <a:spcPct val="100000"/>
-              </a:lnSpc>
-              <a:spcBef>
-                <a:spcPct val="0"/>
-              </a:spcBef>
-              <a:spcAft>
-                <a:spcPct val="0"/>
-              </a:spcAft>
-              <a:buClrTx/>
-              <a:buSzTx/>
-              <a:buFontTx/>
-              <a:buChar char="•"/>
-              <a:tabLst/>
-            </a:pPr>
-            <a:r>
-              <a:rPr kumimoji="0" lang="it-IT" altLang="it-IT" sz="1000" b="0" i="0" u="none" strike="noStrike" cap="none" normalizeH="0" baseline="0" dirty="0" err="1">
-                <a:ln>
-                  <a:noFill/>
-                </a:ln>
-                <a:solidFill>
-                  <a:schemeClr val="tx1"/>
-                </a:solidFill>
-                <a:effectLst/>
-                <a:latin typeface="Arial Unicode MS"/>
-              </a:rPr>
-              <a:t>faiOfferta</a:t>
-            </a:r>
-            <a:r>
-              <a:rPr kumimoji="0" lang="it-IT" altLang="it-IT" sz="1000" b="0" i="0" u="none" strike="noStrike" cap="none" normalizeH="0" baseline="0" dirty="0">
-                <a:ln>
-                  <a:noFill/>
-                </a:ln>
-                <a:solidFill>
-                  <a:schemeClr val="tx1"/>
-                </a:solidFill>
-                <a:effectLst/>
-                <a:latin typeface="Arial Unicode MS"/>
-              </a:rPr>
-              <a:t>(</a:t>
-            </a:r>
-            <a:r>
-              <a:rPr kumimoji="0" lang="it-IT" altLang="it-IT" sz="1000" b="0" i="0" u="none" strike="noStrike" cap="none" normalizeH="0" baseline="0" dirty="0" err="1">
-                <a:ln>
-                  <a:noFill/>
-                </a:ln>
-                <a:solidFill>
-                  <a:schemeClr val="tx1"/>
-                </a:solidFill>
-                <a:effectLst/>
-                <a:latin typeface="Arial Unicode MS"/>
-              </a:rPr>
-              <a:t>prezzoIniziale</a:t>
-            </a:r>
-            <a:r>
-              <a:rPr kumimoji="0" lang="it-IT" altLang="it-IT" sz="1000" b="0" i="0" u="none" strike="noStrike" cap="none" normalizeH="0" baseline="0" dirty="0">
-                <a:ln>
-                  <a:noFill/>
-                </a:ln>
-                <a:solidFill>
-                  <a:schemeClr val="tx1"/>
-                </a:solidFill>
-                <a:effectLst/>
-                <a:latin typeface="Arial Unicode MS"/>
-              </a:rPr>
-              <a:t>, </a:t>
-            </a:r>
-            <a:r>
-              <a:rPr kumimoji="0" lang="it-IT" altLang="it-IT" sz="1000" b="0" i="0" u="none" strike="noStrike" cap="none" normalizeH="0" baseline="0" dirty="0" err="1">
-                <a:ln>
-                  <a:noFill/>
-                </a:ln>
-                <a:solidFill>
-                  <a:schemeClr val="tx1"/>
-                </a:solidFill>
-                <a:effectLst/>
-                <a:latin typeface="Arial Unicode MS"/>
-              </a:rPr>
-              <a:t>prezzoOffertaMassima</a:t>
-            </a:r>
-            <a:r>
-              <a:rPr kumimoji="0" lang="it-IT" altLang="it-IT" sz="1000" b="0" i="0" u="none" strike="noStrike" cap="none" normalizeH="0" baseline="0" dirty="0">
-                <a:ln>
-                  <a:noFill/>
-                </a:ln>
-                <a:solidFill>
-                  <a:schemeClr val="tx1"/>
-                </a:solidFill>
-                <a:effectLst/>
-                <a:latin typeface="Arial Unicode MS"/>
-              </a:rPr>
-              <a:t>, </a:t>
-            </a:r>
-            <a:r>
-              <a:rPr kumimoji="0" lang="it-IT" altLang="it-IT" sz="1000" b="0" i="0" u="none" strike="noStrike" cap="none" normalizeH="0" baseline="0" dirty="0" err="1">
-                <a:ln>
-                  <a:noFill/>
-                </a:ln>
-                <a:solidFill>
-                  <a:schemeClr val="tx1"/>
-                </a:solidFill>
-                <a:effectLst/>
-                <a:latin typeface="Arial Unicode MS"/>
-              </a:rPr>
-              <a:t>rialzoMinimo</a:t>
-            </a:r>
-            <a:r>
-              <a:rPr kumimoji="0" lang="it-IT" altLang="it-IT" sz="1000" b="0" i="0" u="none" strike="noStrike" cap="none" normalizeH="0" baseline="0" dirty="0">
-                <a:ln>
-                  <a:noFill/>
-                </a:ln>
-                <a:solidFill>
-                  <a:schemeClr val="tx1"/>
-                </a:solidFill>
-                <a:effectLst/>
-                <a:latin typeface="Arial Unicode MS"/>
-              </a:rPr>
-              <a:t>)</a:t>
-            </a:r>
-            <a:r>
-              <a:rPr kumimoji="0" lang="it-IT" altLang="it-IT" sz="800" b="0" i="0" u="none" strike="noStrike" cap="none" normalizeH="0" baseline="0" dirty="0">
-                <a:ln>
-                  <a:noFill/>
-                </a:ln>
-                <a:solidFill>
-                  <a:schemeClr val="tx1"/>
-                </a:solidFill>
-                <a:effectLst/>
-              </a:rPr>
-              <a:t> → invia una nuova offerta al server</a:t>
-            </a:r>
-            <a:endParaRPr kumimoji="0" lang="it-IT" altLang="it-IT" sz="1800" b="0" i="0" u="none" strike="noStrike" cap="none" normalizeH="0" baseline="0" dirty="0">
-              <a:ln>
-                <a:noFill/>
-              </a:ln>
-              <a:solidFill>
-                <a:schemeClr val="tx1"/>
-              </a:solidFill>
-              <a:effectLst/>
-              <a:latin typeface="Arial" panose="020B0604020202020204" pitchFamily="34" charset="0"/>
-            </a:endParaRPr>
-          </a:p>
-        </p:txBody>
-      </p:sp>
     </p:spTree>
     <p:extLst>
       <p:ext uri="{BB962C8B-B14F-4D97-AF65-F5344CB8AC3E}">
@@ -11851,7 +10414,7 @@
 </p:sld>
 </file>
 
-<file path=ppt/slides/slide22.xml><?xml version="1.0" encoding="utf-8"?>
+<file path=ppt/slides/slide21.xml><?xml version="1.0" encoding="utf-8"?>
 <p:sld xmlns:a="http://schemas.openxmlformats.org/drawingml/2006/main" xmlns:r="http://schemas.openxmlformats.org/officeDocument/2006/relationships" xmlns:p="http://schemas.openxmlformats.org/presentationml/2006/main">
   <p:cSld>
     <p:spTree>
@@ -11939,7 +10502,7 @@
 </p:sld>
 </file>
 
-<file path=ppt/slides/slide23.xml><?xml version="1.0" encoding="utf-8"?>
+<file path=ppt/slides/slide22.xml><?xml version="1.0" encoding="utf-8"?>
 <p:sld xmlns:a="http://schemas.openxmlformats.org/drawingml/2006/main" xmlns:r="http://schemas.openxmlformats.org/officeDocument/2006/relationships" xmlns:p="http://schemas.openxmlformats.org/presentationml/2006/main">
   <p:cSld>
     <p:spTree>
@@ -12027,7 +10590,7 @@
 </p:sld>
 </file>
 
-<file path=ppt/slides/slide24.xml><?xml version="1.0" encoding="utf-8"?>
+<file path=ppt/slides/slide23.xml><?xml version="1.0" encoding="utf-8"?>
 <p:sld xmlns:a="http://schemas.openxmlformats.org/drawingml/2006/main" xmlns:r="http://schemas.openxmlformats.org/officeDocument/2006/relationships" xmlns:p="http://schemas.openxmlformats.org/presentationml/2006/main">
   <p:cSld>
     <p:spTree>
@@ -12121,7 +10684,7 @@
 </p:sld>
 </file>
 
-<file path=ppt/slides/slide25.xml><?xml version="1.0" encoding="utf-8"?>
+<file path=ppt/slides/slide24.xml><?xml version="1.0" encoding="utf-8"?>
 <p:sld xmlns:a="http://schemas.openxmlformats.org/drawingml/2006/main" xmlns:r="http://schemas.openxmlformats.org/officeDocument/2006/relationships" xmlns:p="http://schemas.openxmlformats.org/presentationml/2006/main">
   <p:cSld>
     <p:spTree>
@@ -12215,7 +10778,7 @@
 </p:sld>
 </file>
 
-<file path=ppt/slides/slide26.xml><?xml version="1.0" encoding="utf-8"?>
+<file path=ppt/slides/slide25.xml><?xml version="1.0" encoding="utf-8"?>
 <p:sld xmlns:a="http://schemas.openxmlformats.org/drawingml/2006/main" xmlns:r="http://schemas.openxmlformats.org/officeDocument/2006/relationships" xmlns:p="http://schemas.openxmlformats.org/presentationml/2006/main">
   <p:cSld>
     <p:spTree>
@@ -12309,7 +10872,7 @@
 </p:sld>
 </file>
 
-<file path=ppt/slides/slide27.xml><?xml version="1.0" encoding="utf-8"?>
+<file path=ppt/slides/slide26.xml><?xml version="1.0" encoding="utf-8"?>
 <p:sld xmlns:a="http://schemas.openxmlformats.org/drawingml/2006/main" xmlns:r="http://schemas.openxmlformats.org/officeDocument/2006/relationships" xmlns:p="http://schemas.openxmlformats.org/presentationml/2006/main">
   <p:cSld>
     <p:spTree>
@@ -12403,7 +10966,7 @@
 </p:sld>
 </file>
 
-<file path=ppt/slides/slide28.xml><?xml version="1.0" encoding="utf-8"?>
+<file path=ppt/slides/slide27.xml><?xml version="1.0" encoding="utf-8"?>
 <p:sld xmlns:a="http://schemas.openxmlformats.org/drawingml/2006/main" xmlns:r="http://schemas.openxmlformats.org/officeDocument/2006/relationships" xmlns:p="http://schemas.openxmlformats.org/presentationml/2006/main">
   <p:cSld>
     <p:spTree>
@@ -12497,7 +11060,7 @@
 </p:sld>
 </file>
 
-<file path=ppt/slides/slide29.xml><?xml version="1.0" encoding="utf-8"?>
+<file path=ppt/slides/slide28.xml><?xml version="1.0" encoding="utf-8"?>
 <p:sld xmlns:a="http://schemas.openxmlformats.org/drawingml/2006/main" xmlns:r="http://schemas.openxmlformats.org/officeDocument/2006/relationships" xmlns:p="http://schemas.openxmlformats.org/presentationml/2006/main">
   <p:cSld>
     <p:spTree>
@@ -12591,203 +11154,7 @@
 </p:sld>
 </file>
 
-<file path=ppt/slides/slide3.xml><?xml version="1.0" encoding="utf-8"?>
-<p:sld xmlns:a="http://schemas.openxmlformats.org/drawingml/2006/main" xmlns:r="http://schemas.openxmlformats.org/officeDocument/2006/relationships" xmlns:p="http://schemas.openxmlformats.org/presentationml/2006/main">
-  <p:cSld>
-    <p:spTree>
-      <p:nvGrpSpPr>
-        <p:cNvPr id="1" name=""/>
-        <p:cNvGrpSpPr/>
-        <p:nvPr/>
-      </p:nvGrpSpPr>
-      <p:grpSpPr>
-        <a:xfrm>
-          <a:off x="0" y="0"/>
-          <a:ext cx="0" cy="0"/>
-          <a:chOff x="0" y="0"/>
-          <a:chExt cx="0" cy="0"/>
-        </a:xfrm>
-      </p:grpSpPr>
-      <p:sp>
-        <p:nvSpPr>
-          <p:cNvPr id="5" name="Titolo 1">
-            <a:extLst>
-              <a:ext uri="{FF2B5EF4-FFF2-40B4-BE49-F238E27FC236}">
-                <a16:creationId xmlns:a16="http://schemas.microsoft.com/office/drawing/2014/main" id="{14D54F63-4782-0FEE-3101-BA1F31995533}"/>
-              </a:ext>
-            </a:extLst>
-          </p:cNvPr>
-          <p:cNvSpPr>
-            <a:spLocks noGrp="1"/>
-          </p:cNvSpPr>
-          <p:nvPr>
-            <p:ph idx="1"/>
-          </p:nvPr>
-        </p:nvSpPr>
-        <p:spPr>
-          <a:xfrm>
-            <a:off x="700088" y="1165860"/>
-            <a:ext cx="10691812" cy="4796790"/>
-          </a:xfrm>
-        </p:spPr>
-        <p:txBody>
-          <a:bodyPr>
-            <a:noAutofit/>
-          </a:bodyPr>
-          <a:lstStyle/>
-          <a:p>
-            <a:pPr marL="0" indent="0" algn="just">
-              <a:buNone/>
-            </a:pPr>
-            <a:r>
-              <a:rPr lang="it-IT" dirty="0">
-                <a:solidFill>
-                  <a:srgbClr val="000000"/>
-                </a:solidFill>
-                <a:effectLst/>
-              </a:rPr>
-              <a:t>Il prezzo iniziale dell’asta è ottenuto come somma del prezzo degli articoli compresi nell’offerta. Lo stesso articolo non può essere incluso in aste diverse. Una volta venduto, un articolo non deve essere più disponibile per l’inserimento in ulteriori aste. La lista delle aste nella pagina VENDO è ordinata per </a:t>
-            </a:r>
-            <a:r>
-              <a:rPr lang="it-IT" dirty="0" err="1">
-                <a:solidFill>
-                  <a:srgbClr val="000000"/>
-                </a:solidFill>
-                <a:effectLst/>
-              </a:rPr>
-              <a:t>data+ora</a:t>
-            </a:r>
-            <a:r>
-              <a:rPr lang="it-IT" dirty="0">
-                <a:solidFill>
-                  <a:srgbClr val="000000"/>
-                </a:solidFill>
-                <a:effectLst/>
-              </a:rPr>
-              <a:t> crescente. L’elenco riporta: codice e nome degli articoli compresi nell’asta, offerta massima, tempo mancante (numero di giorni e ore) tra il momento (data ora) del login e la data e ora di chiusura dell’asta. Cliccando su un’asta nell’elenco compare una pagina DETTAGLIO ASTA che riporta per un’asta aperta tutti i dati dell’asta e la lista delle offerte (nome utente, prezzo offerto, data e ora dell’offerta) ordinata per </a:t>
-            </a:r>
-            <a:r>
-              <a:rPr lang="it-IT" dirty="0" err="1">
-                <a:solidFill>
-                  <a:srgbClr val="000000"/>
-                </a:solidFill>
-                <a:effectLst/>
-              </a:rPr>
-              <a:t>data+ora</a:t>
-            </a:r>
-            <a:r>
-              <a:rPr lang="it-IT" dirty="0">
-                <a:solidFill>
-                  <a:srgbClr val="000000"/>
-                </a:solidFill>
-                <a:effectLst/>
-              </a:rPr>
-              <a:t> decrescente. Un bottone CHIUDI permette all’utente di chiudere l’asta se è giunta l’ora della scadenza (si ignori il caso di aste scadute ma non chiuse dall’utente e non ci si occupi della chiusura automatica di aste dopo la scadenza). Se l’asta è chiusa, la pagina riporta tutti i dati dell’asta, il nome dell’aggiudicatario, il prezzo finale e l’indirizzo (fisso) di spedizione dell’utente. La pagina ACQUISTO contiene una </a:t>
-            </a:r>
-            <a:r>
-              <a:rPr lang="it-IT" dirty="0" err="1">
-                <a:solidFill>
-                  <a:srgbClr val="000000"/>
-                </a:solidFill>
-                <a:effectLst/>
-              </a:rPr>
-              <a:t>form</a:t>
-            </a:r>
-            <a:r>
-              <a:rPr lang="it-IT" dirty="0">
-                <a:solidFill>
-                  <a:srgbClr val="000000"/>
-                </a:solidFill>
-                <a:effectLst/>
-              </a:rPr>
-              <a:t> di ricerca per parola chiave.</a:t>
-            </a:r>
-            <a:endParaRPr lang="it-IT" dirty="0"/>
-          </a:p>
-        </p:txBody>
-      </p:sp>
-      <p:sp>
-        <p:nvSpPr>
-          <p:cNvPr id="6" name="CasellaDiTesto 5">
-            <a:extLst>
-              <a:ext uri="{FF2B5EF4-FFF2-40B4-BE49-F238E27FC236}">
-                <a16:creationId xmlns:a16="http://schemas.microsoft.com/office/drawing/2014/main" id="{9F5E4315-9BBB-035A-B542-F36FF7C8E298}"/>
-              </a:ext>
-            </a:extLst>
-          </p:cNvPr>
-          <p:cNvSpPr txBox="1"/>
-          <p:nvPr/>
-        </p:nvSpPr>
-        <p:spPr>
-          <a:xfrm>
-            <a:off x="700633" y="6252150"/>
-            <a:ext cx="3865289" cy="400110"/>
-          </a:xfrm>
-          <a:prstGeom prst="rect">
-            <a:avLst/>
-          </a:prstGeom>
-          <a:noFill/>
-        </p:spPr>
-        <p:txBody>
-          <a:bodyPr wrap="none" rtlCol="0">
-            <a:spAutoFit/>
-          </a:bodyPr>
-          <a:lstStyle/>
-          <a:p>
-            <a:r>
-              <a:rPr lang="it-IT" sz="2000" b="1" dirty="0" err="1">
-                <a:solidFill>
-                  <a:srgbClr val="FF0000"/>
-                </a:solidFill>
-              </a:rPr>
-              <a:t>Entities</a:t>
-            </a:r>
-            <a:r>
-              <a:rPr lang="it-IT" sz="2000" b="1" dirty="0"/>
-              <a:t>, </a:t>
-            </a:r>
-            <a:r>
-              <a:rPr lang="it-IT" sz="2000" b="1" dirty="0" err="1">
-                <a:solidFill>
-                  <a:srgbClr val="00B050"/>
-                </a:solidFill>
-              </a:rPr>
-              <a:t>attributes</a:t>
-            </a:r>
-            <a:r>
-              <a:rPr lang="it-IT" sz="2000" b="1" dirty="0"/>
-              <a:t>, </a:t>
-            </a:r>
-            <a:r>
-              <a:rPr lang="it-IT" sz="2000" b="1" dirty="0" err="1">
-                <a:solidFill>
-                  <a:srgbClr val="0070C0"/>
-                </a:solidFill>
-              </a:rPr>
-              <a:t>relationships</a:t>
-            </a:r>
-            <a:endParaRPr lang="it-IT" sz="2000" b="1" dirty="0">
-              <a:solidFill>
-                <a:srgbClr val="0070C0"/>
-              </a:solidFill>
-            </a:endParaRPr>
-          </a:p>
-        </p:txBody>
-      </p:sp>
-    </p:spTree>
-    <p:extLst>
-      <p:ext uri="{BB962C8B-B14F-4D97-AF65-F5344CB8AC3E}">
-        <p14:creationId xmlns:p14="http://schemas.microsoft.com/office/powerpoint/2010/main" val="973804671"/>
-      </p:ext>
-    </p:extLst>
-  </p:cSld>
-  <p:clrMapOvr>
-    <a:masterClrMapping/>
-  </p:clrMapOvr>
-</p:sld>
-</file>
-
-<file path=ppt/slides/slide30.xml><?xml version="1.0" encoding="utf-8"?>
+<file path=ppt/slides/slide29.xml><?xml version="1.0" encoding="utf-8"?>
 <p:sld xmlns:a="http://schemas.openxmlformats.org/drawingml/2006/main" xmlns:r="http://schemas.openxmlformats.org/officeDocument/2006/relationships" xmlns:p="http://schemas.openxmlformats.org/presentationml/2006/main">
   <p:cSld>
     <p:spTree>
@@ -12881,7 +11248,203 @@
 </p:sld>
 </file>
 
-<file path=ppt/slides/slide31.xml><?xml version="1.0" encoding="utf-8"?>
+<file path=ppt/slides/slide3.xml><?xml version="1.0" encoding="utf-8"?>
+<p:sld xmlns:a="http://schemas.openxmlformats.org/drawingml/2006/main" xmlns:r="http://schemas.openxmlformats.org/officeDocument/2006/relationships" xmlns:p="http://schemas.openxmlformats.org/presentationml/2006/main">
+  <p:cSld>
+    <p:spTree>
+      <p:nvGrpSpPr>
+        <p:cNvPr id="1" name=""/>
+        <p:cNvGrpSpPr/>
+        <p:nvPr/>
+      </p:nvGrpSpPr>
+      <p:grpSpPr>
+        <a:xfrm>
+          <a:off x="0" y="0"/>
+          <a:ext cx="0" cy="0"/>
+          <a:chOff x="0" y="0"/>
+          <a:chExt cx="0" cy="0"/>
+        </a:xfrm>
+      </p:grpSpPr>
+      <p:sp>
+        <p:nvSpPr>
+          <p:cNvPr id="5" name="Titolo 1">
+            <a:extLst>
+              <a:ext uri="{FF2B5EF4-FFF2-40B4-BE49-F238E27FC236}">
+                <a16:creationId xmlns:a16="http://schemas.microsoft.com/office/drawing/2014/main" id="{14D54F63-4782-0FEE-3101-BA1F31995533}"/>
+              </a:ext>
+            </a:extLst>
+          </p:cNvPr>
+          <p:cNvSpPr>
+            <a:spLocks noGrp="1"/>
+          </p:cNvSpPr>
+          <p:nvPr>
+            <p:ph idx="1"/>
+          </p:nvPr>
+        </p:nvSpPr>
+        <p:spPr>
+          <a:xfrm>
+            <a:off x="700088" y="1165860"/>
+            <a:ext cx="10691812" cy="4796790"/>
+          </a:xfrm>
+        </p:spPr>
+        <p:txBody>
+          <a:bodyPr>
+            <a:noAutofit/>
+          </a:bodyPr>
+          <a:lstStyle/>
+          <a:p>
+            <a:pPr marL="0" indent="0" algn="just">
+              <a:buNone/>
+            </a:pPr>
+            <a:r>
+              <a:rPr lang="it-IT" dirty="0">
+                <a:solidFill>
+                  <a:srgbClr val="000000"/>
+                </a:solidFill>
+                <a:effectLst/>
+              </a:rPr>
+              <a:t>Il prezzo iniziale dell’asta è ottenuto come somma del prezzo degli articoli compresi nell’offerta. Lo stesso articolo non può essere incluso in aste diverse. Una volta venduto, un articolo non deve essere più disponibile per l’inserimento in ulteriori aste. La lista delle aste nella pagina VENDO è ordinata per </a:t>
+            </a:r>
+            <a:r>
+              <a:rPr lang="it-IT" dirty="0" err="1">
+                <a:solidFill>
+                  <a:srgbClr val="000000"/>
+                </a:solidFill>
+                <a:effectLst/>
+              </a:rPr>
+              <a:t>data+ora</a:t>
+            </a:r>
+            <a:r>
+              <a:rPr lang="it-IT" dirty="0">
+                <a:solidFill>
+                  <a:srgbClr val="000000"/>
+                </a:solidFill>
+                <a:effectLst/>
+              </a:rPr>
+              <a:t> crescente. L’elenco riporta: codice e nome degli articoli compresi nell’asta, offerta massima, tempo mancante (numero di giorni e ore) tra il momento (data ora) del login e la data e ora di chiusura dell’asta. Cliccando su un’asta nell’elenco compare una pagina DETTAGLIO ASTA che riporta per un’asta aperta tutti i dati dell’asta e la lista delle offerte (nome utente, prezzo offerto, data e ora dell’offerta) ordinata per </a:t>
+            </a:r>
+            <a:r>
+              <a:rPr lang="it-IT" dirty="0" err="1">
+                <a:solidFill>
+                  <a:srgbClr val="000000"/>
+                </a:solidFill>
+                <a:effectLst/>
+              </a:rPr>
+              <a:t>data+ora</a:t>
+            </a:r>
+            <a:r>
+              <a:rPr lang="it-IT" dirty="0">
+                <a:solidFill>
+                  <a:srgbClr val="000000"/>
+                </a:solidFill>
+                <a:effectLst/>
+              </a:rPr>
+              <a:t> decrescente. Un bottone CHIUDI permette all’utente di chiudere l’asta se è giunta l’ora della scadenza (si ignori il caso di aste scadute ma non chiuse dall’utente e non ci si occupi della chiusura automatica di aste dopo la scadenza). Se l’asta è chiusa, la pagina riporta tutti i dati dell’asta, il nome dell’aggiudicatario, il prezzo finale e l’indirizzo (fisso) di spedizione dell’utente. La pagina ACQUISTO contiene una </a:t>
+            </a:r>
+            <a:r>
+              <a:rPr lang="it-IT" dirty="0" err="1">
+                <a:solidFill>
+                  <a:srgbClr val="000000"/>
+                </a:solidFill>
+                <a:effectLst/>
+              </a:rPr>
+              <a:t>form</a:t>
+            </a:r>
+            <a:r>
+              <a:rPr lang="it-IT" dirty="0">
+                <a:solidFill>
+                  <a:srgbClr val="000000"/>
+                </a:solidFill>
+                <a:effectLst/>
+              </a:rPr>
+              <a:t> di ricerca per parola chiave.</a:t>
+            </a:r>
+            <a:endParaRPr lang="it-IT" dirty="0"/>
+          </a:p>
+        </p:txBody>
+      </p:sp>
+      <p:sp>
+        <p:nvSpPr>
+          <p:cNvPr id="6" name="CasellaDiTesto 5">
+            <a:extLst>
+              <a:ext uri="{FF2B5EF4-FFF2-40B4-BE49-F238E27FC236}">
+                <a16:creationId xmlns:a16="http://schemas.microsoft.com/office/drawing/2014/main" id="{9F5E4315-9BBB-035A-B542-F36FF7C8E298}"/>
+              </a:ext>
+            </a:extLst>
+          </p:cNvPr>
+          <p:cNvSpPr txBox="1"/>
+          <p:nvPr/>
+        </p:nvSpPr>
+        <p:spPr>
+          <a:xfrm>
+            <a:off x="700633" y="6252150"/>
+            <a:ext cx="3865289" cy="400110"/>
+          </a:xfrm>
+          <a:prstGeom prst="rect">
+            <a:avLst/>
+          </a:prstGeom>
+          <a:noFill/>
+        </p:spPr>
+        <p:txBody>
+          <a:bodyPr wrap="none" rtlCol="0">
+            <a:spAutoFit/>
+          </a:bodyPr>
+          <a:lstStyle/>
+          <a:p>
+            <a:r>
+              <a:rPr lang="it-IT" sz="2000" b="1" dirty="0" err="1">
+                <a:solidFill>
+                  <a:srgbClr val="FF0000"/>
+                </a:solidFill>
+              </a:rPr>
+              <a:t>Entities</a:t>
+            </a:r>
+            <a:r>
+              <a:rPr lang="it-IT" sz="2000" b="1" dirty="0"/>
+              <a:t>, </a:t>
+            </a:r>
+            <a:r>
+              <a:rPr lang="it-IT" sz="2000" b="1" dirty="0" err="1">
+                <a:solidFill>
+                  <a:srgbClr val="00B050"/>
+                </a:solidFill>
+              </a:rPr>
+              <a:t>attributes</a:t>
+            </a:r>
+            <a:r>
+              <a:rPr lang="it-IT" sz="2000" b="1" dirty="0"/>
+              <a:t>, </a:t>
+            </a:r>
+            <a:r>
+              <a:rPr lang="it-IT" sz="2000" b="1" dirty="0" err="1">
+                <a:solidFill>
+                  <a:srgbClr val="0070C0"/>
+                </a:solidFill>
+              </a:rPr>
+              <a:t>relationships</a:t>
+            </a:r>
+            <a:endParaRPr lang="it-IT" sz="2000" b="1" dirty="0">
+              <a:solidFill>
+                <a:srgbClr val="0070C0"/>
+              </a:solidFill>
+            </a:endParaRPr>
+          </a:p>
+        </p:txBody>
+      </p:sp>
+    </p:spTree>
+    <p:extLst>
+      <p:ext uri="{BB962C8B-B14F-4D97-AF65-F5344CB8AC3E}">
+        <p14:creationId xmlns:p14="http://schemas.microsoft.com/office/powerpoint/2010/main" val="973804671"/>
+      </p:ext>
+    </p:extLst>
+  </p:cSld>
+  <p:clrMapOvr>
+    <a:masterClrMapping/>
+  </p:clrMapOvr>
+</p:sld>
+</file>
+
+<file path=ppt/slides/slide30.xml><?xml version="1.0" encoding="utf-8"?>
 <p:sld xmlns:a="http://schemas.openxmlformats.org/drawingml/2006/main" xmlns:r="http://schemas.openxmlformats.org/officeDocument/2006/relationships" xmlns:p="http://schemas.openxmlformats.org/presentationml/2006/main">
   <p:cSld>
     <p:spTree>
@@ -12975,7 +11538,7 @@
 </p:sld>
 </file>
 
-<file path=ppt/slides/slide32.xml><?xml version="1.0" encoding="utf-8"?>
+<file path=ppt/slides/slide31.xml><?xml version="1.0" encoding="utf-8"?>
 <p:sld xmlns:a="http://schemas.openxmlformats.org/drawingml/2006/main" xmlns:r="http://schemas.openxmlformats.org/officeDocument/2006/relationships" xmlns:p="http://schemas.openxmlformats.org/presentationml/2006/main">
   <p:cSld>
     <p:spTree>
@@ -13069,7 +11632,7 @@
 </p:sld>
 </file>
 
-<file path=ppt/slides/slide33.xml><?xml version="1.0" encoding="utf-8"?>
+<file path=ppt/slides/slide32.xml><?xml version="1.0" encoding="utf-8"?>
 <p:sld xmlns:a="http://schemas.openxmlformats.org/drawingml/2006/main" xmlns:r="http://schemas.openxmlformats.org/officeDocument/2006/relationships" xmlns:p="http://schemas.openxmlformats.org/presentationml/2006/main">
   <p:cSld>
     <p:spTree>
@@ -13163,7 +11726,7 @@
 </p:sld>
 </file>
 
-<file path=ppt/slides/slide34.xml><?xml version="1.0" encoding="utf-8"?>
+<file path=ppt/slides/slide33.xml><?xml version="1.0" encoding="utf-8"?>
 <p:sld xmlns:a="http://schemas.openxmlformats.org/drawingml/2006/main" xmlns:r="http://schemas.openxmlformats.org/officeDocument/2006/relationships" xmlns:p="http://schemas.openxmlformats.org/presentationml/2006/main">
   <p:cSld>
     <p:spTree>
@@ -13257,7 +11820,7 @@
 </p:sld>
 </file>
 
-<file path=ppt/slides/slide35.xml><?xml version="1.0" encoding="utf-8"?>
+<file path=ppt/slides/slide34.xml><?xml version="1.0" encoding="utf-8"?>
 <p:sld xmlns:a="http://schemas.openxmlformats.org/drawingml/2006/main" xmlns:r="http://schemas.openxmlformats.org/officeDocument/2006/relationships" xmlns:p="http://schemas.openxmlformats.org/presentationml/2006/main">
   <p:cSld>
     <p:spTree>
@@ -13353,7 +11916,7 @@
 </p:sld>
 </file>
 
-<file path=ppt/slides/slide36.xml><?xml version="1.0" encoding="utf-8"?>
+<file path=ppt/slides/slide35.xml><?xml version="1.0" encoding="utf-8"?>
 <p:sld xmlns:a="http://schemas.openxmlformats.org/drawingml/2006/main" xmlns:r="http://schemas.openxmlformats.org/officeDocument/2006/relationships" xmlns:p="http://schemas.openxmlformats.org/presentationml/2006/main">
   <p:cSld>
     <p:spTree>
@@ -13449,7 +12012,7 @@
 </p:sld>
 </file>
 
-<file path=ppt/slides/slide37.xml><?xml version="1.0" encoding="utf-8"?>
+<file path=ppt/slides/slide36.xml><?xml version="1.0" encoding="utf-8"?>
 <p:sld xmlns:a="http://schemas.openxmlformats.org/drawingml/2006/main" xmlns:r="http://schemas.openxmlformats.org/officeDocument/2006/relationships" xmlns:p="http://schemas.openxmlformats.org/presentationml/2006/main">
   <p:cSld>
     <p:spTree>
@@ -13543,7 +12106,7 @@
 </p:sld>
 </file>
 
-<file path=ppt/slides/slide38.xml><?xml version="1.0" encoding="utf-8"?>
+<file path=ppt/slides/slide37.xml><?xml version="1.0" encoding="utf-8"?>
 <p:sld xmlns:a="http://schemas.openxmlformats.org/drawingml/2006/main" xmlns:r="http://schemas.openxmlformats.org/officeDocument/2006/relationships" xmlns:p="http://schemas.openxmlformats.org/presentationml/2006/main">
   <p:cSld>
     <p:spTree>
@@ -13637,7 +12200,7 @@
 </p:sld>
 </file>
 
-<file path=ppt/slides/slide39.xml><?xml version="1.0" encoding="utf-8"?>
+<file path=ppt/slides/slide38.xml><?xml version="1.0" encoding="utf-8"?>
 <p:sld xmlns:a="http://schemas.openxmlformats.org/drawingml/2006/main" xmlns:r="http://schemas.openxmlformats.org/officeDocument/2006/relationships" xmlns:p="http://schemas.openxmlformats.org/presentationml/2006/main">
   <p:cSld>
     <p:spTree>
@@ -13733,254 +12296,7 @@
 </p:sld>
 </file>
 
-<file path=ppt/slides/slide4.xml><?xml version="1.0" encoding="utf-8"?>
-<p:sld xmlns:a="http://schemas.openxmlformats.org/drawingml/2006/main" xmlns:r="http://schemas.openxmlformats.org/officeDocument/2006/relationships" xmlns:p="http://schemas.openxmlformats.org/presentationml/2006/main">
-  <p:cSld>
-    <p:spTree>
-      <p:nvGrpSpPr>
-        <p:cNvPr id="1" name=""/>
-        <p:cNvGrpSpPr/>
-        <p:nvPr/>
-      </p:nvGrpSpPr>
-      <p:grpSpPr>
-        <a:xfrm>
-          <a:off x="0" y="0"/>
-          <a:ext cx="0" cy="0"/>
-          <a:chOff x="0" y="0"/>
-          <a:chExt cx="0" cy="0"/>
-        </a:xfrm>
-      </p:grpSpPr>
-      <p:sp>
-        <p:nvSpPr>
-          <p:cNvPr id="4" name="Titolo 1">
-            <a:extLst>
-              <a:ext uri="{FF2B5EF4-FFF2-40B4-BE49-F238E27FC236}">
-                <a16:creationId xmlns:a16="http://schemas.microsoft.com/office/drawing/2014/main" id="{69ABF3D7-38F2-52AA-2192-66F1D661F6A2}"/>
-              </a:ext>
-            </a:extLst>
-          </p:cNvPr>
-          <p:cNvSpPr>
-            <a:spLocks noGrp="1"/>
-          </p:cNvSpPr>
-          <p:nvPr>
-            <p:ph idx="1"/>
-          </p:nvPr>
-        </p:nvSpPr>
-        <p:spPr>
-          <a:xfrm>
-            <a:off x="700088" y="1634490"/>
-            <a:ext cx="10691812" cy="4328160"/>
-          </a:xfrm>
-        </p:spPr>
-        <p:txBody>
-          <a:bodyPr>
-            <a:noAutofit/>
-          </a:bodyPr>
-          <a:lstStyle/>
-          <a:p>
-            <a:pPr marL="0" indent="0" algn="just">
-              <a:buNone/>
-            </a:pPr>
-            <a:r>
-              <a:rPr lang="it-IT" dirty="0">
-                <a:solidFill>
-                  <a:srgbClr val="000000"/>
-                </a:solidFill>
-                <a:effectLst/>
-              </a:rPr>
-              <a:t>Quando l’acquirente invia una parola chiave la pagina ACQUISTO è aggiornata e mostra un elenco di aste aperte (la cui scadenza è posteriore alla data e ora dell’invio) per cui la parola chiave compare nel nome o nella descrizione di almeno uno degli articoli dell’asta. La lista è ordinata in modo decrescente in base al tempo (numero di giorni e ore) mancante alla chiusura. Cliccando su un’asta aperta compare la pagina OFFERTA che mostra i dati degli articoli, l’elenco delle </a:t>
-            </a:r>
-            <a:r>
-              <a:rPr lang="it-IT" b="1" dirty="0">
-                <a:solidFill>
-                  <a:srgbClr val="FF0000"/>
-                </a:solidFill>
-                <a:effectLst/>
-              </a:rPr>
-              <a:t>offerte</a:t>
-            </a:r>
-            <a:r>
-              <a:rPr lang="it-IT" dirty="0">
-                <a:solidFill>
-                  <a:srgbClr val="000000"/>
-                </a:solidFill>
-                <a:effectLst/>
-              </a:rPr>
-              <a:t> pervenute in ordine di </a:t>
-            </a:r>
-            <a:r>
-              <a:rPr lang="it-IT" dirty="0" err="1">
-                <a:solidFill>
-                  <a:srgbClr val="000000"/>
-                </a:solidFill>
-                <a:effectLst/>
-              </a:rPr>
-              <a:t>data+ora</a:t>
-            </a:r>
-            <a:r>
-              <a:rPr lang="it-IT" dirty="0">
-                <a:solidFill>
-                  <a:srgbClr val="000000"/>
-                </a:solidFill>
-                <a:effectLst/>
-              </a:rPr>
-              <a:t> decrescente e un campo di input per inserire la propria offerta, che deve essere superiore all’offerta massima corrente di un importo pari almeno al rialzo minimo. Dopo l’invio dell’offerta la pagina OFFERTA mostra l’elenco delle offerte aggiornate. La pagina ACQUISTO contiene anche un elenco delle offerte aggiudicate all’utente con i dati degli articoli e il prezzo finale.</a:t>
-            </a:r>
-          </a:p>
-          <a:p>
-            <a:pPr marL="0" indent="0" algn="just">
-              <a:buNone/>
-            </a:pPr>
-            <a:endParaRPr lang="it-IT" dirty="0"/>
-          </a:p>
-        </p:txBody>
-      </p:sp>
-      <p:sp>
-        <p:nvSpPr>
-          <p:cNvPr id="6" name="CasellaDiTesto 5">
-            <a:extLst>
-              <a:ext uri="{FF2B5EF4-FFF2-40B4-BE49-F238E27FC236}">
-                <a16:creationId xmlns:a16="http://schemas.microsoft.com/office/drawing/2014/main" id="{C38F1E2E-7AC3-A666-87FD-EF4F90B77824}"/>
-              </a:ext>
-            </a:extLst>
-          </p:cNvPr>
-          <p:cNvSpPr txBox="1"/>
-          <p:nvPr/>
-        </p:nvSpPr>
-        <p:spPr>
-          <a:xfrm>
-            <a:off x="1794510" y="1028700"/>
-            <a:ext cx="184731" cy="369332"/>
-          </a:xfrm>
-          <a:prstGeom prst="rect">
-            <a:avLst/>
-          </a:prstGeom>
-          <a:noFill/>
-        </p:spPr>
-        <p:txBody>
-          <a:bodyPr wrap="none" rtlCol="0">
-            <a:spAutoFit/>
-          </a:bodyPr>
-          <a:lstStyle/>
-          <a:p>
-            <a:endParaRPr lang="it-IT" dirty="0"/>
-          </a:p>
-        </p:txBody>
-      </p:sp>
-      <p:sp>
-        <p:nvSpPr>
-          <p:cNvPr id="7" name="CasellaDiTesto 6">
-            <a:extLst>
-              <a:ext uri="{FF2B5EF4-FFF2-40B4-BE49-F238E27FC236}">
-                <a16:creationId xmlns:a16="http://schemas.microsoft.com/office/drawing/2014/main" id="{A4DED0D4-59E8-EB93-D4C2-51A9E6A35AEA}"/>
-              </a:ext>
-            </a:extLst>
-          </p:cNvPr>
-          <p:cNvSpPr txBox="1"/>
-          <p:nvPr/>
-        </p:nvSpPr>
-        <p:spPr>
-          <a:xfrm>
-            <a:off x="857250" y="937260"/>
-            <a:ext cx="184731" cy="369332"/>
-          </a:xfrm>
-          <a:prstGeom prst="rect">
-            <a:avLst/>
-          </a:prstGeom>
-          <a:noFill/>
-        </p:spPr>
-        <p:txBody>
-          <a:bodyPr wrap="none" rtlCol="0">
-            <a:spAutoFit/>
-          </a:bodyPr>
-          <a:lstStyle/>
-          <a:p>
-            <a:endParaRPr lang="it-IT" dirty="0"/>
-          </a:p>
-        </p:txBody>
-      </p:sp>
-      <p:sp>
-        <p:nvSpPr>
-          <p:cNvPr id="11" name="CasellaDiTesto 10">
-            <a:extLst>
-              <a:ext uri="{FF2B5EF4-FFF2-40B4-BE49-F238E27FC236}">
-                <a16:creationId xmlns:a16="http://schemas.microsoft.com/office/drawing/2014/main" id="{9D765ECA-6A9A-AF5A-D7C1-411337FF504B}"/>
-              </a:ext>
-            </a:extLst>
-          </p:cNvPr>
-          <p:cNvSpPr txBox="1"/>
-          <p:nvPr/>
-        </p:nvSpPr>
-        <p:spPr>
-          <a:xfrm>
-            <a:off x="700633" y="6252150"/>
-            <a:ext cx="3865289" cy="400110"/>
-          </a:xfrm>
-          <a:prstGeom prst="rect">
-            <a:avLst/>
-          </a:prstGeom>
-          <a:noFill/>
-        </p:spPr>
-        <p:txBody>
-          <a:bodyPr wrap="none" rtlCol="0">
-            <a:spAutoFit/>
-          </a:bodyPr>
-          <a:lstStyle/>
-          <a:p>
-            <a:r>
-              <a:rPr lang="it-IT" sz="2000" b="1" dirty="0" err="1">
-                <a:solidFill>
-                  <a:srgbClr val="FF0000"/>
-                </a:solidFill>
-              </a:rPr>
-              <a:t>Entities</a:t>
-            </a:r>
-            <a:r>
-              <a:rPr lang="it-IT" sz="2000" b="1" dirty="0"/>
-              <a:t>, </a:t>
-            </a:r>
-            <a:r>
-              <a:rPr lang="it-IT" sz="2000" b="1" dirty="0" err="1">
-                <a:solidFill>
-                  <a:srgbClr val="00B050"/>
-                </a:solidFill>
-              </a:rPr>
-              <a:t>attributes</a:t>
-            </a:r>
-            <a:r>
-              <a:rPr lang="it-IT" sz="2000" b="1" dirty="0"/>
-              <a:t>, </a:t>
-            </a:r>
-            <a:r>
-              <a:rPr lang="it-IT" sz="2000" b="1" dirty="0" err="1">
-                <a:solidFill>
-                  <a:srgbClr val="0070C0"/>
-                </a:solidFill>
-              </a:rPr>
-              <a:t>relationships</a:t>
-            </a:r>
-            <a:endParaRPr lang="it-IT" sz="2000" b="1" dirty="0">
-              <a:solidFill>
-                <a:srgbClr val="0070C0"/>
-              </a:solidFill>
-            </a:endParaRPr>
-          </a:p>
-        </p:txBody>
-      </p:sp>
-    </p:spTree>
-    <p:extLst>
-      <p:ext uri="{BB962C8B-B14F-4D97-AF65-F5344CB8AC3E}">
-        <p14:creationId xmlns:p14="http://schemas.microsoft.com/office/powerpoint/2010/main" val="1561828668"/>
-      </p:ext>
-    </p:extLst>
-  </p:cSld>
-  <p:clrMapOvr>
-    <a:masterClrMapping/>
-  </p:clrMapOvr>
-</p:sld>
-</file>
-
-<file path=ppt/slides/slide40.xml><?xml version="1.0" encoding="utf-8"?>
+<file path=ppt/slides/slide39.xml><?xml version="1.0" encoding="utf-8"?>
 <p:sld xmlns:a="http://schemas.openxmlformats.org/drawingml/2006/main" xmlns:r="http://schemas.openxmlformats.org/officeDocument/2006/relationships" xmlns:p="http://schemas.openxmlformats.org/presentationml/2006/main">
   <p:cSld>
     <p:spTree>
@@ -14074,7 +12390,254 @@
 </p:sld>
 </file>
 
-<file path=ppt/slides/slide41.xml><?xml version="1.0" encoding="utf-8"?>
+<file path=ppt/slides/slide4.xml><?xml version="1.0" encoding="utf-8"?>
+<p:sld xmlns:a="http://schemas.openxmlformats.org/drawingml/2006/main" xmlns:r="http://schemas.openxmlformats.org/officeDocument/2006/relationships" xmlns:p="http://schemas.openxmlformats.org/presentationml/2006/main">
+  <p:cSld>
+    <p:spTree>
+      <p:nvGrpSpPr>
+        <p:cNvPr id="1" name=""/>
+        <p:cNvGrpSpPr/>
+        <p:nvPr/>
+      </p:nvGrpSpPr>
+      <p:grpSpPr>
+        <a:xfrm>
+          <a:off x="0" y="0"/>
+          <a:ext cx="0" cy="0"/>
+          <a:chOff x="0" y="0"/>
+          <a:chExt cx="0" cy="0"/>
+        </a:xfrm>
+      </p:grpSpPr>
+      <p:sp>
+        <p:nvSpPr>
+          <p:cNvPr id="4" name="Titolo 1">
+            <a:extLst>
+              <a:ext uri="{FF2B5EF4-FFF2-40B4-BE49-F238E27FC236}">
+                <a16:creationId xmlns:a16="http://schemas.microsoft.com/office/drawing/2014/main" id="{69ABF3D7-38F2-52AA-2192-66F1D661F6A2}"/>
+              </a:ext>
+            </a:extLst>
+          </p:cNvPr>
+          <p:cNvSpPr>
+            <a:spLocks noGrp="1"/>
+          </p:cNvSpPr>
+          <p:nvPr>
+            <p:ph idx="1"/>
+          </p:nvPr>
+        </p:nvSpPr>
+        <p:spPr>
+          <a:xfrm>
+            <a:off x="700088" y="1634490"/>
+            <a:ext cx="10691812" cy="4328160"/>
+          </a:xfrm>
+        </p:spPr>
+        <p:txBody>
+          <a:bodyPr>
+            <a:noAutofit/>
+          </a:bodyPr>
+          <a:lstStyle/>
+          <a:p>
+            <a:pPr marL="0" indent="0" algn="just">
+              <a:buNone/>
+            </a:pPr>
+            <a:r>
+              <a:rPr lang="it-IT" dirty="0">
+                <a:solidFill>
+                  <a:srgbClr val="000000"/>
+                </a:solidFill>
+                <a:effectLst/>
+              </a:rPr>
+              <a:t>Quando l’acquirente invia una parola chiave la pagina ACQUISTO è aggiornata e mostra un elenco di aste aperte (la cui scadenza è posteriore alla data e ora dell’invio) per cui la parola chiave compare nel nome o nella descrizione di almeno uno degli articoli dell’asta. La lista è ordinata in modo decrescente in base al tempo (numero di giorni e ore) mancante alla chiusura. Cliccando su un’asta aperta compare la pagina OFFERTA che mostra i dati degli articoli, l’elenco delle </a:t>
+            </a:r>
+            <a:r>
+              <a:rPr lang="it-IT" b="1" dirty="0">
+                <a:solidFill>
+                  <a:srgbClr val="FF0000"/>
+                </a:solidFill>
+                <a:effectLst/>
+              </a:rPr>
+              <a:t>offerte</a:t>
+            </a:r>
+            <a:r>
+              <a:rPr lang="it-IT" dirty="0">
+                <a:solidFill>
+                  <a:srgbClr val="000000"/>
+                </a:solidFill>
+                <a:effectLst/>
+              </a:rPr>
+              <a:t> pervenute in ordine di </a:t>
+            </a:r>
+            <a:r>
+              <a:rPr lang="it-IT" dirty="0" err="1">
+                <a:solidFill>
+                  <a:srgbClr val="000000"/>
+                </a:solidFill>
+                <a:effectLst/>
+              </a:rPr>
+              <a:t>data+ora</a:t>
+            </a:r>
+            <a:r>
+              <a:rPr lang="it-IT" dirty="0">
+                <a:solidFill>
+                  <a:srgbClr val="000000"/>
+                </a:solidFill>
+                <a:effectLst/>
+              </a:rPr>
+              <a:t> decrescente e un campo di input per inserire la propria offerta, che deve essere superiore all’offerta massima corrente di un importo pari almeno al rialzo minimo. Dopo l’invio dell’offerta la pagina OFFERTA mostra l’elenco delle offerte aggiornate. La pagina ACQUISTO contiene anche un elenco delle offerte aggiudicate all’utente con i dati degli articoli e il prezzo finale.</a:t>
+            </a:r>
+          </a:p>
+          <a:p>
+            <a:pPr marL="0" indent="0" algn="just">
+              <a:buNone/>
+            </a:pPr>
+            <a:endParaRPr lang="it-IT" dirty="0"/>
+          </a:p>
+        </p:txBody>
+      </p:sp>
+      <p:sp>
+        <p:nvSpPr>
+          <p:cNvPr id="6" name="CasellaDiTesto 5">
+            <a:extLst>
+              <a:ext uri="{FF2B5EF4-FFF2-40B4-BE49-F238E27FC236}">
+                <a16:creationId xmlns:a16="http://schemas.microsoft.com/office/drawing/2014/main" id="{C38F1E2E-7AC3-A666-87FD-EF4F90B77824}"/>
+              </a:ext>
+            </a:extLst>
+          </p:cNvPr>
+          <p:cNvSpPr txBox="1"/>
+          <p:nvPr/>
+        </p:nvSpPr>
+        <p:spPr>
+          <a:xfrm>
+            <a:off x="1794510" y="1028700"/>
+            <a:ext cx="184731" cy="369332"/>
+          </a:xfrm>
+          <a:prstGeom prst="rect">
+            <a:avLst/>
+          </a:prstGeom>
+          <a:noFill/>
+        </p:spPr>
+        <p:txBody>
+          <a:bodyPr wrap="none" rtlCol="0">
+            <a:spAutoFit/>
+          </a:bodyPr>
+          <a:lstStyle/>
+          <a:p>
+            <a:endParaRPr lang="it-IT" dirty="0"/>
+          </a:p>
+        </p:txBody>
+      </p:sp>
+      <p:sp>
+        <p:nvSpPr>
+          <p:cNvPr id="7" name="CasellaDiTesto 6">
+            <a:extLst>
+              <a:ext uri="{FF2B5EF4-FFF2-40B4-BE49-F238E27FC236}">
+                <a16:creationId xmlns:a16="http://schemas.microsoft.com/office/drawing/2014/main" id="{A4DED0D4-59E8-EB93-D4C2-51A9E6A35AEA}"/>
+              </a:ext>
+            </a:extLst>
+          </p:cNvPr>
+          <p:cNvSpPr txBox="1"/>
+          <p:nvPr/>
+        </p:nvSpPr>
+        <p:spPr>
+          <a:xfrm>
+            <a:off x="857250" y="937260"/>
+            <a:ext cx="184731" cy="369332"/>
+          </a:xfrm>
+          <a:prstGeom prst="rect">
+            <a:avLst/>
+          </a:prstGeom>
+          <a:noFill/>
+        </p:spPr>
+        <p:txBody>
+          <a:bodyPr wrap="none" rtlCol="0">
+            <a:spAutoFit/>
+          </a:bodyPr>
+          <a:lstStyle/>
+          <a:p>
+            <a:endParaRPr lang="it-IT" dirty="0"/>
+          </a:p>
+        </p:txBody>
+      </p:sp>
+      <p:sp>
+        <p:nvSpPr>
+          <p:cNvPr id="11" name="CasellaDiTesto 10">
+            <a:extLst>
+              <a:ext uri="{FF2B5EF4-FFF2-40B4-BE49-F238E27FC236}">
+                <a16:creationId xmlns:a16="http://schemas.microsoft.com/office/drawing/2014/main" id="{9D765ECA-6A9A-AF5A-D7C1-411337FF504B}"/>
+              </a:ext>
+            </a:extLst>
+          </p:cNvPr>
+          <p:cNvSpPr txBox="1"/>
+          <p:nvPr/>
+        </p:nvSpPr>
+        <p:spPr>
+          <a:xfrm>
+            <a:off x="700633" y="6252150"/>
+            <a:ext cx="3865289" cy="400110"/>
+          </a:xfrm>
+          <a:prstGeom prst="rect">
+            <a:avLst/>
+          </a:prstGeom>
+          <a:noFill/>
+        </p:spPr>
+        <p:txBody>
+          <a:bodyPr wrap="none" rtlCol="0">
+            <a:spAutoFit/>
+          </a:bodyPr>
+          <a:lstStyle/>
+          <a:p>
+            <a:r>
+              <a:rPr lang="it-IT" sz="2000" b="1" dirty="0" err="1">
+                <a:solidFill>
+                  <a:srgbClr val="FF0000"/>
+                </a:solidFill>
+              </a:rPr>
+              <a:t>Entities</a:t>
+            </a:r>
+            <a:r>
+              <a:rPr lang="it-IT" sz="2000" b="1" dirty="0"/>
+              <a:t>, </a:t>
+            </a:r>
+            <a:r>
+              <a:rPr lang="it-IT" sz="2000" b="1" dirty="0" err="1">
+                <a:solidFill>
+                  <a:srgbClr val="00B050"/>
+                </a:solidFill>
+              </a:rPr>
+              <a:t>attributes</a:t>
+            </a:r>
+            <a:r>
+              <a:rPr lang="it-IT" sz="2000" b="1" dirty="0"/>
+              <a:t>, </a:t>
+            </a:r>
+            <a:r>
+              <a:rPr lang="it-IT" sz="2000" b="1" dirty="0" err="1">
+                <a:solidFill>
+                  <a:srgbClr val="0070C0"/>
+                </a:solidFill>
+              </a:rPr>
+              <a:t>relationships</a:t>
+            </a:r>
+            <a:endParaRPr lang="it-IT" sz="2000" b="1" dirty="0">
+              <a:solidFill>
+                <a:srgbClr val="0070C0"/>
+              </a:solidFill>
+            </a:endParaRPr>
+          </a:p>
+        </p:txBody>
+      </p:sp>
+    </p:spTree>
+    <p:extLst>
+      <p:ext uri="{BB962C8B-B14F-4D97-AF65-F5344CB8AC3E}">
+        <p14:creationId xmlns:p14="http://schemas.microsoft.com/office/powerpoint/2010/main" val="1561828668"/>
+      </p:ext>
+    </p:extLst>
+  </p:cSld>
+  <p:clrMapOvr>
+    <a:masterClrMapping/>
+  </p:clrMapOvr>
+</p:sld>
+</file>
+
+<file path=ppt/slides/slide40.xml><?xml version="1.0" encoding="utf-8"?>
 <p:sld xmlns:a="http://schemas.openxmlformats.org/drawingml/2006/main" xmlns:r="http://schemas.openxmlformats.org/officeDocument/2006/relationships" xmlns:p="http://schemas.openxmlformats.org/presentationml/2006/main">
   <p:cSld>
     <p:spTree>
@@ -14168,7 +12731,7 @@
 </p:sld>
 </file>
 
-<file path=ppt/slides/slide42.xml><?xml version="1.0" encoding="utf-8"?>
+<file path=ppt/slides/slide41.xml><?xml version="1.0" encoding="utf-8"?>
 <p:sld xmlns:a="http://schemas.openxmlformats.org/drawingml/2006/main" xmlns:r="http://schemas.openxmlformats.org/officeDocument/2006/relationships" xmlns:p="http://schemas.openxmlformats.org/presentationml/2006/main">
   <p:cSld>
     <p:spTree>
@@ -14262,7 +12825,7 @@
 </p:sld>
 </file>
 
-<file path=ppt/slides/slide43.xml><?xml version="1.0" encoding="utf-8"?>
+<file path=ppt/slides/slide42.xml><?xml version="1.0" encoding="utf-8"?>
 <p:sld xmlns:a="http://schemas.openxmlformats.org/drawingml/2006/main" xmlns:r="http://schemas.openxmlformats.org/officeDocument/2006/relationships" xmlns:p="http://schemas.openxmlformats.org/presentationml/2006/main">
   <p:cSld>
     <p:spTree>
@@ -14356,7 +12919,7 @@
 </p:sld>
 </file>
 
-<file path=ppt/slides/slide44.xml><?xml version="1.0" encoding="utf-8"?>
+<file path=ppt/slides/slide43.xml><?xml version="1.0" encoding="utf-8"?>
 <p:sld xmlns:a="http://schemas.openxmlformats.org/drawingml/2006/main" xmlns:r="http://schemas.openxmlformats.org/officeDocument/2006/relationships" xmlns:p="http://schemas.openxmlformats.org/presentationml/2006/main">
   <p:cSld>
     <p:spTree>

--- a/deliverables/PresentazioneProgettoTIW.pptx
+++ b/deliverables/PresentazioneProgettoTIW.pptx
@@ -8935,7 +8935,7 @@
             </a:r>
             <a:r>
               <a:rPr lang="it-IT" altLang="it-IT" sz="1200" dirty="0"/>
-              <a:t> → invia un nuovo articolo al server</a:t>
+              <a:t> → aggiunge un nuovo articolo al database</a:t>
             </a:r>
             <a:endParaRPr lang="it-IT" altLang="it-IT" sz="1200" dirty="0">
               <a:latin typeface="Arial" panose="020B0604020202020204" pitchFamily="34" charset="0"/>
@@ -9902,7 +9902,7 @@
             </a:r>
             <a:r>
               <a:rPr lang="it-IT" altLang="it-IT" sz="1200" dirty="0"/>
-              <a:t> → aggiunge una riga asta trovata in tabella</a:t>
+              <a:t> → aggiunge un’asta alla tabella delle aste</a:t>
             </a:r>
             <a:endParaRPr lang="it-IT" altLang="it-IT" sz="1200" dirty="0">
               <a:latin typeface="Arial" panose="020B0604020202020204" pitchFamily="34" charset="0"/>
@@ -10301,7 +10301,7 @@
             </a:r>
             <a:r>
               <a:rPr lang="it-IT" altLang="it-IT" sz="1200" dirty="0"/>
-              <a:t> → aggiunge un’offerta alla tabella offerte</a:t>
+              <a:t> → aggiunge un’offerta alla tabella offerta</a:t>
             </a:r>
             <a:endParaRPr lang="it-IT" altLang="it-IT" sz="1200" dirty="0">
               <a:latin typeface="Arial" panose="020B0604020202020204" pitchFamily="34" charset="0"/>

--- a/deliverables/PresentazioneProgettoTIW.pptx
+++ b/deliverables/PresentazioneProgettoTIW.pptx
@@ -17,7 +17,7 @@
     <p:sldId id="263" r:id="rId11"/>
     <p:sldId id="264" r:id="rId12"/>
     <p:sldId id="266" r:id="rId13"/>
-    <p:sldId id="270" r:id="rId14"/>
+    <p:sldId id="302" r:id="rId14"/>
     <p:sldId id="271" r:id="rId15"/>
     <p:sldId id="272" r:id="rId16"/>
     <p:sldId id="273" r:id="rId17"/>
@@ -29,25 +29,25 @@
     <p:sldId id="279" r:id="rId23"/>
     <p:sldId id="280" r:id="rId24"/>
     <p:sldId id="281" r:id="rId25"/>
-    <p:sldId id="282" r:id="rId26"/>
-    <p:sldId id="283" r:id="rId27"/>
-    <p:sldId id="284" r:id="rId28"/>
-    <p:sldId id="285" r:id="rId29"/>
-    <p:sldId id="286" r:id="rId30"/>
-    <p:sldId id="287" r:id="rId31"/>
+    <p:sldId id="284" r:id="rId26"/>
+    <p:sldId id="286" r:id="rId27"/>
+    <p:sldId id="282" r:id="rId28"/>
+    <p:sldId id="287" r:id="rId29"/>
+    <p:sldId id="283" r:id="rId30"/>
+    <p:sldId id="290" r:id="rId31"/>
     <p:sldId id="288" r:id="rId32"/>
-    <p:sldId id="289" r:id="rId33"/>
-    <p:sldId id="290" r:id="rId34"/>
+    <p:sldId id="285" r:id="rId33"/>
+    <p:sldId id="289" r:id="rId34"/>
     <p:sldId id="291" r:id="rId35"/>
     <p:sldId id="292" r:id="rId36"/>
-    <p:sldId id="293" r:id="rId37"/>
+    <p:sldId id="300" r:id="rId37"/>
     <p:sldId id="294" r:id="rId38"/>
-    <p:sldId id="295" r:id="rId39"/>
-    <p:sldId id="296" r:id="rId40"/>
-    <p:sldId id="297" r:id="rId41"/>
-    <p:sldId id="298" r:id="rId42"/>
-    <p:sldId id="299" r:id="rId43"/>
-    <p:sldId id="300" r:id="rId44"/>
+    <p:sldId id="299" r:id="rId39"/>
+    <p:sldId id="293" r:id="rId40"/>
+    <p:sldId id="296" r:id="rId41"/>
+    <p:sldId id="297" r:id="rId42"/>
+    <p:sldId id="295" r:id="rId43"/>
+    <p:sldId id="298" r:id="rId44"/>
   </p:sldIdLst>
   <p:sldSz cx="12192000" cy="6858000"/>
   <p:notesSz cx="6858000" cy="9144000"/>
@@ -307,7 +307,7 @@
           <a:p>
             <a:fld id="{D1D1EADE-8E88-4C7C-8AC5-FB148DE4940E}" type="datetime1">
               <a:rPr lang="en-US" smtClean="0"/>
-              <a:t>8/24/2025</a:t>
+              <a:t>8/24/25</a:t>
             </a:fld>
             <a:endParaRPr lang="en-US"/>
           </a:p>
@@ -507,7 +507,7 @@
           <a:p>
             <a:fld id="{EC3C8B9C-477D-492A-96AD-1FC2CC997A73}" type="datetime1">
               <a:rPr lang="en-US" smtClean="0"/>
-              <a:t>8/24/2025</a:t>
+              <a:t>8/24/25</a:t>
             </a:fld>
             <a:endParaRPr lang="en-US"/>
           </a:p>
@@ -717,7 +717,7 @@
           <a:p>
             <a:fld id="{42D3AED5-E26D-4E29-B1B3-7847B6779594}" type="datetime1">
               <a:rPr lang="en-US" smtClean="0"/>
-              <a:t>8/24/2025</a:t>
+              <a:t>8/24/25</a:t>
             </a:fld>
             <a:endParaRPr lang="en-US"/>
           </a:p>
@@ -917,7 +917,7 @@
           <a:p>
             <a:fld id="{157B6794-849E-4626-908B-D15793550EFB}" type="datetime1">
               <a:rPr lang="en-US" smtClean="0"/>
-              <a:t>8/24/2025</a:t>
+              <a:t>8/24/25</a:t>
             </a:fld>
             <a:endParaRPr lang="en-US"/>
           </a:p>
@@ -1193,7 +1193,7 @@
           <a:p>
             <a:fld id="{63DB64E7-5594-42A3-ADBF-E95A7ACEAD64}" type="datetime1">
               <a:rPr lang="en-US" smtClean="0"/>
-              <a:t>8/24/2025</a:t>
+              <a:t>8/24/25</a:t>
             </a:fld>
             <a:endParaRPr lang="en-US"/>
           </a:p>
@@ -1466,7 +1466,7 @@
           <a:p>
             <a:fld id="{18462B0B-D248-4FFB-8695-AD7FA4B1284A}" type="datetime1">
               <a:rPr lang="en-US" smtClean="0"/>
-              <a:t>8/24/2025</a:t>
+              <a:t>8/24/25</a:t>
             </a:fld>
             <a:endParaRPr lang="en-US"/>
           </a:p>
@@ -1889,7 +1889,7 @@
           <a:p>
             <a:fld id="{D0378EFB-9159-4510-B73F-4F0409ADE937}" type="datetime1">
               <a:rPr lang="en-US" smtClean="0"/>
-              <a:t>8/24/2025</a:t>
+              <a:t>8/24/25</a:t>
             </a:fld>
             <a:endParaRPr lang="en-US"/>
           </a:p>
@@ -2031,7 +2031,7 @@
           <a:p>
             <a:fld id="{89BC9412-2452-4BED-A324-9D8C115361AD}" type="datetime1">
               <a:rPr lang="en-US" smtClean="0"/>
-              <a:t>8/24/2025</a:t>
+              <a:t>8/24/25</a:t>
             </a:fld>
             <a:endParaRPr lang="en-US"/>
           </a:p>
@@ -2144,7 +2144,7 @@
           <a:p>
             <a:fld id="{F5318F62-D251-40E8-A23C-F4CFE9FEAB41}" type="datetime1">
               <a:rPr lang="en-US" smtClean="0"/>
-              <a:t>8/24/2025</a:t>
+              <a:t>8/24/25</a:t>
             </a:fld>
             <a:endParaRPr lang="en-US"/>
           </a:p>
@@ -2457,7 +2457,7 @@
           <a:p>
             <a:fld id="{44F76144-149E-4874-93A5-554A0357CF82}" type="datetime1">
               <a:rPr lang="en-US" smtClean="0"/>
-              <a:t>8/24/2025</a:t>
+              <a:t>8/24/25</a:t>
             </a:fld>
             <a:endParaRPr lang="en-US"/>
           </a:p>
@@ -2750,7 +2750,7 @@
           <a:p>
             <a:fld id="{50BA65D8-0540-4835-AE5C-25D29DBA01BE}" type="datetime1">
               <a:rPr lang="en-US" smtClean="0"/>
-              <a:t>8/24/2025</a:t>
+              <a:t>8/24/25</a:t>
             </a:fld>
             <a:endParaRPr lang="en-US"/>
           </a:p>
@@ -2992,7 +2992,7 @@
           <a:p>
             <a:fld id="{E31BA835-12AC-4E8F-955A-EA3F4DE2791F}" type="datetime1">
               <a:rPr lang="en-US" smtClean="0"/>
-              <a:t>8/24/2025</a:t>
+              <a:t>8/24/25</a:t>
             </a:fld>
             <a:endParaRPr lang="en-US"/>
           </a:p>
@@ -5473,7 +5473,13 @@
   <p:cSld>
     <p:spTree>
       <p:nvGrpSpPr>
-        <p:cNvPr id="1" name=""/>
+        <p:cNvPr id="1" name="">
+          <a:extLst>
+            <a:ext uri="{FF2B5EF4-FFF2-40B4-BE49-F238E27FC236}">
+              <a16:creationId xmlns:a16="http://schemas.microsoft.com/office/drawing/2014/main" id="{25C6C626-0A71-34D6-296E-BA49E89BC1CB}"/>
+            </a:ext>
+          </a:extLst>
+        </p:cNvPr>
         <p:cNvGrpSpPr/>
         <p:nvPr/>
       </p:nvGrpSpPr>
@@ -5487,10 +5493,10 @@
       </p:grpSpPr>
       <p:pic>
         <p:nvPicPr>
-          <p:cNvPr id="6" name="Segnaposto contenuto 5">
-            <a:extLst>
-              <a:ext uri="{FF2B5EF4-FFF2-40B4-BE49-F238E27FC236}">
-                <a16:creationId xmlns:a16="http://schemas.microsoft.com/office/drawing/2014/main" id="{725FDD80-0DBC-8DE6-AEA2-B9ECE3812C44}"/>
+          <p:cNvPr id="8" name="Segnaposto contenuto 7" descr="Immagine che contiene diagramma, schizzo, Piano, Disegno tecnico&#10;&#10;Il contenuto generato dall'IA potrebbe non essere corretto.">
+            <a:extLst>
+              <a:ext uri="{FF2B5EF4-FFF2-40B4-BE49-F238E27FC236}">
+                <a16:creationId xmlns:a16="http://schemas.microsoft.com/office/drawing/2014/main" id="{573988E7-C6CA-061C-C97A-341A905F7FB9}"/>
               </a:ext>
             </a:extLst>
           </p:cNvPr>
@@ -5503,13 +5509,14 @@
         </p:nvPicPr>
         <p:blipFill>
           <a:blip r:embed="rId2"/>
-          <a:srcRect t="4120" r="58485" b="67400"/>
-          <a:stretch/>
+          <a:stretch>
+            <a:fillRect/>
+          </a:stretch>
         </p:blipFill>
         <p:spPr>
           <a:xfrm>
-            <a:off x="932905" y="1020848"/>
-            <a:ext cx="10326185" cy="5005953"/>
+            <a:off x="1505986" y="1560305"/>
+            <a:ext cx="9180023" cy="4402345"/>
           </a:xfrm>
         </p:spPr>
       </p:pic>
@@ -5518,7 +5525,7 @@
           <p:cNvPr id="2" name="Titolo 1">
             <a:extLst>
               <a:ext uri="{FF2B5EF4-FFF2-40B4-BE49-F238E27FC236}">
-                <a16:creationId xmlns:a16="http://schemas.microsoft.com/office/drawing/2014/main" id="{68F60D08-073E-6986-BE89-DE39BFF0E80A}"/>
+                <a16:creationId xmlns:a16="http://schemas.microsoft.com/office/drawing/2014/main" id="{DE10E5C4-B434-990C-FDFC-32F64153FEED}"/>
               </a:ext>
             </a:extLst>
           </p:cNvPr>
@@ -5552,7 +5559,7 @@
           <p:cNvPr id="4" name="CasellaDiTesto 3">
             <a:extLst>
               <a:ext uri="{FF2B5EF4-FFF2-40B4-BE49-F238E27FC236}">
-                <a16:creationId xmlns:a16="http://schemas.microsoft.com/office/drawing/2014/main" id="{9C8CCABE-0084-5480-89B8-E54F0DEAC7D1}"/>
+                <a16:creationId xmlns:a16="http://schemas.microsoft.com/office/drawing/2014/main" id="{78514272-7498-5833-3F3D-B45453DDEDF0}"/>
               </a:ext>
             </a:extLst>
           </p:cNvPr>
@@ -5593,7 +5600,7 @@
     </p:spTree>
     <p:extLst>
       <p:ext uri="{BB962C8B-B14F-4D97-AF65-F5344CB8AC3E}">
-        <p14:creationId xmlns:p14="http://schemas.microsoft.com/office/powerpoint/2010/main" val="4038670869"/>
+        <p14:creationId xmlns:p14="http://schemas.microsoft.com/office/powerpoint/2010/main" val="4252371170"/>
       </p:ext>
     </p:extLst>
   </p:cSld>
@@ -5660,34 +5667,6 @@
           </a:p>
         </p:txBody>
       </p:sp>
-      <p:pic>
-        <p:nvPicPr>
-          <p:cNvPr id="8" name="Segnaposto contenuto 7">
-            <a:extLst>
-              <a:ext uri="{FF2B5EF4-FFF2-40B4-BE49-F238E27FC236}">
-                <a16:creationId xmlns:a16="http://schemas.microsoft.com/office/drawing/2014/main" id="{82E1DD89-5BEC-9B57-4E50-95A9E4FE7F94}"/>
-              </a:ext>
-            </a:extLst>
-          </p:cNvPr>
-          <p:cNvPicPr>
-            <a:picLocks noGrp="1" noChangeAspect="1"/>
-          </p:cNvPicPr>
-          <p:nvPr>
-            <p:ph idx="1"/>
-          </p:nvPr>
-        </p:nvPicPr>
-        <p:blipFill>
-          <a:blip r:embed="rId2"/>
-          <a:srcRect l="46091" r="1147" b="76587"/>
-          <a:stretch/>
-        </p:blipFill>
-        <p:spPr>
-          <a:xfrm>
-            <a:off x="482246" y="1876005"/>
-            <a:ext cx="11227504" cy="3520595"/>
-          </a:xfrm>
-        </p:spPr>
-      </p:pic>
       <p:sp>
         <p:nvSpPr>
           <p:cNvPr id="4" name="CasellaDiTesto 3">
@@ -5731,6 +5710,35 @@
           </a:p>
         </p:txBody>
       </p:sp>
+      <p:pic>
+        <p:nvPicPr>
+          <p:cNvPr id="7" name="Segnaposto contenuto 6" descr="Immagine che contiene diagramma, Piano, Disegno tecnico, schematico&#10;&#10;Il contenuto generato dall'IA potrebbe non essere corretto.">
+            <a:extLst>
+              <a:ext uri="{FF2B5EF4-FFF2-40B4-BE49-F238E27FC236}">
+                <a16:creationId xmlns:a16="http://schemas.microsoft.com/office/drawing/2014/main" id="{BCA436F8-D78F-FC1E-DB29-303B1F7F0DBB}"/>
+              </a:ext>
+            </a:extLst>
+          </p:cNvPr>
+          <p:cNvPicPr>
+            <a:picLocks noGrp="1" noChangeAspect="1"/>
+          </p:cNvPicPr>
+          <p:nvPr>
+            <p:ph idx="1"/>
+          </p:nvPr>
+        </p:nvPicPr>
+        <p:blipFill>
+          <a:blip r:embed="rId2"/>
+          <a:stretch>
+            <a:fillRect/>
+          </a:stretch>
+        </p:blipFill>
+        <p:spPr>
+          <a:xfrm>
+            <a:off x="750366" y="2365419"/>
+            <a:ext cx="10691812" cy="3271432"/>
+          </a:xfrm>
+        </p:spPr>
+      </p:pic>
     </p:spTree>
     <p:extLst>
       <p:ext uri="{BB962C8B-B14F-4D97-AF65-F5344CB8AC3E}">
@@ -5767,34 +5775,6 @@
           <a:chExt cx="0" cy="0"/>
         </a:xfrm>
       </p:grpSpPr>
-      <p:pic>
-        <p:nvPicPr>
-          <p:cNvPr id="12" name="Segnaposto contenuto 11">
-            <a:extLst>
-              <a:ext uri="{FF2B5EF4-FFF2-40B4-BE49-F238E27FC236}">
-                <a16:creationId xmlns:a16="http://schemas.microsoft.com/office/drawing/2014/main" id="{AFFF6074-BDA0-83AA-5A04-ED9DD07036B6}"/>
-              </a:ext>
-            </a:extLst>
-          </p:cNvPr>
-          <p:cNvPicPr>
-            <a:picLocks noGrp="1" noChangeAspect="1"/>
-          </p:cNvPicPr>
-          <p:nvPr>
-            <p:ph idx="1"/>
-          </p:nvPr>
-        </p:nvPicPr>
-        <p:blipFill>
-          <a:blip r:embed="rId2"/>
-          <a:srcRect l="46702" t="23437" r="1981" b="49109"/>
-          <a:stretch/>
-        </p:blipFill>
-        <p:spPr>
-          <a:xfrm>
-            <a:off x="750366" y="2206636"/>
-            <a:ext cx="10388099" cy="3927309"/>
-          </a:xfrm>
-        </p:spPr>
-      </p:pic>
       <p:sp>
         <p:nvSpPr>
           <p:cNvPr id="2" name="Titolo 1">
@@ -5877,6 +5857,35 @@
           </a:p>
         </p:txBody>
       </p:sp>
+      <p:pic>
+        <p:nvPicPr>
+          <p:cNvPr id="7" name="Segnaposto contenuto 6" descr="Immagine che contiene diagramma, Piano, Disegno tecnico, schematico&#10;&#10;Il contenuto generato dall'IA potrebbe non essere corretto.">
+            <a:extLst>
+              <a:ext uri="{FF2B5EF4-FFF2-40B4-BE49-F238E27FC236}">
+                <a16:creationId xmlns:a16="http://schemas.microsoft.com/office/drawing/2014/main" id="{7F43DC1A-706C-6287-4FBB-2CFD729AF777}"/>
+              </a:ext>
+            </a:extLst>
+          </p:cNvPr>
+          <p:cNvPicPr>
+            <a:picLocks noGrp="1" noChangeAspect="1"/>
+          </p:cNvPicPr>
+          <p:nvPr>
+            <p:ph idx="1"/>
+          </p:nvPr>
+        </p:nvPicPr>
+        <p:blipFill>
+          <a:blip r:embed="rId2"/>
+          <a:stretch>
+            <a:fillRect/>
+          </a:stretch>
+        </p:blipFill>
+        <p:spPr>
+          <a:xfrm>
+            <a:off x="1338446" y="2222500"/>
+            <a:ext cx="9415095" cy="3740150"/>
+          </a:xfrm>
+        </p:spPr>
+      </p:pic>
     </p:spTree>
     <p:extLst>
       <p:ext uri="{BB962C8B-B14F-4D97-AF65-F5344CB8AC3E}">
@@ -5992,10 +6001,10 @@
       </p:sp>
       <p:pic>
         <p:nvPicPr>
-          <p:cNvPr id="7" name="Segnaposto contenuto 6">
-            <a:extLst>
-              <a:ext uri="{FF2B5EF4-FFF2-40B4-BE49-F238E27FC236}">
-                <a16:creationId xmlns:a16="http://schemas.microsoft.com/office/drawing/2014/main" id="{99B992D6-FCB9-7E10-D46B-D0C03C6E3075}"/>
+          <p:cNvPr id="10" name="Segnaposto contenuto 9" descr="Immagine che contiene diagramma, Piano, schizzo, Disegno tecnico&#10;&#10;Il contenuto generato dall'IA potrebbe non essere corretto.">
+            <a:extLst>
+              <a:ext uri="{FF2B5EF4-FFF2-40B4-BE49-F238E27FC236}">
+                <a16:creationId xmlns:a16="http://schemas.microsoft.com/office/drawing/2014/main" id="{C916692D-F4ED-A78C-FB63-F53F2A8EF741}"/>
               </a:ext>
             </a:extLst>
           </p:cNvPr>
@@ -6008,13 +6017,14 @@
         </p:nvPicPr>
         <p:blipFill>
           <a:blip r:embed="rId2"/>
-          <a:srcRect t="30434" r="59453" b="44678"/>
-          <a:stretch/>
+          <a:stretch>
+            <a:fillRect/>
+          </a:stretch>
         </p:blipFill>
         <p:spPr>
           <a:xfrm>
-            <a:off x="1770405" y="2206636"/>
-            <a:ext cx="8651190" cy="3752320"/>
+            <a:off x="1422753" y="2222500"/>
+            <a:ext cx="9246481" cy="3740150"/>
           </a:xfrm>
         </p:spPr>
       </p:pic>
@@ -6088,49 +6098,21 @@
           </a:p>
         </p:txBody>
       </p:sp>
-      <p:pic>
-        <p:nvPicPr>
-          <p:cNvPr id="8" name="Segnaposto contenuto 7">
-            <a:extLst>
-              <a:ext uri="{FF2B5EF4-FFF2-40B4-BE49-F238E27FC236}">
-                <a16:creationId xmlns:a16="http://schemas.microsoft.com/office/drawing/2014/main" id="{F036E0E4-B818-C3AD-5C46-5F44E112E00E}"/>
-              </a:ext>
-            </a:extLst>
-          </p:cNvPr>
-          <p:cNvPicPr>
-            <a:picLocks noGrp="1" noChangeAspect="1"/>
-          </p:cNvPicPr>
-          <p:nvPr>
-            <p:ph idx="1"/>
-          </p:nvPr>
-        </p:nvPicPr>
-        <p:blipFill>
-          <a:blip r:embed="rId2"/>
-          <a:srcRect l="41048" t="1974" r="-880" b="65787"/>
-          <a:stretch/>
-        </p:blipFill>
+      <p:sp>
+        <p:nvSpPr>
+          <p:cNvPr id="4" name="CasellaDiTesto 3">
+            <a:extLst>
+              <a:ext uri="{FF2B5EF4-FFF2-40B4-BE49-F238E27FC236}">
+                <a16:creationId xmlns:a16="http://schemas.microsoft.com/office/drawing/2014/main" id="{FFA53688-DFF4-A962-3555-E007613857C9}"/>
+              </a:ext>
+            </a:extLst>
+          </p:cNvPr>
+          <p:cNvSpPr txBox="1"/>
+          <p:nvPr/>
+        </p:nvSpPr>
         <p:spPr>
           <a:xfrm>
-            <a:off x="839472" y="2106406"/>
-            <a:ext cx="10513051" cy="4002846"/>
-          </a:xfrm>
-        </p:spPr>
-      </p:pic>
-      <p:sp>
-        <p:nvSpPr>
-          <p:cNvPr id="4" name="CasellaDiTesto 3">
-            <a:extLst>
-              <a:ext uri="{FF2B5EF4-FFF2-40B4-BE49-F238E27FC236}">
-                <a16:creationId xmlns:a16="http://schemas.microsoft.com/office/drawing/2014/main" id="{FFA53688-DFF4-A962-3555-E007613857C9}"/>
-              </a:ext>
-            </a:extLst>
-          </p:cNvPr>
-          <p:cNvSpPr txBox="1"/>
-          <p:nvPr/>
-        </p:nvSpPr>
-        <p:spPr>
-          <a:xfrm>
-            <a:off x="6529928" y="1562641"/>
+            <a:off x="5125186" y="1560305"/>
             <a:ext cx="1941622" cy="646331"/>
           </a:xfrm>
           <a:prstGeom prst="rect">
@@ -6214,6 +6196,35 @@
           </a:p>
         </p:txBody>
       </p:sp>
+      <p:pic>
+        <p:nvPicPr>
+          <p:cNvPr id="7" name="Segnaposto contenuto 6" descr="Immagine che contiene diagramma, Piano, Disegno tecnico, schizzo&#10;&#10;Il contenuto generato dall'IA potrebbe non essere corretto.">
+            <a:extLst>
+              <a:ext uri="{FF2B5EF4-FFF2-40B4-BE49-F238E27FC236}">
+                <a16:creationId xmlns:a16="http://schemas.microsoft.com/office/drawing/2014/main" id="{84BC66E8-BF3D-796E-1821-052A3159CC27}"/>
+              </a:ext>
+            </a:extLst>
+          </p:cNvPr>
+          <p:cNvPicPr>
+            <a:picLocks noGrp="1" noChangeAspect="1"/>
+          </p:cNvPicPr>
+          <p:nvPr>
+            <p:ph idx="1"/>
+          </p:nvPr>
+        </p:nvPicPr>
+        <p:blipFill>
+          <a:blip r:embed="rId2"/>
+          <a:stretch>
+            <a:fillRect/>
+          </a:stretch>
+        </p:blipFill>
+        <p:spPr>
+          <a:xfrm>
+            <a:off x="1260642" y="2206636"/>
+            <a:ext cx="9670711" cy="3740150"/>
+          </a:xfrm>
+        </p:spPr>
+      </p:pic>
     </p:spTree>
     <p:extLst>
       <p:ext uri="{BB962C8B-B14F-4D97-AF65-F5344CB8AC3E}">
@@ -6284,34 +6295,6 @@
           </a:p>
         </p:txBody>
       </p:sp>
-      <p:pic>
-        <p:nvPicPr>
-          <p:cNvPr id="8" name="Segnaposto contenuto 7">
-            <a:extLst>
-              <a:ext uri="{FF2B5EF4-FFF2-40B4-BE49-F238E27FC236}">
-                <a16:creationId xmlns:a16="http://schemas.microsoft.com/office/drawing/2014/main" id="{01AD9FC7-1D01-5D81-9202-4137747C05F3}"/>
-              </a:ext>
-            </a:extLst>
-          </p:cNvPr>
-          <p:cNvPicPr>
-            <a:picLocks noGrp="1" noChangeAspect="1"/>
-          </p:cNvPicPr>
-          <p:nvPr>
-            <p:ph idx="1"/>
-          </p:nvPr>
-        </p:nvPicPr>
-        <p:blipFill>
-          <a:blip r:embed="rId2"/>
-          <a:srcRect l="39661" t="27170" r="507" b="29914"/>
-          <a:stretch/>
-        </p:blipFill>
-        <p:spPr>
-          <a:xfrm>
-            <a:off x="1969026" y="1897354"/>
-            <a:ext cx="8253943" cy="4183522"/>
-          </a:xfrm>
-        </p:spPr>
-      </p:pic>
       <p:sp>
         <p:nvSpPr>
           <p:cNvPr id="3" name="Rettangolo 2">
@@ -6477,6 +6460,200 @@
           </a:p>
         </p:txBody>
       </p:sp>
+      <p:pic>
+        <p:nvPicPr>
+          <p:cNvPr id="11" name="Segnaposto contenuto 10" descr="Immagine che contiene diagramma, Piano, Disegno tecnico, schematico&#10;&#10;Il contenuto generato dall'IA potrebbe non essere corretto.">
+            <a:extLst>
+              <a:ext uri="{FF2B5EF4-FFF2-40B4-BE49-F238E27FC236}">
+                <a16:creationId xmlns:a16="http://schemas.microsoft.com/office/drawing/2014/main" id="{A1EA2D4F-F6EB-C037-4943-BF3C6193F794}"/>
+              </a:ext>
+            </a:extLst>
+          </p:cNvPr>
+          <p:cNvPicPr>
+            <a:picLocks noGrp="1" noChangeAspect="1"/>
+          </p:cNvPicPr>
+          <p:nvPr>
+            <p:ph idx="1"/>
+          </p:nvPr>
+        </p:nvPicPr>
+        <p:blipFill>
+          <a:blip r:embed="rId2"/>
+          <a:stretch>
+            <a:fillRect/>
+          </a:stretch>
+        </p:blipFill>
+        <p:spPr>
+          <a:xfrm>
+            <a:off x="2176047" y="1625496"/>
+            <a:ext cx="8156874" cy="4483487"/>
+          </a:xfrm>
+        </p:spPr>
+      </p:pic>
+      <p:sp>
+        <p:nvSpPr>
+          <p:cNvPr id="12" name="Rettangolo 11">
+            <a:extLst>
+              <a:ext uri="{FF2B5EF4-FFF2-40B4-BE49-F238E27FC236}">
+                <a16:creationId xmlns:a16="http://schemas.microsoft.com/office/drawing/2014/main" id="{10A0CDD7-5CCA-4D3B-C1ED-F0BDE02E729A}"/>
+              </a:ext>
+            </a:extLst>
+          </p:cNvPr>
+          <p:cNvSpPr/>
+          <p:nvPr/>
+        </p:nvSpPr>
+        <p:spPr>
+          <a:xfrm>
+            <a:off x="2286000" y="1552840"/>
+            <a:ext cx="3968484" cy="653796"/>
+          </a:xfrm>
+          <a:prstGeom prst="rect">
+            <a:avLst/>
+          </a:prstGeom>
+          <a:solidFill>
+            <a:schemeClr val="bg1"/>
+          </a:solidFill>
+          <a:ln w="12700" cap="flat" cmpd="sng" algn="ctr">
+            <a:noFill/>
+            <a:prstDash val="solid"/>
+            <a:miter lim="800000"/>
+          </a:ln>
+          <a:effectLst/>
+        </p:spPr>
+        <p:style>
+          <a:lnRef idx="2">
+            <a:schemeClr val="accent1">
+              <a:shade val="50000"/>
+            </a:schemeClr>
+          </a:lnRef>
+          <a:fillRef idx="1">
+            <a:schemeClr val="accent1"/>
+          </a:fillRef>
+          <a:effectRef idx="0">
+            <a:schemeClr val="accent1"/>
+          </a:effectRef>
+          <a:fontRef idx="minor">
+            <a:schemeClr val="lt1"/>
+          </a:fontRef>
+        </p:style>
+        <p:txBody>
+          <a:bodyPr rtlCol="0" anchor="ctr"/>
+          <a:lstStyle/>
+          <a:p>
+            <a:pPr algn="ctr"/>
+            <a:endParaRPr lang="it-IT"/>
+          </a:p>
+        </p:txBody>
+      </p:sp>
+      <p:sp>
+        <p:nvSpPr>
+          <p:cNvPr id="13" name="Rettangolo 12">
+            <a:extLst>
+              <a:ext uri="{FF2B5EF4-FFF2-40B4-BE49-F238E27FC236}">
+                <a16:creationId xmlns:a16="http://schemas.microsoft.com/office/drawing/2014/main" id="{E8BEE815-488B-DECC-AA26-5DE0150025CE}"/>
+              </a:ext>
+            </a:extLst>
+          </p:cNvPr>
+          <p:cNvSpPr/>
+          <p:nvPr/>
+        </p:nvSpPr>
+        <p:spPr>
+          <a:xfrm>
+            <a:off x="9008781" y="1549257"/>
+            <a:ext cx="2186441" cy="653796"/>
+          </a:xfrm>
+          <a:prstGeom prst="rect">
+            <a:avLst/>
+          </a:prstGeom>
+          <a:solidFill>
+            <a:schemeClr val="bg1"/>
+          </a:solidFill>
+          <a:ln w="12700" cap="flat" cmpd="sng" algn="ctr">
+            <a:noFill/>
+            <a:prstDash val="solid"/>
+            <a:miter lim="800000"/>
+          </a:ln>
+          <a:effectLst/>
+        </p:spPr>
+        <p:style>
+          <a:lnRef idx="2">
+            <a:schemeClr val="accent1">
+              <a:shade val="50000"/>
+            </a:schemeClr>
+          </a:lnRef>
+          <a:fillRef idx="1">
+            <a:schemeClr val="accent1"/>
+          </a:fillRef>
+          <a:effectRef idx="0">
+            <a:schemeClr val="accent1"/>
+          </a:effectRef>
+          <a:fontRef idx="minor">
+            <a:schemeClr val="lt1"/>
+          </a:fontRef>
+        </p:style>
+        <p:txBody>
+          <a:bodyPr rtlCol="0" anchor="ctr"/>
+          <a:lstStyle/>
+          <a:p>
+            <a:pPr algn="ctr"/>
+            <a:endParaRPr lang="it-IT"/>
+          </a:p>
+        </p:txBody>
+      </p:sp>
+      <p:sp>
+        <p:nvSpPr>
+          <p:cNvPr id="14" name="Rettangolo 13">
+            <a:extLst>
+              <a:ext uri="{FF2B5EF4-FFF2-40B4-BE49-F238E27FC236}">
+                <a16:creationId xmlns:a16="http://schemas.microsoft.com/office/drawing/2014/main" id="{8FC0640C-B5EE-431A-BC2F-36131E653F2C}"/>
+              </a:ext>
+            </a:extLst>
+          </p:cNvPr>
+          <p:cNvSpPr/>
+          <p:nvPr/>
+        </p:nvSpPr>
+        <p:spPr>
+          <a:xfrm>
+            <a:off x="7376984" y="1458929"/>
+            <a:ext cx="1261196" cy="258660"/>
+          </a:xfrm>
+          <a:prstGeom prst="rect">
+            <a:avLst/>
+          </a:prstGeom>
+          <a:solidFill>
+            <a:schemeClr val="bg1"/>
+          </a:solidFill>
+          <a:ln w="12700" cap="flat" cmpd="sng" algn="ctr">
+            <a:noFill/>
+            <a:prstDash val="solid"/>
+            <a:miter lim="800000"/>
+          </a:ln>
+          <a:effectLst/>
+        </p:spPr>
+        <p:style>
+          <a:lnRef idx="2">
+            <a:schemeClr val="accent1">
+              <a:shade val="50000"/>
+            </a:schemeClr>
+          </a:lnRef>
+          <a:fillRef idx="1">
+            <a:schemeClr val="accent1"/>
+          </a:fillRef>
+          <a:effectRef idx="0">
+            <a:schemeClr val="accent1"/>
+          </a:effectRef>
+          <a:fontRef idx="minor">
+            <a:schemeClr val="lt1"/>
+          </a:fontRef>
+        </p:style>
+        <p:txBody>
+          <a:bodyPr rtlCol="0" anchor="ctr"/>
+          <a:lstStyle/>
+          <a:p>
+            <a:pPr algn="ctr"/>
+            <a:endParaRPr lang="it-IT"/>
+          </a:p>
+        </p:txBody>
+      </p:sp>
       <p:sp>
         <p:nvSpPr>
           <p:cNvPr id="4" name="CasellaDiTesto 3">
@@ -6491,7 +6668,7 @@
         </p:nvSpPr>
         <p:spPr>
           <a:xfrm>
-            <a:off x="4917084" y="1564425"/>
+            <a:off x="4936604" y="1615008"/>
             <a:ext cx="2357826" cy="646331"/>
           </a:xfrm>
           <a:prstGeom prst="rect">
@@ -8477,12 +8654,12 @@
         <p:spPr>
           <a:xfrm>
             <a:off x="276582" y="1752862"/>
-            <a:ext cx="5088229" cy="3739896"/>
+            <a:ext cx="5088229" cy="1307592"/>
           </a:xfrm>
         </p:spPr>
         <p:txBody>
           <a:bodyPr>
-            <a:normAutofit/>
+            <a:normAutofit lnSpcReduction="10000"/>
           </a:bodyPr>
           <a:lstStyle/>
           <a:p>
@@ -8492,7 +8669,7 @@
             </a:r>
           </a:p>
           <a:p>
-            <a:pPr marL="457200" lvl="1" indent="0" eaLnBrk="0" fontAlgn="base" hangingPunct="0">
+            <a:pPr lvl="1" eaLnBrk="0" fontAlgn="base" hangingPunct="0">
               <a:lnSpc>
                 <a:spcPct val="100000"/>
               </a:lnSpc>
@@ -8502,31 +8679,20 @@
               <a:spcAft>
                 <a:spcPct val="0"/>
               </a:spcAft>
-              <a:buFontTx/>
-              <a:buChar char="•"/>
+              <a:buFont typeface="Courier New" panose="02070309020205020404" pitchFamily="49" charset="0"/>
+              <a:buChar char="o"/>
             </a:pPr>
             <a:r>
-              <a:rPr lang="it-IT" altLang="it-IT" sz="1200" dirty="0" err="1">
-                <a:latin typeface="Arial Unicode MS"/>
-              </a:rPr>
+              <a:rPr lang="it-IT" altLang="it-IT" sz="1200" dirty="0" err="1"/>
               <a:t>showVendo</a:t>
             </a:r>
             <a:r>
-              <a:rPr lang="it-IT" altLang="it-IT" sz="1200" dirty="0">
-                <a:latin typeface="Arial Unicode MS"/>
-              </a:rPr>
-              <a:t>()</a:t>
-            </a:r>
-            <a:r>
               <a:rPr lang="it-IT" altLang="it-IT" sz="1200" dirty="0"/>
-              <a:t> → mostra la pagina Vendo e nasconde le altre</a:t>
-            </a:r>
-            <a:endParaRPr lang="it-IT" altLang="it-IT" sz="1200" dirty="0">
-              <a:latin typeface="Arial" panose="020B0604020202020204" pitchFamily="34" charset="0"/>
-            </a:endParaRPr>
-          </a:p>
-          <a:p>
-            <a:pPr marL="457200" lvl="1" indent="0" eaLnBrk="0" fontAlgn="base" hangingPunct="0">
+              <a:t>() → mostra la pagina Vendo e nasconde le altre</a:t>
+            </a:r>
+          </a:p>
+          <a:p>
+            <a:pPr lvl="1" eaLnBrk="0" fontAlgn="base" hangingPunct="0">
               <a:lnSpc>
                 <a:spcPct val="100000"/>
               </a:lnSpc>
@@ -8536,31 +8702,20 @@
               <a:spcAft>
                 <a:spcPct val="0"/>
               </a:spcAft>
-              <a:buFontTx/>
-              <a:buChar char="•"/>
+              <a:buFont typeface="Courier New" panose="02070309020205020404" pitchFamily="49" charset="0"/>
+              <a:buChar char="o"/>
             </a:pPr>
             <a:r>
-              <a:rPr lang="it-IT" altLang="it-IT" sz="1200" dirty="0" err="1">
-                <a:latin typeface="Arial Unicode MS"/>
-              </a:rPr>
+              <a:rPr lang="it-IT" altLang="it-IT" sz="1200" dirty="0" err="1"/>
               <a:t>showAcquisto</a:t>
             </a:r>
             <a:r>
-              <a:rPr lang="it-IT" altLang="it-IT" sz="1200" dirty="0">
-                <a:latin typeface="Arial Unicode MS"/>
-              </a:rPr>
-              <a:t>()</a:t>
-            </a:r>
-            <a:r>
               <a:rPr lang="it-IT" altLang="it-IT" sz="1200" dirty="0"/>
-              <a:t> → mostra la pagina Acquisto e nasconde le altre</a:t>
-            </a:r>
-            <a:endParaRPr lang="it-IT" altLang="it-IT" sz="1200" dirty="0">
-              <a:latin typeface="Arial" panose="020B0604020202020204" pitchFamily="34" charset="0"/>
-            </a:endParaRPr>
-          </a:p>
-          <a:p>
-            <a:pPr marL="457200" lvl="1" indent="0" eaLnBrk="0" fontAlgn="base" hangingPunct="0">
+              <a:t>() → mostra la pagina Acquisto e nasconde le altre</a:t>
+            </a:r>
+          </a:p>
+          <a:p>
+            <a:pPr lvl="1" eaLnBrk="0" fontAlgn="base" hangingPunct="0">
               <a:lnSpc>
                 <a:spcPct val="100000"/>
               </a:lnSpc>
@@ -8570,31 +8725,20 @@
               <a:spcAft>
                 <a:spcPct val="0"/>
               </a:spcAft>
-              <a:buFontTx/>
-              <a:buChar char="•"/>
+              <a:buFont typeface="Courier New" panose="02070309020205020404" pitchFamily="49" charset="0"/>
+              <a:buChar char="o"/>
             </a:pPr>
             <a:r>
-              <a:rPr lang="it-IT" altLang="it-IT" sz="1200" dirty="0" err="1">
-                <a:latin typeface="Arial Unicode MS"/>
-              </a:rPr>
+              <a:rPr lang="it-IT" altLang="it-IT" sz="1200" dirty="0" err="1"/>
               <a:t>hideAllPages</a:t>
             </a:r>
             <a:r>
-              <a:rPr lang="it-IT" altLang="it-IT" sz="1200" dirty="0">
-                <a:latin typeface="Arial Unicode MS"/>
-              </a:rPr>
-              <a:t>()</a:t>
-            </a:r>
-            <a:r>
               <a:rPr lang="it-IT" altLang="it-IT" sz="1200" dirty="0"/>
-              <a:t> → nasconde tutte le pagine</a:t>
-            </a:r>
-            <a:endParaRPr lang="it-IT" altLang="it-IT" sz="1200" dirty="0">
-              <a:latin typeface="Arial" panose="020B0604020202020204" pitchFamily="34" charset="0"/>
-            </a:endParaRPr>
-          </a:p>
-          <a:p>
-            <a:pPr marL="457200" lvl="1" indent="0" eaLnBrk="0" fontAlgn="base" hangingPunct="0">
+              <a:t>() → nasconde tutte le pagine</a:t>
+            </a:r>
+          </a:p>
+          <a:p>
+            <a:pPr lvl="1" eaLnBrk="0" fontAlgn="base" hangingPunct="0">
               <a:lnSpc>
                 <a:spcPct val="100000"/>
               </a:lnSpc>
@@ -8604,24 +8748,16 @@
               <a:spcAft>
                 <a:spcPct val="0"/>
               </a:spcAft>
-              <a:buFontTx/>
-              <a:buChar char="•"/>
+              <a:buFont typeface="Courier New" panose="02070309020205020404" pitchFamily="49" charset="0"/>
+              <a:buChar char="o"/>
             </a:pPr>
             <a:r>
-              <a:rPr lang="it-IT" altLang="it-IT" sz="1200" dirty="0" err="1">
-                <a:latin typeface="Arial Unicode MS"/>
-              </a:rPr>
+              <a:rPr lang="it-IT" altLang="it-IT" sz="1200" dirty="0" err="1"/>
               <a:t>renderPageByLastAction</a:t>
             </a:r>
             <a:r>
-              <a:rPr lang="it-IT" altLang="it-IT" sz="1200" dirty="0">
-                <a:latin typeface="Arial Unicode MS"/>
-              </a:rPr>
-              <a:t>()</a:t>
-            </a:r>
-            <a:r>
               <a:rPr lang="it-IT" altLang="it-IT" sz="1200" dirty="0"/>
-              <a:t> → apre Vendo o Acquisto in base all’ultima azione utente</a:t>
+              <a:t>() → apre Vendo o Acquisto in base all’ultima azione utente</a:t>
             </a:r>
             <a:endParaRPr lang="it-IT" sz="1200" b="1" dirty="0"/>
           </a:p>
@@ -8693,7 +8829,7 @@
         <p:spPr>
           <a:xfrm>
             <a:off x="276581" y="3060454"/>
-            <a:ext cx="6075831" cy="3739896"/>
+            <a:ext cx="6075831" cy="2345936"/>
           </a:xfrm>
           <a:prstGeom prst="rect">
             <a:avLst/>
@@ -8701,7 +8837,7 @@
         </p:spPr>
         <p:txBody>
           <a:bodyPr vert="horz" lIns="91440" tIns="45720" rIns="91440" bIns="45720" rtlCol="0">
-            <a:normAutofit/>
+            <a:normAutofit lnSpcReduction="10000"/>
           </a:bodyPr>
           <a:lstStyle>
             <a:lvl1pPr marL="228600" indent="-228600" algn="l" defTabSz="914400" rtl="0" eaLnBrk="1" latinLnBrk="0" hangingPunct="1">
@@ -8874,7 +9010,7 @@
             </a:r>
           </a:p>
           <a:p>
-            <a:pPr marL="457200" lvl="1" indent="0" eaLnBrk="0" fontAlgn="base" hangingPunct="0">
+            <a:pPr lvl="1" eaLnBrk="0" fontAlgn="base" hangingPunct="0">
               <a:lnSpc>
                 <a:spcPct val="100000"/>
               </a:lnSpc>
@@ -8884,31 +9020,20 @@
               <a:spcAft>
                 <a:spcPct val="0"/>
               </a:spcAft>
-              <a:buFontTx/>
-              <a:buChar char="•"/>
+              <a:buFont typeface="Courier New" panose="02070309020205020404" pitchFamily="49" charset="0"/>
+              <a:buChar char="o"/>
             </a:pPr>
             <a:r>
-              <a:rPr lang="it-IT" altLang="it-IT" sz="1200" dirty="0" err="1">
-                <a:latin typeface="Arial Unicode MS"/>
-              </a:rPr>
+              <a:rPr lang="it-IT" altLang="it-IT" sz="1200" dirty="0" err="1"/>
               <a:t>renderVendoPage</a:t>
             </a:r>
             <a:r>
-              <a:rPr lang="it-IT" altLang="it-IT" sz="1200" dirty="0">
-                <a:latin typeface="Arial Unicode MS"/>
-              </a:rPr>
-              <a:t>()</a:t>
-            </a:r>
-            <a:r>
               <a:rPr lang="it-IT" altLang="it-IT" sz="1200" dirty="0"/>
-              <a:t> → inizializza pagina Vendo e collega i pulsanti</a:t>
-            </a:r>
-            <a:endParaRPr lang="it-IT" altLang="it-IT" sz="1200" dirty="0">
-              <a:latin typeface="Arial" panose="020B0604020202020204" pitchFamily="34" charset="0"/>
-            </a:endParaRPr>
-          </a:p>
-          <a:p>
-            <a:pPr marL="457200" lvl="1" indent="0" eaLnBrk="0" fontAlgn="base" hangingPunct="0">
+              <a:t>() → inizializza pagina Vendo e collega i pulsanti</a:t>
+            </a:r>
+          </a:p>
+          <a:p>
+            <a:pPr lvl="1" eaLnBrk="0" fontAlgn="base" hangingPunct="0">
               <a:lnSpc>
                 <a:spcPct val="100000"/>
               </a:lnSpc>
@@ -8918,31 +9043,20 @@
               <a:spcAft>
                 <a:spcPct val="0"/>
               </a:spcAft>
-              <a:buFontTx/>
-              <a:buChar char="•"/>
+              <a:buFont typeface="Courier New" panose="02070309020205020404" pitchFamily="49" charset="0"/>
+              <a:buChar char="o"/>
             </a:pPr>
             <a:r>
-              <a:rPr lang="it-IT" altLang="it-IT" sz="1200" dirty="0" err="1">
-                <a:latin typeface="Arial Unicode MS"/>
-              </a:rPr>
+              <a:rPr lang="it-IT" altLang="it-IT" sz="1200" dirty="0" err="1"/>
               <a:t>aggiungiArticolo</a:t>
             </a:r>
             <a:r>
-              <a:rPr lang="it-IT" altLang="it-IT" sz="1200" dirty="0">
-                <a:latin typeface="Arial Unicode MS"/>
-              </a:rPr>
-              <a:t>()</a:t>
-            </a:r>
-            <a:r>
               <a:rPr lang="it-IT" altLang="it-IT" sz="1200" dirty="0"/>
-              <a:t> → aggiunge un nuovo articolo al database</a:t>
-            </a:r>
-            <a:endParaRPr lang="it-IT" altLang="it-IT" sz="1200" dirty="0">
-              <a:latin typeface="Arial" panose="020B0604020202020204" pitchFamily="34" charset="0"/>
-            </a:endParaRPr>
-          </a:p>
-          <a:p>
-            <a:pPr marL="457200" lvl="1" indent="0" eaLnBrk="0" fontAlgn="base" hangingPunct="0">
+              <a:t>() → aggiunge un nuovo articolo al database</a:t>
+            </a:r>
+          </a:p>
+          <a:p>
+            <a:pPr lvl="1" eaLnBrk="0" fontAlgn="base" hangingPunct="0">
               <a:lnSpc>
                 <a:spcPct val="100000"/>
               </a:lnSpc>
@@ -8952,31 +9066,20 @@
               <a:spcAft>
                 <a:spcPct val="0"/>
               </a:spcAft>
-              <a:buFontTx/>
-              <a:buChar char="•"/>
+              <a:buFont typeface="Courier New" panose="02070309020205020404" pitchFamily="49" charset="0"/>
+              <a:buChar char="o"/>
             </a:pPr>
             <a:r>
-              <a:rPr lang="it-IT" altLang="it-IT" sz="1200" dirty="0" err="1">
-                <a:latin typeface="Arial Unicode MS"/>
-              </a:rPr>
+              <a:rPr lang="it-IT" altLang="it-IT" sz="1200" dirty="0" err="1"/>
               <a:t>creaAsta</a:t>
             </a:r>
             <a:r>
-              <a:rPr lang="it-IT" altLang="it-IT" sz="1200" dirty="0">
-                <a:latin typeface="Arial Unicode MS"/>
-              </a:rPr>
-              <a:t>()</a:t>
-            </a:r>
-            <a:r>
               <a:rPr lang="it-IT" altLang="it-IT" sz="1200" dirty="0"/>
-              <a:t> → crea una nuova asta con articoli selezionati</a:t>
-            </a:r>
-            <a:endParaRPr lang="it-IT" altLang="it-IT" sz="1200" dirty="0">
-              <a:latin typeface="Arial" panose="020B0604020202020204" pitchFamily="34" charset="0"/>
-            </a:endParaRPr>
-          </a:p>
-          <a:p>
-            <a:pPr marL="457200" lvl="1" indent="0" eaLnBrk="0" fontAlgn="base" hangingPunct="0">
+              <a:t>() → crea una nuova asta con articoli selezionati</a:t>
+            </a:r>
+          </a:p>
+          <a:p>
+            <a:pPr lvl="1" eaLnBrk="0" fontAlgn="base" hangingPunct="0">
               <a:lnSpc>
                 <a:spcPct val="100000"/>
               </a:lnSpc>
@@ -8986,31 +9089,20 @@
               <a:spcAft>
                 <a:spcPct val="0"/>
               </a:spcAft>
-              <a:buFontTx/>
-              <a:buChar char="•"/>
+              <a:buFont typeface="Courier New" panose="02070309020205020404" pitchFamily="49" charset="0"/>
+              <a:buChar char="o"/>
             </a:pPr>
             <a:r>
-              <a:rPr lang="it-IT" altLang="it-IT" sz="1200" dirty="0" err="1">
-                <a:latin typeface="Arial Unicode MS"/>
-              </a:rPr>
+              <a:rPr lang="it-IT" altLang="it-IT" sz="1200" dirty="0" err="1"/>
               <a:t>aggiornaArticoliDisponibili</a:t>
             </a:r>
             <a:r>
-              <a:rPr lang="it-IT" altLang="it-IT" sz="1200" dirty="0">
-                <a:latin typeface="Arial Unicode MS"/>
-              </a:rPr>
-              <a:t>()</a:t>
-            </a:r>
-            <a:r>
               <a:rPr lang="it-IT" altLang="it-IT" sz="1200" dirty="0"/>
-              <a:t> → aggiorna la lista articoli disponibili per asta</a:t>
-            </a:r>
-            <a:endParaRPr lang="it-IT" altLang="it-IT" sz="1200" dirty="0">
-              <a:latin typeface="Arial" panose="020B0604020202020204" pitchFamily="34" charset="0"/>
-            </a:endParaRPr>
-          </a:p>
-          <a:p>
-            <a:pPr marL="457200" lvl="1" indent="0" eaLnBrk="0" fontAlgn="base" hangingPunct="0">
+              <a:t>() → aggiorna la lista articoli disponibili per asta</a:t>
+            </a:r>
+          </a:p>
+          <a:p>
+            <a:pPr lvl="1" eaLnBrk="0" fontAlgn="base" hangingPunct="0">
               <a:lnSpc>
                 <a:spcPct val="100000"/>
               </a:lnSpc>
@@ -9020,31 +9112,20 @@
               <a:spcAft>
                 <a:spcPct val="0"/>
               </a:spcAft>
-              <a:buFontTx/>
-              <a:buChar char="•"/>
+              <a:buFont typeface="Courier New" panose="02070309020205020404" pitchFamily="49" charset="0"/>
+              <a:buChar char="o"/>
             </a:pPr>
             <a:r>
-              <a:rPr lang="it-IT" altLang="it-IT" sz="1200" dirty="0" err="1">
-                <a:latin typeface="Arial Unicode MS"/>
-              </a:rPr>
+              <a:rPr lang="it-IT" altLang="it-IT" sz="1200" dirty="0" err="1"/>
               <a:t>aggiungiArticoloAllaTabella</a:t>
             </a:r>
             <a:r>
-              <a:rPr lang="it-IT" altLang="it-IT" sz="1200" dirty="0">
-                <a:latin typeface="Arial Unicode MS"/>
-              </a:rPr>
-              <a:t>()</a:t>
-            </a:r>
-            <a:r>
               <a:rPr lang="it-IT" altLang="it-IT" sz="1200" dirty="0"/>
-              <a:t> → aggiunge una riga articolo alla tabella nuova asta</a:t>
-            </a:r>
-            <a:endParaRPr lang="it-IT" altLang="it-IT" sz="1200" dirty="0">
-              <a:latin typeface="Arial" panose="020B0604020202020204" pitchFamily="34" charset="0"/>
-            </a:endParaRPr>
-          </a:p>
-          <a:p>
-            <a:pPr marL="457200" lvl="1" indent="0" eaLnBrk="0" fontAlgn="base" hangingPunct="0">
+              <a:t>() → aggiunge una riga articolo alla tabella nuova asta</a:t>
+            </a:r>
+          </a:p>
+          <a:p>
+            <a:pPr lvl="1" eaLnBrk="0" fontAlgn="base" hangingPunct="0">
               <a:lnSpc>
                 <a:spcPct val="100000"/>
               </a:lnSpc>
@@ -9054,31 +9135,20 @@
               <a:spcAft>
                 <a:spcPct val="0"/>
               </a:spcAft>
-              <a:buFontTx/>
-              <a:buChar char="•"/>
+              <a:buFont typeface="Courier New" panose="02070309020205020404" pitchFamily="49" charset="0"/>
+              <a:buChar char="o"/>
             </a:pPr>
             <a:r>
-              <a:rPr lang="it-IT" altLang="it-IT" sz="1200" dirty="0" err="1">
-                <a:latin typeface="Arial Unicode MS"/>
-              </a:rPr>
+              <a:rPr lang="it-IT" altLang="it-IT" sz="1200" dirty="0" err="1"/>
               <a:t>caricaListeAperte</a:t>
             </a:r>
             <a:r>
-              <a:rPr lang="it-IT" altLang="it-IT" sz="1200" dirty="0">
-                <a:latin typeface="Arial Unicode MS"/>
-              </a:rPr>
-              <a:t>()</a:t>
-            </a:r>
-            <a:r>
               <a:rPr lang="it-IT" altLang="it-IT" sz="1200" dirty="0"/>
-              <a:t> → carica e mostra le aste aperte dell’utente</a:t>
-            </a:r>
-            <a:endParaRPr lang="it-IT" altLang="it-IT" sz="1200" dirty="0">
-              <a:latin typeface="Arial" panose="020B0604020202020204" pitchFamily="34" charset="0"/>
-            </a:endParaRPr>
-          </a:p>
-          <a:p>
-            <a:pPr marL="457200" lvl="1" indent="0" eaLnBrk="0" fontAlgn="base" hangingPunct="0">
+              <a:t>() → carica e mostra le aste aperte dell’utente</a:t>
+            </a:r>
+          </a:p>
+          <a:p>
+            <a:pPr lvl="1" eaLnBrk="0" fontAlgn="base" hangingPunct="0">
               <a:lnSpc>
                 <a:spcPct val="100000"/>
               </a:lnSpc>
@@ -9088,31 +9158,20 @@
               <a:spcAft>
                 <a:spcPct val="0"/>
               </a:spcAft>
-              <a:buFontTx/>
-              <a:buChar char="•"/>
+              <a:buFont typeface="Courier New" panose="02070309020205020404" pitchFamily="49" charset="0"/>
+              <a:buChar char="o"/>
             </a:pPr>
             <a:r>
-              <a:rPr lang="it-IT" altLang="it-IT" sz="1200" dirty="0" err="1">
-                <a:latin typeface="Arial Unicode MS"/>
-              </a:rPr>
+              <a:rPr lang="it-IT" altLang="it-IT" sz="1200" dirty="0" err="1"/>
               <a:t>caricaListeChiuse</a:t>
             </a:r>
             <a:r>
-              <a:rPr lang="it-IT" altLang="it-IT" sz="1200" dirty="0">
-                <a:latin typeface="Arial Unicode MS"/>
-              </a:rPr>
-              <a:t>()</a:t>
-            </a:r>
-            <a:r>
               <a:rPr lang="it-IT" altLang="it-IT" sz="1200" dirty="0"/>
-              <a:t> → carica e mostra le aste chiuse dell’utente</a:t>
-            </a:r>
-            <a:endParaRPr lang="it-IT" altLang="it-IT" sz="1200" dirty="0">
-              <a:latin typeface="Arial" panose="020B0604020202020204" pitchFamily="34" charset="0"/>
-            </a:endParaRPr>
-          </a:p>
-          <a:p>
-            <a:pPr marL="457200" lvl="1" indent="0" eaLnBrk="0" fontAlgn="base" hangingPunct="0">
+              <a:t>() → carica e mostra le aste chiuse dell’utente</a:t>
+            </a:r>
+          </a:p>
+          <a:p>
+            <a:pPr lvl="1" eaLnBrk="0" fontAlgn="base" hangingPunct="0">
               <a:lnSpc>
                 <a:spcPct val="100000"/>
               </a:lnSpc>
@@ -9122,31 +9181,20 @@
               <a:spcAft>
                 <a:spcPct val="0"/>
               </a:spcAft>
-              <a:buFontTx/>
-              <a:buChar char="•"/>
+              <a:buFont typeface="Courier New" panose="02070309020205020404" pitchFamily="49" charset="0"/>
+              <a:buChar char="o"/>
             </a:pPr>
             <a:r>
-              <a:rPr lang="it-IT" altLang="it-IT" sz="1200" dirty="0" err="1">
-                <a:latin typeface="Arial Unicode MS"/>
-              </a:rPr>
+              <a:rPr lang="it-IT" altLang="it-IT" sz="1200" dirty="0" err="1"/>
               <a:t>inizializzaClickDettaglioAstaAperta</a:t>
             </a:r>
             <a:r>
-              <a:rPr lang="it-IT" altLang="it-IT" sz="1200" dirty="0">
-                <a:latin typeface="Arial Unicode MS"/>
-              </a:rPr>
-              <a:t>()</a:t>
-            </a:r>
-            <a:r>
               <a:rPr lang="it-IT" altLang="it-IT" sz="1200" dirty="0"/>
-              <a:t> → click su ID asta aperta → dettaglio</a:t>
-            </a:r>
-            <a:endParaRPr lang="it-IT" altLang="it-IT" sz="1200" dirty="0">
-              <a:latin typeface="Arial" panose="020B0604020202020204" pitchFamily="34" charset="0"/>
-            </a:endParaRPr>
-          </a:p>
-          <a:p>
-            <a:pPr marL="457200" lvl="1" indent="0" eaLnBrk="0" fontAlgn="base" hangingPunct="0">
+              <a:t>() → click su ID asta aperta → dettaglio</a:t>
+            </a:r>
+          </a:p>
+          <a:p>
+            <a:pPr lvl="1" eaLnBrk="0" fontAlgn="base" hangingPunct="0">
               <a:lnSpc>
                 <a:spcPct val="100000"/>
               </a:lnSpc>
@@ -9156,31 +9204,20 @@
               <a:spcAft>
                 <a:spcPct val="0"/>
               </a:spcAft>
-              <a:buFontTx/>
-              <a:buChar char="•"/>
+              <a:buFont typeface="Courier New" panose="02070309020205020404" pitchFamily="49" charset="0"/>
+              <a:buChar char="o"/>
             </a:pPr>
             <a:r>
-              <a:rPr lang="it-IT" altLang="it-IT" sz="1200" dirty="0" err="1">
-                <a:latin typeface="Arial Unicode MS"/>
-              </a:rPr>
+              <a:rPr lang="it-IT" altLang="it-IT" sz="1200" dirty="0" err="1"/>
               <a:t>inizializzaClickDettaglioAsteChiuse</a:t>
             </a:r>
             <a:r>
-              <a:rPr lang="it-IT" altLang="it-IT" sz="1200" dirty="0">
-                <a:latin typeface="Arial Unicode MS"/>
-              </a:rPr>
-              <a:t>()</a:t>
-            </a:r>
-            <a:r>
               <a:rPr lang="it-IT" altLang="it-IT" sz="1200" dirty="0"/>
-              <a:t> → click su ID asta chiusa → dettaglio</a:t>
-            </a:r>
-            <a:endParaRPr lang="it-IT" altLang="it-IT" sz="1200" dirty="0">
-              <a:latin typeface="Arial" panose="020B0604020202020204" pitchFamily="34" charset="0"/>
-            </a:endParaRPr>
-          </a:p>
-          <a:p>
-            <a:pPr marL="457200" lvl="1" indent="0" eaLnBrk="0" fontAlgn="base" hangingPunct="0">
+              <a:t>() → click su ID asta chiusa → dettaglio</a:t>
+            </a:r>
+          </a:p>
+          <a:p>
+            <a:pPr lvl="1" eaLnBrk="0" fontAlgn="base" hangingPunct="0">
               <a:lnSpc>
                 <a:spcPct val="100000"/>
               </a:lnSpc>
@@ -9190,28 +9227,17 @@
               <a:spcAft>
                 <a:spcPct val="0"/>
               </a:spcAft>
-              <a:buFontTx/>
-              <a:buChar char="•"/>
+              <a:buFont typeface="Courier New" panose="02070309020205020404" pitchFamily="49" charset="0"/>
+              <a:buChar char="o"/>
             </a:pPr>
             <a:r>
-              <a:rPr lang="it-IT" altLang="it-IT" sz="1200" dirty="0" err="1">
-                <a:latin typeface="Arial Unicode MS"/>
-              </a:rPr>
+              <a:rPr lang="it-IT" altLang="it-IT" sz="1200" dirty="0" err="1"/>
               <a:t>resetMSG</a:t>
             </a:r>
             <a:r>
-              <a:rPr lang="it-IT" altLang="it-IT" sz="1200" dirty="0">
-                <a:latin typeface="Arial Unicode MS"/>
-              </a:rPr>
-              <a:t>()</a:t>
-            </a:r>
-            <a:r>
               <a:rPr lang="it-IT" altLang="it-IT" sz="1200" dirty="0"/>
-              <a:t> → pulisce i messaggi a schermo</a:t>
-            </a:r>
-            <a:endParaRPr lang="it-IT" altLang="it-IT" sz="1200" dirty="0">
-              <a:latin typeface="Arial" panose="020B0604020202020204" pitchFamily="34" charset="0"/>
-            </a:endParaRPr>
+              <a:t>() → pulisce i messaggi a schermo</a:t>
+            </a:r>
           </a:p>
           <a:p>
             <a:pPr lvl="1"/>
@@ -9256,7 +9282,7 @@
         <p:spPr>
           <a:xfrm>
             <a:off x="6172200" y="3549658"/>
-            <a:ext cx="6019800" cy="3739896"/>
+            <a:ext cx="6019800" cy="1190113"/>
           </a:xfrm>
           <a:prstGeom prst="rect">
             <a:avLst/>
@@ -9438,7 +9464,7 @@
             <a:endParaRPr lang="it-IT" b="1" dirty="0"/>
           </a:p>
           <a:p>
-            <a:pPr marL="457200" lvl="1" indent="0" eaLnBrk="0" fontAlgn="base" hangingPunct="0">
+            <a:pPr lvl="1" eaLnBrk="0" fontAlgn="base" hangingPunct="0">
               <a:lnSpc>
                 <a:spcPct val="100000"/>
               </a:lnSpc>
@@ -9448,31 +9474,20 @@
               <a:spcAft>
                 <a:spcPct val="0"/>
               </a:spcAft>
-              <a:buFontTx/>
-              <a:buChar char="•"/>
+              <a:buFont typeface="Courier New" panose="02070309020205020404" pitchFamily="49" charset="0"/>
+              <a:buChar char="o"/>
             </a:pPr>
             <a:r>
-              <a:rPr lang="it-IT" altLang="it-IT" sz="1200" dirty="0" err="1">
-                <a:latin typeface="Arial Unicode MS"/>
-              </a:rPr>
+              <a:rPr lang="it-IT" altLang="it-IT" sz="1200" dirty="0" err="1"/>
               <a:t>mostraDettaglioAstaAperta</a:t>
             </a:r>
             <a:r>
-              <a:rPr lang="it-IT" altLang="it-IT" sz="1200" dirty="0">
-                <a:latin typeface="Arial Unicode MS"/>
-              </a:rPr>
-              <a:t>(data)</a:t>
-            </a:r>
-            <a:r>
               <a:rPr lang="it-IT" altLang="it-IT" sz="1200" dirty="0"/>
-              <a:t> → mostra dettagli e offerte di un’asta aperta</a:t>
-            </a:r>
-            <a:endParaRPr lang="it-IT" altLang="it-IT" sz="1200" dirty="0">
-              <a:latin typeface="Arial" panose="020B0604020202020204" pitchFamily="34" charset="0"/>
-            </a:endParaRPr>
-          </a:p>
-          <a:p>
-            <a:pPr marL="457200" lvl="1" indent="0" eaLnBrk="0" fontAlgn="base" hangingPunct="0">
+              <a:t>(data) → mostra dettagli e offerte di un’asta aperta</a:t>
+            </a:r>
+          </a:p>
+          <a:p>
+            <a:pPr lvl="1" eaLnBrk="0" fontAlgn="base" hangingPunct="0">
               <a:lnSpc>
                 <a:spcPct val="100000"/>
               </a:lnSpc>
@@ -9482,31 +9497,20 @@
               <a:spcAft>
                 <a:spcPct val="0"/>
               </a:spcAft>
-              <a:buFontTx/>
-              <a:buChar char="•"/>
+              <a:buFont typeface="Courier New" panose="02070309020205020404" pitchFamily="49" charset="0"/>
+              <a:buChar char="o"/>
             </a:pPr>
             <a:r>
-              <a:rPr lang="it-IT" altLang="it-IT" sz="1200" dirty="0" err="1">
-                <a:latin typeface="Arial Unicode MS"/>
-              </a:rPr>
+              <a:rPr lang="it-IT" altLang="it-IT" sz="1200" dirty="0" err="1"/>
               <a:t>mostraDettaglioAstaChiusa</a:t>
             </a:r>
             <a:r>
-              <a:rPr lang="it-IT" altLang="it-IT" sz="1200" dirty="0">
-                <a:latin typeface="Arial Unicode MS"/>
-              </a:rPr>
-              <a:t>(data)</a:t>
-            </a:r>
-            <a:r>
               <a:rPr lang="it-IT" altLang="it-IT" sz="1200" dirty="0"/>
-              <a:t> → mostra dettagli di un’asta chiusa</a:t>
-            </a:r>
-            <a:endParaRPr lang="it-IT" altLang="it-IT" sz="1200" dirty="0">
-              <a:latin typeface="Arial" panose="020B0604020202020204" pitchFamily="34" charset="0"/>
-            </a:endParaRPr>
-          </a:p>
-          <a:p>
-            <a:pPr marL="457200" lvl="1" indent="0" eaLnBrk="0" fontAlgn="base" hangingPunct="0">
+              <a:t>(data) → mostra dettagli di un’asta chiusa</a:t>
+            </a:r>
+          </a:p>
+          <a:p>
+            <a:pPr lvl="1" eaLnBrk="0" fontAlgn="base" hangingPunct="0">
               <a:lnSpc>
                 <a:spcPct val="100000"/>
               </a:lnSpc>
@@ -9516,28 +9520,17 @@
               <a:spcAft>
                 <a:spcPct val="0"/>
               </a:spcAft>
-              <a:buFontTx/>
-              <a:buChar char="•"/>
+              <a:buFont typeface="Courier New" panose="02070309020205020404" pitchFamily="49" charset="0"/>
+              <a:buChar char="o"/>
             </a:pPr>
             <a:r>
-              <a:rPr lang="it-IT" altLang="it-IT" sz="1200" dirty="0" err="1">
-                <a:latin typeface="Arial Unicode MS"/>
-              </a:rPr>
+              <a:rPr lang="it-IT" altLang="it-IT" sz="1200" dirty="0" err="1"/>
               <a:t>caricaChiudiAstaButton</a:t>
             </a:r>
             <a:r>
-              <a:rPr lang="it-IT" altLang="it-IT" sz="1200" dirty="0">
-                <a:latin typeface="Arial Unicode MS"/>
-              </a:rPr>
-              <a:t>()</a:t>
-            </a:r>
-            <a:r>
               <a:rPr lang="it-IT" altLang="it-IT" sz="1200" dirty="0"/>
-              <a:t> → collega bottone “Chiudi asta” e invia richiesta al server</a:t>
-            </a:r>
-            <a:endParaRPr lang="it-IT" altLang="it-IT" sz="1200" dirty="0">
-              <a:latin typeface="Arial" panose="020B0604020202020204" pitchFamily="34" charset="0"/>
-            </a:endParaRPr>
+              <a:t>() → collega bottone “Chiudi asta” e invia richiesta al server</a:t>
+            </a:r>
           </a:p>
           <a:p>
             <a:pPr lvl="1"/>
@@ -9580,7 +9573,7 @@
         <p:spPr>
           <a:xfrm>
             <a:off x="6095999" y="1870341"/>
-            <a:ext cx="5682236" cy="3739896"/>
+            <a:ext cx="5682236" cy="1659243"/>
           </a:xfrm>
           <a:prstGeom prst="rect">
             <a:avLst/>
@@ -9761,7 +9754,7 @@
             </a:r>
           </a:p>
           <a:p>
-            <a:pPr marL="457200" lvl="1" indent="0" eaLnBrk="0" fontAlgn="base" hangingPunct="0">
+            <a:pPr lvl="1" eaLnBrk="0" fontAlgn="base" hangingPunct="0">
               <a:lnSpc>
                 <a:spcPct val="100000"/>
               </a:lnSpc>
@@ -9771,31 +9764,20 @@
               <a:spcAft>
                 <a:spcPct val="0"/>
               </a:spcAft>
-              <a:buFontTx/>
-              <a:buChar char="•"/>
+              <a:buFont typeface="Courier New" panose="02070309020205020404" pitchFamily="49" charset="0"/>
+              <a:buChar char="o"/>
             </a:pPr>
             <a:r>
-              <a:rPr lang="it-IT" altLang="it-IT" sz="1200" dirty="0" err="1">
-                <a:latin typeface="Arial Unicode MS"/>
-              </a:rPr>
+              <a:rPr lang="it-IT" altLang="it-IT" sz="1200" dirty="0" err="1"/>
               <a:t>renderAcquistoPage</a:t>
             </a:r>
             <a:r>
-              <a:rPr lang="it-IT" altLang="it-IT" sz="1200" dirty="0">
-                <a:latin typeface="Arial Unicode MS"/>
-              </a:rPr>
-              <a:t>()</a:t>
-            </a:r>
-            <a:r>
               <a:rPr lang="it-IT" altLang="it-IT" sz="1200" dirty="0"/>
-              <a:t> → apre pagina Acquisto e collega pulsante ricerca</a:t>
-            </a:r>
-            <a:endParaRPr lang="it-IT" altLang="it-IT" sz="1200" dirty="0">
-              <a:latin typeface="Arial" panose="020B0604020202020204" pitchFamily="34" charset="0"/>
-            </a:endParaRPr>
-          </a:p>
-          <a:p>
-            <a:pPr marL="457200" lvl="1" indent="0" eaLnBrk="0" fontAlgn="base" hangingPunct="0">
+              <a:t>() → apre pagina Acquisto e collega pulsante ricerca</a:t>
+            </a:r>
+          </a:p>
+          <a:p>
+            <a:pPr lvl="1" eaLnBrk="0" fontAlgn="base" hangingPunct="0">
               <a:lnSpc>
                 <a:spcPct val="100000"/>
               </a:lnSpc>
@@ -9805,31 +9787,20 @@
               <a:spcAft>
                 <a:spcPct val="0"/>
               </a:spcAft>
-              <a:buFontTx/>
-              <a:buChar char="•"/>
+              <a:buFont typeface="Courier New" panose="02070309020205020404" pitchFamily="49" charset="0"/>
+              <a:buChar char="o"/>
             </a:pPr>
             <a:r>
-              <a:rPr lang="it-IT" altLang="it-IT" sz="1200" dirty="0" err="1">
-                <a:latin typeface="Arial Unicode MS"/>
-              </a:rPr>
+              <a:rPr lang="it-IT" altLang="it-IT" sz="1200" dirty="0" err="1"/>
               <a:t>searchAstaByKeyword</a:t>
             </a:r>
             <a:r>
-              <a:rPr lang="it-IT" altLang="it-IT" sz="1200" dirty="0">
-                <a:latin typeface="Arial Unicode MS"/>
-              </a:rPr>
-              <a:t>()</a:t>
-            </a:r>
-            <a:r>
               <a:rPr lang="it-IT" altLang="it-IT" sz="1200" dirty="0"/>
-              <a:t> → cerca aste per parola chiave</a:t>
-            </a:r>
-            <a:endParaRPr lang="it-IT" altLang="it-IT" sz="1200" dirty="0">
-              <a:latin typeface="Arial" panose="020B0604020202020204" pitchFamily="34" charset="0"/>
-            </a:endParaRPr>
-          </a:p>
-          <a:p>
-            <a:pPr marL="457200" lvl="1" indent="0" eaLnBrk="0" fontAlgn="base" hangingPunct="0">
+              <a:t>() → cerca aste per parola chiave</a:t>
+            </a:r>
+          </a:p>
+          <a:p>
+            <a:pPr lvl="1" eaLnBrk="0" fontAlgn="base" hangingPunct="0">
               <a:lnSpc>
                 <a:spcPct val="100000"/>
               </a:lnSpc>
@@ -9839,43 +9810,28 @@
               <a:spcAft>
                 <a:spcPct val="0"/>
               </a:spcAft>
-              <a:buFontTx/>
-              <a:buChar char="•"/>
+              <a:buFont typeface="Courier New" panose="02070309020205020404" pitchFamily="49" charset="0"/>
+              <a:buChar char="o"/>
             </a:pPr>
             <a:r>
-              <a:rPr lang="it-IT" altLang="it-IT" sz="1200" dirty="0" err="1">
-                <a:latin typeface="Arial Unicode MS"/>
-              </a:rPr>
+              <a:rPr lang="it-IT" altLang="it-IT" sz="1200" dirty="0" err="1"/>
               <a:t>showAsteByKeyword</a:t>
             </a:r>
             <a:r>
-              <a:rPr lang="it-IT" altLang="it-IT" sz="1200" dirty="0">
-                <a:latin typeface="Arial Unicode MS"/>
-              </a:rPr>
+              <a:rPr lang="it-IT" altLang="it-IT" sz="1200" dirty="0"/>
               <a:t>(</a:t>
             </a:r>
             <a:r>
-              <a:rPr lang="it-IT" altLang="it-IT" sz="1200" dirty="0" err="1">
-                <a:latin typeface="Arial Unicode MS"/>
-              </a:rPr>
+              <a:rPr lang="it-IT" altLang="it-IT" sz="1200" dirty="0" err="1"/>
               <a:t>request</a:t>
             </a:r>
             <a:r>
-              <a:rPr lang="it-IT" altLang="it-IT" sz="1200" dirty="0">
-                <a:latin typeface="Arial Unicode MS"/>
-              </a:rPr>
-              <a:t>)</a:t>
-            </a:r>
-            <a:r>
               <a:rPr lang="it-IT" altLang="it-IT" sz="1200" dirty="0"/>
-              <a:t> → mostra i risultati della ricerca</a:t>
-            </a:r>
-            <a:endParaRPr lang="it-IT" altLang="it-IT" sz="1200" dirty="0">
-              <a:latin typeface="Arial" panose="020B0604020202020204" pitchFamily="34" charset="0"/>
-            </a:endParaRPr>
-          </a:p>
-          <a:p>
-            <a:pPr marL="457200" lvl="1" indent="0" eaLnBrk="0" fontAlgn="base" hangingPunct="0">
+              <a:t>) → mostra i risultati della ricerca</a:t>
+            </a:r>
+          </a:p>
+          <a:p>
+            <a:pPr lvl="1" eaLnBrk="0" fontAlgn="base" hangingPunct="0">
               <a:lnSpc>
                 <a:spcPct val="100000"/>
               </a:lnSpc>
@@ -9885,31 +9841,20 @@
               <a:spcAft>
                 <a:spcPct val="0"/>
               </a:spcAft>
-              <a:buFontTx/>
-              <a:buChar char="•"/>
+              <a:buFont typeface="Courier New" panose="02070309020205020404" pitchFamily="49" charset="0"/>
+              <a:buChar char="o"/>
             </a:pPr>
             <a:r>
-              <a:rPr lang="it-IT" altLang="it-IT" sz="1200" dirty="0" err="1">
-                <a:latin typeface="Arial Unicode MS"/>
-              </a:rPr>
+              <a:rPr lang="it-IT" altLang="it-IT" sz="1200" dirty="0" err="1"/>
               <a:t>addAstaTrovataInTable</a:t>
             </a:r>
             <a:r>
-              <a:rPr lang="it-IT" altLang="it-IT" sz="1200" dirty="0">
-                <a:latin typeface="Arial Unicode MS"/>
-              </a:rPr>
-              <a:t>(asta)</a:t>
-            </a:r>
-            <a:r>
               <a:rPr lang="it-IT" altLang="it-IT" sz="1200" dirty="0"/>
-              <a:t> → aggiunge un’asta alla tabella delle aste</a:t>
-            </a:r>
-            <a:endParaRPr lang="it-IT" altLang="it-IT" sz="1200" dirty="0">
-              <a:latin typeface="Arial" panose="020B0604020202020204" pitchFamily="34" charset="0"/>
-            </a:endParaRPr>
-          </a:p>
-          <a:p>
-            <a:pPr marL="457200" lvl="1" indent="0" eaLnBrk="0" fontAlgn="base" hangingPunct="0">
+              <a:t>(asta) → aggiunge un’asta alla tabella delle aste</a:t>
+            </a:r>
+          </a:p>
+          <a:p>
+            <a:pPr lvl="1" eaLnBrk="0" fontAlgn="base" hangingPunct="0">
               <a:lnSpc>
                 <a:spcPct val="100000"/>
               </a:lnSpc>
@@ -9919,31 +9864,20 @@
               <a:spcAft>
                 <a:spcPct val="0"/>
               </a:spcAft>
-              <a:buFontTx/>
-              <a:buChar char="•"/>
+              <a:buFont typeface="Courier New" panose="02070309020205020404" pitchFamily="49" charset="0"/>
+              <a:buChar char="o"/>
             </a:pPr>
             <a:r>
-              <a:rPr lang="it-IT" altLang="it-IT" sz="1200" dirty="0" err="1">
-                <a:latin typeface="Arial Unicode MS"/>
-              </a:rPr>
+              <a:rPr lang="it-IT" altLang="it-IT" sz="1200" dirty="0" err="1"/>
               <a:t>renderAsteVisionateEAggiudicate</a:t>
             </a:r>
             <a:r>
-              <a:rPr lang="it-IT" altLang="it-IT" sz="1200" dirty="0">
-                <a:latin typeface="Arial Unicode MS"/>
-              </a:rPr>
-              <a:t>()</a:t>
-            </a:r>
-            <a:r>
               <a:rPr lang="it-IT" altLang="it-IT" sz="1200" dirty="0"/>
-              <a:t> → mostra aste visitate e vinte</a:t>
-            </a:r>
-            <a:endParaRPr lang="it-IT" altLang="it-IT" sz="1200" dirty="0">
-              <a:latin typeface="Arial" panose="020B0604020202020204" pitchFamily="34" charset="0"/>
-            </a:endParaRPr>
-          </a:p>
-          <a:p>
-            <a:pPr marL="457200" lvl="1" indent="0" eaLnBrk="0" fontAlgn="base" hangingPunct="0">
+              <a:t>() → mostra aste visitate e vinte</a:t>
+            </a:r>
+          </a:p>
+          <a:p>
+            <a:pPr lvl="1" eaLnBrk="0" fontAlgn="base" hangingPunct="0">
               <a:lnSpc>
                 <a:spcPct val="100000"/>
               </a:lnSpc>
@@ -9953,28 +9887,17 @@
               <a:spcAft>
                 <a:spcPct val="0"/>
               </a:spcAft>
-              <a:buFontTx/>
-              <a:buChar char="•"/>
+              <a:buFont typeface="Courier New" panose="02070309020205020404" pitchFamily="49" charset="0"/>
+              <a:buChar char="o"/>
             </a:pPr>
             <a:r>
-              <a:rPr lang="it-IT" altLang="it-IT" sz="1200" dirty="0" err="1">
-                <a:latin typeface="Arial Unicode MS"/>
-              </a:rPr>
+              <a:rPr lang="it-IT" altLang="it-IT" sz="1200" dirty="0" err="1"/>
               <a:t>addAstaVintaInTable</a:t>
             </a:r>
             <a:r>
-              <a:rPr lang="it-IT" altLang="it-IT" sz="1200" dirty="0">
-                <a:latin typeface="Arial Unicode MS"/>
-              </a:rPr>
-              <a:t>(asta)</a:t>
-            </a:r>
-            <a:r>
               <a:rPr lang="it-IT" altLang="it-IT" sz="1200" dirty="0"/>
-              <a:t> → aggiunge asta vinta in tabella</a:t>
-            </a:r>
-            <a:endParaRPr lang="it-IT" altLang="it-IT" sz="1200" dirty="0">
-              <a:latin typeface="Arial" panose="020B0604020202020204" pitchFamily="34" charset="0"/>
-            </a:endParaRPr>
+              <a:t>(asta) → aggiunge asta vinta in tabella</a:t>
+            </a:r>
           </a:p>
           <a:p>
             <a:pPr lvl="1"/>
@@ -10013,7 +9936,7 @@
         <p:spPr>
           <a:xfrm>
             <a:off x="6172200" y="4739771"/>
-            <a:ext cx="5819419" cy="3739896"/>
+            <a:ext cx="5819419" cy="1363849"/>
           </a:xfrm>
           <a:prstGeom prst="rect">
             <a:avLst/>
@@ -10194,7 +10117,7 @@
             </a:r>
           </a:p>
           <a:p>
-            <a:pPr marL="457200" lvl="1" indent="0" eaLnBrk="0" fontAlgn="base" hangingPunct="0">
+            <a:pPr lvl="1" eaLnBrk="0" fontAlgn="base" hangingPunct="0">
               <a:lnSpc>
                 <a:spcPct val="100000"/>
               </a:lnSpc>
@@ -10204,43 +10127,28 @@
               <a:spcAft>
                 <a:spcPct val="0"/>
               </a:spcAft>
-              <a:buFontTx/>
-              <a:buChar char="•"/>
+              <a:buFont typeface="Courier New" panose="02070309020205020404" pitchFamily="49" charset="0"/>
+              <a:buChar char="o"/>
             </a:pPr>
             <a:r>
-              <a:rPr lang="it-IT" altLang="it-IT" sz="1200" dirty="0" err="1">
-                <a:latin typeface="Arial Unicode MS"/>
-              </a:rPr>
+              <a:rPr lang="it-IT" altLang="it-IT" sz="1200" dirty="0" err="1"/>
               <a:t>renderOffertaPage</a:t>
             </a:r>
             <a:r>
-              <a:rPr lang="it-IT" altLang="it-IT" sz="1200" dirty="0">
-                <a:latin typeface="Arial Unicode MS"/>
-              </a:rPr>
+              <a:rPr lang="it-IT" altLang="it-IT" sz="1200" dirty="0"/>
               <a:t>(</a:t>
             </a:r>
             <a:r>
-              <a:rPr lang="it-IT" altLang="it-IT" sz="1200" dirty="0" err="1">
-                <a:latin typeface="Arial Unicode MS"/>
-              </a:rPr>
+              <a:rPr lang="it-IT" altLang="it-IT" sz="1200" dirty="0" err="1"/>
               <a:t>idAsta</a:t>
             </a:r>
             <a:r>
-              <a:rPr lang="it-IT" altLang="it-IT" sz="1200" dirty="0">
-                <a:latin typeface="Arial Unicode MS"/>
-              </a:rPr>
-              <a:t>)</a:t>
-            </a:r>
-            <a:r>
               <a:rPr lang="it-IT" altLang="it-IT" sz="1200" dirty="0"/>
-              <a:t> → mostra pagina offerta per una certa asta</a:t>
-            </a:r>
-            <a:endParaRPr lang="it-IT" altLang="it-IT" sz="1200" dirty="0">
-              <a:latin typeface="Arial" panose="020B0604020202020204" pitchFamily="34" charset="0"/>
-            </a:endParaRPr>
-          </a:p>
-          <a:p>
-            <a:pPr marL="457200" lvl="1" indent="0" eaLnBrk="0" fontAlgn="base" hangingPunct="0">
+              <a:t>) → mostra pagina offerta per una certa asta</a:t>
+            </a:r>
+          </a:p>
+          <a:p>
+            <a:pPr lvl="1" eaLnBrk="0" fontAlgn="base" hangingPunct="0">
               <a:lnSpc>
                 <a:spcPct val="100000"/>
               </a:lnSpc>
@@ -10250,31 +10158,20 @@
               <a:spcAft>
                 <a:spcPct val="0"/>
               </a:spcAft>
-              <a:buFontTx/>
-              <a:buChar char="•"/>
+              <a:buFont typeface="Courier New" panose="02070309020205020404" pitchFamily="49" charset="0"/>
+              <a:buChar char="o"/>
             </a:pPr>
             <a:r>
-              <a:rPr lang="it-IT" altLang="it-IT" sz="1200" dirty="0" err="1">
-                <a:latin typeface="Arial Unicode MS"/>
-              </a:rPr>
+              <a:rPr lang="it-IT" altLang="it-IT" sz="1200" dirty="0" err="1"/>
               <a:t>addArticoloInTable</a:t>
             </a:r>
             <a:r>
-              <a:rPr lang="it-IT" altLang="it-IT" sz="1200" dirty="0">
-                <a:latin typeface="Arial Unicode MS"/>
-              </a:rPr>
-              <a:t>(articolo)</a:t>
-            </a:r>
-            <a:r>
               <a:rPr lang="it-IT" altLang="it-IT" sz="1200" dirty="0"/>
-              <a:t> → aggiunge un articolo alla tabella articoli asta</a:t>
-            </a:r>
-            <a:endParaRPr lang="it-IT" altLang="it-IT" sz="1200" dirty="0">
-              <a:latin typeface="Arial" panose="020B0604020202020204" pitchFamily="34" charset="0"/>
-            </a:endParaRPr>
-          </a:p>
-          <a:p>
-            <a:pPr marL="457200" lvl="1" indent="0" eaLnBrk="0" fontAlgn="base" hangingPunct="0">
+              <a:t>(articolo) → aggiunge un articolo alla tabella articoli asta</a:t>
+            </a:r>
+          </a:p>
+          <a:p>
+            <a:pPr lvl="1" eaLnBrk="0" fontAlgn="base" hangingPunct="0">
               <a:lnSpc>
                 <a:spcPct val="100000"/>
               </a:lnSpc>
@@ -10284,31 +10181,20 @@
               <a:spcAft>
                 <a:spcPct val="0"/>
               </a:spcAft>
-              <a:buFontTx/>
-              <a:buChar char="•"/>
+              <a:buFont typeface="Courier New" panose="02070309020205020404" pitchFamily="49" charset="0"/>
+              <a:buChar char="o"/>
             </a:pPr>
             <a:r>
-              <a:rPr lang="it-IT" altLang="it-IT" sz="1200" dirty="0" err="1">
-                <a:latin typeface="Arial Unicode MS"/>
-              </a:rPr>
+              <a:rPr lang="it-IT" altLang="it-IT" sz="1200" dirty="0" err="1"/>
               <a:t>addOffertaInTable</a:t>
             </a:r>
             <a:r>
-              <a:rPr lang="it-IT" altLang="it-IT" sz="1200" dirty="0">
-                <a:latin typeface="Arial Unicode MS"/>
-              </a:rPr>
-              <a:t>(offerta, nuova)</a:t>
-            </a:r>
-            <a:r>
               <a:rPr lang="it-IT" altLang="it-IT" sz="1200" dirty="0"/>
-              <a:t> → aggiunge un’offerta alla tabella offerta</a:t>
-            </a:r>
-            <a:endParaRPr lang="it-IT" altLang="it-IT" sz="1200" dirty="0">
-              <a:latin typeface="Arial" panose="020B0604020202020204" pitchFamily="34" charset="0"/>
-            </a:endParaRPr>
-          </a:p>
-          <a:p>
-            <a:pPr marL="457200" lvl="1" indent="0" eaLnBrk="0" fontAlgn="base" hangingPunct="0">
+              <a:t>(offerta, nuova) → aggiunge un’offerta alla tabella offerta</a:t>
+            </a:r>
+          </a:p>
+          <a:p>
+            <a:pPr lvl="1" eaLnBrk="0" fontAlgn="base" hangingPunct="0">
               <a:lnSpc>
                 <a:spcPct val="100000"/>
               </a:lnSpc>
@@ -10318,64 +10204,41 @@
               <a:spcAft>
                 <a:spcPct val="0"/>
               </a:spcAft>
-              <a:buFontTx/>
-              <a:buChar char="•"/>
+              <a:buFont typeface="Courier New" panose="02070309020205020404" pitchFamily="49" charset="0"/>
+              <a:buChar char="o"/>
             </a:pPr>
             <a:r>
-              <a:rPr lang="it-IT" altLang="it-IT" sz="1200" dirty="0" err="1">
-                <a:latin typeface="Arial Unicode MS"/>
-              </a:rPr>
+              <a:rPr lang="it-IT" altLang="it-IT" sz="1200" dirty="0" err="1"/>
               <a:t>faiOfferta</a:t>
             </a:r>
             <a:r>
-              <a:rPr lang="it-IT" altLang="it-IT" sz="1200" dirty="0">
-                <a:latin typeface="Arial Unicode MS"/>
-              </a:rPr>
+              <a:rPr lang="it-IT" altLang="it-IT" sz="1200" dirty="0"/>
               <a:t>(</a:t>
             </a:r>
             <a:r>
-              <a:rPr lang="it-IT" altLang="it-IT" sz="1200" dirty="0" err="1">
-                <a:latin typeface="Arial Unicode MS"/>
-              </a:rPr>
+              <a:rPr lang="it-IT" altLang="it-IT" sz="1200" dirty="0" err="1"/>
               <a:t>prezzoIniziale</a:t>
             </a:r>
             <a:r>
-              <a:rPr lang="it-IT" altLang="it-IT" sz="1200" dirty="0">
-                <a:latin typeface="Arial Unicode MS"/>
-              </a:rPr>
+              <a:rPr lang="it-IT" altLang="it-IT" sz="1200" dirty="0"/>
               <a:t>, </a:t>
             </a:r>
             <a:r>
-              <a:rPr lang="it-IT" altLang="it-IT" sz="1200" dirty="0" err="1">
-                <a:latin typeface="Arial Unicode MS"/>
-              </a:rPr>
+              <a:rPr lang="it-IT" altLang="it-IT" sz="1200" dirty="0" err="1"/>
               <a:t>prezzoOffertaMassima</a:t>
             </a:r>
             <a:r>
-              <a:rPr lang="it-IT" altLang="it-IT" sz="1200" dirty="0">
-                <a:latin typeface="Arial Unicode MS"/>
-              </a:rPr>
+              <a:rPr lang="it-IT" altLang="it-IT" sz="1200" dirty="0"/>
               <a:t>, </a:t>
             </a:r>
             <a:r>
-              <a:rPr lang="it-IT" altLang="it-IT" sz="1200" dirty="0" err="1">
-                <a:latin typeface="Arial Unicode MS"/>
-              </a:rPr>
+              <a:rPr lang="it-IT" altLang="it-IT" sz="1200" dirty="0" err="1"/>
               <a:t>rialzoMinimo</a:t>
             </a:r>
             <a:r>
-              <a:rPr lang="it-IT" altLang="it-IT" sz="1200" dirty="0">
-                <a:latin typeface="Arial Unicode MS"/>
-              </a:rPr>
-              <a:t>)</a:t>
-            </a:r>
-            <a:r>
               <a:rPr lang="it-IT" altLang="it-IT" sz="1200" dirty="0"/>
-              <a:t> → invia una nuova offerta al server</a:t>
-            </a:r>
-            <a:endParaRPr lang="it-IT" altLang="it-IT" sz="1200" dirty="0">
-              <a:latin typeface="Arial" panose="020B0604020202020204" pitchFamily="34" charset="0"/>
-            </a:endParaRPr>
+              <a:t>) → invia una nuova offerta al server</a:t>
+            </a:r>
           </a:p>
           <a:p>
             <a:pPr lvl="1"/>
@@ -10489,6 +10352,96 @@
           </a:xfrm>
         </p:spPr>
       </p:pic>
+      <p:sp>
+        <p:nvSpPr>
+          <p:cNvPr id="3" name="CasellaDiTesto 2">
+            <a:extLst>
+              <a:ext uri="{FF2B5EF4-FFF2-40B4-BE49-F238E27FC236}">
+                <a16:creationId xmlns:a16="http://schemas.microsoft.com/office/drawing/2014/main" id="{23EB16A1-5D4B-1BDD-0668-7333479FA2D5}"/>
+              </a:ext>
+            </a:extLst>
+          </p:cNvPr>
+          <p:cNvSpPr txBox="1"/>
+          <p:nvPr/>
+        </p:nvSpPr>
+        <p:spPr>
+          <a:xfrm>
+            <a:off x="0" y="2782669"/>
+            <a:ext cx="971550" cy="2462213"/>
+          </a:xfrm>
+          <a:prstGeom prst="rect">
+            <a:avLst/>
+          </a:prstGeom>
+          <a:noFill/>
+        </p:spPr>
+        <p:txBody>
+          <a:bodyPr wrap="square" rtlCol="0">
+            <a:spAutoFit/>
+          </a:bodyPr>
+          <a:lstStyle/>
+          <a:p>
+            <a:r>
+              <a:rPr lang="it-IT" sz="1400" dirty="0"/>
+              <a:t>POST</a:t>
+            </a:r>
+          </a:p>
+          <a:p>
+            <a:r>
+              <a:rPr lang="it-IT" sz="1400" dirty="0"/>
+              <a:t>/</a:t>
+            </a:r>
+            <a:r>
+              <a:rPr lang="it-IT" sz="1400" dirty="0" err="1"/>
+              <a:t>SignUp</a:t>
+            </a:r>
+            <a:endParaRPr lang="it-IT" sz="1400" dirty="0"/>
+          </a:p>
+          <a:p>
+            <a:r>
+              <a:rPr lang="it-IT" sz="1400" dirty="0"/>
+              <a:t>username</a:t>
+            </a:r>
+          </a:p>
+          <a:p>
+            <a:r>
+              <a:rPr lang="it-IT" sz="1400" dirty="0"/>
+              <a:t>password</a:t>
+            </a:r>
+          </a:p>
+          <a:p>
+            <a:r>
+              <a:rPr lang="it-IT" sz="1400" dirty="0"/>
+              <a:t>nome</a:t>
+            </a:r>
+          </a:p>
+          <a:p>
+            <a:r>
+              <a:rPr lang="it-IT" sz="1400" dirty="0"/>
+              <a:t>cognome</a:t>
+            </a:r>
+          </a:p>
+          <a:p>
+            <a:r>
+              <a:rPr lang="it-IT" sz="1400" dirty="0"/>
+              <a:t>indirizzo</a:t>
+            </a:r>
+          </a:p>
+          <a:p>
+            <a:endParaRPr lang="it-IT" sz="1400" dirty="0"/>
+          </a:p>
+          <a:p>
+            <a:r>
+              <a:rPr lang="it-IT" sz="1400" dirty="0"/>
+              <a:t>From: </a:t>
+            </a:r>
+            <a:r>
+              <a:rPr lang="it-IT" sz="1400" dirty="0" err="1"/>
+              <a:t>registrazione.html</a:t>
+            </a:r>
+            <a:endParaRPr lang="it-IT" sz="1400" dirty="0"/>
+          </a:p>
+        </p:txBody>
+      </p:sp>
     </p:spTree>
     <p:extLst>
       <p:ext uri="{BB962C8B-B14F-4D97-AF65-F5344CB8AC3E}">
@@ -10577,6 +10530,73 @@
           </a:xfrm>
         </p:spPr>
       </p:pic>
+      <p:sp>
+        <p:nvSpPr>
+          <p:cNvPr id="3" name="CasellaDiTesto 2">
+            <a:extLst>
+              <a:ext uri="{FF2B5EF4-FFF2-40B4-BE49-F238E27FC236}">
+                <a16:creationId xmlns:a16="http://schemas.microsoft.com/office/drawing/2014/main" id="{85D32454-36DD-E737-236D-339F0BB0CCB3}"/>
+              </a:ext>
+            </a:extLst>
+          </p:cNvPr>
+          <p:cNvSpPr txBox="1"/>
+          <p:nvPr/>
+        </p:nvSpPr>
+        <p:spPr>
+          <a:xfrm>
+            <a:off x="0" y="2782669"/>
+            <a:ext cx="1017270" cy="1600438"/>
+          </a:xfrm>
+          <a:prstGeom prst="rect">
+            <a:avLst/>
+          </a:prstGeom>
+          <a:noFill/>
+        </p:spPr>
+        <p:txBody>
+          <a:bodyPr wrap="square" rtlCol="0">
+            <a:spAutoFit/>
+          </a:bodyPr>
+          <a:lstStyle/>
+          <a:p>
+            <a:r>
+              <a:rPr lang="it-IT" sz="1400" dirty="0"/>
+              <a:t>POST</a:t>
+            </a:r>
+          </a:p>
+          <a:p>
+            <a:r>
+              <a:rPr lang="it-IT" sz="1400" dirty="0"/>
+              <a:t>/Login</a:t>
+            </a:r>
+          </a:p>
+          <a:p>
+            <a:r>
+              <a:rPr lang="it-IT" sz="1400" dirty="0"/>
+              <a:t>username</a:t>
+            </a:r>
+          </a:p>
+          <a:p>
+            <a:r>
+              <a:rPr lang="it-IT" sz="1400" dirty="0"/>
+              <a:t>password</a:t>
+            </a:r>
+          </a:p>
+          <a:p>
+            <a:endParaRPr lang="it-IT" sz="1400" dirty="0"/>
+          </a:p>
+          <a:p>
+            <a:r>
+              <a:rPr lang="it-IT" sz="1400" dirty="0"/>
+              <a:t>From: </a:t>
+            </a:r>
+            <a:r>
+              <a:rPr lang="it-IT" sz="1400" dirty="0" err="1"/>
+              <a:t>index.html</a:t>
+            </a:r>
+            <a:endParaRPr lang="it-IT" sz="1400" dirty="0"/>
+          </a:p>
+        </p:txBody>
+      </p:sp>
     </p:spTree>
     <p:extLst>
       <p:ext uri="{BB962C8B-B14F-4D97-AF65-F5344CB8AC3E}">
@@ -10671,6 +10691,56 @@
           </a:xfrm>
         </p:spPr>
       </p:pic>
+      <p:sp>
+        <p:nvSpPr>
+          <p:cNvPr id="3" name="CasellaDiTesto 2">
+            <a:extLst>
+              <a:ext uri="{FF2B5EF4-FFF2-40B4-BE49-F238E27FC236}">
+                <a16:creationId xmlns:a16="http://schemas.microsoft.com/office/drawing/2014/main" id="{A29B8A4B-AC6B-CDF8-7E7B-C6436B01E328}"/>
+              </a:ext>
+            </a:extLst>
+          </p:cNvPr>
+          <p:cNvSpPr txBox="1"/>
+          <p:nvPr/>
+        </p:nvSpPr>
+        <p:spPr>
+          <a:xfrm>
+            <a:off x="1920240" y="3638202"/>
+            <a:ext cx="1495771" cy="954107"/>
+          </a:xfrm>
+          <a:prstGeom prst="rect">
+            <a:avLst/>
+          </a:prstGeom>
+          <a:noFill/>
+        </p:spPr>
+        <p:txBody>
+          <a:bodyPr wrap="square" rtlCol="0">
+            <a:spAutoFit/>
+          </a:bodyPr>
+          <a:lstStyle/>
+          <a:p>
+            <a:r>
+              <a:rPr lang="it-IT" sz="1400" dirty="0"/>
+              <a:t>POST</a:t>
+            </a:r>
+          </a:p>
+          <a:p>
+            <a:r>
+              <a:rPr lang="it-IT" sz="1400" dirty="0"/>
+              <a:t>/Logout</a:t>
+            </a:r>
+          </a:p>
+          <a:p>
+            <a:endParaRPr lang="it-IT" sz="1400" dirty="0"/>
+          </a:p>
+          <a:p>
+            <a:r>
+              <a:rPr lang="it-IT" sz="1400" dirty="0"/>
+              <a:t>From: *.html</a:t>
+            </a:r>
+          </a:p>
+        </p:txBody>
+      </p:sp>
     </p:spTree>
     <p:extLst>
       <p:ext uri="{BB962C8B-B14F-4D97-AF65-F5344CB8AC3E}">
@@ -10765,6 +10835,61 @@
           </a:xfrm>
         </p:spPr>
       </p:pic>
+      <p:sp>
+        <p:nvSpPr>
+          <p:cNvPr id="4" name="CasellaDiTesto 3">
+            <a:extLst>
+              <a:ext uri="{FF2B5EF4-FFF2-40B4-BE49-F238E27FC236}">
+                <a16:creationId xmlns:a16="http://schemas.microsoft.com/office/drawing/2014/main" id="{58C05F07-8A9F-8F24-7F8D-95FF13E55470}"/>
+              </a:ext>
+            </a:extLst>
+          </p:cNvPr>
+          <p:cNvSpPr txBox="1"/>
+          <p:nvPr/>
+        </p:nvSpPr>
+        <p:spPr>
+          <a:xfrm>
+            <a:off x="285750" y="3429000"/>
+            <a:ext cx="1495771" cy="954107"/>
+          </a:xfrm>
+          <a:prstGeom prst="rect">
+            <a:avLst/>
+          </a:prstGeom>
+          <a:noFill/>
+        </p:spPr>
+        <p:txBody>
+          <a:bodyPr wrap="square" rtlCol="0">
+            <a:spAutoFit/>
+          </a:bodyPr>
+          <a:lstStyle/>
+          <a:p>
+            <a:r>
+              <a:rPr lang="it-IT" sz="1400" dirty="0"/>
+              <a:t>GET</a:t>
+            </a:r>
+          </a:p>
+          <a:p>
+            <a:r>
+              <a:rPr lang="it-IT" sz="1400" dirty="0"/>
+              <a:t>/</a:t>
+            </a:r>
+            <a:r>
+              <a:rPr lang="it-IT" sz="1400" dirty="0" err="1"/>
+              <a:t>HomeServlet</a:t>
+            </a:r>
+            <a:endParaRPr lang="it-IT" sz="1400" dirty="0"/>
+          </a:p>
+          <a:p>
+            <a:endParaRPr lang="it-IT" sz="1400" dirty="0"/>
+          </a:p>
+          <a:p>
+            <a:r>
+              <a:rPr lang="it-IT" sz="1400" dirty="0"/>
+              <a:t>From: *.html</a:t>
+            </a:r>
+          </a:p>
+        </p:txBody>
+      </p:sp>
     </p:spTree>
     <p:extLst>
       <p:ext uri="{BB962C8B-B14F-4D97-AF65-F5344CB8AC3E}">
@@ -10779,6 +10904,545 @@
 </file>
 
 <file path=ppt/slides/slide25.xml><?xml version="1.0" encoding="utf-8"?>
+<p:sld xmlns:a="http://schemas.openxmlformats.org/drawingml/2006/main" xmlns:r="http://schemas.openxmlformats.org/officeDocument/2006/relationships" xmlns:p="http://schemas.openxmlformats.org/presentationml/2006/main">
+  <p:cSld>
+    <p:spTree>
+      <p:nvGrpSpPr>
+        <p:cNvPr id="1" name="">
+          <a:extLst>
+            <a:ext uri="{FF2B5EF4-FFF2-40B4-BE49-F238E27FC236}">
+              <a16:creationId xmlns:a16="http://schemas.microsoft.com/office/drawing/2014/main" id="{7D4AA0AA-E97E-39A8-8EC5-0BF71DC2DFC6}"/>
+            </a:ext>
+          </a:extLst>
+        </p:cNvPr>
+        <p:cNvGrpSpPr/>
+        <p:nvPr/>
+      </p:nvGrpSpPr>
+      <p:grpSpPr>
+        <a:xfrm>
+          <a:off x="0" y="0"/>
+          <a:ext cx="0" cy="0"/>
+          <a:chOff x="0" y="0"/>
+          <a:chExt cx="0" cy="0"/>
+        </a:xfrm>
+      </p:grpSpPr>
+      <p:sp>
+        <p:nvSpPr>
+          <p:cNvPr id="2" name="Titolo 1">
+            <a:extLst>
+              <a:ext uri="{FF2B5EF4-FFF2-40B4-BE49-F238E27FC236}">
+                <a16:creationId xmlns:a16="http://schemas.microsoft.com/office/drawing/2014/main" id="{26C2AFD9-F249-34EA-0DFD-B9149B1429FE}"/>
+              </a:ext>
+            </a:extLst>
+          </p:cNvPr>
+          <p:cNvSpPr>
+            <a:spLocks noGrp="1"/>
+          </p:cNvSpPr>
+          <p:nvPr>
+            <p:ph type="title"/>
+          </p:nvPr>
+        </p:nvSpPr>
+        <p:spPr/>
+        <p:txBody>
+          <a:bodyPr/>
+          <a:lstStyle/>
+          <a:p>
+            <a:pPr algn="ctr"/>
+            <a:r>
+              <a:rPr lang="it-IT" dirty="0"/>
+              <a:t>SEQUENCE DIAGRAM – GO TO ACQUISTO</a:t>
+            </a:r>
+          </a:p>
+        </p:txBody>
+      </p:sp>
+      <p:pic>
+        <p:nvPicPr>
+          <p:cNvPr id="5" name="Segnaposto contenuto 4" descr="Immagine che contiene testo, schermata, numero, Carattere&#10;&#10;Il contenuto generato dall'IA potrebbe non essere corretto.">
+            <a:extLst>
+              <a:ext uri="{FF2B5EF4-FFF2-40B4-BE49-F238E27FC236}">
+                <a16:creationId xmlns:a16="http://schemas.microsoft.com/office/drawing/2014/main" id="{1C3E70CE-AB16-84E7-3B89-C93CE931019E}"/>
+              </a:ext>
+            </a:extLst>
+          </p:cNvPr>
+          <p:cNvPicPr>
+            <a:picLocks noGrp="1" noChangeAspect="1"/>
+          </p:cNvPicPr>
+          <p:nvPr>
+            <p:ph idx="1"/>
+          </p:nvPr>
+        </p:nvPicPr>
+        <p:blipFill>
+          <a:blip r:embed="rId2"/>
+          <a:stretch>
+            <a:fillRect/>
+          </a:stretch>
+        </p:blipFill>
+        <p:spPr>
+          <a:xfrm>
+            <a:off x="1548246" y="1628957"/>
+            <a:ext cx="9310254" cy="4766103"/>
+          </a:xfrm>
+        </p:spPr>
+      </p:pic>
+      <p:sp>
+        <p:nvSpPr>
+          <p:cNvPr id="4" name="CasellaDiTesto 3">
+            <a:extLst>
+              <a:ext uri="{FF2B5EF4-FFF2-40B4-BE49-F238E27FC236}">
+                <a16:creationId xmlns:a16="http://schemas.microsoft.com/office/drawing/2014/main" id="{263A7FE6-EFCE-C076-4238-B8AB0BC82820}"/>
+              </a:ext>
+            </a:extLst>
+          </p:cNvPr>
+          <p:cNvSpPr txBox="1"/>
+          <p:nvPr/>
+        </p:nvSpPr>
+        <p:spPr>
+          <a:xfrm>
+            <a:off x="159385" y="3354418"/>
+            <a:ext cx="1495771" cy="954107"/>
+          </a:xfrm>
+          <a:prstGeom prst="rect">
+            <a:avLst/>
+          </a:prstGeom>
+          <a:noFill/>
+        </p:spPr>
+        <p:txBody>
+          <a:bodyPr wrap="square" rtlCol="0">
+            <a:spAutoFit/>
+          </a:bodyPr>
+          <a:lstStyle/>
+          <a:p>
+            <a:r>
+              <a:rPr lang="it-IT" sz="1400" dirty="0"/>
+              <a:t>POST</a:t>
+            </a:r>
+          </a:p>
+          <a:p>
+            <a:r>
+              <a:rPr lang="it-IT" sz="1400" dirty="0"/>
+              <a:t>/</a:t>
+            </a:r>
+            <a:r>
+              <a:rPr lang="it-IT" sz="1400" dirty="0" err="1"/>
+              <a:t>AcquistoServlet</a:t>
+            </a:r>
+            <a:endParaRPr lang="it-IT" sz="1400" dirty="0"/>
+          </a:p>
+          <a:p>
+            <a:endParaRPr lang="it-IT" sz="1400" dirty="0"/>
+          </a:p>
+          <a:p>
+            <a:r>
+              <a:rPr lang="it-IT" sz="1400" dirty="0"/>
+              <a:t>From: *.html</a:t>
+            </a:r>
+          </a:p>
+        </p:txBody>
+      </p:sp>
+      <p:sp>
+        <p:nvSpPr>
+          <p:cNvPr id="6" name="Rettangolo 5">
+            <a:extLst>
+              <a:ext uri="{FF2B5EF4-FFF2-40B4-BE49-F238E27FC236}">
+                <a16:creationId xmlns:a16="http://schemas.microsoft.com/office/drawing/2014/main" id="{C18D24EB-451C-D5DA-9587-7AF30BA2875C}"/>
+              </a:ext>
+            </a:extLst>
+          </p:cNvPr>
+          <p:cNvSpPr/>
+          <p:nvPr/>
+        </p:nvSpPr>
+        <p:spPr>
+          <a:xfrm>
+            <a:off x="700635" y="5772150"/>
+            <a:ext cx="954521" cy="622910"/>
+          </a:xfrm>
+          <a:prstGeom prst="rect">
+            <a:avLst/>
+          </a:prstGeom>
+          <a:solidFill>
+            <a:schemeClr val="bg1"/>
+          </a:solidFill>
+          <a:ln w="12700" cap="flat" cmpd="sng" algn="ctr">
+            <a:noFill/>
+            <a:prstDash val="solid"/>
+            <a:miter lim="800000"/>
+          </a:ln>
+          <a:effectLst/>
+        </p:spPr>
+        <p:style>
+          <a:lnRef idx="2">
+            <a:schemeClr val="accent1">
+              <a:shade val="50000"/>
+            </a:schemeClr>
+          </a:lnRef>
+          <a:fillRef idx="1">
+            <a:schemeClr val="accent1"/>
+          </a:fillRef>
+          <a:effectRef idx="0">
+            <a:schemeClr val="accent1"/>
+          </a:effectRef>
+          <a:fontRef idx="minor">
+            <a:schemeClr val="lt1"/>
+          </a:fontRef>
+        </p:style>
+        <p:txBody>
+          <a:bodyPr rtlCol="0" anchor="ctr"/>
+          <a:lstStyle/>
+          <a:p>
+            <a:pPr algn="ctr"/>
+            <a:endParaRPr lang="it-IT"/>
+          </a:p>
+        </p:txBody>
+      </p:sp>
+      <p:sp>
+        <p:nvSpPr>
+          <p:cNvPr id="7" name="Rettangolo 6">
+            <a:extLst>
+              <a:ext uri="{FF2B5EF4-FFF2-40B4-BE49-F238E27FC236}">
+                <a16:creationId xmlns:a16="http://schemas.microsoft.com/office/drawing/2014/main" id="{2850BFA2-FD14-1EDA-490A-767F8B3E3EA8}"/>
+              </a:ext>
+            </a:extLst>
+          </p:cNvPr>
+          <p:cNvSpPr/>
+          <p:nvPr/>
+        </p:nvSpPr>
+        <p:spPr>
+          <a:xfrm>
+            <a:off x="10858500" y="5772150"/>
+            <a:ext cx="533400" cy="622910"/>
+          </a:xfrm>
+          <a:prstGeom prst="rect">
+            <a:avLst/>
+          </a:prstGeom>
+          <a:solidFill>
+            <a:schemeClr val="bg1"/>
+          </a:solidFill>
+          <a:ln w="12700" cap="flat" cmpd="sng" algn="ctr">
+            <a:noFill/>
+            <a:prstDash val="solid"/>
+            <a:miter lim="800000"/>
+          </a:ln>
+          <a:effectLst/>
+        </p:spPr>
+        <p:style>
+          <a:lnRef idx="2">
+            <a:schemeClr val="accent1">
+              <a:shade val="50000"/>
+            </a:schemeClr>
+          </a:lnRef>
+          <a:fillRef idx="1">
+            <a:schemeClr val="accent1"/>
+          </a:fillRef>
+          <a:effectRef idx="0">
+            <a:schemeClr val="accent1"/>
+          </a:effectRef>
+          <a:fontRef idx="minor">
+            <a:schemeClr val="lt1"/>
+          </a:fontRef>
+        </p:style>
+        <p:txBody>
+          <a:bodyPr rtlCol="0" anchor="ctr"/>
+          <a:lstStyle/>
+          <a:p>
+            <a:pPr algn="ctr"/>
+            <a:endParaRPr lang="it-IT"/>
+          </a:p>
+        </p:txBody>
+      </p:sp>
+    </p:spTree>
+    <p:extLst>
+      <p:ext uri="{BB962C8B-B14F-4D97-AF65-F5344CB8AC3E}">
+        <p14:creationId xmlns:p14="http://schemas.microsoft.com/office/powerpoint/2010/main" val="3112876415"/>
+      </p:ext>
+    </p:extLst>
+  </p:cSld>
+  <p:clrMapOvr>
+    <a:masterClrMapping/>
+  </p:clrMapOvr>
+</p:sld>
+</file>
+
+<file path=ppt/slides/slide26.xml><?xml version="1.0" encoding="utf-8"?>
+<p:sld xmlns:a="http://schemas.openxmlformats.org/drawingml/2006/main" xmlns:r="http://schemas.openxmlformats.org/officeDocument/2006/relationships" xmlns:p="http://schemas.openxmlformats.org/presentationml/2006/main">
+  <p:cSld>
+    <p:spTree>
+      <p:nvGrpSpPr>
+        <p:cNvPr id="1" name="">
+          <a:extLst>
+            <a:ext uri="{FF2B5EF4-FFF2-40B4-BE49-F238E27FC236}">
+              <a16:creationId xmlns:a16="http://schemas.microsoft.com/office/drawing/2014/main" id="{73238343-DEA0-2086-1C54-63C48A8E27DE}"/>
+            </a:ext>
+          </a:extLst>
+        </p:cNvPr>
+        <p:cNvGrpSpPr/>
+        <p:nvPr/>
+      </p:nvGrpSpPr>
+      <p:grpSpPr>
+        <a:xfrm>
+          <a:off x="0" y="0"/>
+          <a:ext cx="0" cy="0"/>
+          <a:chOff x="0" y="0"/>
+          <a:chExt cx="0" cy="0"/>
+        </a:xfrm>
+      </p:grpSpPr>
+      <p:sp>
+        <p:nvSpPr>
+          <p:cNvPr id="2" name="Titolo 1">
+            <a:extLst>
+              <a:ext uri="{FF2B5EF4-FFF2-40B4-BE49-F238E27FC236}">
+                <a16:creationId xmlns:a16="http://schemas.microsoft.com/office/drawing/2014/main" id="{F08D50D1-BF1F-1913-29B2-9A7F9C8FD4FD}"/>
+              </a:ext>
+            </a:extLst>
+          </p:cNvPr>
+          <p:cNvSpPr>
+            <a:spLocks noGrp="1"/>
+          </p:cNvSpPr>
+          <p:nvPr>
+            <p:ph type="title"/>
+          </p:nvPr>
+        </p:nvSpPr>
+        <p:spPr/>
+        <p:txBody>
+          <a:bodyPr>
+            <a:normAutofit fontScale="90000"/>
+          </a:bodyPr>
+          <a:lstStyle/>
+          <a:p>
+            <a:pPr algn="ctr"/>
+            <a:r>
+              <a:rPr lang="it-IT" dirty="0"/>
+              <a:t>SEQUENCE DIAGRAM – SEARCH ASTE BY </a:t>
+            </a:r>
+            <a:r>
+              <a:rPr lang="it-IT" dirty="0" err="1"/>
+              <a:t>KEYword</a:t>
+            </a:r>
+            <a:r>
+              <a:rPr lang="it-IT" dirty="0"/>
+              <a:t> </a:t>
+            </a:r>
+          </a:p>
+        </p:txBody>
+      </p:sp>
+      <p:pic>
+        <p:nvPicPr>
+          <p:cNvPr id="5" name="Segnaposto contenuto 4" descr="Immagine che contiene testo, schermata, Carattere, linea&#10;&#10;Il contenuto generato dall'IA potrebbe non essere corretto.">
+            <a:extLst>
+              <a:ext uri="{FF2B5EF4-FFF2-40B4-BE49-F238E27FC236}">
+                <a16:creationId xmlns:a16="http://schemas.microsoft.com/office/drawing/2014/main" id="{39BF1B3C-8B65-4BD8-1C2F-CDA1BC851D9A}"/>
+              </a:ext>
+            </a:extLst>
+          </p:cNvPr>
+          <p:cNvPicPr>
+            <a:picLocks noGrp="1" noChangeAspect="1"/>
+          </p:cNvPicPr>
+          <p:nvPr>
+            <p:ph idx="1"/>
+          </p:nvPr>
+        </p:nvPicPr>
+        <p:blipFill>
+          <a:blip r:embed="rId2"/>
+          <a:stretch>
+            <a:fillRect/>
+          </a:stretch>
+        </p:blipFill>
+        <p:spPr>
+          <a:xfrm>
+            <a:off x="2272636" y="1724891"/>
+            <a:ext cx="7924204" cy="4520045"/>
+          </a:xfrm>
+        </p:spPr>
+      </p:pic>
+      <p:sp>
+        <p:nvSpPr>
+          <p:cNvPr id="3" name="CasellaDiTesto 2">
+            <a:extLst>
+              <a:ext uri="{FF2B5EF4-FFF2-40B4-BE49-F238E27FC236}">
+                <a16:creationId xmlns:a16="http://schemas.microsoft.com/office/drawing/2014/main" id="{99989B1E-9038-7F25-49DE-2E8C5C318A6A}"/>
+              </a:ext>
+            </a:extLst>
+          </p:cNvPr>
+          <p:cNvSpPr txBox="1"/>
+          <p:nvPr/>
+        </p:nvSpPr>
+        <p:spPr>
+          <a:xfrm>
+            <a:off x="388620" y="3146712"/>
+            <a:ext cx="1884017" cy="1169551"/>
+          </a:xfrm>
+          <a:prstGeom prst="rect">
+            <a:avLst/>
+          </a:prstGeom>
+          <a:noFill/>
+        </p:spPr>
+        <p:txBody>
+          <a:bodyPr wrap="square" rtlCol="0">
+            <a:spAutoFit/>
+          </a:bodyPr>
+          <a:lstStyle/>
+          <a:p>
+            <a:r>
+              <a:rPr lang="it-IT" sz="1400" dirty="0"/>
+              <a:t>POST</a:t>
+            </a:r>
+          </a:p>
+          <a:p>
+            <a:r>
+              <a:rPr lang="it-IT" sz="1400" dirty="0"/>
+              <a:t>/</a:t>
+            </a:r>
+            <a:r>
+              <a:rPr lang="it-IT" sz="1400" dirty="0" err="1"/>
+              <a:t>AcquistoServlet</a:t>
+            </a:r>
+            <a:endParaRPr lang="it-IT" sz="1400" dirty="0"/>
+          </a:p>
+          <a:p>
+            <a:r>
+              <a:rPr lang="it-IT" sz="1400" dirty="0"/>
+              <a:t>keyword</a:t>
+            </a:r>
+          </a:p>
+          <a:p>
+            <a:endParaRPr lang="it-IT" sz="1400" dirty="0"/>
+          </a:p>
+          <a:p>
+            <a:r>
+              <a:rPr lang="it-IT" sz="1400" dirty="0"/>
+              <a:t>From: </a:t>
+            </a:r>
+            <a:r>
+              <a:rPr lang="it-IT" sz="1400" dirty="0" err="1"/>
+              <a:t>acquisto.html</a:t>
+            </a:r>
+            <a:endParaRPr lang="it-IT" sz="1400" dirty="0"/>
+          </a:p>
+        </p:txBody>
+      </p:sp>
+      <p:sp>
+        <p:nvSpPr>
+          <p:cNvPr id="4" name="Rettangolo 3">
+            <a:extLst>
+              <a:ext uri="{FF2B5EF4-FFF2-40B4-BE49-F238E27FC236}">
+                <a16:creationId xmlns:a16="http://schemas.microsoft.com/office/drawing/2014/main" id="{00236F7B-D116-4C81-75E7-6BC6D0AB9FD1}"/>
+              </a:ext>
+            </a:extLst>
+          </p:cNvPr>
+          <p:cNvSpPr/>
+          <p:nvPr/>
+        </p:nvSpPr>
+        <p:spPr>
+          <a:xfrm>
+            <a:off x="605790" y="5554980"/>
+            <a:ext cx="1771650" cy="822960"/>
+          </a:xfrm>
+          <a:prstGeom prst="rect">
+            <a:avLst/>
+          </a:prstGeom>
+          <a:solidFill>
+            <a:schemeClr val="bg1"/>
+          </a:solidFill>
+          <a:ln w="12700" cap="flat" cmpd="sng" algn="ctr">
+            <a:noFill/>
+            <a:prstDash val="solid"/>
+            <a:miter lim="800000"/>
+          </a:ln>
+          <a:effectLst/>
+        </p:spPr>
+        <p:style>
+          <a:lnRef idx="2">
+            <a:schemeClr val="accent1">
+              <a:shade val="50000"/>
+            </a:schemeClr>
+          </a:lnRef>
+          <a:fillRef idx="1">
+            <a:schemeClr val="accent1"/>
+          </a:fillRef>
+          <a:effectRef idx="0">
+            <a:schemeClr val="accent1"/>
+          </a:effectRef>
+          <a:fontRef idx="minor">
+            <a:schemeClr val="lt1"/>
+          </a:fontRef>
+        </p:style>
+        <p:txBody>
+          <a:bodyPr rtlCol="0" anchor="ctr"/>
+          <a:lstStyle/>
+          <a:p>
+            <a:pPr algn="ctr"/>
+            <a:endParaRPr lang="it-IT"/>
+          </a:p>
+        </p:txBody>
+      </p:sp>
+      <p:sp>
+        <p:nvSpPr>
+          <p:cNvPr id="6" name="Rettangolo 5">
+            <a:extLst>
+              <a:ext uri="{FF2B5EF4-FFF2-40B4-BE49-F238E27FC236}">
+                <a16:creationId xmlns:a16="http://schemas.microsoft.com/office/drawing/2014/main" id="{AA79B7AE-2BE7-0E03-300C-2F095395748B}"/>
+              </a:ext>
+            </a:extLst>
+          </p:cNvPr>
+          <p:cNvSpPr/>
+          <p:nvPr/>
+        </p:nvSpPr>
+        <p:spPr>
+          <a:xfrm>
+            <a:off x="10196840" y="5646420"/>
+            <a:ext cx="1336030" cy="731520"/>
+          </a:xfrm>
+          <a:prstGeom prst="rect">
+            <a:avLst/>
+          </a:prstGeom>
+          <a:solidFill>
+            <a:schemeClr val="bg1"/>
+          </a:solidFill>
+          <a:ln w="12700" cap="flat" cmpd="sng" algn="ctr">
+            <a:noFill/>
+            <a:prstDash val="solid"/>
+            <a:miter lim="800000"/>
+          </a:ln>
+          <a:effectLst/>
+        </p:spPr>
+        <p:style>
+          <a:lnRef idx="2">
+            <a:schemeClr val="accent1">
+              <a:shade val="50000"/>
+            </a:schemeClr>
+          </a:lnRef>
+          <a:fillRef idx="1">
+            <a:schemeClr val="accent1"/>
+          </a:fillRef>
+          <a:effectRef idx="0">
+            <a:schemeClr val="accent1"/>
+          </a:effectRef>
+          <a:fontRef idx="minor">
+            <a:schemeClr val="lt1"/>
+          </a:fontRef>
+        </p:style>
+        <p:txBody>
+          <a:bodyPr rtlCol="0" anchor="ctr"/>
+          <a:lstStyle/>
+          <a:p>
+            <a:pPr algn="ctr"/>
+            <a:endParaRPr lang="it-IT"/>
+          </a:p>
+        </p:txBody>
+      </p:sp>
+    </p:spTree>
+    <p:extLst>
+      <p:ext uri="{BB962C8B-B14F-4D97-AF65-F5344CB8AC3E}">
+        <p14:creationId xmlns:p14="http://schemas.microsoft.com/office/powerpoint/2010/main" val="1866007806"/>
+      </p:ext>
+    </p:extLst>
+  </p:cSld>
+  <p:clrMapOvr>
+    <a:masterClrMapping/>
+  </p:clrMapOvr>
+</p:sld>
+</file>
+
+<file path=ppt/slides/slide27.xml><?xml version="1.0" encoding="utf-8"?>
 <p:sld xmlns:a="http://schemas.openxmlformats.org/drawingml/2006/main" xmlns:r="http://schemas.openxmlformats.org/officeDocument/2006/relationships" xmlns:p="http://schemas.openxmlformats.org/presentationml/2006/main">
   <p:cSld>
     <p:spTree>
@@ -10859,6 +11523,183 @@
           </a:xfrm>
         </p:spPr>
       </p:pic>
+      <p:sp>
+        <p:nvSpPr>
+          <p:cNvPr id="3" name="CasellaDiTesto 2">
+            <a:extLst>
+              <a:ext uri="{FF2B5EF4-FFF2-40B4-BE49-F238E27FC236}">
+                <a16:creationId xmlns:a16="http://schemas.microsoft.com/office/drawing/2014/main" id="{5A8A7EE0-6C3B-BC91-B54C-0BE784C18CA2}"/>
+              </a:ext>
+            </a:extLst>
+          </p:cNvPr>
+          <p:cNvSpPr txBox="1"/>
+          <p:nvPr/>
+        </p:nvSpPr>
+        <p:spPr>
+          <a:xfrm>
+            <a:off x="1074420" y="2691014"/>
+            <a:ext cx="1463039" cy="1384995"/>
+          </a:xfrm>
+          <a:prstGeom prst="rect">
+            <a:avLst/>
+          </a:prstGeom>
+          <a:noFill/>
+        </p:spPr>
+        <p:txBody>
+          <a:bodyPr wrap="square" rtlCol="0">
+            <a:spAutoFit/>
+          </a:bodyPr>
+          <a:lstStyle/>
+          <a:p>
+            <a:r>
+              <a:rPr lang="it-IT" sz="1400" dirty="0"/>
+              <a:t>GET</a:t>
+            </a:r>
+          </a:p>
+          <a:p>
+            <a:r>
+              <a:rPr lang="it-IT" sz="1400" dirty="0"/>
+              <a:t>/</a:t>
+            </a:r>
+            <a:r>
+              <a:rPr lang="it-IT" sz="1400" dirty="0" err="1"/>
+              <a:t>OfferteServlet</a:t>
+            </a:r>
+            <a:endParaRPr lang="it-IT" sz="1400" dirty="0"/>
+          </a:p>
+          <a:p>
+            <a:r>
+              <a:rPr lang="it-IT" sz="1400" dirty="0" err="1"/>
+              <a:t>idAsta</a:t>
+            </a:r>
+            <a:endParaRPr lang="it-IT" sz="1400" dirty="0"/>
+          </a:p>
+          <a:p>
+            <a:endParaRPr lang="it-IT" sz="1400" dirty="0"/>
+          </a:p>
+          <a:p>
+            <a:r>
+              <a:rPr lang="it-IT" sz="1400" dirty="0"/>
+              <a:t>From: </a:t>
+            </a:r>
+            <a:r>
+              <a:rPr lang="it-IT" sz="1400" dirty="0" err="1"/>
+              <a:t>acquisto.html</a:t>
+            </a:r>
+            <a:endParaRPr lang="it-IT" sz="1400" dirty="0"/>
+          </a:p>
+        </p:txBody>
+      </p:sp>
+      <p:sp>
+        <p:nvSpPr>
+          <p:cNvPr id="4" name="Rettangolo 3">
+            <a:extLst>
+              <a:ext uri="{FF2B5EF4-FFF2-40B4-BE49-F238E27FC236}">
+                <a16:creationId xmlns:a16="http://schemas.microsoft.com/office/drawing/2014/main" id="{71048369-3CB3-926E-C400-675B96F97709}"/>
+              </a:ext>
+            </a:extLst>
+          </p:cNvPr>
+          <p:cNvSpPr/>
+          <p:nvPr/>
+        </p:nvSpPr>
+        <p:spPr>
+          <a:xfrm>
+            <a:off x="216477" y="5680710"/>
+            <a:ext cx="1771650" cy="822960"/>
+          </a:xfrm>
+          <a:prstGeom prst="rect">
+            <a:avLst/>
+          </a:prstGeom>
+          <a:solidFill>
+            <a:schemeClr val="bg1"/>
+          </a:solidFill>
+          <a:ln w="12700" cap="flat" cmpd="sng" algn="ctr">
+            <a:noFill/>
+            <a:prstDash val="solid"/>
+            <a:miter lim="800000"/>
+          </a:ln>
+          <a:effectLst/>
+        </p:spPr>
+        <p:style>
+          <a:lnRef idx="2">
+            <a:schemeClr val="accent1">
+              <a:shade val="50000"/>
+            </a:schemeClr>
+          </a:lnRef>
+          <a:fillRef idx="1">
+            <a:schemeClr val="accent1"/>
+          </a:fillRef>
+          <a:effectRef idx="0">
+            <a:schemeClr val="accent1"/>
+          </a:effectRef>
+          <a:fontRef idx="minor">
+            <a:schemeClr val="lt1"/>
+          </a:fontRef>
+        </p:style>
+        <p:txBody>
+          <a:bodyPr rtlCol="0" anchor="ctr"/>
+          <a:lstStyle/>
+          <a:p>
+            <a:pPr algn="ctr"/>
+            <a:endParaRPr lang="it-IT"/>
+          </a:p>
+        </p:txBody>
+      </p:sp>
+      <p:sp>
+        <p:nvSpPr>
+          <p:cNvPr id="6" name="Rettangolo 5">
+            <a:extLst>
+              <a:ext uri="{FF2B5EF4-FFF2-40B4-BE49-F238E27FC236}">
+                <a16:creationId xmlns:a16="http://schemas.microsoft.com/office/drawing/2014/main" id="{5B12CD65-39BB-74F5-7160-59D290B83B7A}"/>
+              </a:ext>
+            </a:extLst>
+          </p:cNvPr>
+          <p:cNvSpPr/>
+          <p:nvPr/>
+        </p:nvSpPr>
+        <p:spPr>
+          <a:xfrm>
+            <a:off x="10203873" y="5680710"/>
+            <a:ext cx="1771650" cy="822960"/>
+          </a:xfrm>
+          <a:prstGeom prst="rect">
+            <a:avLst/>
+          </a:prstGeom>
+          <a:solidFill>
+            <a:schemeClr val="bg1"/>
+          </a:solidFill>
+          <a:ln w="12700" cap="flat" cmpd="sng" algn="ctr">
+            <a:noFill/>
+            <a:prstDash val="solid"/>
+            <a:miter lim="800000"/>
+          </a:ln>
+          <a:effectLst/>
+        </p:spPr>
+        <p:style>
+          <a:lnRef idx="2">
+            <a:schemeClr val="accent1">
+              <a:shade val="50000"/>
+            </a:schemeClr>
+          </a:lnRef>
+          <a:fillRef idx="1">
+            <a:schemeClr val="accent1"/>
+          </a:fillRef>
+          <a:effectRef idx="0">
+            <a:schemeClr val="accent1"/>
+          </a:effectRef>
+          <a:fontRef idx="minor">
+            <a:schemeClr val="lt1"/>
+          </a:fontRef>
+        </p:style>
+        <p:txBody>
+          <a:bodyPr rtlCol="0" anchor="ctr"/>
+          <a:lstStyle/>
+          <a:p>
+            <a:pPr algn="ctr"/>
+            <a:endParaRPr lang="it-IT"/>
+          </a:p>
+        </p:txBody>
+      </p:sp>
     </p:spTree>
     <p:extLst>
       <p:ext uri="{BB962C8B-B14F-4D97-AF65-F5344CB8AC3E}">
@@ -10872,7 +11713,285 @@
 </p:sld>
 </file>
 
-<file path=ppt/slides/slide26.xml><?xml version="1.0" encoding="utf-8"?>
+<file path=ppt/slides/slide28.xml><?xml version="1.0" encoding="utf-8"?>
+<p:sld xmlns:a="http://schemas.openxmlformats.org/drawingml/2006/main" xmlns:r="http://schemas.openxmlformats.org/officeDocument/2006/relationships" xmlns:p="http://schemas.openxmlformats.org/presentationml/2006/main">
+  <p:cSld>
+    <p:spTree>
+      <p:nvGrpSpPr>
+        <p:cNvPr id="1" name="">
+          <a:extLst>
+            <a:ext uri="{FF2B5EF4-FFF2-40B4-BE49-F238E27FC236}">
+              <a16:creationId xmlns:a16="http://schemas.microsoft.com/office/drawing/2014/main" id="{31FAC8C2-4EA9-B8C7-1A88-A526A93B9E77}"/>
+            </a:ext>
+          </a:extLst>
+        </p:cNvPr>
+        <p:cNvGrpSpPr/>
+        <p:nvPr/>
+      </p:nvGrpSpPr>
+      <p:grpSpPr>
+        <a:xfrm>
+          <a:off x="0" y="0"/>
+          <a:ext cx="0" cy="0"/>
+          <a:chOff x="0" y="0"/>
+          <a:chExt cx="0" cy="0"/>
+        </a:xfrm>
+      </p:grpSpPr>
+      <p:sp>
+        <p:nvSpPr>
+          <p:cNvPr id="2" name="Titolo 1">
+            <a:extLst>
+              <a:ext uri="{FF2B5EF4-FFF2-40B4-BE49-F238E27FC236}">
+                <a16:creationId xmlns:a16="http://schemas.microsoft.com/office/drawing/2014/main" id="{5D6AC322-0E0B-6A6E-04D0-8AEC47B203AB}"/>
+              </a:ext>
+            </a:extLst>
+          </p:cNvPr>
+          <p:cNvSpPr>
+            <a:spLocks noGrp="1"/>
+          </p:cNvSpPr>
+          <p:nvPr>
+            <p:ph type="title"/>
+          </p:nvPr>
+        </p:nvSpPr>
+        <p:spPr/>
+        <p:txBody>
+          <a:bodyPr/>
+          <a:lstStyle/>
+          <a:p>
+            <a:pPr algn="ctr"/>
+            <a:r>
+              <a:rPr lang="it-IT" dirty="0"/>
+              <a:t>SEQUENCE DIAGRAM – FAI OFFERTA</a:t>
+            </a:r>
+          </a:p>
+        </p:txBody>
+      </p:sp>
+      <p:pic>
+        <p:nvPicPr>
+          <p:cNvPr id="5" name="Segnaposto contenuto 4" descr="Immagine che contiene testo, schermata, linea, Carattere&#10;&#10;Il contenuto generato dall'IA potrebbe non essere corretto.">
+            <a:extLst>
+              <a:ext uri="{FF2B5EF4-FFF2-40B4-BE49-F238E27FC236}">
+                <a16:creationId xmlns:a16="http://schemas.microsoft.com/office/drawing/2014/main" id="{8F0A9A2C-7FDE-9C44-66DA-9924D0DC10D0}"/>
+              </a:ext>
+            </a:extLst>
+          </p:cNvPr>
+          <p:cNvPicPr>
+            <a:picLocks noGrp="1" noChangeAspect="1"/>
+          </p:cNvPicPr>
+          <p:nvPr>
+            <p:ph idx="1"/>
+          </p:nvPr>
+        </p:nvPicPr>
+        <p:blipFill>
+          <a:blip r:embed="rId2"/>
+          <a:stretch>
+            <a:fillRect/>
+          </a:stretch>
+        </p:blipFill>
+        <p:spPr>
+          <a:xfrm>
+            <a:off x="2493818" y="1577483"/>
+            <a:ext cx="7232073" cy="4942889"/>
+          </a:xfrm>
+        </p:spPr>
+      </p:pic>
+      <p:sp>
+        <p:nvSpPr>
+          <p:cNvPr id="3" name="CasellaDiTesto 2">
+            <a:extLst>
+              <a:ext uri="{FF2B5EF4-FFF2-40B4-BE49-F238E27FC236}">
+                <a16:creationId xmlns:a16="http://schemas.microsoft.com/office/drawing/2014/main" id="{B073C763-2005-AE57-4573-C446E918F28D}"/>
+              </a:ext>
+            </a:extLst>
+          </p:cNvPr>
+          <p:cNvSpPr txBox="1"/>
+          <p:nvPr/>
+        </p:nvSpPr>
+        <p:spPr>
+          <a:xfrm>
+            <a:off x="700635" y="3192432"/>
+            <a:ext cx="1622945" cy="1384995"/>
+          </a:xfrm>
+          <a:prstGeom prst="rect">
+            <a:avLst/>
+          </a:prstGeom>
+          <a:noFill/>
+        </p:spPr>
+        <p:txBody>
+          <a:bodyPr wrap="square" rtlCol="0">
+            <a:spAutoFit/>
+          </a:bodyPr>
+          <a:lstStyle/>
+          <a:p>
+            <a:r>
+              <a:rPr lang="it-IT" sz="1400" dirty="0"/>
+              <a:t>POST</a:t>
+            </a:r>
+          </a:p>
+          <a:p>
+            <a:r>
+              <a:rPr lang="it-IT" sz="1400" dirty="0"/>
+              <a:t>/</a:t>
+            </a:r>
+            <a:r>
+              <a:rPr lang="it-IT" sz="1400" dirty="0" err="1"/>
+              <a:t>FaiOfferta</a:t>
+            </a:r>
+            <a:endParaRPr lang="it-IT" sz="1400" dirty="0"/>
+          </a:p>
+          <a:p>
+            <a:r>
+              <a:rPr lang="it-IT" sz="1400" dirty="0" err="1"/>
+              <a:t>prezzoOfferto</a:t>
+            </a:r>
+            <a:endParaRPr lang="it-IT" sz="1400" dirty="0"/>
+          </a:p>
+          <a:p>
+            <a:r>
+              <a:rPr lang="it-IT" sz="1400" dirty="0" err="1"/>
+              <a:t>idAsta</a:t>
+            </a:r>
+            <a:endParaRPr lang="it-IT" sz="1400" dirty="0"/>
+          </a:p>
+          <a:p>
+            <a:endParaRPr lang="it-IT" sz="1400" dirty="0"/>
+          </a:p>
+          <a:p>
+            <a:r>
+              <a:rPr lang="it-IT" sz="1400" dirty="0"/>
+              <a:t>From: </a:t>
+            </a:r>
+            <a:r>
+              <a:rPr lang="it-IT" sz="1400" dirty="0" err="1"/>
+              <a:t>offerta.html</a:t>
+            </a:r>
+            <a:endParaRPr lang="it-IT" sz="1400" dirty="0"/>
+          </a:p>
+        </p:txBody>
+      </p:sp>
+      <p:sp>
+        <p:nvSpPr>
+          <p:cNvPr id="4" name="Rettangolo 3">
+            <a:extLst>
+              <a:ext uri="{FF2B5EF4-FFF2-40B4-BE49-F238E27FC236}">
+                <a16:creationId xmlns:a16="http://schemas.microsoft.com/office/drawing/2014/main" id="{4074CDD7-E7BC-43A5-FFB2-CAE3B5FF6FC4}"/>
+              </a:ext>
+            </a:extLst>
+          </p:cNvPr>
+          <p:cNvSpPr/>
+          <p:nvPr/>
+        </p:nvSpPr>
+        <p:spPr>
+          <a:xfrm>
+            <a:off x="722168" y="5593587"/>
+            <a:ext cx="1771650" cy="822960"/>
+          </a:xfrm>
+          <a:prstGeom prst="rect">
+            <a:avLst/>
+          </a:prstGeom>
+          <a:solidFill>
+            <a:schemeClr val="bg1"/>
+          </a:solidFill>
+          <a:ln w="12700" cap="flat" cmpd="sng" algn="ctr">
+            <a:noFill/>
+            <a:prstDash val="solid"/>
+            <a:miter lim="800000"/>
+          </a:ln>
+          <a:effectLst/>
+        </p:spPr>
+        <p:style>
+          <a:lnRef idx="2">
+            <a:schemeClr val="accent1">
+              <a:shade val="50000"/>
+            </a:schemeClr>
+          </a:lnRef>
+          <a:fillRef idx="1">
+            <a:schemeClr val="accent1"/>
+          </a:fillRef>
+          <a:effectRef idx="0">
+            <a:schemeClr val="accent1"/>
+          </a:effectRef>
+          <a:fontRef idx="minor">
+            <a:schemeClr val="lt1"/>
+          </a:fontRef>
+        </p:style>
+        <p:txBody>
+          <a:bodyPr rtlCol="0" anchor="ctr"/>
+          <a:lstStyle/>
+          <a:p>
+            <a:pPr algn="ctr"/>
+            <a:endParaRPr lang="it-IT"/>
+          </a:p>
+        </p:txBody>
+      </p:sp>
+      <p:sp>
+        <p:nvSpPr>
+          <p:cNvPr id="6" name="Rettangolo 5">
+            <a:extLst>
+              <a:ext uri="{FF2B5EF4-FFF2-40B4-BE49-F238E27FC236}">
+                <a16:creationId xmlns:a16="http://schemas.microsoft.com/office/drawing/2014/main" id="{A3F57FAC-689E-EFAF-B04B-419BC477D6E9}"/>
+              </a:ext>
+            </a:extLst>
+          </p:cNvPr>
+          <p:cNvSpPr/>
+          <p:nvPr/>
+        </p:nvSpPr>
+        <p:spPr>
+          <a:xfrm>
+            <a:off x="9620250" y="5795010"/>
+            <a:ext cx="1771650" cy="822960"/>
+          </a:xfrm>
+          <a:prstGeom prst="rect">
+            <a:avLst/>
+          </a:prstGeom>
+          <a:solidFill>
+            <a:schemeClr val="bg1"/>
+          </a:solidFill>
+          <a:ln w="12700" cap="flat" cmpd="sng" algn="ctr">
+            <a:noFill/>
+            <a:prstDash val="solid"/>
+            <a:miter lim="800000"/>
+          </a:ln>
+          <a:effectLst/>
+        </p:spPr>
+        <p:style>
+          <a:lnRef idx="2">
+            <a:schemeClr val="accent1">
+              <a:shade val="50000"/>
+            </a:schemeClr>
+          </a:lnRef>
+          <a:fillRef idx="1">
+            <a:schemeClr val="accent1"/>
+          </a:fillRef>
+          <a:effectRef idx="0">
+            <a:schemeClr val="accent1"/>
+          </a:effectRef>
+          <a:fontRef idx="minor">
+            <a:schemeClr val="lt1"/>
+          </a:fontRef>
+        </p:style>
+        <p:txBody>
+          <a:bodyPr rtlCol="0" anchor="ctr"/>
+          <a:lstStyle/>
+          <a:p>
+            <a:pPr algn="ctr"/>
+            <a:endParaRPr lang="it-IT"/>
+          </a:p>
+        </p:txBody>
+      </p:sp>
+    </p:spTree>
+    <p:extLst>
+      <p:ext uri="{BB962C8B-B14F-4D97-AF65-F5344CB8AC3E}">
+        <p14:creationId xmlns:p14="http://schemas.microsoft.com/office/powerpoint/2010/main" val="83448595"/>
+      </p:ext>
+    </p:extLst>
+  </p:cSld>
+  <p:clrMapOvr>
+    <a:masterClrMapping/>
+  </p:clrMapOvr>
+</p:sld>
+</file>
+
+<file path=ppt/slides/slide29.xml><?xml version="1.0" encoding="utf-8"?>
 <p:sld xmlns:a="http://schemas.openxmlformats.org/drawingml/2006/main" xmlns:r="http://schemas.openxmlformats.org/officeDocument/2006/relationships" xmlns:p="http://schemas.openxmlformats.org/presentationml/2006/main">
   <p:cSld>
     <p:spTree>
@@ -10953,292 +12072,175 @@
           </a:xfrm>
         </p:spPr>
       </p:pic>
+      <p:sp>
+        <p:nvSpPr>
+          <p:cNvPr id="3" name="CasellaDiTesto 2">
+            <a:extLst>
+              <a:ext uri="{FF2B5EF4-FFF2-40B4-BE49-F238E27FC236}">
+                <a16:creationId xmlns:a16="http://schemas.microsoft.com/office/drawing/2014/main" id="{804EC3CF-889C-047E-52A1-56EAC50FD24A}"/>
+              </a:ext>
+            </a:extLst>
+          </p:cNvPr>
+          <p:cNvSpPr txBox="1"/>
+          <p:nvPr/>
+        </p:nvSpPr>
+        <p:spPr>
+          <a:xfrm>
+            <a:off x="597765" y="2951946"/>
+            <a:ext cx="1336359" cy="954107"/>
+          </a:xfrm>
+          <a:prstGeom prst="rect">
+            <a:avLst/>
+          </a:prstGeom>
+          <a:noFill/>
+        </p:spPr>
+        <p:txBody>
+          <a:bodyPr wrap="square" rtlCol="0">
+            <a:spAutoFit/>
+          </a:bodyPr>
+          <a:lstStyle/>
+          <a:p>
+            <a:r>
+              <a:rPr lang="it-IT" sz="1400" dirty="0"/>
+              <a:t>GET</a:t>
+            </a:r>
+          </a:p>
+          <a:p>
+            <a:r>
+              <a:rPr lang="it-IT" sz="1400" dirty="0"/>
+              <a:t>/</a:t>
+            </a:r>
+            <a:r>
+              <a:rPr lang="it-IT" sz="1400" dirty="0" err="1"/>
+              <a:t>VendoServlet</a:t>
+            </a:r>
+            <a:endParaRPr lang="it-IT" sz="1400" dirty="0"/>
+          </a:p>
+          <a:p>
+            <a:endParaRPr lang="it-IT" sz="1400" dirty="0"/>
+          </a:p>
+          <a:p>
+            <a:r>
+              <a:rPr lang="it-IT" sz="1400" dirty="0"/>
+              <a:t>From: *.html</a:t>
+            </a:r>
+          </a:p>
+        </p:txBody>
+      </p:sp>
+      <p:sp>
+        <p:nvSpPr>
+          <p:cNvPr id="4" name="Rettangolo 3">
+            <a:extLst>
+              <a:ext uri="{FF2B5EF4-FFF2-40B4-BE49-F238E27FC236}">
+                <a16:creationId xmlns:a16="http://schemas.microsoft.com/office/drawing/2014/main" id="{27F06EF0-29B4-0314-4E01-E339F23583E3}"/>
+              </a:ext>
+            </a:extLst>
+          </p:cNvPr>
+          <p:cNvSpPr/>
+          <p:nvPr/>
+        </p:nvSpPr>
+        <p:spPr>
+          <a:xfrm>
+            <a:off x="597476" y="5634990"/>
+            <a:ext cx="1771650" cy="822960"/>
+          </a:xfrm>
+          <a:prstGeom prst="rect">
+            <a:avLst/>
+          </a:prstGeom>
+          <a:solidFill>
+            <a:schemeClr val="bg1"/>
+          </a:solidFill>
+          <a:ln w="12700" cap="flat" cmpd="sng" algn="ctr">
+            <a:noFill/>
+            <a:prstDash val="solid"/>
+            <a:miter lim="800000"/>
+          </a:ln>
+          <a:effectLst/>
+        </p:spPr>
+        <p:style>
+          <a:lnRef idx="2">
+            <a:schemeClr val="accent1">
+              <a:shade val="50000"/>
+            </a:schemeClr>
+          </a:lnRef>
+          <a:fillRef idx="1">
+            <a:schemeClr val="accent1"/>
+          </a:fillRef>
+          <a:effectRef idx="0">
+            <a:schemeClr val="accent1"/>
+          </a:effectRef>
+          <a:fontRef idx="minor">
+            <a:schemeClr val="lt1"/>
+          </a:fontRef>
+        </p:style>
+        <p:txBody>
+          <a:bodyPr rtlCol="0" anchor="ctr"/>
+          <a:lstStyle/>
+          <a:p>
+            <a:pPr algn="ctr"/>
+            <a:endParaRPr lang="it-IT"/>
+          </a:p>
+        </p:txBody>
+      </p:sp>
+      <p:sp>
+        <p:nvSpPr>
+          <p:cNvPr id="6" name="Rettangolo 5">
+            <a:extLst>
+              <a:ext uri="{FF2B5EF4-FFF2-40B4-BE49-F238E27FC236}">
+                <a16:creationId xmlns:a16="http://schemas.microsoft.com/office/drawing/2014/main" id="{7189AFC8-429D-78C9-9726-1EEA6619521D}"/>
+              </a:ext>
+            </a:extLst>
+          </p:cNvPr>
+          <p:cNvSpPr/>
+          <p:nvPr/>
+        </p:nvSpPr>
+        <p:spPr>
+          <a:xfrm>
+            <a:off x="9902535" y="5726430"/>
+            <a:ext cx="1771650" cy="822960"/>
+          </a:xfrm>
+          <a:prstGeom prst="rect">
+            <a:avLst/>
+          </a:prstGeom>
+          <a:solidFill>
+            <a:schemeClr val="bg1"/>
+          </a:solidFill>
+          <a:ln w="12700" cap="flat" cmpd="sng" algn="ctr">
+            <a:noFill/>
+            <a:prstDash val="solid"/>
+            <a:miter lim="800000"/>
+          </a:ln>
+          <a:effectLst/>
+        </p:spPr>
+        <p:style>
+          <a:lnRef idx="2">
+            <a:schemeClr val="accent1">
+              <a:shade val="50000"/>
+            </a:schemeClr>
+          </a:lnRef>
+          <a:fillRef idx="1">
+            <a:schemeClr val="accent1"/>
+          </a:fillRef>
+          <a:effectRef idx="0">
+            <a:schemeClr val="accent1"/>
+          </a:effectRef>
+          <a:fontRef idx="minor">
+            <a:schemeClr val="lt1"/>
+          </a:fontRef>
+        </p:style>
+        <p:txBody>
+          <a:bodyPr rtlCol="0" anchor="ctr"/>
+          <a:lstStyle/>
+          <a:p>
+            <a:pPr algn="ctr"/>
+            <a:endParaRPr lang="it-IT"/>
+          </a:p>
+        </p:txBody>
+      </p:sp>
     </p:spTree>
     <p:extLst>
       <p:ext uri="{BB962C8B-B14F-4D97-AF65-F5344CB8AC3E}">
         <p14:creationId xmlns:p14="http://schemas.microsoft.com/office/powerpoint/2010/main" val="2796739571"/>
-      </p:ext>
-    </p:extLst>
-  </p:cSld>
-  <p:clrMapOvr>
-    <a:masterClrMapping/>
-  </p:clrMapOvr>
-</p:sld>
-</file>
-
-<file path=ppt/slides/slide27.xml><?xml version="1.0" encoding="utf-8"?>
-<p:sld xmlns:a="http://schemas.openxmlformats.org/drawingml/2006/main" xmlns:r="http://schemas.openxmlformats.org/officeDocument/2006/relationships" xmlns:p="http://schemas.openxmlformats.org/presentationml/2006/main">
-  <p:cSld>
-    <p:spTree>
-      <p:nvGrpSpPr>
-        <p:cNvPr id="1" name="">
-          <a:extLst>
-            <a:ext uri="{FF2B5EF4-FFF2-40B4-BE49-F238E27FC236}">
-              <a16:creationId xmlns:a16="http://schemas.microsoft.com/office/drawing/2014/main" id="{7D4AA0AA-E97E-39A8-8EC5-0BF71DC2DFC6}"/>
-            </a:ext>
-          </a:extLst>
-        </p:cNvPr>
-        <p:cNvGrpSpPr/>
-        <p:nvPr/>
-      </p:nvGrpSpPr>
-      <p:grpSpPr>
-        <a:xfrm>
-          <a:off x="0" y="0"/>
-          <a:ext cx="0" cy="0"/>
-          <a:chOff x="0" y="0"/>
-          <a:chExt cx="0" cy="0"/>
-        </a:xfrm>
-      </p:grpSpPr>
-      <p:sp>
-        <p:nvSpPr>
-          <p:cNvPr id="2" name="Titolo 1">
-            <a:extLst>
-              <a:ext uri="{FF2B5EF4-FFF2-40B4-BE49-F238E27FC236}">
-                <a16:creationId xmlns:a16="http://schemas.microsoft.com/office/drawing/2014/main" id="{26C2AFD9-F249-34EA-0DFD-B9149B1429FE}"/>
-              </a:ext>
-            </a:extLst>
-          </p:cNvPr>
-          <p:cNvSpPr>
-            <a:spLocks noGrp="1"/>
-          </p:cNvSpPr>
-          <p:nvPr>
-            <p:ph type="title"/>
-          </p:nvPr>
-        </p:nvSpPr>
-        <p:spPr/>
-        <p:txBody>
-          <a:bodyPr/>
-          <a:lstStyle/>
-          <a:p>
-            <a:pPr algn="ctr"/>
-            <a:r>
-              <a:rPr lang="it-IT" dirty="0"/>
-              <a:t>SEQUENCE DIAGRAM – GO TO ACQUISTO</a:t>
-            </a:r>
-          </a:p>
-        </p:txBody>
-      </p:sp>
-      <p:pic>
-        <p:nvPicPr>
-          <p:cNvPr id="5" name="Segnaposto contenuto 4" descr="Immagine che contiene testo, schermata, numero, Carattere&#10;&#10;Il contenuto generato dall'IA potrebbe non essere corretto.">
-            <a:extLst>
-              <a:ext uri="{FF2B5EF4-FFF2-40B4-BE49-F238E27FC236}">
-                <a16:creationId xmlns:a16="http://schemas.microsoft.com/office/drawing/2014/main" id="{1C3E70CE-AB16-84E7-3B89-C93CE931019E}"/>
-              </a:ext>
-            </a:extLst>
-          </p:cNvPr>
-          <p:cNvPicPr>
-            <a:picLocks noGrp="1" noChangeAspect="1"/>
-          </p:cNvPicPr>
-          <p:nvPr>
-            <p:ph idx="1"/>
-          </p:nvPr>
-        </p:nvPicPr>
-        <p:blipFill>
-          <a:blip r:embed="rId2"/>
-          <a:stretch>
-            <a:fillRect/>
-          </a:stretch>
-        </p:blipFill>
-        <p:spPr>
-          <a:xfrm>
-            <a:off x="1548246" y="1628957"/>
-            <a:ext cx="9310254" cy="4766103"/>
-          </a:xfrm>
-        </p:spPr>
-      </p:pic>
-    </p:spTree>
-    <p:extLst>
-      <p:ext uri="{BB962C8B-B14F-4D97-AF65-F5344CB8AC3E}">
-        <p14:creationId xmlns:p14="http://schemas.microsoft.com/office/powerpoint/2010/main" val="3112876415"/>
-      </p:ext>
-    </p:extLst>
-  </p:cSld>
-  <p:clrMapOvr>
-    <a:masterClrMapping/>
-  </p:clrMapOvr>
-</p:sld>
-</file>
-
-<file path=ppt/slides/slide28.xml><?xml version="1.0" encoding="utf-8"?>
-<p:sld xmlns:a="http://schemas.openxmlformats.org/drawingml/2006/main" xmlns:r="http://schemas.openxmlformats.org/officeDocument/2006/relationships" xmlns:p="http://schemas.openxmlformats.org/presentationml/2006/main">
-  <p:cSld>
-    <p:spTree>
-      <p:nvGrpSpPr>
-        <p:cNvPr id="1" name="">
-          <a:extLst>
-            <a:ext uri="{FF2B5EF4-FFF2-40B4-BE49-F238E27FC236}">
-              <a16:creationId xmlns:a16="http://schemas.microsoft.com/office/drawing/2014/main" id="{AA333138-BE70-8D72-7224-846E8B518A4B}"/>
-            </a:ext>
-          </a:extLst>
-        </p:cNvPr>
-        <p:cNvGrpSpPr/>
-        <p:nvPr/>
-      </p:nvGrpSpPr>
-      <p:grpSpPr>
-        <a:xfrm>
-          <a:off x="0" y="0"/>
-          <a:ext cx="0" cy="0"/>
-          <a:chOff x="0" y="0"/>
-          <a:chExt cx="0" cy="0"/>
-        </a:xfrm>
-      </p:grpSpPr>
-      <p:sp>
-        <p:nvSpPr>
-          <p:cNvPr id="2" name="Titolo 1">
-            <a:extLst>
-              <a:ext uri="{FF2B5EF4-FFF2-40B4-BE49-F238E27FC236}">
-                <a16:creationId xmlns:a16="http://schemas.microsoft.com/office/drawing/2014/main" id="{9833DF20-AA24-DDD3-3FFA-33C4AD79947D}"/>
-              </a:ext>
-            </a:extLst>
-          </p:cNvPr>
-          <p:cNvSpPr>
-            <a:spLocks noGrp="1"/>
-          </p:cNvSpPr>
-          <p:nvPr>
-            <p:ph type="title"/>
-          </p:nvPr>
-        </p:nvSpPr>
-        <p:spPr/>
-        <p:txBody>
-          <a:bodyPr/>
-          <a:lstStyle/>
-          <a:p>
-            <a:pPr algn="ctr"/>
-            <a:r>
-              <a:rPr lang="it-IT" dirty="0"/>
-              <a:t>SEQUENCE DIAGRAM – GO TO DETTAGLIO ASTA</a:t>
-            </a:r>
-          </a:p>
-        </p:txBody>
-      </p:sp>
-      <p:pic>
-        <p:nvPicPr>
-          <p:cNvPr id="5" name="Segnaposto contenuto 4" descr="Immagine che contiene testo, schermata, numero, Carattere&#10;&#10;Il contenuto generato dall'IA potrebbe non essere corretto.">
-            <a:extLst>
-              <a:ext uri="{FF2B5EF4-FFF2-40B4-BE49-F238E27FC236}">
-                <a16:creationId xmlns:a16="http://schemas.microsoft.com/office/drawing/2014/main" id="{EBCB93FA-E45A-C10C-DD16-554093D140FE}"/>
-              </a:ext>
-            </a:extLst>
-          </p:cNvPr>
-          <p:cNvPicPr>
-            <a:picLocks noGrp="1" noChangeAspect="1"/>
-          </p:cNvPicPr>
-          <p:nvPr>
-            <p:ph idx="1"/>
-          </p:nvPr>
-        </p:nvPicPr>
-        <p:blipFill>
-          <a:blip r:embed="rId2"/>
-          <a:stretch>
-            <a:fillRect/>
-          </a:stretch>
-        </p:blipFill>
-        <p:spPr>
-          <a:xfrm>
-            <a:off x="2722419" y="1641968"/>
-            <a:ext cx="6909954" cy="4721638"/>
-          </a:xfrm>
-        </p:spPr>
-      </p:pic>
-    </p:spTree>
-    <p:extLst>
-      <p:ext uri="{BB962C8B-B14F-4D97-AF65-F5344CB8AC3E}">
-        <p14:creationId xmlns:p14="http://schemas.microsoft.com/office/powerpoint/2010/main" val="2371181397"/>
-      </p:ext>
-    </p:extLst>
-  </p:cSld>
-  <p:clrMapOvr>
-    <a:masterClrMapping/>
-  </p:clrMapOvr>
-</p:sld>
-</file>
-
-<file path=ppt/slides/slide29.xml><?xml version="1.0" encoding="utf-8"?>
-<p:sld xmlns:a="http://schemas.openxmlformats.org/drawingml/2006/main" xmlns:r="http://schemas.openxmlformats.org/officeDocument/2006/relationships" xmlns:p="http://schemas.openxmlformats.org/presentationml/2006/main">
-  <p:cSld>
-    <p:spTree>
-      <p:nvGrpSpPr>
-        <p:cNvPr id="1" name="">
-          <a:extLst>
-            <a:ext uri="{FF2B5EF4-FFF2-40B4-BE49-F238E27FC236}">
-              <a16:creationId xmlns:a16="http://schemas.microsoft.com/office/drawing/2014/main" id="{73238343-DEA0-2086-1C54-63C48A8E27DE}"/>
-            </a:ext>
-          </a:extLst>
-        </p:cNvPr>
-        <p:cNvGrpSpPr/>
-        <p:nvPr/>
-      </p:nvGrpSpPr>
-      <p:grpSpPr>
-        <a:xfrm>
-          <a:off x="0" y="0"/>
-          <a:ext cx="0" cy="0"/>
-          <a:chOff x="0" y="0"/>
-          <a:chExt cx="0" cy="0"/>
-        </a:xfrm>
-      </p:grpSpPr>
-      <p:sp>
-        <p:nvSpPr>
-          <p:cNvPr id="2" name="Titolo 1">
-            <a:extLst>
-              <a:ext uri="{FF2B5EF4-FFF2-40B4-BE49-F238E27FC236}">
-                <a16:creationId xmlns:a16="http://schemas.microsoft.com/office/drawing/2014/main" id="{F08D50D1-BF1F-1913-29B2-9A7F9C8FD4FD}"/>
-              </a:ext>
-            </a:extLst>
-          </p:cNvPr>
-          <p:cNvSpPr>
-            <a:spLocks noGrp="1"/>
-          </p:cNvSpPr>
-          <p:nvPr>
-            <p:ph type="title"/>
-          </p:nvPr>
-        </p:nvSpPr>
-        <p:spPr/>
-        <p:txBody>
-          <a:bodyPr/>
-          <a:lstStyle/>
-          <a:p>
-            <a:pPr algn="ctr"/>
-            <a:r>
-              <a:rPr lang="it-IT" dirty="0"/>
-              <a:t>SEQUENCE DIAGRAM – SEARCH ASTE BY KEY </a:t>
-            </a:r>
-          </a:p>
-        </p:txBody>
-      </p:sp>
-      <p:pic>
-        <p:nvPicPr>
-          <p:cNvPr id="5" name="Segnaposto contenuto 4" descr="Immagine che contiene testo, schermata, Carattere, linea&#10;&#10;Il contenuto generato dall'IA potrebbe non essere corretto.">
-            <a:extLst>
-              <a:ext uri="{FF2B5EF4-FFF2-40B4-BE49-F238E27FC236}">
-                <a16:creationId xmlns:a16="http://schemas.microsoft.com/office/drawing/2014/main" id="{39BF1B3C-8B65-4BD8-1C2F-CDA1BC851D9A}"/>
-              </a:ext>
-            </a:extLst>
-          </p:cNvPr>
-          <p:cNvPicPr>
-            <a:picLocks noGrp="1" noChangeAspect="1"/>
-          </p:cNvPicPr>
-          <p:nvPr>
-            <p:ph idx="1"/>
-          </p:nvPr>
-        </p:nvPicPr>
-        <p:blipFill>
-          <a:blip r:embed="rId2"/>
-          <a:stretch>
-            <a:fillRect/>
-          </a:stretch>
-        </p:blipFill>
-        <p:spPr>
-          <a:xfrm>
-            <a:off x="2272636" y="1724891"/>
-            <a:ext cx="7924204" cy="4520045"/>
-          </a:xfrm>
-        </p:spPr>
-      </p:pic>
-    </p:spTree>
-    <p:extLst>
-      <p:ext uri="{BB962C8B-B14F-4D97-AF65-F5344CB8AC3E}">
-        <p14:creationId xmlns:p14="http://schemas.microsoft.com/office/powerpoint/2010/main" val="1866007806"/>
       </p:ext>
     </p:extLst>
   </p:cSld>
@@ -11452,7 +12454,7 @@
         <p:cNvPr id="1" name="">
           <a:extLst>
             <a:ext uri="{FF2B5EF4-FFF2-40B4-BE49-F238E27FC236}">
-              <a16:creationId xmlns:a16="http://schemas.microsoft.com/office/drawing/2014/main" id="{31FAC8C2-4EA9-B8C7-1A88-A526A93B9E77}"/>
+              <a16:creationId xmlns:a16="http://schemas.microsoft.com/office/drawing/2014/main" id="{19C3C918-7594-30C2-4CB0-5C4CE88A0E38}"/>
             </a:ext>
           </a:extLst>
         </p:cNvPr>
@@ -11472,7 +12474,7 @@
           <p:cNvPr id="2" name="Titolo 1">
             <a:extLst>
               <a:ext uri="{FF2B5EF4-FFF2-40B4-BE49-F238E27FC236}">
-                <a16:creationId xmlns:a16="http://schemas.microsoft.com/office/drawing/2014/main" id="{5D6AC322-0E0B-6A6E-04D0-8AEC47B203AB}"/>
+                <a16:creationId xmlns:a16="http://schemas.microsoft.com/office/drawing/2014/main" id="{FF874F21-99E4-2CD9-799E-C6509178008C}"/>
               </a:ext>
             </a:extLst>
           </p:cNvPr>
@@ -11491,17 +12493,17 @@
             <a:pPr algn="ctr"/>
             <a:r>
               <a:rPr lang="it-IT" dirty="0"/>
-              <a:t>SEQUENCE DIAGRAM – FAI OFFERTA</a:t>
+              <a:t>SEQUENCE DIAGRAM – AGGIUNGI ARTICOLO</a:t>
             </a:r>
           </a:p>
         </p:txBody>
       </p:sp>
       <p:pic>
         <p:nvPicPr>
-          <p:cNvPr id="5" name="Segnaposto contenuto 4" descr="Immagine che contiene testo, schermata, linea, Carattere&#10;&#10;Il contenuto generato dall'IA potrebbe non essere corretto.">
-            <a:extLst>
-              <a:ext uri="{FF2B5EF4-FFF2-40B4-BE49-F238E27FC236}">
-                <a16:creationId xmlns:a16="http://schemas.microsoft.com/office/drawing/2014/main" id="{8F0A9A2C-7FDE-9C44-66DA-9924D0DC10D0}"/>
+          <p:cNvPr id="5" name="Segnaposto contenuto 4" descr="Immagine che contiene testo, schermata, Carattere, linea&#10;&#10;Il contenuto generato dall'IA potrebbe non essere corretto.">
+            <a:extLst>
+              <a:ext uri="{FF2B5EF4-FFF2-40B4-BE49-F238E27FC236}">
+                <a16:creationId xmlns:a16="http://schemas.microsoft.com/office/drawing/2014/main" id="{B5862C63-546E-D1F9-48BF-262CDA953E85}"/>
               </a:ext>
             </a:extLst>
           </p:cNvPr>
@@ -11520,15 +12522,99 @@
         </p:blipFill>
         <p:spPr>
           <a:xfrm>
-            <a:off x="2493818" y="1577483"/>
-            <a:ext cx="7232073" cy="4942889"/>
+            <a:off x="800100" y="1776846"/>
+            <a:ext cx="10606379" cy="4581956"/>
           </a:xfrm>
         </p:spPr>
       </p:pic>
+      <p:sp>
+        <p:nvSpPr>
+          <p:cNvPr id="3" name="CasellaDiTesto 2">
+            <a:extLst>
+              <a:ext uri="{FF2B5EF4-FFF2-40B4-BE49-F238E27FC236}">
+                <a16:creationId xmlns:a16="http://schemas.microsoft.com/office/drawing/2014/main" id="{CCF85655-B9B6-7F41-44AD-CDE5294DC3E4}"/>
+              </a:ext>
+            </a:extLst>
+          </p:cNvPr>
+          <p:cNvSpPr txBox="1"/>
+          <p:nvPr/>
+        </p:nvSpPr>
+        <p:spPr>
+          <a:xfrm>
+            <a:off x="308611" y="3159883"/>
+            <a:ext cx="1876366" cy="1815882"/>
+          </a:xfrm>
+          <a:prstGeom prst="rect">
+            <a:avLst/>
+          </a:prstGeom>
+          <a:noFill/>
+        </p:spPr>
+        <p:txBody>
+          <a:bodyPr wrap="square" rtlCol="0">
+            <a:spAutoFit/>
+          </a:bodyPr>
+          <a:lstStyle/>
+          <a:p>
+            <a:r>
+              <a:rPr lang="it-IT" sz="1400" dirty="0"/>
+              <a:t>POST</a:t>
+            </a:r>
+          </a:p>
+          <a:p>
+            <a:r>
+              <a:rPr lang="it-IT" sz="1400" dirty="0"/>
+              <a:t>/</a:t>
+            </a:r>
+            <a:r>
+              <a:rPr lang="it-IT" sz="1400" dirty="0" err="1"/>
+              <a:t>AggiungiArticolo</a:t>
+            </a:r>
+            <a:endParaRPr lang="it-IT" sz="1400" dirty="0"/>
+          </a:p>
+          <a:p>
+            <a:r>
+              <a:rPr lang="it-IT" sz="1400" dirty="0"/>
+              <a:t>nome</a:t>
+            </a:r>
+          </a:p>
+          <a:p>
+            <a:r>
+              <a:rPr lang="it-IT" sz="1400" dirty="0"/>
+              <a:t>descrizione</a:t>
+            </a:r>
+          </a:p>
+          <a:p>
+            <a:r>
+              <a:rPr lang="it-IT" sz="1400" dirty="0"/>
+              <a:t>prezzo</a:t>
+            </a:r>
+          </a:p>
+          <a:p>
+            <a:r>
+              <a:rPr lang="it-IT" sz="1400" dirty="0"/>
+              <a:t>immagine</a:t>
+            </a:r>
+          </a:p>
+          <a:p>
+            <a:endParaRPr lang="it-IT" sz="1400" dirty="0"/>
+          </a:p>
+          <a:p>
+            <a:r>
+              <a:rPr lang="it-IT" sz="1400" dirty="0"/>
+              <a:t>From: </a:t>
+            </a:r>
+            <a:r>
+              <a:rPr lang="it-IT" sz="1400" dirty="0" err="1"/>
+              <a:t>vendo.html</a:t>
+            </a:r>
+            <a:endParaRPr lang="it-IT" sz="1400" dirty="0"/>
+          </a:p>
+        </p:txBody>
+      </p:sp>
     </p:spTree>
     <p:extLst>
       <p:ext uri="{BB962C8B-B14F-4D97-AF65-F5344CB8AC3E}">
-        <p14:creationId xmlns:p14="http://schemas.microsoft.com/office/powerpoint/2010/main" val="83448595"/>
+        <p14:creationId xmlns:p14="http://schemas.microsoft.com/office/powerpoint/2010/main" val="2333171487"/>
       </p:ext>
     </p:extLst>
   </p:cSld>
@@ -11619,6 +12705,189 @@
           </a:xfrm>
         </p:spPr>
       </p:pic>
+      <p:sp>
+        <p:nvSpPr>
+          <p:cNvPr id="3" name="CasellaDiTesto 2">
+            <a:extLst>
+              <a:ext uri="{FF2B5EF4-FFF2-40B4-BE49-F238E27FC236}">
+                <a16:creationId xmlns:a16="http://schemas.microsoft.com/office/drawing/2014/main" id="{0A12675D-6A4F-1528-2069-FEA71E48A4C4}"/>
+              </a:ext>
+            </a:extLst>
+          </p:cNvPr>
+          <p:cNvSpPr txBox="1"/>
+          <p:nvPr/>
+        </p:nvSpPr>
+        <p:spPr>
+          <a:xfrm>
+            <a:off x="811530" y="2908543"/>
+            <a:ext cx="1848543" cy="1384995"/>
+          </a:xfrm>
+          <a:prstGeom prst="rect">
+            <a:avLst/>
+          </a:prstGeom>
+          <a:noFill/>
+        </p:spPr>
+        <p:txBody>
+          <a:bodyPr wrap="square" rtlCol="0">
+            <a:spAutoFit/>
+          </a:bodyPr>
+          <a:lstStyle/>
+          <a:p>
+            <a:r>
+              <a:rPr lang="it-IT" sz="1400" dirty="0"/>
+              <a:t>POST</a:t>
+            </a:r>
+          </a:p>
+          <a:p>
+            <a:r>
+              <a:rPr lang="it-IT" sz="1400" dirty="0"/>
+              <a:t>/</a:t>
+            </a:r>
+            <a:r>
+              <a:rPr lang="it-IT" sz="1400" dirty="0" err="1"/>
+              <a:t>CreaAsta</a:t>
+            </a:r>
+            <a:endParaRPr lang="it-IT" sz="1400" dirty="0"/>
+          </a:p>
+          <a:p>
+            <a:r>
+              <a:rPr lang="it-IT" sz="1400" dirty="0" err="1"/>
+              <a:t>codiciArticoli</a:t>
+            </a:r>
+            <a:endParaRPr lang="it-IT" sz="1400" dirty="0"/>
+          </a:p>
+          <a:p>
+            <a:r>
+              <a:rPr lang="it-IT" sz="1400" dirty="0"/>
+              <a:t>scadenza</a:t>
+            </a:r>
+          </a:p>
+          <a:p>
+            <a:endParaRPr lang="it-IT" sz="1400" dirty="0"/>
+          </a:p>
+          <a:p>
+            <a:r>
+              <a:rPr lang="it-IT" sz="1400" dirty="0"/>
+              <a:t>From: </a:t>
+            </a:r>
+            <a:r>
+              <a:rPr lang="it-IT" sz="1400" dirty="0" err="1"/>
+              <a:t>vendo.html</a:t>
+            </a:r>
+            <a:endParaRPr lang="it-IT" sz="1400" dirty="0"/>
+          </a:p>
+        </p:txBody>
+      </p:sp>
+      <p:sp>
+        <p:nvSpPr>
+          <p:cNvPr id="4" name="Rettangolo 3">
+            <a:extLst>
+              <a:ext uri="{FF2B5EF4-FFF2-40B4-BE49-F238E27FC236}">
+                <a16:creationId xmlns:a16="http://schemas.microsoft.com/office/drawing/2014/main" id="{3B36B4EC-8B40-6F51-1BA4-EAB5B35BCAFD}"/>
+              </a:ext>
+            </a:extLst>
+          </p:cNvPr>
+          <p:cNvSpPr/>
+          <p:nvPr/>
+        </p:nvSpPr>
+        <p:spPr>
+          <a:xfrm>
+            <a:off x="756805" y="5634455"/>
+            <a:ext cx="1903267" cy="822960"/>
+          </a:xfrm>
+          <a:prstGeom prst="rect">
+            <a:avLst/>
+          </a:prstGeom>
+          <a:solidFill>
+            <a:schemeClr val="bg1"/>
+          </a:solidFill>
+          <a:ln w="12700" cap="flat" cmpd="sng" algn="ctr">
+            <a:noFill/>
+            <a:prstDash val="solid"/>
+            <a:miter lim="800000"/>
+          </a:ln>
+          <a:effectLst/>
+        </p:spPr>
+        <p:style>
+          <a:lnRef idx="2">
+            <a:schemeClr val="accent1">
+              <a:shade val="50000"/>
+            </a:schemeClr>
+          </a:lnRef>
+          <a:fillRef idx="1">
+            <a:schemeClr val="accent1"/>
+          </a:fillRef>
+          <a:effectRef idx="0">
+            <a:schemeClr val="accent1"/>
+          </a:effectRef>
+          <a:fontRef idx="minor">
+            <a:schemeClr val="lt1"/>
+          </a:fontRef>
+        </p:style>
+        <p:txBody>
+          <a:bodyPr rtlCol="0" anchor="ctr"/>
+          <a:lstStyle/>
+          <a:p>
+            <a:pPr algn="ctr"/>
+            <a:endParaRPr lang="it-IT"/>
+          </a:p>
+        </p:txBody>
+      </p:sp>
+      <p:sp>
+        <p:nvSpPr>
+          <p:cNvPr id="6" name="Rettangolo 5">
+            <a:extLst>
+              <a:ext uri="{FF2B5EF4-FFF2-40B4-BE49-F238E27FC236}">
+                <a16:creationId xmlns:a16="http://schemas.microsoft.com/office/drawing/2014/main" id="{78D6753C-ACB0-F183-2C15-CF22783E9D26}"/>
+              </a:ext>
+            </a:extLst>
+          </p:cNvPr>
+          <p:cNvSpPr/>
+          <p:nvPr/>
+        </p:nvSpPr>
+        <p:spPr>
+          <a:xfrm>
+            <a:off x="9620250" y="5623025"/>
+            <a:ext cx="1771650" cy="822960"/>
+          </a:xfrm>
+          <a:prstGeom prst="rect">
+            <a:avLst/>
+          </a:prstGeom>
+          <a:solidFill>
+            <a:schemeClr val="bg1"/>
+          </a:solidFill>
+          <a:ln w="12700" cap="flat" cmpd="sng" algn="ctr">
+            <a:noFill/>
+            <a:prstDash val="solid"/>
+            <a:miter lim="800000"/>
+          </a:ln>
+          <a:effectLst/>
+        </p:spPr>
+        <p:style>
+          <a:lnRef idx="2">
+            <a:schemeClr val="accent1">
+              <a:shade val="50000"/>
+            </a:schemeClr>
+          </a:lnRef>
+          <a:fillRef idx="1">
+            <a:schemeClr val="accent1"/>
+          </a:fillRef>
+          <a:effectRef idx="0">
+            <a:schemeClr val="accent1"/>
+          </a:effectRef>
+          <a:fontRef idx="minor">
+            <a:schemeClr val="lt1"/>
+          </a:fontRef>
+        </p:style>
+        <p:txBody>
+          <a:bodyPr rtlCol="0" anchor="ctr"/>
+          <a:lstStyle/>
+          <a:p>
+            <a:pPr algn="ctr"/>
+            <a:endParaRPr lang="it-IT"/>
+          </a:p>
+        </p:txBody>
+      </p:sp>
     </p:spTree>
     <p:extLst>
       <p:ext uri="{BB962C8B-B14F-4D97-AF65-F5344CB8AC3E}">
@@ -11633,6 +12902,277 @@
 </file>
 
 <file path=ppt/slides/slide32.xml><?xml version="1.0" encoding="utf-8"?>
+<p:sld xmlns:a="http://schemas.openxmlformats.org/drawingml/2006/main" xmlns:r="http://schemas.openxmlformats.org/officeDocument/2006/relationships" xmlns:p="http://schemas.openxmlformats.org/presentationml/2006/main">
+  <p:cSld>
+    <p:spTree>
+      <p:nvGrpSpPr>
+        <p:cNvPr id="1" name="">
+          <a:extLst>
+            <a:ext uri="{FF2B5EF4-FFF2-40B4-BE49-F238E27FC236}">
+              <a16:creationId xmlns:a16="http://schemas.microsoft.com/office/drawing/2014/main" id="{AA333138-BE70-8D72-7224-846E8B518A4B}"/>
+            </a:ext>
+          </a:extLst>
+        </p:cNvPr>
+        <p:cNvGrpSpPr/>
+        <p:nvPr/>
+      </p:nvGrpSpPr>
+      <p:grpSpPr>
+        <a:xfrm>
+          <a:off x="0" y="0"/>
+          <a:ext cx="0" cy="0"/>
+          <a:chOff x="0" y="0"/>
+          <a:chExt cx="0" cy="0"/>
+        </a:xfrm>
+      </p:grpSpPr>
+      <p:sp>
+        <p:nvSpPr>
+          <p:cNvPr id="2" name="Titolo 1">
+            <a:extLst>
+              <a:ext uri="{FF2B5EF4-FFF2-40B4-BE49-F238E27FC236}">
+                <a16:creationId xmlns:a16="http://schemas.microsoft.com/office/drawing/2014/main" id="{9833DF20-AA24-DDD3-3FFA-33C4AD79947D}"/>
+              </a:ext>
+            </a:extLst>
+          </p:cNvPr>
+          <p:cNvSpPr>
+            <a:spLocks noGrp="1"/>
+          </p:cNvSpPr>
+          <p:nvPr>
+            <p:ph type="title"/>
+          </p:nvPr>
+        </p:nvSpPr>
+        <p:spPr/>
+        <p:txBody>
+          <a:bodyPr/>
+          <a:lstStyle/>
+          <a:p>
+            <a:pPr algn="ctr"/>
+            <a:r>
+              <a:rPr lang="it-IT" dirty="0"/>
+              <a:t>SEQUENCE DIAGRAM – GO TO DETTAGLIO ASTA</a:t>
+            </a:r>
+          </a:p>
+        </p:txBody>
+      </p:sp>
+      <p:pic>
+        <p:nvPicPr>
+          <p:cNvPr id="5" name="Segnaposto contenuto 4" descr="Immagine che contiene testo, schermata, numero, Carattere&#10;&#10;Il contenuto generato dall'IA potrebbe non essere corretto.">
+            <a:extLst>
+              <a:ext uri="{FF2B5EF4-FFF2-40B4-BE49-F238E27FC236}">
+                <a16:creationId xmlns:a16="http://schemas.microsoft.com/office/drawing/2014/main" id="{EBCB93FA-E45A-C10C-DD16-554093D140FE}"/>
+              </a:ext>
+            </a:extLst>
+          </p:cNvPr>
+          <p:cNvPicPr>
+            <a:picLocks noGrp="1" noChangeAspect="1"/>
+          </p:cNvPicPr>
+          <p:nvPr>
+            <p:ph idx="1"/>
+          </p:nvPr>
+        </p:nvPicPr>
+        <p:blipFill>
+          <a:blip r:embed="rId2"/>
+          <a:stretch>
+            <a:fillRect/>
+          </a:stretch>
+        </p:blipFill>
+        <p:spPr>
+          <a:xfrm>
+            <a:off x="2722419" y="1641968"/>
+            <a:ext cx="6909954" cy="4721638"/>
+          </a:xfrm>
+        </p:spPr>
+      </p:pic>
+      <p:sp>
+        <p:nvSpPr>
+          <p:cNvPr id="3" name="CasellaDiTesto 2">
+            <a:extLst>
+              <a:ext uri="{FF2B5EF4-FFF2-40B4-BE49-F238E27FC236}">
+                <a16:creationId xmlns:a16="http://schemas.microsoft.com/office/drawing/2014/main" id="{F545A27E-F416-2AE9-4D5B-A8D92ED6EF83}"/>
+              </a:ext>
+            </a:extLst>
+          </p:cNvPr>
+          <p:cNvSpPr txBox="1"/>
+          <p:nvPr/>
+        </p:nvSpPr>
+        <p:spPr>
+          <a:xfrm>
+            <a:off x="962892" y="2951946"/>
+            <a:ext cx="2121649" cy="1169551"/>
+          </a:xfrm>
+          <a:prstGeom prst="rect">
+            <a:avLst/>
+          </a:prstGeom>
+          <a:noFill/>
+        </p:spPr>
+        <p:txBody>
+          <a:bodyPr wrap="square" rtlCol="0">
+            <a:spAutoFit/>
+          </a:bodyPr>
+          <a:lstStyle/>
+          <a:p>
+            <a:r>
+              <a:rPr lang="it-IT" sz="1400" dirty="0"/>
+              <a:t>GET</a:t>
+            </a:r>
+          </a:p>
+          <a:p>
+            <a:r>
+              <a:rPr lang="it-IT" sz="1400" dirty="0"/>
+              <a:t>/</a:t>
+            </a:r>
+            <a:r>
+              <a:rPr lang="it-IT" sz="1400" dirty="0" err="1"/>
+              <a:t>DettaglioAstaServlet</a:t>
+            </a:r>
+            <a:endParaRPr lang="it-IT" sz="1400" dirty="0"/>
+          </a:p>
+          <a:p>
+            <a:r>
+              <a:rPr lang="it-IT" sz="1400" dirty="0" err="1"/>
+              <a:t>idAsta</a:t>
+            </a:r>
+            <a:endParaRPr lang="it-IT" sz="1400" dirty="0"/>
+          </a:p>
+          <a:p>
+            <a:endParaRPr lang="it-IT" sz="1400" dirty="0"/>
+          </a:p>
+          <a:p>
+            <a:r>
+              <a:rPr lang="it-IT" sz="1400" dirty="0"/>
+              <a:t>From: </a:t>
+            </a:r>
+            <a:r>
+              <a:rPr lang="it-IT" sz="1400" dirty="0" err="1"/>
+              <a:t>vendo.html</a:t>
+            </a:r>
+            <a:endParaRPr lang="it-IT" sz="1400" dirty="0"/>
+          </a:p>
+        </p:txBody>
+      </p:sp>
+      <p:sp>
+        <p:nvSpPr>
+          <p:cNvPr id="4" name="Rettangolo 3">
+            <a:extLst>
+              <a:ext uri="{FF2B5EF4-FFF2-40B4-BE49-F238E27FC236}">
+                <a16:creationId xmlns:a16="http://schemas.microsoft.com/office/drawing/2014/main" id="{AAB3A1A5-53F6-53FE-2E9B-C9C02E220855}"/>
+              </a:ext>
+            </a:extLst>
+          </p:cNvPr>
+          <p:cNvSpPr/>
+          <p:nvPr/>
+        </p:nvSpPr>
+        <p:spPr>
+          <a:xfrm>
+            <a:off x="700635" y="5657850"/>
+            <a:ext cx="2021784" cy="822960"/>
+          </a:xfrm>
+          <a:prstGeom prst="rect">
+            <a:avLst/>
+          </a:prstGeom>
+          <a:solidFill>
+            <a:schemeClr val="bg1"/>
+          </a:solidFill>
+          <a:ln w="12700" cap="flat" cmpd="sng" algn="ctr">
+            <a:noFill/>
+            <a:prstDash val="solid"/>
+            <a:miter lim="800000"/>
+          </a:ln>
+          <a:effectLst/>
+        </p:spPr>
+        <p:style>
+          <a:lnRef idx="2">
+            <a:schemeClr val="accent1">
+              <a:shade val="50000"/>
+            </a:schemeClr>
+          </a:lnRef>
+          <a:fillRef idx="1">
+            <a:schemeClr val="accent1"/>
+          </a:fillRef>
+          <a:effectRef idx="0">
+            <a:schemeClr val="accent1"/>
+          </a:effectRef>
+          <a:fontRef idx="minor">
+            <a:schemeClr val="lt1"/>
+          </a:fontRef>
+        </p:style>
+        <p:txBody>
+          <a:bodyPr rtlCol="0" anchor="ctr"/>
+          <a:lstStyle/>
+          <a:p>
+            <a:pPr algn="ctr"/>
+            <a:endParaRPr lang="it-IT"/>
+          </a:p>
+        </p:txBody>
+      </p:sp>
+      <p:sp>
+        <p:nvSpPr>
+          <p:cNvPr id="6" name="Rettangolo 5">
+            <a:extLst>
+              <a:ext uri="{FF2B5EF4-FFF2-40B4-BE49-F238E27FC236}">
+                <a16:creationId xmlns:a16="http://schemas.microsoft.com/office/drawing/2014/main" id="{F0CDC594-4AEB-DFBF-92A0-BDB5615BB383}"/>
+              </a:ext>
+            </a:extLst>
+          </p:cNvPr>
+          <p:cNvSpPr/>
+          <p:nvPr/>
+        </p:nvSpPr>
+        <p:spPr>
+          <a:xfrm>
+            <a:off x="9620249" y="5749290"/>
+            <a:ext cx="2021783" cy="822960"/>
+          </a:xfrm>
+          <a:prstGeom prst="rect">
+            <a:avLst/>
+          </a:prstGeom>
+          <a:solidFill>
+            <a:schemeClr val="bg1"/>
+          </a:solidFill>
+          <a:ln w="12700" cap="flat" cmpd="sng" algn="ctr">
+            <a:noFill/>
+            <a:prstDash val="solid"/>
+            <a:miter lim="800000"/>
+          </a:ln>
+          <a:effectLst/>
+        </p:spPr>
+        <p:style>
+          <a:lnRef idx="2">
+            <a:schemeClr val="accent1">
+              <a:shade val="50000"/>
+            </a:schemeClr>
+          </a:lnRef>
+          <a:fillRef idx="1">
+            <a:schemeClr val="accent1"/>
+          </a:fillRef>
+          <a:effectRef idx="0">
+            <a:schemeClr val="accent1"/>
+          </a:effectRef>
+          <a:fontRef idx="minor">
+            <a:schemeClr val="lt1"/>
+          </a:fontRef>
+        </p:style>
+        <p:txBody>
+          <a:bodyPr rtlCol="0" anchor="ctr"/>
+          <a:lstStyle/>
+          <a:p>
+            <a:pPr algn="ctr"/>
+            <a:endParaRPr lang="it-IT"/>
+          </a:p>
+        </p:txBody>
+      </p:sp>
+    </p:spTree>
+    <p:extLst>
+      <p:ext uri="{BB962C8B-B14F-4D97-AF65-F5344CB8AC3E}">
+        <p14:creationId xmlns:p14="http://schemas.microsoft.com/office/powerpoint/2010/main" val="2371181397"/>
+      </p:ext>
+    </p:extLst>
+  </p:cSld>
+  <p:clrMapOvr>
+    <a:masterClrMapping/>
+  </p:clrMapOvr>
+</p:sld>
+</file>
+
+<file path=ppt/slides/slide33.xml><?xml version="1.0" encoding="utf-8"?>
 <p:sld xmlns:a="http://schemas.openxmlformats.org/drawingml/2006/main" xmlns:r="http://schemas.openxmlformats.org/officeDocument/2006/relationships" xmlns:p="http://schemas.openxmlformats.org/presentationml/2006/main">
   <p:cSld>
     <p:spTree>
@@ -11713,104 +13253,187 @@
           </a:xfrm>
         </p:spPr>
       </p:pic>
+      <p:sp>
+        <p:nvSpPr>
+          <p:cNvPr id="3" name="CasellaDiTesto 2">
+            <a:extLst>
+              <a:ext uri="{FF2B5EF4-FFF2-40B4-BE49-F238E27FC236}">
+                <a16:creationId xmlns:a16="http://schemas.microsoft.com/office/drawing/2014/main" id="{0BC026A9-1C00-7405-7502-038938D46AB2}"/>
+              </a:ext>
+            </a:extLst>
+          </p:cNvPr>
+          <p:cNvSpPr txBox="1"/>
+          <p:nvPr/>
+        </p:nvSpPr>
+        <p:spPr>
+          <a:xfrm>
+            <a:off x="571500" y="3045016"/>
+            <a:ext cx="2029145" cy="1384995"/>
+          </a:xfrm>
+          <a:prstGeom prst="rect">
+            <a:avLst/>
+          </a:prstGeom>
+          <a:noFill/>
+        </p:spPr>
+        <p:txBody>
+          <a:bodyPr wrap="square" rtlCol="0">
+            <a:spAutoFit/>
+          </a:bodyPr>
+          <a:lstStyle/>
+          <a:p>
+            <a:r>
+              <a:rPr lang="it-IT" sz="1400" dirty="0"/>
+              <a:t>POST</a:t>
+            </a:r>
+          </a:p>
+          <a:p>
+            <a:r>
+              <a:rPr lang="it-IT" sz="1400" dirty="0"/>
+              <a:t>/</a:t>
+            </a:r>
+            <a:r>
+              <a:rPr lang="it-IT" sz="1400" dirty="0" err="1"/>
+              <a:t>ChiudiAsta</a:t>
+            </a:r>
+            <a:endParaRPr lang="it-IT" sz="1400" dirty="0"/>
+          </a:p>
+          <a:p>
+            <a:r>
+              <a:rPr lang="it-IT" sz="1400" dirty="0" err="1"/>
+              <a:t>idAsta</a:t>
+            </a:r>
+            <a:endParaRPr lang="it-IT" sz="1400" dirty="0"/>
+          </a:p>
+          <a:p>
+            <a:endParaRPr lang="it-IT" sz="1400" dirty="0"/>
+          </a:p>
+          <a:p>
+            <a:r>
+              <a:rPr lang="it-IT" sz="1400" dirty="0"/>
+              <a:t>From: </a:t>
+            </a:r>
+            <a:r>
+              <a:rPr lang="it-IT" sz="1400" dirty="0" err="1"/>
+              <a:t>dettaglioAsta.html</a:t>
+            </a:r>
+            <a:endParaRPr lang="it-IT" sz="1400" dirty="0"/>
+          </a:p>
+        </p:txBody>
+      </p:sp>
+      <p:sp>
+        <p:nvSpPr>
+          <p:cNvPr id="4" name="Rettangolo 3">
+            <a:extLst>
+              <a:ext uri="{FF2B5EF4-FFF2-40B4-BE49-F238E27FC236}">
+                <a16:creationId xmlns:a16="http://schemas.microsoft.com/office/drawing/2014/main" id="{EAAA2EC9-E158-887F-00FD-6CD096D6E1B5}"/>
+              </a:ext>
+            </a:extLst>
+          </p:cNvPr>
+          <p:cNvSpPr/>
+          <p:nvPr/>
+        </p:nvSpPr>
+        <p:spPr>
+          <a:xfrm>
+            <a:off x="700635" y="5640185"/>
+            <a:ext cx="1771650" cy="822960"/>
+          </a:xfrm>
+          <a:prstGeom prst="rect">
+            <a:avLst/>
+          </a:prstGeom>
+          <a:solidFill>
+            <a:schemeClr val="bg1"/>
+          </a:solidFill>
+          <a:ln w="12700" cap="flat" cmpd="sng" algn="ctr">
+            <a:noFill/>
+            <a:prstDash val="solid"/>
+            <a:miter lim="800000"/>
+          </a:ln>
+          <a:effectLst/>
+        </p:spPr>
+        <p:style>
+          <a:lnRef idx="2">
+            <a:schemeClr val="accent1">
+              <a:shade val="50000"/>
+            </a:schemeClr>
+          </a:lnRef>
+          <a:fillRef idx="1">
+            <a:schemeClr val="accent1"/>
+          </a:fillRef>
+          <a:effectRef idx="0">
+            <a:schemeClr val="accent1"/>
+          </a:effectRef>
+          <a:fontRef idx="minor">
+            <a:schemeClr val="lt1"/>
+          </a:fontRef>
+        </p:style>
+        <p:txBody>
+          <a:bodyPr rtlCol="0" anchor="ctr"/>
+          <a:lstStyle/>
+          <a:p>
+            <a:pPr algn="ctr"/>
+            <a:endParaRPr lang="it-IT"/>
+          </a:p>
+        </p:txBody>
+      </p:sp>
+      <p:sp>
+        <p:nvSpPr>
+          <p:cNvPr id="6" name="Rettangolo 5">
+            <a:extLst>
+              <a:ext uri="{FF2B5EF4-FFF2-40B4-BE49-F238E27FC236}">
+                <a16:creationId xmlns:a16="http://schemas.microsoft.com/office/drawing/2014/main" id="{930DEE25-179A-C267-8A08-B6BAC9F11684}"/>
+              </a:ext>
+            </a:extLst>
+          </p:cNvPr>
+          <p:cNvSpPr/>
+          <p:nvPr/>
+        </p:nvSpPr>
+        <p:spPr>
+          <a:xfrm>
+            <a:off x="9819409" y="5772150"/>
+            <a:ext cx="1771650" cy="822960"/>
+          </a:xfrm>
+          <a:prstGeom prst="rect">
+            <a:avLst/>
+          </a:prstGeom>
+          <a:solidFill>
+            <a:schemeClr val="bg1"/>
+          </a:solidFill>
+          <a:ln w="12700" cap="flat" cmpd="sng" algn="ctr">
+            <a:noFill/>
+            <a:prstDash val="solid"/>
+            <a:miter lim="800000"/>
+          </a:ln>
+          <a:effectLst/>
+        </p:spPr>
+        <p:style>
+          <a:lnRef idx="2">
+            <a:schemeClr val="accent1">
+              <a:shade val="50000"/>
+            </a:schemeClr>
+          </a:lnRef>
+          <a:fillRef idx="1">
+            <a:schemeClr val="accent1"/>
+          </a:fillRef>
+          <a:effectRef idx="0">
+            <a:schemeClr val="accent1"/>
+          </a:effectRef>
+          <a:fontRef idx="minor">
+            <a:schemeClr val="lt1"/>
+          </a:fontRef>
+        </p:style>
+        <p:txBody>
+          <a:bodyPr rtlCol="0" anchor="ctr"/>
+          <a:lstStyle/>
+          <a:p>
+            <a:pPr algn="ctr"/>
+            <a:endParaRPr lang="it-IT"/>
+          </a:p>
+        </p:txBody>
+      </p:sp>
     </p:spTree>
     <p:extLst>
       <p:ext uri="{BB962C8B-B14F-4D97-AF65-F5344CB8AC3E}">
         <p14:creationId xmlns:p14="http://schemas.microsoft.com/office/powerpoint/2010/main" val="226067210"/>
-      </p:ext>
-    </p:extLst>
-  </p:cSld>
-  <p:clrMapOvr>
-    <a:masterClrMapping/>
-  </p:clrMapOvr>
-</p:sld>
-</file>
-
-<file path=ppt/slides/slide33.xml><?xml version="1.0" encoding="utf-8"?>
-<p:sld xmlns:a="http://schemas.openxmlformats.org/drawingml/2006/main" xmlns:r="http://schemas.openxmlformats.org/officeDocument/2006/relationships" xmlns:p="http://schemas.openxmlformats.org/presentationml/2006/main">
-  <p:cSld>
-    <p:spTree>
-      <p:nvGrpSpPr>
-        <p:cNvPr id="1" name="">
-          <a:extLst>
-            <a:ext uri="{FF2B5EF4-FFF2-40B4-BE49-F238E27FC236}">
-              <a16:creationId xmlns:a16="http://schemas.microsoft.com/office/drawing/2014/main" id="{19C3C918-7594-30C2-4CB0-5C4CE88A0E38}"/>
-            </a:ext>
-          </a:extLst>
-        </p:cNvPr>
-        <p:cNvGrpSpPr/>
-        <p:nvPr/>
-      </p:nvGrpSpPr>
-      <p:grpSpPr>
-        <a:xfrm>
-          <a:off x="0" y="0"/>
-          <a:ext cx="0" cy="0"/>
-          <a:chOff x="0" y="0"/>
-          <a:chExt cx="0" cy="0"/>
-        </a:xfrm>
-      </p:grpSpPr>
-      <p:sp>
-        <p:nvSpPr>
-          <p:cNvPr id="2" name="Titolo 1">
-            <a:extLst>
-              <a:ext uri="{FF2B5EF4-FFF2-40B4-BE49-F238E27FC236}">
-                <a16:creationId xmlns:a16="http://schemas.microsoft.com/office/drawing/2014/main" id="{FF874F21-99E4-2CD9-799E-C6509178008C}"/>
-              </a:ext>
-            </a:extLst>
-          </p:cNvPr>
-          <p:cNvSpPr>
-            <a:spLocks noGrp="1"/>
-          </p:cNvSpPr>
-          <p:nvPr>
-            <p:ph type="title"/>
-          </p:nvPr>
-        </p:nvSpPr>
-        <p:spPr/>
-        <p:txBody>
-          <a:bodyPr/>
-          <a:lstStyle/>
-          <a:p>
-            <a:pPr algn="ctr"/>
-            <a:r>
-              <a:rPr lang="it-IT" dirty="0"/>
-              <a:t>SEQUENCE DIAGRAM – AGGIUNGI ARTICOLO</a:t>
-            </a:r>
-          </a:p>
-        </p:txBody>
-      </p:sp>
-      <p:pic>
-        <p:nvPicPr>
-          <p:cNvPr id="5" name="Segnaposto contenuto 4" descr="Immagine che contiene testo, schermata, Carattere, linea&#10;&#10;Il contenuto generato dall'IA potrebbe non essere corretto.">
-            <a:extLst>
-              <a:ext uri="{FF2B5EF4-FFF2-40B4-BE49-F238E27FC236}">
-                <a16:creationId xmlns:a16="http://schemas.microsoft.com/office/drawing/2014/main" id="{B5862C63-546E-D1F9-48BF-262CDA953E85}"/>
-              </a:ext>
-            </a:extLst>
-          </p:cNvPr>
-          <p:cNvPicPr>
-            <a:picLocks noGrp="1" noChangeAspect="1"/>
-          </p:cNvPicPr>
-          <p:nvPr>
-            <p:ph idx="1"/>
-          </p:nvPr>
-        </p:nvPicPr>
-        <p:blipFill>
-          <a:blip r:embed="rId2"/>
-          <a:stretch>
-            <a:fillRect/>
-          </a:stretch>
-        </p:blipFill>
-        <p:spPr>
-          <a:xfrm>
-            <a:off x="800100" y="1776846"/>
-            <a:ext cx="10606379" cy="4581956"/>
-          </a:xfrm>
-        </p:spPr>
-      </p:pic>
-    </p:spTree>
-    <p:extLst>
-      <p:ext uri="{BB962C8B-B14F-4D97-AF65-F5344CB8AC3E}">
-        <p14:creationId xmlns:p14="http://schemas.microsoft.com/office/powerpoint/2010/main" val="2333171487"/>
       </p:ext>
     </p:extLst>
   </p:cSld>
@@ -11876,10 +13499,10 @@
       </p:sp>
       <p:pic>
         <p:nvPicPr>
-          <p:cNvPr id="5" name="Segnaposto contenuto 4" descr="Immagine che contiene testo, schermata, Carattere, linea&#10;&#10;Il contenuto generato dall'IA potrebbe non essere corretto.">
-            <a:extLst>
-              <a:ext uri="{FF2B5EF4-FFF2-40B4-BE49-F238E27FC236}">
-                <a16:creationId xmlns:a16="http://schemas.microsoft.com/office/drawing/2014/main" id="{923BC546-CE1A-804A-96D6-4A94D96F62C0}"/>
+          <p:cNvPr id="7" name="Segnaposto contenuto 6" descr="Immagine che contiene testo, schermata, Carattere, linea&#10;&#10;Il contenuto generato dall'IA potrebbe non essere corretto.">
+            <a:extLst>
+              <a:ext uri="{FF2B5EF4-FFF2-40B4-BE49-F238E27FC236}">
+                <a16:creationId xmlns:a16="http://schemas.microsoft.com/office/drawing/2014/main" id="{EE745396-108C-37F9-0A09-5B94CD7B3A02}"/>
               </a:ext>
             </a:extLst>
           </p:cNvPr>
@@ -11898,8 +13521,8 @@
         </p:blipFill>
         <p:spPr>
           <a:xfrm>
-            <a:off x="684644" y="2639291"/>
-            <a:ext cx="10712074" cy="2909453"/>
+            <a:off x="824327" y="2314705"/>
+            <a:ext cx="10543345" cy="2892422"/>
           </a:xfrm>
         </p:spPr>
       </p:pic>
@@ -11994,11 +13617,121 @@
         </p:blipFill>
         <p:spPr>
           <a:xfrm>
-            <a:off x="2815936" y="1553015"/>
+            <a:off x="2617267" y="1568196"/>
             <a:ext cx="6858000" cy="4800600"/>
           </a:xfrm>
         </p:spPr>
       </p:pic>
+      <p:sp>
+        <p:nvSpPr>
+          <p:cNvPr id="3" name="Rettangolo 2">
+            <a:extLst>
+              <a:ext uri="{FF2B5EF4-FFF2-40B4-BE49-F238E27FC236}">
+                <a16:creationId xmlns:a16="http://schemas.microsoft.com/office/drawing/2014/main" id="{DB446F04-29B2-215F-74CD-956B290AA78F}"/>
+              </a:ext>
+            </a:extLst>
+          </p:cNvPr>
+          <p:cNvSpPr/>
+          <p:nvPr/>
+        </p:nvSpPr>
+        <p:spPr>
+          <a:xfrm>
+            <a:off x="525780" y="5680710"/>
+            <a:ext cx="2091487" cy="822960"/>
+          </a:xfrm>
+          <a:prstGeom prst="rect">
+            <a:avLst/>
+          </a:prstGeom>
+          <a:solidFill>
+            <a:schemeClr val="bg1"/>
+          </a:solidFill>
+          <a:ln w="12700" cap="flat" cmpd="sng" algn="ctr">
+            <a:noFill/>
+            <a:prstDash val="solid"/>
+            <a:miter lim="800000"/>
+          </a:ln>
+          <a:effectLst/>
+        </p:spPr>
+        <p:style>
+          <a:lnRef idx="2">
+            <a:schemeClr val="accent1">
+              <a:shade val="50000"/>
+            </a:schemeClr>
+          </a:lnRef>
+          <a:fillRef idx="1">
+            <a:schemeClr val="accent1"/>
+          </a:fillRef>
+          <a:effectRef idx="0">
+            <a:schemeClr val="accent1"/>
+          </a:effectRef>
+          <a:fontRef idx="minor">
+            <a:schemeClr val="lt1"/>
+          </a:fontRef>
+        </p:style>
+        <p:txBody>
+          <a:bodyPr rtlCol="0" anchor="ctr"/>
+          <a:lstStyle/>
+          <a:p>
+            <a:pPr algn="ctr"/>
+            <a:endParaRPr lang="it-IT"/>
+          </a:p>
+        </p:txBody>
+      </p:sp>
+      <p:sp>
+        <p:nvSpPr>
+          <p:cNvPr id="4" name="Rettangolo 3">
+            <a:extLst>
+              <a:ext uri="{FF2B5EF4-FFF2-40B4-BE49-F238E27FC236}">
+                <a16:creationId xmlns:a16="http://schemas.microsoft.com/office/drawing/2014/main" id="{3F79A7DA-FB8C-9ECB-C28B-C1ACBBDA87D1}"/>
+              </a:ext>
+            </a:extLst>
+          </p:cNvPr>
+          <p:cNvSpPr/>
+          <p:nvPr/>
+        </p:nvSpPr>
+        <p:spPr>
+          <a:xfrm>
+            <a:off x="9475267" y="5623560"/>
+            <a:ext cx="2091486" cy="822960"/>
+          </a:xfrm>
+          <a:prstGeom prst="rect">
+            <a:avLst/>
+          </a:prstGeom>
+          <a:solidFill>
+            <a:schemeClr val="bg1"/>
+          </a:solidFill>
+          <a:ln w="12700" cap="flat" cmpd="sng" algn="ctr">
+            <a:noFill/>
+            <a:prstDash val="solid"/>
+            <a:miter lim="800000"/>
+          </a:ln>
+          <a:effectLst/>
+        </p:spPr>
+        <p:style>
+          <a:lnRef idx="2">
+            <a:schemeClr val="accent1">
+              <a:shade val="50000"/>
+            </a:schemeClr>
+          </a:lnRef>
+          <a:fillRef idx="1">
+            <a:schemeClr val="accent1"/>
+          </a:fillRef>
+          <a:effectRef idx="0">
+            <a:schemeClr val="accent1"/>
+          </a:effectRef>
+          <a:fontRef idx="minor">
+            <a:schemeClr val="lt1"/>
+          </a:fontRef>
+        </p:style>
+        <p:txBody>
+          <a:bodyPr rtlCol="0" anchor="ctr"/>
+          <a:lstStyle/>
+          <a:p>
+            <a:pPr algn="ctr"/>
+            <a:endParaRPr lang="it-IT"/>
+          </a:p>
+        </p:txBody>
+      </p:sp>
     </p:spTree>
     <p:extLst>
       <p:ext uri="{BB962C8B-B14F-4D97-AF65-F5344CB8AC3E}">
@@ -12020,7 +13753,7 @@
         <p:cNvPr id="1" name="">
           <a:extLst>
             <a:ext uri="{FF2B5EF4-FFF2-40B4-BE49-F238E27FC236}">
-              <a16:creationId xmlns:a16="http://schemas.microsoft.com/office/drawing/2014/main" id="{6DCA445D-A68C-E6A4-C755-2DA511001669}"/>
+              <a16:creationId xmlns:a16="http://schemas.microsoft.com/office/drawing/2014/main" id="{1B0556A0-31C6-C039-DDC3-F94A93D764AC}"/>
             </a:ext>
           </a:extLst>
         </p:cNvPr>
@@ -12040,7 +13773,7 @@
           <p:cNvPr id="2" name="Titolo 1">
             <a:extLst>
               <a:ext uri="{FF2B5EF4-FFF2-40B4-BE49-F238E27FC236}">
-                <a16:creationId xmlns:a16="http://schemas.microsoft.com/office/drawing/2014/main" id="{BA22202D-1A9C-A99F-2844-7251BC30ABA2}"/>
+                <a16:creationId xmlns:a16="http://schemas.microsoft.com/office/drawing/2014/main" id="{21454DE5-8B62-B30F-4486-2DE1F78257E5}"/>
               </a:ext>
             </a:extLst>
           </p:cNvPr>
@@ -12053,23 +13786,30 @@
         </p:nvSpPr>
         <p:spPr/>
         <p:txBody>
-          <a:bodyPr/>
+          <a:bodyPr>
+            <a:normAutofit fontScale="90000"/>
+          </a:bodyPr>
           <a:lstStyle/>
           <a:p>
             <a:pPr algn="ctr"/>
             <a:r>
               <a:rPr lang="it-IT" dirty="0"/>
-              <a:t>SEQUENCE DIAGRAM – CARICAMENTO VENDO</a:t>
-            </a:r>
+              <a:t>SEQUENCE DIAGRAM – SEARCH ASTE BY </a:t>
+            </a:r>
+            <a:r>
+              <a:rPr lang="it-IT" dirty="0" err="1"/>
+              <a:t>KEYword</a:t>
+            </a:r>
+            <a:endParaRPr lang="it-IT" dirty="0"/>
           </a:p>
         </p:txBody>
       </p:sp>
       <p:pic>
         <p:nvPicPr>
-          <p:cNvPr id="5" name="Segnaposto contenuto 4" descr="Immagine che contiene testo, schermata, numero, Carattere&#10;&#10;Il contenuto generato dall'IA potrebbe non essere corretto.">
-            <a:extLst>
-              <a:ext uri="{FF2B5EF4-FFF2-40B4-BE49-F238E27FC236}">
-                <a16:creationId xmlns:a16="http://schemas.microsoft.com/office/drawing/2014/main" id="{6E72BBF1-1153-67E7-222E-A40E50E10079}"/>
+          <p:cNvPr id="5" name="Segnaposto contenuto 4" descr="Immagine che contiene testo, schermata, diagramma, linea&#10;&#10;Il contenuto generato dall'IA potrebbe non essere corretto.">
+            <a:extLst>
+              <a:ext uri="{FF2B5EF4-FFF2-40B4-BE49-F238E27FC236}">
+                <a16:creationId xmlns:a16="http://schemas.microsoft.com/office/drawing/2014/main" id="{42BE1DA9-60DB-C1D6-0009-B605B5717F60}"/>
               </a:ext>
             </a:extLst>
           </p:cNvPr>
@@ -12088,15 +13828,15 @@
         </p:blipFill>
         <p:spPr>
           <a:xfrm>
-            <a:off x="2336312" y="1596375"/>
-            <a:ext cx="7451924" cy="4970679"/>
+            <a:off x="1339034" y="1568196"/>
+            <a:ext cx="9728041" cy="4416137"/>
           </a:xfrm>
         </p:spPr>
       </p:pic>
     </p:spTree>
     <p:extLst>
       <p:ext uri="{BB962C8B-B14F-4D97-AF65-F5344CB8AC3E}">
-        <p14:creationId xmlns:p14="http://schemas.microsoft.com/office/powerpoint/2010/main" val="2424893026"/>
+        <p14:creationId xmlns:p14="http://schemas.microsoft.com/office/powerpoint/2010/main" val="1297480831"/>
       </p:ext>
     </p:extLst>
   </p:cSld>
@@ -12187,6 +13927,116 @@
           </a:xfrm>
         </p:spPr>
       </p:pic>
+      <p:sp>
+        <p:nvSpPr>
+          <p:cNvPr id="3" name="Rettangolo 2">
+            <a:extLst>
+              <a:ext uri="{FF2B5EF4-FFF2-40B4-BE49-F238E27FC236}">
+                <a16:creationId xmlns:a16="http://schemas.microsoft.com/office/drawing/2014/main" id="{D6B1B3BE-4D97-DF3A-B8C2-652B74148B86}"/>
+              </a:ext>
+            </a:extLst>
+          </p:cNvPr>
+          <p:cNvSpPr/>
+          <p:nvPr/>
+        </p:nvSpPr>
+        <p:spPr>
+          <a:xfrm>
+            <a:off x="136500" y="5619404"/>
+            <a:ext cx="1771650" cy="822960"/>
+          </a:xfrm>
+          <a:prstGeom prst="rect">
+            <a:avLst/>
+          </a:prstGeom>
+          <a:solidFill>
+            <a:schemeClr val="bg1"/>
+          </a:solidFill>
+          <a:ln w="12700" cap="flat" cmpd="sng" algn="ctr">
+            <a:noFill/>
+            <a:prstDash val="solid"/>
+            <a:miter lim="800000"/>
+          </a:ln>
+          <a:effectLst/>
+        </p:spPr>
+        <p:style>
+          <a:lnRef idx="2">
+            <a:schemeClr val="accent1">
+              <a:shade val="50000"/>
+            </a:schemeClr>
+          </a:lnRef>
+          <a:fillRef idx="1">
+            <a:schemeClr val="accent1"/>
+          </a:fillRef>
+          <a:effectRef idx="0">
+            <a:schemeClr val="accent1"/>
+          </a:effectRef>
+          <a:fontRef idx="minor">
+            <a:schemeClr val="lt1"/>
+          </a:fontRef>
+        </p:style>
+        <p:txBody>
+          <a:bodyPr rtlCol="0" anchor="ctr"/>
+          <a:lstStyle/>
+          <a:p>
+            <a:pPr algn="ctr"/>
+            <a:endParaRPr lang="it-IT"/>
+          </a:p>
+        </p:txBody>
+      </p:sp>
+      <p:sp>
+        <p:nvSpPr>
+          <p:cNvPr id="4" name="Rettangolo 3">
+            <a:extLst>
+              <a:ext uri="{FF2B5EF4-FFF2-40B4-BE49-F238E27FC236}">
+                <a16:creationId xmlns:a16="http://schemas.microsoft.com/office/drawing/2014/main" id="{BF8E6B8E-FA4A-1B5B-E6DC-CA9A1C321BDC}"/>
+              </a:ext>
+            </a:extLst>
+          </p:cNvPr>
+          <p:cNvSpPr/>
+          <p:nvPr/>
+        </p:nvSpPr>
+        <p:spPr>
+          <a:xfrm>
+            <a:off x="10283850" y="5619404"/>
+            <a:ext cx="1771650" cy="822960"/>
+          </a:xfrm>
+          <a:prstGeom prst="rect">
+            <a:avLst/>
+          </a:prstGeom>
+          <a:solidFill>
+            <a:schemeClr val="bg1"/>
+          </a:solidFill>
+          <a:ln w="12700" cap="flat" cmpd="sng" algn="ctr">
+            <a:noFill/>
+            <a:prstDash val="solid"/>
+            <a:miter lim="800000"/>
+          </a:ln>
+          <a:effectLst/>
+        </p:spPr>
+        <p:style>
+          <a:lnRef idx="2">
+            <a:schemeClr val="accent1">
+              <a:shade val="50000"/>
+            </a:schemeClr>
+          </a:lnRef>
+          <a:fillRef idx="1">
+            <a:schemeClr val="accent1"/>
+          </a:fillRef>
+          <a:effectRef idx="0">
+            <a:schemeClr val="accent1"/>
+          </a:effectRef>
+          <a:fontRef idx="minor">
+            <a:schemeClr val="lt1"/>
+          </a:fontRef>
+        </p:style>
+        <p:txBody>
+          <a:bodyPr rtlCol="0" anchor="ctr"/>
+          <a:lstStyle/>
+          <a:p>
+            <a:pPr algn="ctr"/>
+            <a:endParaRPr lang="it-IT"/>
+          </a:p>
+        </p:txBody>
+      </p:sp>
     </p:spTree>
     <p:extLst>
       <p:ext uri="{BB962C8B-B14F-4D97-AF65-F5344CB8AC3E}">
@@ -12201,6 +14051,849 @@
 </file>
 
 <file path=ppt/slides/slide38.xml><?xml version="1.0" encoding="utf-8"?>
+<p:sld xmlns:a="http://schemas.openxmlformats.org/drawingml/2006/main" xmlns:r="http://schemas.openxmlformats.org/officeDocument/2006/relationships" xmlns:p="http://schemas.openxmlformats.org/presentationml/2006/main">
+  <p:cSld>
+    <p:spTree>
+      <p:nvGrpSpPr>
+        <p:cNvPr id="1" name="">
+          <a:extLst>
+            <a:ext uri="{FF2B5EF4-FFF2-40B4-BE49-F238E27FC236}">
+              <a16:creationId xmlns:a16="http://schemas.microsoft.com/office/drawing/2014/main" id="{82E3FE80-BE74-AA18-DD56-A6E3F4C2BC6F}"/>
+            </a:ext>
+          </a:extLst>
+        </p:cNvPr>
+        <p:cNvGrpSpPr/>
+        <p:nvPr/>
+      </p:nvGrpSpPr>
+      <p:grpSpPr>
+        <a:xfrm>
+          <a:off x="0" y="0"/>
+          <a:ext cx="0" cy="0"/>
+          <a:chOff x="0" y="0"/>
+          <a:chExt cx="0" cy="0"/>
+        </a:xfrm>
+      </p:grpSpPr>
+      <p:sp>
+        <p:nvSpPr>
+          <p:cNvPr id="2" name="Titolo 1">
+            <a:extLst>
+              <a:ext uri="{FF2B5EF4-FFF2-40B4-BE49-F238E27FC236}">
+                <a16:creationId xmlns:a16="http://schemas.microsoft.com/office/drawing/2014/main" id="{2C030651-BCA1-A728-15E0-106761D029EC}"/>
+              </a:ext>
+            </a:extLst>
+          </p:cNvPr>
+          <p:cNvSpPr>
+            <a:spLocks noGrp="1"/>
+          </p:cNvSpPr>
+          <p:nvPr>
+            <p:ph type="title"/>
+          </p:nvPr>
+        </p:nvSpPr>
+        <p:spPr/>
+        <p:txBody>
+          <a:bodyPr/>
+          <a:lstStyle/>
+          <a:p>
+            <a:pPr algn="ctr"/>
+            <a:r>
+              <a:rPr lang="it-IT" dirty="0"/>
+              <a:t>SEQUENCE DIAGRAM – FAI OFFERTA</a:t>
+            </a:r>
+          </a:p>
+        </p:txBody>
+      </p:sp>
+      <p:pic>
+        <p:nvPicPr>
+          <p:cNvPr id="5" name="Segnaposto contenuto 4" descr="Immagine che contiene testo, schermata, numero, Carattere&#10;&#10;Il contenuto generato dall'IA potrebbe non essere corretto.">
+            <a:extLst>
+              <a:ext uri="{FF2B5EF4-FFF2-40B4-BE49-F238E27FC236}">
+                <a16:creationId xmlns:a16="http://schemas.microsoft.com/office/drawing/2014/main" id="{C1C89FC0-7B07-A877-D1F8-AB86DFFDE56F}"/>
+              </a:ext>
+            </a:extLst>
+          </p:cNvPr>
+          <p:cNvPicPr>
+            <a:picLocks noGrp="1" noChangeAspect="1"/>
+          </p:cNvPicPr>
+          <p:nvPr>
+            <p:ph idx="1"/>
+          </p:nvPr>
+        </p:nvPicPr>
+        <p:blipFill>
+          <a:blip r:embed="rId2"/>
+          <a:stretch>
+            <a:fillRect/>
+          </a:stretch>
+        </p:blipFill>
+        <p:spPr>
+          <a:xfrm>
+            <a:off x="1569027" y="1696697"/>
+            <a:ext cx="9227128" cy="4653963"/>
+          </a:xfrm>
+        </p:spPr>
+      </p:pic>
+    </p:spTree>
+    <p:extLst>
+      <p:ext uri="{BB962C8B-B14F-4D97-AF65-F5344CB8AC3E}">
+        <p14:creationId xmlns:p14="http://schemas.microsoft.com/office/powerpoint/2010/main" val="2474054820"/>
+      </p:ext>
+    </p:extLst>
+  </p:cSld>
+  <p:clrMapOvr>
+    <a:masterClrMapping/>
+  </p:clrMapOvr>
+</p:sld>
+</file>
+
+<file path=ppt/slides/slide39.xml><?xml version="1.0" encoding="utf-8"?>
+<p:sld xmlns:a="http://schemas.openxmlformats.org/drawingml/2006/main" xmlns:r="http://schemas.openxmlformats.org/officeDocument/2006/relationships" xmlns:p="http://schemas.openxmlformats.org/presentationml/2006/main">
+  <p:cSld>
+    <p:spTree>
+      <p:nvGrpSpPr>
+        <p:cNvPr id="1" name="">
+          <a:extLst>
+            <a:ext uri="{FF2B5EF4-FFF2-40B4-BE49-F238E27FC236}">
+              <a16:creationId xmlns:a16="http://schemas.microsoft.com/office/drawing/2014/main" id="{6DCA445D-A68C-E6A4-C755-2DA511001669}"/>
+            </a:ext>
+          </a:extLst>
+        </p:cNvPr>
+        <p:cNvGrpSpPr/>
+        <p:nvPr/>
+      </p:nvGrpSpPr>
+      <p:grpSpPr>
+        <a:xfrm>
+          <a:off x="0" y="0"/>
+          <a:ext cx="0" cy="0"/>
+          <a:chOff x="0" y="0"/>
+          <a:chExt cx="0" cy="0"/>
+        </a:xfrm>
+      </p:grpSpPr>
+      <p:sp>
+        <p:nvSpPr>
+          <p:cNvPr id="2" name="Titolo 1">
+            <a:extLst>
+              <a:ext uri="{FF2B5EF4-FFF2-40B4-BE49-F238E27FC236}">
+                <a16:creationId xmlns:a16="http://schemas.microsoft.com/office/drawing/2014/main" id="{BA22202D-1A9C-A99F-2844-7251BC30ABA2}"/>
+              </a:ext>
+            </a:extLst>
+          </p:cNvPr>
+          <p:cNvSpPr>
+            <a:spLocks noGrp="1"/>
+          </p:cNvSpPr>
+          <p:nvPr>
+            <p:ph type="title"/>
+          </p:nvPr>
+        </p:nvSpPr>
+        <p:spPr/>
+        <p:txBody>
+          <a:bodyPr/>
+          <a:lstStyle/>
+          <a:p>
+            <a:pPr algn="ctr"/>
+            <a:r>
+              <a:rPr lang="it-IT" dirty="0"/>
+              <a:t>SEQUENCE DIAGRAM – CARICAMENTO VENDO</a:t>
+            </a:r>
+          </a:p>
+        </p:txBody>
+      </p:sp>
+      <p:pic>
+        <p:nvPicPr>
+          <p:cNvPr id="5" name="Segnaposto contenuto 4" descr="Immagine che contiene testo, schermata, numero, Carattere&#10;&#10;Il contenuto generato dall'IA potrebbe non essere corretto.">
+            <a:extLst>
+              <a:ext uri="{FF2B5EF4-FFF2-40B4-BE49-F238E27FC236}">
+                <a16:creationId xmlns:a16="http://schemas.microsoft.com/office/drawing/2014/main" id="{6E72BBF1-1153-67E7-222E-A40E50E10079}"/>
+              </a:ext>
+            </a:extLst>
+          </p:cNvPr>
+          <p:cNvPicPr>
+            <a:picLocks noGrp="1" noChangeAspect="1"/>
+          </p:cNvPicPr>
+          <p:nvPr>
+            <p:ph idx="1"/>
+          </p:nvPr>
+        </p:nvPicPr>
+        <p:blipFill>
+          <a:blip r:embed="rId2"/>
+          <a:stretch>
+            <a:fillRect/>
+          </a:stretch>
+        </p:blipFill>
+        <p:spPr>
+          <a:xfrm>
+            <a:off x="2336312" y="1596375"/>
+            <a:ext cx="7451924" cy="4970679"/>
+          </a:xfrm>
+        </p:spPr>
+      </p:pic>
+      <p:sp>
+        <p:nvSpPr>
+          <p:cNvPr id="3" name="Rettangolo 2">
+            <a:extLst>
+              <a:ext uri="{FF2B5EF4-FFF2-40B4-BE49-F238E27FC236}">
+                <a16:creationId xmlns:a16="http://schemas.microsoft.com/office/drawing/2014/main" id="{CFAE95AF-90AD-CABB-8C27-DCB65E7B06FD}"/>
+              </a:ext>
+            </a:extLst>
+          </p:cNvPr>
+          <p:cNvSpPr/>
+          <p:nvPr/>
+        </p:nvSpPr>
+        <p:spPr>
+          <a:xfrm>
+            <a:off x="564662" y="5646420"/>
+            <a:ext cx="1771650" cy="822960"/>
+          </a:xfrm>
+          <a:prstGeom prst="rect">
+            <a:avLst/>
+          </a:prstGeom>
+          <a:solidFill>
+            <a:schemeClr val="bg1"/>
+          </a:solidFill>
+          <a:ln w="12700" cap="flat" cmpd="sng" algn="ctr">
+            <a:noFill/>
+            <a:prstDash val="solid"/>
+            <a:miter lim="800000"/>
+          </a:ln>
+          <a:effectLst/>
+        </p:spPr>
+        <p:style>
+          <a:lnRef idx="2">
+            <a:schemeClr val="accent1">
+              <a:shade val="50000"/>
+            </a:schemeClr>
+          </a:lnRef>
+          <a:fillRef idx="1">
+            <a:schemeClr val="accent1"/>
+          </a:fillRef>
+          <a:effectRef idx="0">
+            <a:schemeClr val="accent1"/>
+          </a:effectRef>
+          <a:fontRef idx="minor">
+            <a:schemeClr val="lt1"/>
+          </a:fontRef>
+        </p:style>
+        <p:txBody>
+          <a:bodyPr rtlCol="0" anchor="ctr"/>
+          <a:lstStyle/>
+          <a:p>
+            <a:pPr algn="ctr"/>
+            <a:endParaRPr lang="it-IT"/>
+          </a:p>
+        </p:txBody>
+      </p:sp>
+      <p:sp>
+        <p:nvSpPr>
+          <p:cNvPr id="4" name="Rettangolo 3">
+            <a:extLst>
+              <a:ext uri="{FF2B5EF4-FFF2-40B4-BE49-F238E27FC236}">
+                <a16:creationId xmlns:a16="http://schemas.microsoft.com/office/drawing/2014/main" id="{4DE95B97-1725-209D-051D-A662456A714E}"/>
+              </a:ext>
+            </a:extLst>
+          </p:cNvPr>
+          <p:cNvSpPr/>
+          <p:nvPr/>
+        </p:nvSpPr>
+        <p:spPr>
+          <a:xfrm>
+            <a:off x="9788236" y="5646420"/>
+            <a:ext cx="1771650" cy="822960"/>
+          </a:xfrm>
+          <a:prstGeom prst="rect">
+            <a:avLst/>
+          </a:prstGeom>
+          <a:solidFill>
+            <a:schemeClr val="bg1"/>
+          </a:solidFill>
+          <a:ln w="12700" cap="flat" cmpd="sng" algn="ctr">
+            <a:noFill/>
+            <a:prstDash val="solid"/>
+            <a:miter lim="800000"/>
+          </a:ln>
+          <a:effectLst/>
+        </p:spPr>
+        <p:style>
+          <a:lnRef idx="2">
+            <a:schemeClr val="accent1">
+              <a:shade val="50000"/>
+            </a:schemeClr>
+          </a:lnRef>
+          <a:fillRef idx="1">
+            <a:schemeClr val="accent1"/>
+          </a:fillRef>
+          <a:effectRef idx="0">
+            <a:schemeClr val="accent1"/>
+          </a:effectRef>
+          <a:fontRef idx="minor">
+            <a:schemeClr val="lt1"/>
+          </a:fontRef>
+        </p:style>
+        <p:txBody>
+          <a:bodyPr rtlCol="0" anchor="ctr"/>
+          <a:lstStyle/>
+          <a:p>
+            <a:pPr algn="ctr"/>
+            <a:endParaRPr lang="it-IT"/>
+          </a:p>
+        </p:txBody>
+      </p:sp>
+    </p:spTree>
+    <p:extLst>
+      <p:ext uri="{BB962C8B-B14F-4D97-AF65-F5344CB8AC3E}">
+        <p14:creationId xmlns:p14="http://schemas.microsoft.com/office/powerpoint/2010/main" val="2424893026"/>
+      </p:ext>
+    </p:extLst>
+  </p:cSld>
+  <p:clrMapOvr>
+    <a:masterClrMapping/>
+  </p:clrMapOvr>
+</p:sld>
+</file>
+
+<file path=ppt/slides/slide4.xml><?xml version="1.0" encoding="utf-8"?>
+<p:sld xmlns:a="http://schemas.openxmlformats.org/drawingml/2006/main" xmlns:r="http://schemas.openxmlformats.org/officeDocument/2006/relationships" xmlns:p="http://schemas.openxmlformats.org/presentationml/2006/main">
+  <p:cSld>
+    <p:spTree>
+      <p:nvGrpSpPr>
+        <p:cNvPr id="1" name=""/>
+        <p:cNvGrpSpPr/>
+        <p:nvPr/>
+      </p:nvGrpSpPr>
+      <p:grpSpPr>
+        <a:xfrm>
+          <a:off x="0" y="0"/>
+          <a:ext cx="0" cy="0"/>
+          <a:chOff x="0" y="0"/>
+          <a:chExt cx="0" cy="0"/>
+        </a:xfrm>
+      </p:grpSpPr>
+      <p:sp>
+        <p:nvSpPr>
+          <p:cNvPr id="4" name="Titolo 1">
+            <a:extLst>
+              <a:ext uri="{FF2B5EF4-FFF2-40B4-BE49-F238E27FC236}">
+                <a16:creationId xmlns:a16="http://schemas.microsoft.com/office/drawing/2014/main" id="{69ABF3D7-38F2-52AA-2192-66F1D661F6A2}"/>
+              </a:ext>
+            </a:extLst>
+          </p:cNvPr>
+          <p:cNvSpPr>
+            <a:spLocks noGrp="1"/>
+          </p:cNvSpPr>
+          <p:nvPr>
+            <p:ph idx="1"/>
+          </p:nvPr>
+        </p:nvSpPr>
+        <p:spPr>
+          <a:xfrm>
+            <a:off x="700088" y="1634490"/>
+            <a:ext cx="10691812" cy="4328160"/>
+          </a:xfrm>
+        </p:spPr>
+        <p:txBody>
+          <a:bodyPr>
+            <a:noAutofit/>
+          </a:bodyPr>
+          <a:lstStyle/>
+          <a:p>
+            <a:pPr marL="0" indent="0" algn="just">
+              <a:buNone/>
+            </a:pPr>
+            <a:r>
+              <a:rPr lang="it-IT" dirty="0">
+                <a:solidFill>
+                  <a:srgbClr val="000000"/>
+                </a:solidFill>
+                <a:effectLst/>
+              </a:rPr>
+              <a:t>Quando l’acquirente invia una parola chiave la pagina ACQUISTO è aggiornata e mostra un elenco di aste aperte (la cui scadenza è posteriore alla data e ora dell’invio) per cui la parola chiave compare nel nome o nella descrizione di almeno uno degli articoli dell’asta. La lista è ordinata in modo decrescente in base al tempo (numero di giorni e ore) mancante alla chiusura. Cliccando su un’asta aperta compare la pagina OFFERTA che mostra i dati degli articoli, l’elenco delle </a:t>
+            </a:r>
+            <a:r>
+              <a:rPr lang="it-IT" b="1" dirty="0">
+                <a:solidFill>
+                  <a:srgbClr val="FF0000"/>
+                </a:solidFill>
+                <a:effectLst/>
+              </a:rPr>
+              <a:t>offerte</a:t>
+            </a:r>
+            <a:r>
+              <a:rPr lang="it-IT" dirty="0">
+                <a:solidFill>
+                  <a:srgbClr val="000000"/>
+                </a:solidFill>
+                <a:effectLst/>
+              </a:rPr>
+              <a:t> pervenute in ordine di </a:t>
+            </a:r>
+            <a:r>
+              <a:rPr lang="it-IT" dirty="0" err="1">
+                <a:solidFill>
+                  <a:srgbClr val="000000"/>
+                </a:solidFill>
+                <a:effectLst/>
+              </a:rPr>
+              <a:t>data+ora</a:t>
+            </a:r>
+            <a:r>
+              <a:rPr lang="it-IT" dirty="0">
+                <a:solidFill>
+                  <a:srgbClr val="000000"/>
+                </a:solidFill>
+                <a:effectLst/>
+              </a:rPr>
+              <a:t> decrescente e un campo di input per inserire la propria offerta, che deve essere superiore all’offerta massima corrente di un importo pari almeno al rialzo minimo. Dopo l’invio dell’offerta la pagina OFFERTA mostra l’elenco delle offerte aggiornate. La pagina ACQUISTO contiene anche un elenco delle offerte aggiudicate all’utente con i dati degli articoli e il prezzo finale.</a:t>
+            </a:r>
+          </a:p>
+          <a:p>
+            <a:pPr marL="0" indent="0" algn="just">
+              <a:buNone/>
+            </a:pPr>
+            <a:endParaRPr lang="it-IT" dirty="0"/>
+          </a:p>
+        </p:txBody>
+      </p:sp>
+      <p:sp>
+        <p:nvSpPr>
+          <p:cNvPr id="6" name="CasellaDiTesto 5">
+            <a:extLst>
+              <a:ext uri="{FF2B5EF4-FFF2-40B4-BE49-F238E27FC236}">
+                <a16:creationId xmlns:a16="http://schemas.microsoft.com/office/drawing/2014/main" id="{C38F1E2E-7AC3-A666-87FD-EF4F90B77824}"/>
+              </a:ext>
+            </a:extLst>
+          </p:cNvPr>
+          <p:cNvSpPr txBox="1"/>
+          <p:nvPr/>
+        </p:nvSpPr>
+        <p:spPr>
+          <a:xfrm>
+            <a:off x="1794510" y="1028700"/>
+            <a:ext cx="184731" cy="369332"/>
+          </a:xfrm>
+          <a:prstGeom prst="rect">
+            <a:avLst/>
+          </a:prstGeom>
+          <a:noFill/>
+        </p:spPr>
+        <p:txBody>
+          <a:bodyPr wrap="none" rtlCol="0">
+            <a:spAutoFit/>
+          </a:bodyPr>
+          <a:lstStyle/>
+          <a:p>
+            <a:endParaRPr lang="it-IT" dirty="0"/>
+          </a:p>
+        </p:txBody>
+      </p:sp>
+      <p:sp>
+        <p:nvSpPr>
+          <p:cNvPr id="7" name="CasellaDiTesto 6">
+            <a:extLst>
+              <a:ext uri="{FF2B5EF4-FFF2-40B4-BE49-F238E27FC236}">
+                <a16:creationId xmlns:a16="http://schemas.microsoft.com/office/drawing/2014/main" id="{A4DED0D4-59E8-EB93-D4C2-51A9E6A35AEA}"/>
+              </a:ext>
+            </a:extLst>
+          </p:cNvPr>
+          <p:cNvSpPr txBox="1"/>
+          <p:nvPr/>
+        </p:nvSpPr>
+        <p:spPr>
+          <a:xfrm>
+            <a:off x="857250" y="937260"/>
+            <a:ext cx="184731" cy="369332"/>
+          </a:xfrm>
+          <a:prstGeom prst="rect">
+            <a:avLst/>
+          </a:prstGeom>
+          <a:noFill/>
+        </p:spPr>
+        <p:txBody>
+          <a:bodyPr wrap="none" rtlCol="0">
+            <a:spAutoFit/>
+          </a:bodyPr>
+          <a:lstStyle/>
+          <a:p>
+            <a:endParaRPr lang="it-IT" dirty="0"/>
+          </a:p>
+        </p:txBody>
+      </p:sp>
+      <p:sp>
+        <p:nvSpPr>
+          <p:cNvPr id="11" name="CasellaDiTesto 10">
+            <a:extLst>
+              <a:ext uri="{FF2B5EF4-FFF2-40B4-BE49-F238E27FC236}">
+                <a16:creationId xmlns:a16="http://schemas.microsoft.com/office/drawing/2014/main" id="{9D765ECA-6A9A-AF5A-D7C1-411337FF504B}"/>
+              </a:ext>
+            </a:extLst>
+          </p:cNvPr>
+          <p:cNvSpPr txBox="1"/>
+          <p:nvPr/>
+        </p:nvSpPr>
+        <p:spPr>
+          <a:xfrm>
+            <a:off x="700633" y="6252150"/>
+            <a:ext cx="3865289" cy="400110"/>
+          </a:xfrm>
+          <a:prstGeom prst="rect">
+            <a:avLst/>
+          </a:prstGeom>
+          <a:noFill/>
+        </p:spPr>
+        <p:txBody>
+          <a:bodyPr wrap="none" rtlCol="0">
+            <a:spAutoFit/>
+          </a:bodyPr>
+          <a:lstStyle/>
+          <a:p>
+            <a:r>
+              <a:rPr lang="it-IT" sz="2000" b="1" dirty="0" err="1">
+                <a:solidFill>
+                  <a:srgbClr val="FF0000"/>
+                </a:solidFill>
+              </a:rPr>
+              <a:t>Entities</a:t>
+            </a:r>
+            <a:r>
+              <a:rPr lang="it-IT" sz="2000" b="1" dirty="0"/>
+              <a:t>, </a:t>
+            </a:r>
+            <a:r>
+              <a:rPr lang="it-IT" sz="2000" b="1" dirty="0" err="1">
+                <a:solidFill>
+                  <a:srgbClr val="00B050"/>
+                </a:solidFill>
+              </a:rPr>
+              <a:t>attributes</a:t>
+            </a:r>
+            <a:r>
+              <a:rPr lang="it-IT" sz="2000" b="1" dirty="0"/>
+              <a:t>, </a:t>
+            </a:r>
+            <a:r>
+              <a:rPr lang="it-IT" sz="2000" b="1" dirty="0" err="1">
+                <a:solidFill>
+                  <a:srgbClr val="0070C0"/>
+                </a:solidFill>
+              </a:rPr>
+              <a:t>relationships</a:t>
+            </a:r>
+            <a:endParaRPr lang="it-IT" sz="2000" b="1" dirty="0">
+              <a:solidFill>
+                <a:srgbClr val="0070C0"/>
+              </a:solidFill>
+            </a:endParaRPr>
+          </a:p>
+        </p:txBody>
+      </p:sp>
+    </p:spTree>
+    <p:extLst>
+      <p:ext uri="{BB962C8B-B14F-4D97-AF65-F5344CB8AC3E}">
+        <p14:creationId xmlns:p14="http://schemas.microsoft.com/office/powerpoint/2010/main" val="1561828668"/>
+      </p:ext>
+    </p:extLst>
+  </p:cSld>
+  <p:clrMapOvr>
+    <a:masterClrMapping/>
+  </p:clrMapOvr>
+</p:sld>
+</file>
+
+<file path=ppt/slides/slide40.xml><?xml version="1.0" encoding="utf-8"?>
+<p:sld xmlns:a="http://schemas.openxmlformats.org/drawingml/2006/main" xmlns:r="http://schemas.openxmlformats.org/officeDocument/2006/relationships" xmlns:p="http://schemas.openxmlformats.org/presentationml/2006/main">
+  <p:cSld>
+    <p:spTree>
+      <p:nvGrpSpPr>
+        <p:cNvPr id="1" name="">
+          <a:extLst>
+            <a:ext uri="{FF2B5EF4-FFF2-40B4-BE49-F238E27FC236}">
+              <a16:creationId xmlns:a16="http://schemas.microsoft.com/office/drawing/2014/main" id="{84D3DD91-D270-A745-4170-FEF9B69E0C00}"/>
+            </a:ext>
+          </a:extLst>
+        </p:cNvPr>
+        <p:cNvGrpSpPr/>
+        <p:nvPr/>
+      </p:nvGrpSpPr>
+      <p:grpSpPr>
+        <a:xfrm>
+          <a:off x="0" y="0"/>
+          <a:ext cx="0" cy="0"/>
+          <a:chOff x="0" y="0"/>
+          <a:chExt cx="0" cy="0"/>
+        </a:xfrm>
+      </p:grpSpPr>
+      <p:sp>
+        <p:nvSpPr>
+          <p:cNvPr id="2" name="Titolo 1">
+            <a:extLst>
+              <a:ext uri="{FF2B5EF4-FFF2-40B4-BE49-F238E27FC236}">
+                <a16:creationId xmlns:a16="http://schemas.microsoft.com/office/drawing/2014/main" id="{0122CB3C-0A15-7C60-8443-F44CC5ED59A6}"/>
+              </a:ext>
+            </a:extLst>
+          </p:cNvPr>
+          <p:cNvSpPr>
+            <a:spLocks noGrp="1"/>
+          </p:cNvSpPr>
+          <p:nvPr>
+            <p:ph type="title"/>
+          </p:nvPr>
+        </p:nvSpPr>
+        <p:spPr/>
+        <p:txBody>
+          <a:bodyPr/>
+          <a:lstStyle/>
+          <a:p>
+            <a:pPr algn="ctr"/>
+            <a:r>
+              <a:rPr lang="it-IT" dirty="0"/>
+              <a:t>SEQUENCE DIAGRAM – AGGIUNGI ARTICOLO</a:t>
+            </a:r>
+          </a:p>
+        </p:txBody>
+      </p:sp>
+      <p:pic>
+        <p:nvPicPr>
+          <p:cNvPr id="5" name="Segnaposto contenuto 4" descr="Immagine che contiene testo, schermata, diagramma, linea&#10;&#10;Il contenuto generato dall'IA potrebbe non essere corretto.">
+            <a:extLst>
+              <a:ext uri="{FF2B5EF4-FFF2-40B4-BE49-F238E27FC236}">
+                <a16:creationId xmlns:a16="http://schemas.microsoft.com/office/drawing/2014/main" id="{123E8D6E-713A-5AC7-9BAD-41AB27C67420}"/>
+              </a:ext>
+            </a:extLst>
+          </p:cNvPr>
+          <p:cNvPicPr>
+            <a:picLocks noGrp="1" noChangeAspect="1"/>
+          </p:cNvPicPr>
+          <p:nvPr>
+            <p:ph idx="1"/>
+          </p:nvPr>
+        </p:nvPicPr>
+        <p:blipFill>
+          <a:blip r:embed="rId2"/>
+          <a:stretch>
+            <a:fillRect/>
+          </a:stretch>
+        </p:blipFill>
+        <p:spPr>
+          <a:xfrm>
+            <a:off x="700634" y="1614698"/>
+            <a:ext cx="10691265" cy="4955500"/>
+          </a:xfrm>
+        </p:spPr>
+      </p:pic>
+    </p:spTree>
+    <p:extLst>
+      <p:ext uri="{BB962C8B-B14F-4D97-AF65-F5344CB8AC3E}">
+        <p14:creationId xmlns:p14="http://schemas.microsoft.com/office/powerpoint/2010/main" val="1349043980"/>
+      </p:ext>
+    </p:extLst>
+  </p:cSld>
+  <p:clrMapOvr>
+    <a:masterClrMapping/>
+  </p:clrMapOvr>
+</p:sld>
+</file>
+
+<file path=ppt/slides/slide41.xml><?xml version="1.0" encoding="utf-8"?>
+<p:sld xmlns:a="http://schemas.openxmlformats.org/drawingml/2006/main" xmlns:r="http://schemas.openxmlformats.org/officeDocument/2006/relationships" xmlns:p="http://schemas.openxmlformats.org/presentationml/2006/main">
+  <p:cSld>
+    <p:spTree>
+      <p:nvGrpSpPr>
+        <p:cNvPr id="1" name="">
+          <a:extLst>
+            <a:ext uri="{FF2B5EF4-FFF2-40B4-BE49-F238E27FC236}">
+              <a16:creationId xmlns:a16="http://schemas.microsoft.com/office/drawing/2014/main" id="{37BDB7F8-8811-C36F-605B-80E6B61B4D55}"/>
+            </a:ext>
+          </a:extLst>
+        </p:cNvPr>
+        <p:cNvGrpSpPr/>
+        <p:nvPr/>
+      </p:nvGrpSpPr>
+      <p:grpSpPr>
+        <a:xfrm>
+          <a:off x="0" y="0"/>
+          <a:ext cx="0" cy="0"/>
+          <a:chOff x="0" y="0"/>
+          <a:chExt cx="0" cy="0"/>
+        </a:xfrm>
+      </p:grpSpPr>
+      <p:sp>
+        <p:nvSpPr>
+          <p:cNvPr id="2" name="Titolo 1">
+            <a:extLst>
+              <a:ext uri="{FF2B5EF4-FFF2-40B4-BE49-F238E27FC236}">
+                <a16:creationId xmlns:a16="http://schemas.microsoft.com/office/drawing/2014/main" id="{68BB636B-D419-C643-EF2D-5AB5C71A0693}"/>
+              </a:ext>
+            </a:extLst>
+          </p:cNvPr>
+          <p:cNvSpPr>
+            <a:spLocks noGrp="1"/>
+          </p:cNvSpPr>
+          <p:nvPr>
+            <p:ph type="title"/>
+          </p:nvPr>
+        </p:nvSpPr>
+        <p:spPr/>
+        <p:txBody>
+          <a:bodyPr/>
+          <a:lstStyle/>
+          <a:p>
+            <a:pPr algn="ctr"/>
+            <a:r>
+              <a:rPr lang="it-IT" dirty="0"/>
+              <a:t>SEQUENCE DIAGRAM – CREA ASTA</a:t>
+            </a:r>
+          </a:p>
+        </p:txBody>
+      </p:sp>
+      <p:pic>
+        <p:nvPicPr>
+          <p:cNvPr id="5" name="Segnaposto contenuto 4" descr="Immagine che contiene testo, schermata, Carattere, diagramma&#10;&#10;Il contenuto generato dall'IA potrebbe non essere corretto.">
+            <a:extLst>
+              <a:ext uri="{FF2B5EF4-FFF2-40B4-BE49-F238E27FC236}">
+                <a16:creationId xmlns:a16="http://schemas.microsoft.com/office/drawing/2014/main" id="{1E30C2F4-DFD6-FEB6-24CF-068C7DF15E8E}"/>
+              </a:ext>
+            </a:extLst>
+          </p:cNvPr>
+          <p:cNvPicPr>
+            <a:picLocks noGrp="1" noChangeAspect="1"/>
+          </p:cNvPicPr>
+          <p:nvPr>
+            <p:ph idx="1"/>
+          </p:nvPr>
+        </p:nvPicPr>
+        <p:blipFill>
+          <a:blip r:embed="rId2"/>
+          <a:stretch>
+            <a:fillRect/>
+          </a:stretch>
+        </p:blipFill>
+        <p:spPr>
+          <a:xfrm>
+            <a:off x="2400300" y="1509102"/>
+            <a:ext cx="7471063" cy="4964434"/>
+          </a:xfrm>
+        </p:spPr>
+      </p:pic>
+      <p:sp>
+        <p:nvSpPr>
+          <p:cNvPr id="3" name="Rettangolo 2">
+            <a:extLst>
+              <a:ext uri="{FF2B5EF4-FFF2-40B4-BE49-F238E27FC236}">
+                <a16:creationId xmlns:a16="http://schemas.microsoft.com/office/drawing/2014/main" id="{E9BBE821-7A64-E356-CF06-123E21E4E7C9}"/>
+              </a:ext>
+            </a:extLst>
+          </p:cNvPr>
+          <p:cNvSpPr/>
+          <p:nvPr/>
+        </p:nvSpPr>
+        <p:spPr>
+          <a:xfrm>
+            <a:off x="628650" y="5650576"/>
+            <a:ext cx="1771650" cy="822960"/>
+          </a:xfrm>
+          <a:prstGeom prst="rect">
+            <a:avLst/>
+          </a:prstGeom>
+          <a:solidFill>
+            <a:schemeClr val="bg1"/>
+          </a:solidFill>
+          <a:ln w="12700" cap="flat" cmpd="sng" algn="ctr">
+            <a:noFill/>
+            <a:prstDash val="solid"/>
+            <a:miter lim="800000"/>
+          </a:ln>
+          <a:effectLst/>
+        </p:spPr>
+        <p:style>
+          <a:lnRef idx="2">
+            <a:schemeClr val="accent1">
+              <a:shade val="50000"/>
+            </a:schemeClr>
+          </a:lnRef>
+          <a:fillRef idx="1">
+            <a:schemeClr val="accent1"/>
+          </a:fillRef>
+          <a:effectRef idx="0">
+            <a:schemeClr val="accent1"/>
+          </a:effectRef>
+          <a:fontRef idx="minor">
+            <a:schemeClr val="lt1"/>
+          </a:fontRef>
+        </p:style>
+        <p:txBody>
+          <a:bodyPr rtlCol="0" anchor="ctr"/>
+          <a:lstStyle/>
+          <a:p>
+            <a:pPr algn="ctr"/>
+            <a:endParaRPr lang="it-IT"/>
+          </a:p>
+        </p:txBody>
+      </p:sp>
+      <p:sp>
+        <p:nvSpPr>
+          <p:cNvPr id="4" name="Rettangolo 3">
+            <a:extLst>
+              <a:ext uri="{FF2B5EF4-FFF2-40B4-BE49-F238E27FC236}">
+                <a16:creationId xmlns:a16="http://schemas.microsoft.com/office/drawing/2014/main" id="{F3C6D4E0-6437-9383-59A9-60D385591819}"/>
+              </a:ext>
+            </a:extLst>
+          </p:cNvPr>
+          <p:cNvSpPr/>
+          <p:nvPr/>
+        </p:nvSpPr>
+        <p:spPr>
+          <a:xfrm>
+            <a:off x="9799378" y="5627716"/>
+            <a:ext cx="1771650" cy="822960"/>
+          </a:xfrm>
+          <a:prstGeom prst="rect">
+            <a:avLst/>
+          </a:prstGeom>
+          <a:solidFill>
+            <a:schemeClr val="bg1"/>
+          </a:solidFill>
+          <a:ln w="12700" cap="flat" cmpd="sng" algn="ctr">
+            <a:noFill/>
+            <a:prstDash val="solid"/>
+            <a:miter lim="800000"/>
+          </a:ln>
+          <a:effectLst/>
+        </p:spPr>
+        <p:style>
+          <a:lnRef idx="2">
+            <a:schemeClr val="accent1">
+              <a:shade val="50000"/>
+            </a:schemeClr>
+          </a:lnRef>
+          <a:fillRef idx="1">
+            <a:schemeClr val="accent1"/>
+          </a:fillRef>
+          <a:effectRef idx="0">
+            <a:schemeClr val="accent1"/>
+          </a:effectRef>
+          <a:fontRef idx="minor">
+            <a:schemeClr val="lt1"/>
+          </a:fontRef>
+        </p:style>
+        <p:txBody>
+          <a:bodyPr rtlCol="0" anchor="ctr"/>
+          <a:lstStyle/>
+          <a:p>
+            <a:pPr algn="ctr"/>
+            <a:endParaRPr lang="it-IT"/>
+          </a:p>
+        </p:txBody>
+      </p:sp>
+    </p:spTree>
+    <p:extLst>
+      <p:ext uri="{BB962C8B-B14F-4D97-AF65-F5344CB8AC3E}">
+        <p14:creationId xmlns:p14="http://schemas.microsoft.com/office/powerpoint/2010/main" val="3736278895"/>
+      </p:ext>
+    </p:extLst>
+  </p:cSld>
+  <p:clrMapOvr>
+    <a:masterClrMapping/>
+  </p:clrMapOvr>
+</p:sld>
+</file>
+
+<file path=ppt/slides/slide42.xml><?xml version="1.0" encoding="utf-8"?>
 <p:sld xmlns:a="http://schemas.openxmlformats.org/drawingml/2006/main" xmlns:r="http://schemas.openxmlformats.org/officeDocument/2006/relationships" xmlns:p="http://schemas.openxmlformats.org/presentationml/2006/main">
   <p:cSld>
     <p:spTree>
@@ -12296,442 +14989,7 @@
 </p:sld>
 </file>
 
-<file path=ppt/slides/slide39.xml><?xml version="1.0" encoding="utf-8"?>
-<p:sld xmlns:a="http://schemas.openxmlformats.org/drawingml/2006/main" xmlns:r="http://schemas.openxmlformats.org/officeDocument/2006/relationships" xmlns:p="http://schemas.openxmlformats.org/presentationml/2006/main">
-  <p:cSld>
-    <p:spTree>
-      <p:nvGrpSpPr>
-        <p:cNvPr id="1" name="">
-          <a:extLst>
-            <a:ext uri="{FF2B5EF4-FFF2-40B4-BE49-F238E27FC236}">
-              <a16:creationId xmlns:a16="http://schemas.microsoft.com/office/drawing/2014/main" id="{84D3DD91-D270-A745-4170-FEF9B69E0C00}"/>
-            </a:ext>
-          </a:extLst>
-        </p:cNvPr>
-        <p:cNvGrpSpPr/>
-        <p:nvPr/>
-      </p:nvGrpSpPr>
-      <p:grpSpPr>
-        <a:xfrm>
-          <a:off x="0" y="0"/>
-          <a:ext cx="0" cy="0"/>
-          <a:chOff x="0" y="0"/>
-          <a:chExt cx="0" cy="0"/>
-        </a:xfrm>
-      </p:grpSpPr>
-      <p:sp>
-        <p:nvSpPr>
-          <p:cNvPr id="2" name="Titolo 1">
-            <a:extLst>
-              <a:ext uri="{FF2B5EF4-FFF2-40B4-BE49-F238E27FC236}">
-                <a16:creationId xmlns:a16="http://schemas.microsoft.com/office/drawing/2014/main" id="{0122CB3C-0A15-7C60-8443-F44CC5ED59A6}"/>
-              </a:ext>
-            </a:extLst>
-          </p:cNvPr>
-          <p:cNvSpPr>
-            <a:spLocks noGrp="1"/>
-          </p:cNvSpPr>
-          <p:nvPr>
-            <p:ph type="title"/>
-          </p:nvPr>
-        </p:nvSpPr>
-        <p:spPr/>
-        <p:txBody>
-          <a:bodyPr/>
-          <a:lstStyle/>
-          <a:p>
-            <a:pPr algn="ctr"/>
-            <a:r>
-              <a:rPr lang="it-IT" dirty="0"/>
-              <a:t>SEQUENCE DIAGRAM – AGGIUNGI ARTICOLO</a:t>
-            </a:r>
-          </a:p>
-        </p:txBody>
-      </p:sp>
-      <p:pic>
-        <p:nvPicPr>
-          <p:cNvPr id="5" name="Segnaposto contenuto 4" descr="Immagine che contiene testo, schermata, diagramma, linea&#10;&#10;Il contenuto generato dall'IA potrebbe non essere corretto.">
-            <a:extLst>
-              <a:ext uri="{FF2B5EF4-FFF2-40B4-BE49-F238E27FC236}">
-                <a16:creationId xmlns:a16="http://schemas.microsoft.com/office/drawing/2014/main" id="{123E8D6E-713A-5AC7-9BAD-41AB27C67420}"/>
-              </a:ext>
-            </a:extLst>
-          </p:cNvPr>
-          <p:cNvPicPr>
-            <a:picLocks noGrp="1" noChangeAspect="1"/>
-          </p:cNvPicPr>
-          <p:nvPr>
-            <p:ph idx="1"/>
-          </p:nvPr>
-        </p:nvPicPr>
-        <p:blipFill>
-          <a:blip r:embed="rId2"/>
-          <a:stretch>
-            <a:fillRect/>
-          </a:stretch>
-        </p:blipFill>
-        <p:spPr>
-          <a:xfrm>
-            <a:off x="700634" y="1614698"/>
-            <a:ext cx="10691265" cy="4955500"/>
-          </a:xfrm>
-        </p:spPr>
-      </p:pic>
-    </p:spTree>
-    <p:extLst>
-      <p:ext uri="{BB962C8B-B14F-4D97-AF65-F5344CB8AC3E}">
-        <p14:creationId xmlns:p14="http://schemas.microsoft.com/office/powerpoint/2010/main" val="1349043980"/>
-      </p:ext>
-    </p:extLst>
-  </p:cSld>
-  <p:clrMapOvr>
-    <a:masterClrMapping/>
-  </p:clrMapOvr>
-</p:sld>
-</file>
-
-<file path=ppt/slides/slide4.xml><?xml version="1.0" encoding="utf-8"?>
-<p:sld xmlns:a="http://schemas.openxmlformats.org/drawingml/2006/main" xmlns:r="http://schemas.openxmlformats.org/officeDocument/2006/relationships" xmlns:p="http://schemas.openxmlformats.org/presentationml/2006/main">
-  <p:cSld>
-    <p:spTree>
-      <p:nvGrpSpPr>
-        <p:cNvPr id="1" name=""/>
-        <p:cNvGrpSpPr/>
-        <p:nvPr/>
-      </p:nvGrpSpPr>
-      <p:grpSpPr>
-        <a:xfrm>
-          <a:off x="0" y="0"/>
-          <a:ext cx="0" cy="0"/>
-          <a:chOff x="0" y="0"/>
-          <a:chExt cx="0" cy="0"/>
-        </a:xfrm>
-      </p:grpSpPr>
-      <p:sp>
-        <p:nvSpPr>
-          <p:cNvPr id="4" name="Titolo 1">
-            <a:extLst>
-              <a:ext uri="{FF2B5EF4-FFF2-40B4-BE49-F238E27FC236}">
-                <a16:creationId xmlns:a16="http://schemas.microsoft.com/office/drawing/2014/main" id="{69ABF3D7-38F2-52AA-2192-66F1D661F6A2}"/>
-              </a:ext>
-            </a:extLst>
-          </p:cNvPr>
-          <p:cNvSpPr>
-            <a:spLocks noGrp="1"/>
-          </p:cNvSpPr>
-          <p:nvPr>
-            <p:ph idx="1"/>
-          </p:nvPr>
-        </p:nvSpPr>
-        <p:spPr>
-          <a:xfrm>
-            <a:off x="700088" y="1634490"/>
-            <a:ext cx="10691812" cy="4328160"/>
-          </a:xfrm>
-        </p:spPr>
-        <p:txBody>
-          <a:bodyPr>
-            <a:noAutofit/>
-          </a:bodyPr>
-          <a:lstStyle/>
-          <a:p>
-            <a:pPr marL="0" indent="0" algn="just">
-              <a:buNone/>
-            </a:pPr>
-            <a:r>
-              <a:rPr lang="it-IT" dirty="0">
-                <a:solidFill>
-                  <a:srgbClr val="000000"/>
-                </a:solidFill>
-                <a:effectLst/>
-              </a:rPr>
-              <a:t>Quando l’acquirente invia una parola chiave la pagina ACQUISTO è aggiornata e mostra un elenco di aste aperte (la cui scadenza è posteriore alla data e ora dell’invio) per cui la parola chiave compare nel nome o nella descrizione di almeno uno degli articoli dell’asta. La lista è ordinata in modo decrescente in base al tempo (numero di giorni e ore) mancante alla chiusura. Cliccando su un’asta aperta compare la pagina OFFERTA che mostra i dati degli articoli, l’elenco delle </a:t>
-            </a:r>
-            <a:r>
-              <a:rPr lang="it-IT" b="1" dirty="0">
-                <a:solidFill>
-                  <a:srgbClr val="FF0000"/>
-                </a:solidFill>
-                <a:effectLst/>
-              </a:rPr>
-              <a:t>offerte</a:t>
-            </a:r>
-            <a:r>
-              <a:rPr lang="it-IT" dirty="0">
-                <a:solidFill>
-                  <a:srgbClr val="000000"/>
-                </a:solidFill>
-                <a:effectLst/>
-              </a:rPr>
-              <a:t> pervenute in ordine di </a:t>
-            </a:r>
-            <a:r>
-              <a:rPr lang="it-IT" dirty="0" err="1">
-                <a:solidFill>
-                  <a:srgbClr val="000000"/>
-                </a:solidFill>
-                <a:effectLst/>
-              </a:rPr>
-              <a:t>data+ora</a:t>
-            </a:r>
-            <a:r>
-              <a:rPr lang="it-IT" dirty="0">
-                <a:solidFill>
-                  <a:srgbClr val="000000"/>
-                </a:solidFill>
-                <a:effectLst/>
-              </a:rPr>
-              <a:t> decrescente e un campo di input per inserire la propria offerta, che deve essere superiore all’offerta massima corrente di un importo pari almeno al rialzo minimo. Dopo l’invio dell’offerta la pagina OFFERTA mostra l’elenco delle offerte aggiornate. La pagina ACQUISTO contiene anche un elenco delle offerte aggiudicate all’utente con i dati degli articoli e il prezzo finale.</a:t>
-            </a:r>
-          </a:p>
-          <a:p>
-            <a:pPr marL="0" indent="0" algn="just">
-              <a:buNone/>
-            </a:pPr>
-            <a:endParaRPr lang="it-IT" dirty="0"/>
-          </a:p>
-        </p:txBody>
-      </p:sp>
-      <p:sp>
-        <p:nvSpPr>
-          <p:cNvPr id="6" name="CasellaDiTesto 5">
-            <a:extLst>
-              <a:ext uri="{FF2B5EF4-FFF2-40B4-BE49-F238E27FC236}">
-                <a16:creationId xmlns:a16="http://schemas.microsoft.com/office/drawing/2014/main" id="{C38F1E2E-7AC3-A666-87FD-EF4F90B77824}"/>
-              </a:ext>
-            </a:extLst>
-          </p:cNvPr>
-          <p:cNvSpPr txBox="1"/>
-          <p:nvPr/>
-        </p:nvSpPr>
-        <p:spPr>
-          <a:xfrm>
-            <a:off x="1794510" y="1028700"/>
-            <a:ext cx="184731" cy="369332"/>
-          </a:xfrm>
-          <a:prstGeom prst="rect">
-            <a:avLst/>
-          </a:prstGeom>
-          <a:noFill/>
-        </p:spPr>
-        <p:txBody>
-          <a:bodyPr wrap="none" rtlCol="0">
-            <a:spAutoFit/>
-          </a:bodyPr>
-          <a:lstStyle/>
-          <a:p>
-            <a:endParaRPr lang="it-IT" dirty="0"/>
-          </a:p>
-        </p:txBody>
-      </p:sp>
-      <p:sp>
-        <p:nvSpPr>
-          <p:cNvPr id="7" name="CasellaDiTesto 6">
-            <a:extLst>
-              <a:ext uri="{FF2B5EF4-FFF2-40B4-BE49-F238E27FC236}">
-                <a16:creationId xmlns:a16="http://schemas.microsoft.com/office/drawing/2014/main" id="{A4DED0D4-59E8-EB93-D4C2-51A9E6A35AEA}"/>
-              </a:ext>
-            </a:extLst>
-          </p:cNvPr>
-          <p:cNvSpPr txBox="1"/>
-          <p:nvPr/>
-        </p:nvSpPr>
-        <p:spPr>
-          <a:xfrm>
-            <a:off x="857250" y="937260"/>
-            <a:ext cx="184731" cy="369332"/>
-          </a:xfrm>
-          <a:prstGeom prst="rect">
-            <a:avLst/>
-          </a:prstGeom>
-          <a:noFill/>
-        </p:spPr>
-        <p:txBody>
-          <a:bodyPr wrap="none" rtlCol="0">
-            <a:spAutoFit/>
-          </a:bodyPr>
-          <a:lstStyle/>
-          <a:p>
-            <a:endParaRPr lang="it-IT" dirty="0"/>
-          </a:p>
-        </p:txBody>
-      </p:sp>
-      <p:sp>
-        <p:nvSpPr>
-          <p:cNvPr id="11" name="CasellaDiTesto 10">
-            <a:extLst>
-              <a:ext uri="{FF2B5EF4-FFF2-40B4-BE49-F238E27FC236}">
-                <a16:creationId xmlns:a16="http://schemas.microsoft.com/office/drawing/2014/main" id="{9D765ECA-6A9A-AF5A-D7C1-411337FF504B}"/>
-              </a:ext>
-            </a:extLst>
-          </p:cNvPr>
-          <p:cNvSpPr txBox="1"/>
-          <p:nvPr/>
-        </p:nvSpPr>
-        <p:spPr>
-          <a:xfrm>
-            <a:off x="700633" y="6252150"/>
-            <a:ext cx="3865289" cy="400110"/>
-          </a:xfrm>
-          <a:prstGeom prst="rect">
-            <a:avLst/>
-          </a:prstGeom>
-          <a:noFill/>
-        </p:spPr>
-        <p:txBody>
-          <a:bodyPr wrap="none" rtlCol="0">
-            <a:spAutoFit/>
-          </a:bodyPr>
-          <a:lstStyle/>
-          <a:p>
-            <a:r>
-              <a:rPr lang="it-IT" sz="2000" b="1" dirty="0" err="1">
-                <a:solidFill>
-                  <a:srgbClr val="FF0000"/>
-                </a:solidFill>
-              </a:rPr>
-              <a:t>Entities</a:t>
-            </a:r>
-            <a:r>
-              <a:rPr lang="it-IT" sz="2000" b="1" dirty="0"/>
-              <a:t>, </a:t>
-            </a:r>
-            <a:r>
-              <a:rPr lang="it-IT" sz="2000" b="1" dirty="0" err="1">
-                <a:solidFill>
-                  <a:srgbClr val="00B050"/>
-                </a:solidFill>
-              </a:rPr>
-              <a:t>attributes</a:t>
-            </a:r>
-            <a:r>
-              <a:rPr lang="it-IT" sz="2000" b="1" dirty="0"/>
-              <a:t>, </a:t>
-            </a:r>
-            <a:r>
-              <a:rPr lang="it-IT" sz="2000" b="1" dirty="0" err="1">
-                <a:solidFill>
-                  <a:srgbClr val="0070C0"/>
-                </a:solidFill>
-              </a:rPr>
-              <a:t>relationships</a:t>
-            </a:r>
-            <a:endParaRPr lang="it-IT" sz="2000" b="1" dirty="0">
-              <a:solidFill>
-                <a:srgbClr val="0070C0"/>
-              </a:solidFill>
-            </a:endParaRPr>
-          </a:p>
-        </p:txBody>
-      </p:sp>
-    </p:spTree>
-    <p:extLst>
-      <p:ext uri="{BB962C8B-B14F-4D97-AF65-F5344CB8AC3E}">
-        <p14:creationId xmlns:p14="http://schemas.microsoft.com/office/powerpoint/2010/main" val="1561828668"/>
-      </p:ext>
-    </p:extLst>
-  </p:cSld>
-  <p:clrMapOvr>
-    <a:masterClrMapping/>
-  </p:clrMapOvr>
-</p:sld>
-</file>
-
-<file path=ppt/slides/slide40.xml><?xml version="1.0" encoding="utf-8"?>
-<p:sld xmlns:a="http://schemas.openxmlformats.org/drawingml/2006/main" xmlns:r="http://schemas.openxmlformats.org/officeDocument/2006/relationships" xmlns:p="http://schemas.openxmlformats.org/presentationml/2006/main">
-  <p:cSld>
-    <p:spTree>
-      <p:nvGrpSpPr>
-        <p:cNvPr id="1" name="">
-          <a:extLst>
-            <a:ext uri="{FF2B5EF4-FFF2-40B4-BE49-F238E27FC236}">
-              <a16:creationId xmlns:a16="http://schemas.microsoft.com/office/drawing/2014/main" id="{37BDB7F8-8811-C36F-605B-80E6B61B4D55}"/>
-            </a:ext>
-          </a:extLst>
-        </p:cNvPr>
-        <p:cNvGrpSpPr/>
-        <p:nvPr/>
-      </p:nvGrpSpPr>
-      <p:grpSpPr>
-        <a:xfrm>
-          <a:off x="0" y="0"/>
-          <a:ext cx="0" cy="0"/>
-          <a:chOff x="0" y="0"/>
-          <a:chExt cx="0" cy="0"/>
-        </a:xfrm>
-      </p:grpSpPr>
-      <p:sp>
-        <p:nvSpPr>
-          <p:cNvPr id="2" name="Titolo 1">
-            <a:extLst>
-              <a:ext uri="{FF2B5EF4-FFF2-40B4-BE49-F238E27FC236}">
-                <a16:creationId xmlns:a16="http://schemas.microsoft.com/office/drawing/2014/main" id="{68BB636B-D419-C643-EF2D-5AB5C71A0693}"/>
-              </a:ext>
-            </a:extLst>
-          </p:cNvPr>
-          <p:cNvSpPr>
-            <a:spLocks noGrp="1"/>
-          </p:cNvSpPr>
-          <p:nvPr>
-            <p:ph type="title"/>
-          </p:nvPr>
-        </p:nvSpPr>
-        <p:spPr/>
-        <p:txBody>
-          <a:bodyPr/>
-          <a:lstStyle/>
-          <a:p>
-            <a:pPr algn="ctr"/>
-            <a:r>
-              <a:rPr lang="it-IT" dirty="0"/>
-              <a:t>SEQUENCE DIAGRAM – CREA ASTA</a:t>
-            </a:r>
-          </a:p>
-        </p:txBody>
-      </p:sp>
-      <p:pic>
-        <p:nvPicPr>
-          <p:cNvPr id="5" name="Segnaposto contenuto 4" descr="Immagine che contiene testo, schermata, Carattere, diagramma&#10;&#10;Il contenuto generato dall'IA potrebbe non essere corretto.">
-            <a:extLst>
-              <a:ext uri="{FF2B5EF4-FFF2-40B4-BE49-F238E27FC236}">
-                <a16:creationId xmlns:a16="http://schemas.microsoft.com/office/drawing/2014/main" id="{1E30C2F4-DFD6-FEB6-24CF-068C7DF15E8E}"/>
-              </a:ext>
-            </a:extLst>
-          </p:cNvPr>
-          <p:cNvPicPr>
-            <a:picLocks noGrp="1" noChangeAspect="1"/>
-          </p:cNvPicPr>
-          <p:nvPr>
-            <p:ph idx="1"/>
-          </p:nvPr>
-        </p:nvPicPr>
-        <p:blipFill>
-          <a:blip r:embed="rId2"/>
-          <a:stretch>
-            <a:fillRect/>
-          </a:stretch>
-        </p:blipFill>
-        <p:spPr>
-          <a:xfrm>
-            <a:off x="2400300" y="1509102"/>
-            <a:ext cx="7471063" cy="4964434"/>
-          </a:xfrm>
-        </p:spPr>
-      </p:pic>
-    </p:spTree>
-    <p:extLst>
-      <p:ext uri="{BB962C8B-B14F-4D97-AF65-F5344CB8AC3E}">
-        <p14:creationId xmlns:p14="http://schemas.microsoft.com/office/powerpoint/2010/main" val="3736278895"/>
-      </p:ext>
-    </p:extLst>
-  </p:cSld>
-  <p:clrMapOvr>
-    <a:masterClrMapping/>
-  </p:clrMapOvr>
-</p:sld>
-</file>
-
-<file path=ppt/slides/slide41.xml><?xml version="1.0" encoding="utf-8"?>
+<file path=ppt/slides/slide43.xml><?xml version="1.0" encoding="utf-8"?>
 <p:sld xmlns:a="http://schemas.openxmlformats.org/drawingml/2006/main" xmlns:r="http://schemas.openxmlformats.org/officeDocument/2006/relationships" xmlns:p="http://schemas.openxmlformats.org/presentationml/2006/main">
   <p:cSld>
     <p:spTree>
@@ -12812,198 +15070,120 @@
           </a:xfrm>
         </p:spPr>
       </p:pic>
+      <p:sp>
+        <p:nvSpPr>
+          <p:cNvPr id="3" name="Rettangolo 2">
+            <a:extLst>
+              <a:ext uri="{FF2B5EF4-FFF2-40B4-BE49-F238E27FC236}">
+                <a16:creationId xmlns:a16="http://schemas.microsoft.com/office/drawing/2014/main" id="{E761BC1C-2EDD-7AEC-D0A3-9FE8F502B3CE}"/>
+              </a:ext>
+            </a:extLst>
+          </p:cNvPr>
+          <p:cNvSpPr/>
+          <p:nvPr/>
+        </p:nvSpPr>
+        <p:spPr>
+          <a:xfrm>
+            <a:off x="555915" y="5680710"/>
+            <a:ext cx="1771650" cy="822960"/>
+          </a:xfrm>
+          <a:prstGeom prst="rect">
+            <a:avLst/>
+          </a:prstGeom>
+          <a:solidFill>
+            <a:schemeClr val="bg1"/>
+          </a:solidFill>
+          <a:ln w="12700" cap="flat" cmpd="sng" algn="ctr">
+            <a:noFill/>
+            <a:prstDash val="solid"/>
+            <a:miter lim="800000"/>
+          </a:ln>
+          <a:effectLst/>
+        </p:spPr>
+        <p:style>
+          <a:lnRef idx="2">
+            <a:schemeClr val="accent1">
+              <a:shade val="50000"/>
+            </a:schemeClr>
+          </a:lnRef>
+          <a:fillRef idx="1">
+            <a:schemeClr val="accent1"/>
+          </a:fillRef>
+          <a:effectRef idx="0">
+            <a:schemeClr val="accent1"/>
+          </a:effectRef>
+          <a:fontRef idx="minor">
+            <a:schemeClr val="lt1"/>
+          </a:fontRef>
+        </p:style>
+        <p:txBody>
+          <a:bodyPr rtlCol="0" anchor="ctr"/>
+          <a:lstStyle/>
+          <a:p>
+            <a:pPr algn="ctr"/>
+            <a:endParaRPr lang="it-IT"/>
+          </a:p>
+        </p:txBody>
+      </p:sp>
+      <p:sp>
+        <p:nvSpPr>
+          <p:cNvPr id="4" name="Rettangolo 3">
+            <a:extLst>
+              <a:ext uri="{FF2B5EF4-FFF2-40B4-BE49-F238E27FC236}">
+                <a16:creationId xmlns:a16="http://schemas.microsoft.com/office/drawing/2014/main" id="{A87E64EE-1170-3513-9533-0944F0D0AAE1}"/>
+              </a:ext>
+            </a:extLst>
+          </p:cNvPr>
+          <p:cNvSpPr/>
+          <p:nvPr/>
+        </p:nvSpPr>
+        <p:spPr>
+          <a:xfrm>
+            <a:off x="9985665" y="5737860"/>
+            <a:ext cx="1771650" cy="822960"/>
+          </a:xfrm>
+          <a:prstGeom prst="rect">
+            <a:avLst/>
+          </a:prstGeom>
+          <a:solidFill>
+            <a:schemeClr val="bg1"/>
+          </a:solidFill>
+          <a:ln w="12700" cap="flat" cmpd="sng" algn="ctr">
+            <a:noFill/>
+            <a:prstDash val="solid"/>
+            <a:miter lim="800000"/>
+          </a:ln>
+          <a:effectLst/>
+        </p:spPr>
+        <p:style>
+          <a:lnRef idx="2">
+            <a:schemeClr val="accent1">
+              <a:shade val="50000"/>
+            </a:schemeClr>
+          </a:lnRef>
+          <a:fillRef idx="1">
+            <a:schemeClr val="accent1"/>
+          </a:fillRef>
+          <a:effectRef idx="0">
+            <a:schemeClr val="accent1"/>
+          </a:effectRef>
+          <a:fontRef idx="minor">
+            <a:schemeClr val="lt1"/>
+          </a:fontRef>
+        </p:style>
+        <p:txBody>
+          <a:bodyPr rtlCol="0" anchor="ctr"/>
+          <a:lstStyle/>
+          <a:p>
+            <a:pPr algn="ctr"/>
+            <a:endParaRPr lang="it-IT"/>
+          </a:p>
+        </p:txBody>
+      </p:sp>
     </p:spTree>
     <p:extLst>
       <p:ext uri="{BB962C8B-B14F-4D97-AF65-F5344CB8AC3E}">
         <p14:creationId xmlns:p14="http://schemas.microsoft.com/office/powerpoint/2010/main" val="900218779"/>
-      </p:ext>
-    </p:extLst>
-  </p:cSld>
-  <p:clrMapOvr>
-    <a:masterClrMapping/>
-  </p:clrMapOvr>
-</p:sld>
-</file>
-
-<file path=ppt/slides/slide42.xml><?xml version="1.0" encoding="utf-8"?>
-<p:sld xmlns:a="http://schemas.openxmlformats.org/drawingml/2006/main" xmlns:r="http://schemas.openxmlformats.org/officeDocument/2006/relationships" xmlns:p="http://schemas.openxmlformats.org/presentationml/2006/main">
-  <p:cSld>
-    <p:spTree>
-      <p:nvGrpSpPr>
-        <p:cNvPr id="1" name="">
-          <a:extLst>
-            <a:ext uri="{FF2B5EF4-FFF2-40B4-BE49-F238E27FC236}">
-              <a16:creationId xmlns:a16="http://schemas.microsoft.com/office/drawing/2014/main" id="{82E3FE80-BE74-AA18-DD56-A6E3F4C2BC6F}"/>
-            </a:ext>
-          </a:extLst>
-        </p:cNvPr>
-        <p:cNvGrpSpPr/>
-        <p:nvPr/>
-      </p:nvGrpSpPr>
-      <p:grpSpPr>
-        <a:xfrm>
-          <a:off x="0" y="0"/>
-          <a:ext cx="0" cy="0"/>
-          <a:chOff x="0" y="0"/>
-          <a:chExt cx="0" cy="0"/>
-        </a:xfrm>
-      </p:grpSpPr>
-      <p:sp>
-        <p:nvSpPr>
-          <p:cNvPr id="2" name="Titolo 1">
-            <a:extLst>
-              <a:ext uri="{FF2B5EF4-FFF2-40B4-BE49-F238E27FC236}">
-                <a16:creationId xmlns:a16="http://schemas.microsoft.com/office/drawing/2014/main" id="{2C030651-BCA1-A728-15E0-106761D029EC}"/>
-              </a:ext>
-            </a:extLst>
-          </p:cNvPr>
-          <p:cNvSpPr>
-            <a:spLocks noGrp="1"/>
-          </p:cNvSpPr>
-          <p:nvPr>
-            <p:ph type="title"/>
-          </p:nvPr>
-        </p:nvSpPr>
-        <p:spPr/>
-        <p:txBody>
-          <a:bodyPr/>
-          <a:lstStyle/>
-          <a:p>
-            <a:pPr algn="ctr"/>
-            <a:r>
-              <a:rPr lang="it-IT" dirty="0"/>
-              <a:t>SEQUENCE DIAGRAM – FAI OFFERTA</a:t>
-            </a:r>
-          </a:p>
-        </p:txBody>
-      </p:sp>
-      <p:pic>
-        <p:nvPicPr>
-          <p:cNvPr id="5" name="Segnaposto contenuto 4" descr="Immagine che contiene testo, schermata, numero, Carattere&#10;&#10;Il contenuto generato dall'IA potrebbe non essere corretto.">
-            <a:extLst>
-              <a:ext uri="{FF2B5EF4-FFF2-40B4-BE49-F238E27FC236}">
-                <a16:creationId xmlns:a16="http://schemas.microsoft.com/office/drawing/2014/main" id="{C1C89FC0-7B07-A877-D1F8-AB86DFFDE56F}"/>
-              </a:ext>
-            </a:extLst>
-          </p:cNvPr>
-          <p:cNvPicPr>
-            <a:picLocks noGrp="1" noChangeAspect="1"/>
-          </p:cNvPicPr>
-          <p:nvPr>
-            <p:ph idx="1"/>
-          </p:nvPr>
-        </p:nvPicPr>
-        <p:blipFill>
-          <a:blip r:embed="rId2"/>
-          <a:stretch>
-            <a:fillRect/>
-          </a:stretch>
-        </p:blipFill>
-        <p:spPr>
-          <a:xfrm>
-            <a:off x="1569027" y="1696697"/>
-            <a:ext cx="9227128" cy="4653963"/>
-          </a:xfrm>
-        </p:spPr>
-      </p:pic>
-    </p:spTree>
-    <p:extLst>
-      <p:ext uri="{BB962C8B-B14F-4D97-AF65-F5344CB8AC3E}">
-        <p14:creationId xmlns:p14="http://schemas.microsoft.com/office/powerpoint/2010/main" val="2474054820"/>
-      </p:ext>
-    </p:extLst>
-  </p:cSld>
-  <p:clrMapOvr>
-    <a:masterClrMapping/>
-  </p:clrMapOvr>
-</p:sld>
-</file>
-
-<file path=ppt/slides/slide43.xml><?xml version="1.0" encoding="utf-8"?>
-<p:sld xmlns:a="http://schemas.openxmlformats.org/drawingml/2006/main" xmlns:r="http://schemas.openxmlformats.org/officeDocument/2006/relationships" xmlns:p="http://schemas.openxmlformats.org/presentationml/2006/main">
-  <p:cSld>
-    <p:spTree>
-      <p:nvGrpSpPr>
-        <p:cNvPr id="1" name="">
-          <a:extLst>
-            <a:ext uri="{FF2B5EF4-FFF2-40B4-BE49-F238E27FC236}">
-              <a16:creationId xmlns:a16="http://schemas.microsoft.com/office/drawing/2014/main" id="{1B0556A0-31C6-C039-DDC3-F94A93D764AC}"/>
-            </a:ext>
-          </a:extLst>
-        </p:cNvPr>
-        <p:cNvGrpSpPr/>
-        <p:nvPr/>
-      </p:nvGrpSpPr>
-      <p:grpSpPr>
-        <a:xfrm>
-          <a:off x="0" y="0"/>
-          <a:ext cx="0" cy="0"/>
-          <a:chOff x="0" y="0"/>
-          <a:chExt cx="0" cy="0"/>
-        </a:xfrm>
-      </p:grpSpPr>
-      <p:sp>
-        <p:nvSpPr>
-          <p:cNvPr id="2" name="Titolo 1">
-            <a:extLst>
-              <a:ext uri="{FF2B5EF4-FFF2-40B4-BE49-F238E27FC236}">
-                <a16:creationId xmlns:a16="http://schemas.microsoft.com/office/drawing/2014/main" id="{21454DE5-8B62-B30F-4486-2DE1F78257E5}"/>
-              </a:ext>
-            </a:extLst>
-          </p:cNvPr>
-          <p:cNvSpPr>
-            <a:spLocks noGrp="1"/>
-          </p:cNvSpPr>
-          <p:nvPr>
-            <p:ph type="title"/>
-          </p:nvPr>
-        </p:nvSpPr>
-        <p:spPr/>
-        <p:txBody>
-          <a:bodyPr/>
-          <a:lstStyle/>
-          <a:p>
-            <a:pPr algn="ctr"/>
-            <a:r>
-              <a:rPr lang="it-IT" dirty="0"/>
-              <a:t>SEQUENCE DIAGRAM – SEARCH ASTE BY KEY</a:t>
-            </a:r>
-          </a:p>
-        </p:txBody>
-      </p:sp>
-      <p:pic>
-        <p:nvPicPr>
-          <p:cNvPr id="5" name="Segnaposto contenuto 4" descr="Immagine che contiene testo, schermata, diagramma, linea&#10;&#10;Il contenuto generato dall'IA potrebbe non essere corretto.">
-            <a:extLst>
-              <a:ext uri="{FF2B5EF4-FFF2-40B4-BE49-F238E27FC236}">
-                <a16:creationId xmlns:a16="http://schemas.microsoft.com/office/drawing/2014/main" id="{42BE1DA9-60DB-C1D6-0009-B605B5717F60}"/>
-              </a:ext>
-            </a:extLst>
-          </p:cNvPr>
-          <p:cNvPicPr>
-            <a:picLocks noGrp="1" noChangeAspect="1"/>
-          </p:cNvPicPr>
-          <p:nvPr>
-            <p:ph idx="1"/>
-          </p:nvPr>
-        </p:nvPicPr>
-        <p:blipFill>
-          <a:blip r:embed="rId2"/>
-          <a:stretch>
-            <a:fillRect/>
-          </a:stretch>
-        </p:blipFill>
-        <p:spPr>
-          <a:xfrm>
-            <a:off x="1350464" y="1808017"/>
-            <a:ext cx="9728041" cy="4416137"/>
-          </a:xfrm>
-        </p:spPr>
-      </p:pic>
-    </p:spTree>
-    <p:extLst>
-      <p:ext uri="{BB962C8B-B14F-4D97-AF65-F5344CB8AC3E}">
-        <p14:creationId xmlns:p14="http://schemas.microsoft.com/office/powerpoint/2010/main" val="1297480831"/>
       </p:ext>
     </p:extLst>
   </p:cSld>
